--- a/slides/TDL_7頁回答.pptx
+++ b/slides/TDL_7頁回答.pptx
@@ -12,6 +12,7 @@
     <p:sldId id="260" r:id="rId12"/>
     <p:sldId id="261" r:id="rId13"/>
     <p:sldId id="262" r:id="rId14"/>
+    <p:sldId id="263" r:id="rId15"/>
   </p:sldIdLst>
   <p:sldSz cx="12191695" cy="6858000" type="screen4x3"/>
   <p:notesSz cx="6858000" cy="9144000"/>
@@ -929,6 +930,76 @@
           <a:p>
             <a:r>
               <a:t>回答待辦7。賣點+benchmark對照。差異軸：靜vs動、真實vs合成、定量、規模。主評測VLM4D+STI。</a:t>
+            </a:r>
+          </a:p>
+        </p:txBody>
+      </p:sp>
+      <p:sp>
+        <p:nvSpPr>
+          <p:cNvPr id="4" name="Slide Number Placeholder 3"/>
+          <p:cNvSpPr>
+            <a:spLocks noGrp="1"/>
+          </p:cNvSpPr>
+          <p:nvPr>
+            <p:ph type="sldNum" idx="5" sz="quarter"/>
+          </p:nvPr>
+        </p:nvSpPr>
+        <p:spPr/>
+      </p:sp>
+    </p:spTree>
+  </p:cSld>
+  <p:clrMapOvr>
+    <a:masterClrMapping/>
+  </p:clrMapOvr>
+</p:notes>
+</file>
+
+<file path=ppt/notesSlides/notesSlide8.xml><?xml version="1.0" encoding="utf-8"?>
+<p:notes xmlns:a="http://schemas.openxmlformats.org/drawingml/2006/main" xmlns:p="http://schemas.openxmlformats.org/presentationml/2006/main" xmlns:r="http://schemas.openxmlformats.org/officeDocument/2006/relationships">
+  <p:cSld>
+    <p:spTree>
+      <p:nvGrpSpPr>
+        <p:cNvPr id="1" name=""/>
+        <p:cNvGrpSpPr/>
+        <p:nvPr/>
+      </p:nvGrpSpPr>
+      <p:grpSpPr>
+        <a:xfrm>
+          <a:off x="0" y="0"/>
+          <a:ext cx="0" cy="0"/>
+          <a:chOff x="0" y="0"/>
+          <a:chExt cx="0" cy="0"/>
+        </a:xfrm>
+      </p:grpSpPr>
+      <p:sp>
+        <p:nvSpPr>
+          <p:cNvPr id="2" name="Slide Image Placeholder 1"/>
+          <p:cNvSpPr>
+            <a:spLocks noGrp="1"/>
+          </p:cNvSpPr>
+          <p:nvPr>
+            <p:ph type="sldImg" idx="2"/>
+          </p:nvPr>
+        </p:nvSpPr>
+        <p:spPr/>
+      </p:sp>
+      <p:sp>
+        <p:nvSpPr>
+          <p:cNvPr id="3" name="Notes Placeholder 2"/>
+          <p:cNvSpPr>
+            <a:spLocks noGrp="1"/>
+          </p:cNvSpPr>
+          <p:nvPr>
+            <p:ph type="body" idx="3" sz="quarter"/>
+          </p:nvPr>
+        </p:nvSpPr>
+        <p:spPr/>
+        <p:txBody>
+          <a:bodyPr/>
+          <a:lstStyle/>
+          <a:p>
+            <a:r>
+              <a:t>補充頁:只列 10 篇導讀論文實際用到的 benchmark。講解重點:(1) depth/時空評測已齊全,可沿用其設定;(2) Flow4Agent 用了 flow 卻只評一般影片 benchmark —— 全場沒有 flow 專屬評測,呼應我們的縫隙;(3) 4D-RGPT 的 R4D-Bench(動態+region)是我們最近的對照,它的 ablation(P4D&gt;4D-SFT&gt;4D-Concat)也是學姊指定要學的範本。</a:t>
             </a:r>
           </a:p>
         </p:txBody>
@@ -9768,6 +9839,1270 @@
                 <a:latin typeface="Segoe UI"/>
               </a:rPr>
               <a:t>待辦回答 · 7/7</a:t>
+            </a:r>
+          </a:p>
+        </p:txBody>
+      </p:sp>
+    </p:spTree>
+  </p:cSld>
+  <p:clrMapOvr>
+    <a:masterClrMapping/>
+  </p:clrMapOvr>
+</p:sld>
+</file>
+
+<file path=ppt/slides/slide8.xml><?xml version="1.0" encoding="utf-8"?>
+<p:sld xmlns:a="http://schemas.openxmlformats.org/drawingml/2006/main" xmlns:p="http://schemas.openxmlformats.org/presentationml/2006/main" xmlns:r="http://schemas.openxmlformats.org/officeDocument/2006/relationships">
+  <p:cSld>
+    <p:spTree>
+      <p:nvGrpSpPr>
+        <p:cNvPr id="1" name=""/>
+        <p:cNvGrpSpPr/>
+        <p:nvPr/>
+      </p:nvGrpSpPr>
+      <p:grpSpPr/>
+      <p:sp>
+        <p:nvSpPr>
+          <p:cNvPr id="2" name="Rectangle 1"/>
+          <p:cNvSpPr/>
+          <p:nvPr/>
+        </p:nvSpPr>
+        <p:spPr>
+          <a:xfrm>
+            <a:off x="0" y="0"/>
+            <a:ext cx="12191695" cy="6858000"/>
+          </a:xfrm>
+          <a:prstGeom prst="rect">
+            <a:avLst/>
+          </a:prstGeom>
+          <a:solidFill>
+            <a:srgbClr val="FFFFFF"/>
+          </a:solidFill>
+          <a:ln>
+            <a:noFill/>
+          </a:ln>
+          <a:effectLst/>
+        </p:spPr>
+        <p:style>
+          <a:lnRef idx="1">
+            <a:schemeClr val="accent1"/>
+          </a:lnRef>
+          <a:fillRef idx="3">
+            <a:schemeClr val="accent1"/>
+          </a:fillRef>
+          <a:effectRef idx="2">
+            <a:schemeClr val="accent1"/>
+          </a:effectRef>
+          <a:fontRef idx="minor">
+            <a:schemeClr val="lt1"/>
+          </a:fontRef>
+        </p:style>
+        <p:txBody>
+          <a:bodyPr rtlCol="0" anchor="ctr"/>
+          <a:lstStyle/>
+          <a:p>
+            <a:pPr algn="ctr"/>
+          </a:p>
+        </p:txBody>
+      </p:sp>
+      <p:sp>
+        <p:nvSpPr>
+          <p:cNvPr id="3" name="Oval 2"/>
+          <p:cNvSpPr/>
+          <p:nvPr/>
+        </p:nvSpPr>
+        <p:spPr>
+          <a:xfrm>
+            <a:off x="640080" y="457200"/>
+            <a:ext cx="566928" cy="566928"/>
+          </a:xfrm>
+          <a:prstGeom prst="ellipse">
+            <a:avLst/>
+          </a:prstGeom>
+          <a:solidFill>
+            <a:srgbClr val="0F768E"/>
+          </a:solidFill>
+          <a:ln>
+            <a:noFill/>
+          </a:ln>
+          <a:effectLst/>
+        </p:spPr>
+        <p:style>
+          <a:lnRef idx="1">
+            <a:schemeClr val="accent1"/>
+          </a:lnRef>
+          <a:fillRef idx="3">
+            <a:schemeClr val="accent1"/>
+          </a:fillRef>
+          <a:effectRef idx="2">
+            <a:schemeClr val="accent1"/>
+          </a:effectRef>
+          <a:fontRef idx="minor">
+            <a:schemeClr val="lt1"/>
+          </a:fontRef>
+        </p:style>
+        <p:txBody>
+          <a:bodyPr rtlCol="0" anchor="ctr"/>
+          <a:lstStyle/>
+          <a:p>
+            <a:pPr algn="ctr"/>
+          </a:p>
+        </p:txBody>
+      </p:sp>
+      <p:sp>
+        <p:nvSpPr>
+          <p:cNvPr id="4" name="TextBox 3"/>
+          <p:cNvSpPr txBox="1"/>
+          <p:nvPr/>
+        </p:nvSpPr>
+        <p:spPr>
+          <a:xfrm>
+            <a:off x="640080" y="457200"/>
+            <a:ext cx="566928" cy="566928"/>
+          </a:xfrm>
+          <a:prstGeom prst="rect">
+            <a:avLst/>
+          </a:prstGeom>
+          <a:noFill/>
+        </p:spPr>
+        <p:txBody>
+          <a:bodyPr wrap="square" anchor="ctr" lIns="0" rIns="0" tIns="0" bIns="0">
+            <a:spAutoFit/>
+          </a:bodyPr>
+          <a:lstStyle/>
+          <a:p>
+            <a:pPr algn="ctr">
+              <a:lnSpc>
+                <a:spcPct val="108000"/>
+              </a:lnSpc>
+              <a:spcBef>
+                <a:spcPts val="0"/>
+              </a:spcBef>
+              <a:spcAft>
+                <a:spcPts val="600"/>
+              </a:spcAft>
+            </a:pPr>
+            <a:r>
+              <a:rPr sz="2200" b="1" i="0">
+                <a:solidFill>
+                  <a:srgbClr val="FFFFFF"/>
+                </a:solidFill>
+                <a:latin typeface="Segoe UI"/>
+              </a:rPr>
+              <a:t>8</a:t>
+            </a:r>
+          </a:p>
+        </p:txBody>
+      </p:sp>
+      <p:sp>
+        <p:nvSpPr>
+          <p:cNvPr id="5" name="TextBox 4"/>
+          <p:cNvSpPr txBox="1"/>
+          <p:nvPr/>
+        </p:nvSpPr>
+        <p:spPr>
+          <a:xfrm>
+            <a:off x="1371600" y="475488"/>
+            <a:ext cx="10241280" cy="548640"/>
+          </a:xfrm>
+          <a:prstGeom prst="rect">
+            <a:avLst/>
+          </a:prstGeom>
+          <a:noFill/>
+        </p:spPr>
+        <p:txBody>
+          <a:bodyPr wrap="square" anchor="t" lIns="0" rIns="0" tIns="0" bIns="0">
+            <a:spAutoFit/>
+          </a:bodyPr>
+          <a:lstStyle/>
+          <a:p>
+            <a:pPr algn="l">
+              <a:lnSpc>
+                <a:spcPct val="108000"/>
+              </a:lnSpc>
+              <a:spcBef>
+                <a:spcPts val="0"/>
+              </a:spcBef>
+              <a:spcAft>
+                <a:spcPts val="600"/>
+              </a:spcAft>
+            </a:pPr>
+            <a:r>
+              <a:rPr sz="1300" b="1" i="0">
+                <a:solidFill>
+                  <a:srgbClr val="0F768E"/>
+                </a:solidFill>
+                <a:latin typeface="Microsoft JhengHei"/>
+              </a:rPr>
+              <a:t>補充 · Flow / Depth 相關 Benchmark(限報告論文實際使用者)</a:t>
+            </a:r>
+          </a:p>
+        </p:txBody>
+      </p:sp>
+      <p:sp>
+        <p:nvSpPr>
+          <p:cNvPr id="6" name="TextBox 5"/>
+          <p:cNvSpPr txBox="1"/>
+          <p:nvPr/>
+        </p:nvSpPr>
+        <p:spPr>
+          <a:xfrm>
+            <a:off x="1371600" y="822960"/>
+            <a:ext cx="10424160" cy="502920"/>
+          </a:xfrm>
+          <a:prstGeom prst="rect">
+            <a:avLst/>
+          </a:prstGeom>
+          <a:noFill/>
+        </p:spPr>
+        <p:txBody>
+          <a:bodyPr wrap="square" anchor="t" lIns="0" rIns="0" tIns="0" bIns="0">
+            <a:spAutoFit/>
+          </a:bodyPr>
+          <a:lstStyle/>
+          <a:p>
+            <a:pPr algn="l">
+              <a:lnSpc>
+                <a:spcPct val="108000"/>
+              </a:lnSpc>
+              <a:spcBef>
+                <a:spcPts val="0"/>
+              </a:spcBef>
+              <a:spcAft>
+                <a:spcPts val="600"/>
+              </a:spcAft>
+            </a:pPr>
+            <a:r>
+              <a:rPr sz="1300" b="0" i="1">
+                <a:solidFill>
+                  <a:srgbClr val="5B6370"/>
+                </a:solidFill>
+                <a:latin typeface="Microsoft JhengHei"/>
+              </a:rPr>
+              <a:t>整理 10 篇導讀論文(4D_evidence_reward_deep)實際評測用到的 depth / flow / 時空 benchmark。</a:t>
+            </a:r>
+          </a:p>
+        </p:txBody>
+      </p:sp>
+      <p:sp>
+        <p:nvSpPr>
+          <p:cNvPr id="7" name="TextBox 6"/>
+          <p:cNvSpPr txBox="1"/>
+          <p:nvPr/>
+        </p:nvSpPr>
+        <p:spPr>
+          <a:xfrm>
+            <a:off x="640080" y="1463040"/>
+            <a:ext cx="10972800" cy="777240"/>
+          </a:xfrm>
+          <a:prstGeom prst="rect">
+            <a:avLst/>
+          </a:prstGeom>
+          <a:noFill/>
+        </p:spPr>
+        <p:txBody>
+          <a:bodyPr wrap="square" anchor="t" lIns="0" rIns="0" tIns="0" bIns="0">
+            <a:spAutoFit/>
+          </a:bodyPr>
+          <a:lstStyle/>
+          <a:p>
+            <a:pPr algn="l">
+              <a:lnSpc>
+                <a:spcPct val="106000"/>
+              </a:lnSpc>
+              <a:spcBef>
+                <a:spcPts val="0"/>
+              </a:spcBef>
+              <a:spcAft>
+                <a:spcPts val="600"/>
+              </a:spcAft>
+            </a:pPr>
+            <a:r>
+              <a:rPr sz="2200" b="1" i="0">
+                <a:solidFill>
+                  <a:srgbClr val="1A1A2E"/>
+                </a:solidFill>
+                <a:latin typeface="Microsoft JhengHei"/>
+              </a:rPr>
+              <a:t>深度/時空類 benchmark 在論文中已齊全；</a:t>
+            </a:r>
+            <a:r>
+              <a:rPr sz="2200" b="1" i="0">
+                <a:solidFill>
+                  <a:srgbClr val="E86A33"/>
+                </a:solidFill>
+                <a:latin typeface="Microsoft JhengHei"/>
+              </a:rPr>
+              <a:t>「flow 一致性」的評測不存在</a:t>
+            </a:r>
+          </a:p>
+        </p:txBody>
+      </p:sp>
+      <p:graphicFrame>
+        <p:nvGraphicFramePr>
+          <p:cNvPr id="8" name="Table 7"/>
+          <p:cNvGraphicFramePr>
+            <a:graphicFrameLocks noGrp="1"/>
+          </p:cNvGraphicFramePr>
+          <p:nvPr/>
+        </p:nvGraphicFramePr>
+        <p:xfrm>
+          <a:off x="640080" y="2331720"/>
+          <a:ext cx="10881360" cy="2697480"/>
+        </p:xfrm>
+        <a:graphic>
+          <a:graphicData uri="http://schemas.openxmlformats.org/drawingml/2006/table">
+            <a:tbl>
+              <a:tblPr firstRow="1" bandRow="1">
+                <a:tableStyleId>{5C22544A-7EE6-4342-B048-85BDC9FD1C3A}</a:tableStyleId>
+              </a:tblPr>
+              <a:tblGrid>
+                <a:gridCol w="2651760"/>
+                <a:gridCol w="2651760"/>
+                <a:gridCol w="5577840"/>
+              </a:tblGrid>
+              <a:tr h="299720">
+                <a:tc>
+                  <a:txBody>
+                    <a:bodyPr wrap="square"/>
+                    <a:lstStyle/>
+                    <a:p>
+                      <a:r>
+                        <a:rPr sz="1200" b="1">
+                          <a:solidFill>
+                            <a:srgbClr val="FFFFFF"/>
+                          </a:solidFill>
+                          <a:latin typeface="Microsoft JhengHei"/>
+                        </a:rPr>
+                        <a:t>Benchmark</a:t>
+                      </a:r>
+                    </a:p>
+                  </a:txBody>
+                  <a:tcPr marL="63500" marR="50800" marT="12700" marB="12700" anchor="ctr">
+                    <a:solidFill>
+                      <a:srgbClr val="1A1A2E"/>
+                    </a:solidFill>
+                  </a:tcPr>
+                </a:tc>
+                <a:tc>
+                  <a:txBody>
+                    <a:bodyPr wrap="square"/>
+                    <a:lstStyle/>
+                    <a:p>
+                      <a:r>
+                        <a:rPr sz="1200" b="1">
+                          <a:solidFill>
+                            <a:srgbClr val="FFFFFF"/>
+                          </a:solidFill>
+                          <a:latin typeface="Microsoft JhengHei"/>
+                        </a:rPr>
+                        <a:t>哪篇論文在用</a:t>
+                      </a:r>
+                    </a:p>
+                  </a:txBody>
+                  <a:tcPr marL="63500" marR="50800" marT="12700" marB="12700" anchor="ctr">
+                    <a:solidFill>
+                      <a:srgbClr val="1A1A2E"/>
+                    </a:solidFill>
+                  </a:tcPr>
+                </a:tc>
+                <a:tc>
+                  <a:txBody>
+                    <a:bodyPr wrap="square"/>
+                    <a:lstStyle/>
+                    <a:p>
+                      <a:r>
+                        <a:rPr sz="1200" b="1">
+                          <a:solidFill>
+                            <a:srgbClr val="FFFFFF"/>
+                          </a:solidFill>
+                          <a:latin typeface="Microsoft JhengHei"/>
+                        </a:rPr>
+                        <a:t>測什麼 / depth·flow 關聯</a:t>
+                      </a:r>
+                    </a:p>
+                  </a:txBody>
+                  <a:tcPr marL="63500" marR="50800" marT="12700" marB="12700" anchor="ctr">
+                    <a:solidFill>
+                      <a:srgbClr val="1A1A2E"/>
+                    </a:solidFill>
+                  </a:tcPr>
+                </a:tc>
+              </a:tr>
+              <a:tr h="299720">
+                <a:tc>
+                  <a:txBody>
+                    <a:bodyPr wrap="square"/>
+                    <a:lstStyle/>
+                    <a:p>
+                      <a:r>
+                        <a:rPr sz="1050" b="1">
+                          <a:solidFill>
+                            <a:srgbClr val="0F768E"/>
+                          </a:solidFill>
+                          <a:latin typeface="Microsoft JhengHei"/>
+                        </a:rPr>
+                        <a:t>VSI-Bench</a:t>
+                      </a:r>
+                    </a:p>
+                  </a:txBody>
+                  <a:tcPr marL="63500" marR="50800" marT="12700" marB="12700" anchor="ctr">
+                    <a:solidFill>
+                      <a:srgbClr val="FFFFFF"/>
+                    </a:solidFill>
+                  </a:tcPr>
+                </a:tc>
+                <a:tc>
+                  <a:txBody>
+                    <a:bodyPr wrap="square"/>
+                    <a:lstStyle/>
+                    <a:p>
+                      <a:r>
+                        <a:rPr sz="1050">
+                          <a:solidFill>
+                            <a:srgbClr val="1A1A2E"/>
+                          </a:solidFill>
+                          <a:latin typeface="Microsoft JhengHei"/>
+                        </a:rPr>
+                        <a:t>VER · Video-R1 · Video-STR</a:t>
+                      </a:r>
+                    </a:p>
+                  </a:txBody>
+                  <a:tcPr marL="63500" marR="50800" marT="12700" marB="12700" anchor="ctr">
+                    <a:solidFill>
+                      <a:srgbClr val="FFFFFF"/>
+                    </a:solidFill>
+                  </a:tcPr>
+                </a:tc>
+                <a:tc>
+                  <a:txBody>
+                    <a:bodyPr wrap="square"/>
+                    <a:lstStyle/>
+                    <a:p>
+                      <a:r>
+                        <a:rPr sz="1050">
+                          <a:solidFill>
+                            <a:srgbClr val="1A1A2E"/>
+                          </a:solidFill>
+                          <a:latin typeface="Microsoft JhengHei"/>
+                        </a:rPr>
+                        <a:t>3D 空間認知;建於 ScanNet/ScanNet++/ARKitScenes(場景自帶深度)。Video-STR 33.0→46.5</a:t>
+                      </a:r>
+                    </a:p>
+                  </a:txBody>
+                  <a:tcPr marL="63500" marR="50800" marT="12700" marB="12700" anchor="ctr">
+                    <a:solidFill>
+                      <a:srgbClr val="FFFFFF"/>
+                    </a:solidFill>
+                  </a:tcPr>
+                </a:tc>
+              </a:tr>
+              <a:tr h="299720">
+                <a:tc>
+                  <a:txBody>
+                    <a:bodyPr wrap="square"/>
+                    <a:lstStyle/>
+                    <a:p>
+                      <a:r>
+                        <a:rPr sz="1050" b="1">
+                          <a:solidFill>
+                            <a:srgbClr val="0F768E"/>
+                          </a:solidFill>
+                          <a:latin typeface="Microsoft JhengHei"/>
+                        </a:rPr>
+                        <a:t>STI-Bench</a:t>
+                      </a:r>
+                    </a:p>
+                  </a:txBody>
+                  <a:tcPr marL="63500" marR="50800" marT="12700" marB="12700" anchor="ctr">
+                    <a:solidFill>
+                      <a:srgbClr val="F2F5F7"/>
+                    </a:solidFill>
+                  </a:tcPr>
+                </a:tc>
+                <a:tc>
+                  <a:txBody>
+                    <a:bodyPr wrap="square"/>
+                    <a:lstStyle/>
+                    <a:p>
+                      <a:r>
+                        <a:rPr sz="1050">
+                          <a:solidFill>
+                            <a:srgbClr val="1A1A2E"/>
+                          </a:solidFill>
+                          <a:latin typeface="Microsoft JhengHei"/>
+                        </a:rPr>
+                        <a:t>4D-RGPT · Video-STR</a:t>
+                      </a:r>
+                    </a:p>
+                  </a:txBody>
+                  <a:tcPr marL="63500" marR="50800" marT="12700" marB="12700" anchor="ctr">
+                    <a:solidFill>
+                      <a:srgbClr val="F2F5F7"/>
+                    </a:solidFill>
+                  </a:tcPr>
+                </a:tc>
+                <a:tc>
+                  <a:txBody>
+                    <a:bodyPr wrap="square"/>
+                    <a:lstStyle/>
+                    <a:p>
+                      <a:r>
+                        <a:rPr sz="1050">
+                          <a:solidFill>
+                            <a:srgbClr val="1A1A2E"/>
+                          </a:solidFill>
+                          <a:latin typeface="Microsoft JhengHei"/>
+                        </a:rPr>
+                        <a:t>精確量測(距離/速度/方向),深度+運動的定量評測。Video-STR 34.7→39.3</a:t>
+                      </a:r>
+                    </a:p>
+                  </a:txBody>
+                  <a:tcPr marL="63500" marR="50800" marT="12700" marB="12700" anchor="ctr">
+                    <a:solidFill>
+                      <a:srgbClr val="F2F5F7"/>
+                    </a:solidFill>
+                  </a:tcPr>
+                </a:tc>
+              </a:tr>
+              <a:tr h="299720">
+                <a:tc>
+                  <a:txBody>
+                    <a:bodyPr wrap="square"/>
+                    <a:lstStyle/>
+                    <a:p>
+                      <a:r>
+                        <a:rPr sz="1050" b="1">
+                          <a:solidFill>
+                            <a:srgbClr val="0F768E"/>
+                          </a:solidFill>
+                          <a:latin typeface="Microsoft JhengHei"/>
+                        </a:rPr>
+                        <a:t>VLM4D (-real)</a:t>
+                      </a:r>
+                    </a:p>
+                  </a:txBody>
+                  <a:tcPr marL="63500" marR="50800" marT="12700" marB="12700" anchor="ctr">
+                    <a:solidFill>
+                      <a:srgbClr val="FFFFFF"/>
+                    </a:solidFill>
+                  </a:tcPr>
+                </a:tc>
+                <a:tc>
+                  <a:txBody>
+                    <a:bodyPr wrap="square"/>
+                    <a:lstStyle/>
+                    <a:p>
+                      <a:r>
+                        <a:rPr sz="1050">
+                          <a:solidFill>
+                            <a:srgbClr val="1A1A2E"/>
+                          </a:solidFill>
+                          <a:latin typeface="Microsoft JhengHei"/>
+                        </a:rPr>
+                        <a:t>4D-RGPT</a:t>
+                      </a:r>
+                    </a:p>
+                  </a:txBody>
+                  <a:tcPr marL="63500" marR="50800" marT="12700" marB="12700" anchor="ctr">
+                    <a:solidFill>
+                      <a:srgbClr val="FFFFFF"/>
+                    </a:solidFill>
+                  </a:tcPr>
+                </a:tc>
+                <a:tc>
+                  <a:txBody>
+                    <a:bodyPr wrap="square"/>
+                    <a:lstStyle/>
+                    <a:p>
+                      <a:r>
+                        <a:rPr sz="1050">
+                          <a:solidFill>
+                            <a:srgbClr val="1A1A2E"/>
+                          </a:solidFill>
+                          <a:latin typeface="Microsoft JhengHei"/>
+                        </a:rPr>
+                        <a:t>動態時空:平移/旋轉/視角/運動連續性(4D-RGPT +6.2)</a:t>
+                      </a:r>
+                    </a:p>
+                  </a:txBody>
+                  <a:tcPr marL="63500" marR="50800" marT="12700" marB="12700" anchor="ctr">
+                    <a:solidFill>
+                      <a:srgbClr val="FFFFFF"/>
+                    </a:solidFill>
+                  </a:tcPr>
+                </a:tc>
+              </a:tr>
+              <a:tr h="299720">
+                <a:tc>
+                  <a:txBody>
+                    <a:bodyPr wrap="square"/>
+                    <a:lstStyle/>
+                    <a:p>
+                      <a:r>
+                        <a:rPr sz="1050" b="1">
+                          <a:solidFill>
+                            <a:srgbClr val="0F768E"/>
+                          </a:solidFill>
+                          <a:latin typeface="Microsoft JhengHei"/>
+                        </a:rPr>
+                        <a:t>VSTI-Bench</a:t>
+                      </a:r>
+                    </a:p>
+                  </a:txBody>
+                  <a:tcPr marL="63500" marR="50800" marT="12700" marB="12700" anchor="ctr">
+                    <a:solidFill>
+                      <a:srgbClr val="F2F5F7"/>
+                    </a:solidFill>
+                  </a:tcPr>
+                </a:tc>
+                <a:tc>
+                  <a:txBody>
+                    <a:bodyPr wrap="square"/>
+                    <a:lstStyle/>
+                    <a:p>
+                      <a:r>
+                        <a:rPr sz="1050">
+                          <a:solidFill>
+                            <a:srgbClr val="1A1A2E"/>
+                          </a:solidFill>
+                          <a:latin typeface="Microsoft JhengHei"/>
+                        </a:rPr>
+                        <a:t>4D-RGPT</a:t>
+                      </a:r>
+                    </a:p>
+                  </a:txBody>
+                  <a:tcPr marL="63500" marR="50800" marT="12700" marB="12700" anchor="ctr">
+                    <a:solidFill>
+                      <a:srgbClr val="F2F5F7"/>
+                    </a:solidFill>
+                  </a:tcPr>
+                </a:tc>
+                <a:tc>
+                  <a:txBody>
+                    <a:bodyPr wrap="square"/>
+                    <a:lstStyle/>
+                    <a:p>
+                      <a:r>
+                        <a:rPr sz="1050">
+                          <a:solidFill>
+                            <a:srgbClr val="1A1A2E"/>
+                          </a:solidFill>
+                          <a:latin typeface="Microsoft JhengHei"/>
+                        </a:rPr>
+                        <a:t>時空數值題(相對準確率;4D-RGPT +13.9)</a:t>
+                      </a:r>
+                    </a:p>
+                  </a:txBody>
+                  <a:tcPr marL="63500" marR="50800" marT="12700" marB="12700" anchor="ctr">
+                    <a:solidFill>
+                      <a:srgbClr val="F2F5F7"/>
+                    </a:solidFill>
+                  </a:tcPr>
+                </a:tc>
+              </a:tr>
+              <a:tr h="299720">
+                <a:tc>
+                  <a:txBody>
+                    <a:bodyPr wrap="square"/>
+                    <a:lstStyle/>
+                    <a:p>
+                      <a:r>
+                        <a:rPr sz="1050" b="1">
+                          <a:solidFill>
+                            <a:srgbClr val="2E7D5B"/>
+                          </a:solidFill>
+                          <a:latin typeface="Microsoft JhengHei"/>
+                        </a:rPr>
+                        <a:t>R4D-Bench ★</a:t>
+                      </a:r>
+                    </a:p>
+                  </a:txBody>
+                  <a:tcPr marL="63500" marR="50800" marT="12700" marB="12700" anchor="ctr">
+                    <a:solidFill>
+                      <a:srgbClr val="EFF6F8"/>
+                    </a:solidFill>
+                  </a:tcPr>
+                </a:tc>
+                <a:tc>
+                  <a:txBody>
+                    <a:bodyPr wrap="square"/>
+                    <a:lstStyle/>
+                    <a:p>
+                      <a:r>
+                        <a:rPr sz="1050">
+                          <a:solidFill>
+                            <a:srgbClr val="1A1A2E"/>
+                          </a:solidFill>
+                          <a:latin typeface="Microsoft JhengHei"/>
+                        </a:rPr>
+                        <a:t>4D-RGPT 自建</a:t>
+                      </a:r>
+                    </a:p>
+                  </a:txBody>
+                  <a:tcPr marL="63500" marR="50800" marT="12700" marB="12700" anchor="ctr">
+                    <a:solidFill>
+                      <a:srgbClr val="EFF6F8"/>
+                    </a:solidFill>
+                  </a:tcPr>
+                </a:tc>
+                <a:tc>
+                  <a:txBody>
+                    <a:bodyPr wrap="square"/>
+                    <a:lstStyle/>
+                    <a:p>
+                      <a:r>
+                        <a:rPr sz="1050">
+                          <a:solidFill>
+                            <a:srgbClr val="1A1A2E"/>
+                          </a:solidFill>
+                          <a:latin typeface="Microsoft JhengHei"/>
+                        </a:rPr>
+                        <a:t>首個「動態場景+region 提示」4D VQA(~1.5k QA、9 類);源自 STI+VLM4D;Avg 42.2</a:t>
+                      </a:r>
+                    </a:p>
+                  </a:txBody>
+                  <a:tcPr marL="63500" marR="50800" marT="12700" marB="12700" anchor="ctr">
+                    <a:solidFill>
+                      <a:srgbClr val="EFF6F8"/>
+                    </a:solidFill>
+                  </a:tcPr>
+                </a:tc>
+              </a:tr>
+              <a:tr h="299720">
+                <a:tc>
+                  <a:txBody>
+                    <a:bodyPr wrap="square"/>
+                    <a:lstStyle/>
+                    <a:p>
+                      <a:r>
+                        <a:rPr sz="1050" b="1">
+                          <a:solidFill>
+                            <a:srgbClr val="0F768E"/>
+                          </a:solidFill>
+                          <a:latin typeface="Microsoft JhengHei"/>
+                        </a:rPr>
+                        <a:t>STV-205k</a:t>
+                      </a:r>
+                    </a:p>
+                  </a:txBody>
+                  <a:tcPr marL="63500" marR="50800" marT="12700" marB="12700" anchor="ctr">
+                    <a:solidFill>
+                      <a:srgbClr val="F2F5F7"/>
+                    </a:solidFill>
+                  </a:tcPr>
+                </a:tc>
+                <a:tc>
+                  <a:txBody>
+                    <a:bodyPr wrap="square"/>
+                    <a:lstStyle/>
+                    <a:p>
+                      <a:r>
+                        <a:rPr sz="1050">
+                          <a:solidFill>
+                            <a:srgbClr val="1A1A2E"/>
+                          </a:solidFill>
+                          <a:latin typeface="Microsoft JhengHei"/>
+                        </a:rPr>
+                        <a:t>Video-STR 自建(訓練)</a:t>
+                      </a:r>
+                    </a:p>
+                  </a:txBody>
+                  <a:tcPr marL="63500" marR="50800" marT="12700" marB="12700" anchor="ctr">
+                    <a:solidFill>
+                      <a:srgbClr val="F2F5F7"/>
+                    </a:solidFill>
+                  </a:tcPr>
+                </a:tc>
+                <a:tc>
+                  <a:txBody>
+                    <a:bodyPr wrap="square"/>
+                    <a:lstStyle/>
+                    <a:p>
+                      <a:r>
+                        <a:rPr sz="1050">
+                          <a:solidFill>
+                            <a:srgbClr val="1A1A2E"/>
+                          </a:solidFill>
+                          <a:latin typeface="Microsoft JhengHei"/>
+                        </a:rPr>
+                        <a:t>TAO+ScanNet+KITTI 逐幀標註→8 類 QA;深度來源=ScanNet/KITTI</a:t>
+                      </a:r>
+                    </a:p>
+                  </a:txBody>
+                  <a:tcPr marL="63500" marR="50800" marT="12700" marB="12700" anchor="ctr">
+                    <a:solidFill>
+                      <a:srgbClr val="F2F5F7"/>
+                    </a:solidFill>
+                  </a:tcPr>
+                </a:tc>
+              </a:tr>
+              <a:tr h="299720">
+                <a:tc>
+                  <a:txBody>
+                    <a:bodyPr wrap="square"/>
+                    <a:lstStyle/>
+                    <a:p>
+                      <a:r>
+                        <a:rPr sz="1050" b="1">
+                          <a:solidFill>
+                            <a:srgbClr val="0F768E"/>
+                          </a:solidFill>
+                          <a:latin typeface="Microsoft JhengHei"/>
+                        </a:rPr>
+                        <a:t>OmniSpatial · MMSI · SAT · SPAR</a:t>
+                      </a:r>
+                    </a:p>
+                  </a:txBody>
+                  <a:tcPr marL="63500" marR="50800" marT="12700" marB="12700" anchor="ctr">
+                    <a:solidFill>
+                      <a:srgbClr val="FFFFFF"/>
+                    </a:solidFill>
+                  </a:tcPr>
+                </a:tc>
+                <a:tc>
+                  <a:txBody>
+                    <a:bodyPr wrap="square"/>
+                    <a:lstStyle/>
+                    <a:p>
+                      <a:r>
+                        <a:rPr sz="1050">
+                          <a:solidFill>
+                            <a:srgbClr val="1A1A2E"/>
+                          </a:solidFill>
+                          <a:latin typeface="Microsoft JhengHei"/>
+                        </a:rPr>
+                        <a:t>4D-RGPT · Video-STR</a:t>
+                      </a:r>
+                    </a:p>
+                  </a:txBody>
+                  <a:tcPr marL="63500" marR="50800" marT="12700" marB="12700" anchor="ctr">
+                    <a:solidFill>
+                      <a:srgbClr val="FFFFFF"/>
+                    </a:solidFill>
+                  </a:tcPr>
+                </a:tc>
+                <a:tc>
+                  <a:txBody>
+                    <a:bodyPr wrap="square"/>
+                    <a:lstStyle/>
+                    <a:p>
+                      <a:r>
+                        <a:rPr sz="1050">
+                          <a:solidFill>
+                            <a:srgbClr val="1A1A2E"/>
+                          </a:solidFill>
+                          <a:latin typeface="Microsoft JhengHei"/>
+                        </a:rPr>
+                        <a:t>空間推理系列(靜態為主,無 flow 成分)</a:t>
+                      </a:r>
+                    </a:p>
+                  </a:txBody>
+                  <a:tcPr marL="63500" marR="50800" marT="12700" marB="12700" anchor="ctr">
+                    <a:solidFill>
+                      <a:srgbClr val="FFFFFF"/>
+                    </a:solidFill>
+                  </a:tcPr>
+                </a:tc>
+              </a:tr>
+              <a:tr h="299720">
+                <a:tc>
+                  <a:txBody>
+                    <a:bodyPr wrap="square"/>
+                    <a:lstStyle/>
+                    <a:p>
+                      <a:r>
+                        <a:rPr sz="1050" b="1">
+                          <a:solidFill>
+                            <a:srgbClr val="0F768E"/>
+                          </a:solidFill>
+                          <a:latin typeface="Microsoft JhengHei"/>
+                        </a:rPr>
+                        <a:t>Video-MME · MLVU · LVB 等</a:t>
+                      </a:r>
+                    </a:p>
+                  </a:txBody>
+                  <a:tcPr marL="63500" marR="50800" marT="12700" marB="12700" anchor="ctr">
+                    <a:solidFill>
+                      <a:srgbClr val="F2F5F7"/>
+                    </a:solidFill>
+                  </a:tcPr>
+                </a:tc>
+                <a:tc>
+                  <a:txBody>
+                    <a:bodyPr wrap="square"/>
+                    <a:lstStyle/>
+                    <a:p>
+                      <a:r>
+                        <a:rPr sz="1050">
+                          <a:solidFill>
+                            <a:srgbClr val="1A1A2E"/>
+                          </a:solidFill>
+                          <a:latin typeface="Microsoft JhengHei"/>
+                        </a:rPr>
+                        <a:t>Flow4Agent · VER · Video-R1</a:t>
+                      </a:r>
+                    </a:p>
+                  </a:txBody>
+                  <a:tcPr marL="63500" marR="50800" marT="12700" marB="12700" anchor="ctr">
+                    <a:solidFill>
+                      <a:srgbClr val="F2F5F7"/>
+                    </a:solidFill>
+                  </a:tcPr>
+                </a:tc>
+                <a:tc>
+                  <a:txBody>
+                    <a:bodyPr wrap="square"/>
+                    <a:lstStyle/>
+                    <a:p>
+                      <a:r>
+                        <a:rPr sz="1050">
+                          <a:solidFill>
+                            <a:srgbClr val="1A1A2E"/>
+                          </a:solidFill>
+                          <a:latin typeface="Microsoft JhengHei"/>
+                        </a:rPr>
+                        <a:t>一般影片理解;Flow4Agent 只評這些 —— 用了 flow 卻無 flow 專屬評測</a:t>
+                      </a:r>
+                    </a:p>
+                  </a:txBody>
+                  <a:tcPr marL="63500" marR="50800" marT="12700" marB="12700" anchor="ctr">
+                    <a:solidFill>
+                      <a:srgbClr val="F2F5F7"/>
+                    </a:solidFill>
+                  </a:tcPr>
+                </a:tc>
+              </a:tr>
+            </a:tbl>
+          </a:graphicData>
+        </a:graphic>
+      </p:graphicFrame>
+      <p:sp>
+        <p:nvSpPr>
+          <p:cNvPr id="9" name="Rounded Rectangle 8"/>
+          <p:cNvSpPr/>
+          <p:nvPr/>
+        </p:nvSpPr>
+        <p:spPr>
+          <a:xfrm>
+            <a:off x="640080" y="5257800"/>
+            <a:ext cx="10881360" cy="731520"/>
+          </a:xfrm>
+          <a:prstGeom prst="roundRect">
+            <a:avLst/>
+          </a:prstGeom>
+          <a:solidFill>
+            <a:srgbClr val="EFF6F8"/>
+          </a:solidFill>
+          <a:ln>
+            <a:noFill/>
+          </a:ln>
+          <a:effectLst/>
+        </p:spPr>
+        <p:style>
+          <a:lnRef idx="1">
+            <a:schemeClr val="accent1"/>
+          </a:lnRef>
+          <a:fillRef idx="3">
+            <a:schemeClr val="accent1"/>
+          </a:fillRef>
+          <a:effectRef idx="2">
+            <a:schemeClr val="accent1"/>
+          </a:effectRef>
+          <a:fontRef idx="minor">
+            <a:schemeClr val="lt1"/>
+          </a:fontRef>
+        </p:style>
+        <p:txBody>
+          <a:bodyPr rtlCol="0" anchor="ctr"/>
+          <a:lstStyle/>
+          <a:p>
+            <a:pPr algn="ctr"/>
+          </a:p>
+        </p:txBody>
+      </p:sp>
+      <p:sp>
+        <p:nvSpPr>
+          <p:cNvPr id="10" name="Rectangle 9"/>
+          <p:cNvSpPr/>
+          <p:nvPr/>
+        </p:nvSpPr>
+        <p:spPr>
+          <a:xfrm>
+            <a:off x="640080" y="5257800"/>
+            <a:ext cx="146304" cy="731520"/>
+          </a:xfrm>
+          <a:prstGeom prst="rect">
+            <a:avLst/>
+          </a:prstGeom>
+          <a:solidFill>
+            <a:srgbClr val="E86A33"/>
+          </a:solidFill>
+          <a:ln>
+            <a:noFill/>
+          </a:ln>
+          <a:effectLst/>
+        </p:spPr>
+        <p:style>
+          <a:lnRef idx="1">
+            <a:schemeClr val="accent1"/>
+          </a:lnRef>
+          <a:fillRef idx="3">
+            <a:schemeClr val="accent1"/>
+          </a:fillRef>
+          <a:effectRef idx="2">
+            <a:schemeClr val="accent1"/>
+          </a:effectRef>
+          <a:fontRef idx="minor">
+            <a:schemeClr val="lt1"/>
+          </a:fontRef>
+        </p:style>
+        <p:txBody>
+          <a:bodyPr rtlCol="0" anchor="ctr"/>
+          <a:lstStyle/>
+          <a:p>
+            <a:pPr algn="ctr"/>
+          </a:p>
+        </p:txBody>
+      </p:sp>
+      <p:sp>
+        <p:nvSpPr>
+          <p:cNvPr id="11" name="Rounded Rectangle 10"/>
+          <p:cNvSpPr/>
+          <p:nvPr/>
+        </p:nvSpPr>
+        <p:spPr>
+          <a:xfrm>
+            <a:off x="868680" y="5422392"/>
+            <a:ext cx="960120" cy="402336"/>
+          </a:xfrm>
+          <a:prstGeom prst="roundRect">
+            <a:avLst/>
+          </a:prstGeom>
+          <a:solidFill>
+            <a:srgbClr val="E86A33"/>
+          </a:solidFill>
+          <a:ln>
+            <a:noFill/>
+          </a:ln>
+          <a:effectLst/>
+        </p:spPr>
+        <p:style>
+          <a:lnRef idx="1">
+            <a:schemeClr val="accent1"/>
+          </a:lnRef>
+          <a:fillRef idx="3">
+            <a:schemeClr val="accent1"/>
+          </a:fillRef>
+          <a:effectRef idx="2">
+            <a:schemeClr val="accent1"/>
+          </a:effectRef>
+          <a:fontRef idx="minor">
+            <a:schemeClr val="lt1"/>
+          </a:fontRef>
+        </p:style>
+        <p:txBody>
+          <a:bodyPr rtlCol="0" anchor="ctr"/>
+          <a:lstStyle/>
+          <a:p>
+            <a:pPr algn="ctr"/>
+          </a:p>
+        </p:txBody>
+      </p:sp>
+      <p:sp>
+        <p:nvSpPr>
+          <p:cNvPr id="12" name="TextBox 11"/>
+          <p:cNvSpPr txBox="1"/>
+          <p:nvPr/>
+        </p:nvSpPr>
+        <p:spPr>
+          <a:xfrm>
+            <a:off x="868680" y="5422392"/>
+            <a:ext cx="960120" cy="402336"/>
+          </a:xfrm>
+          <a:prstGeom prst="rect">
+            <a:avLst/>
+          </a:prstGeom>
+          <a:noFill/>
+        </p:spPr>
+        <p:txBody>
+          <a:bodyPr wrap="square" anchor="ctr" lIns="0" rIns="0" tIns="0" bIns="0">
+            <a:spAutoFit/>
+          </a:bodyPr>
+          <a:lstStyle/>
+          <a:p>
+            <a:pPr algn="ctr">
+              <a:lnSpc>
+                <a:spcPct val="108000"/>
+              </a:lnSpc>
+              <a:spcBef>
+                <a:spcPts val="0"/>
+              </a:spcBef>
+              <a:spcAft>
+                <a:spcPts val="600"/>
+              </a:spcAft>
+            </a:pPr>
+            <a:r>
+              <a:rPr sz="1500" b="1" i="0">
+                <a:solidFill>
+                  <a:srgbClr val="FFFFFF"/>
+                </a:solidFill>
+                <a:latin typeface="Microsoft JhengHei"/>
+              </a:rPr>
+              <a:t>結論</a:t>
+            </a:r>
+          </a:p>
+        </p:txBody>
+      </p:sp>
+      <p:sp>
+        <p:nvSpPr>
+          <p:cNvPr id="13" name="TextBox 12"/>
+          <p:cNvSpPr txBox="1"/>
+          <p:nvPr/>
+        </p:nvSpPr>
+        <p:spPr>
+          <a:xfrm>
+            <a:off x="2011680" y="5257800"/>
+            <a:ext cx="9326880" cy="731520"/>
+          </a:xfrm>
+          <a:prstGeom prst="rect">
+            <a:avLst/>
+          </a:prstGeom>
+          <a:noFill/>
+        </p:spPr>
+        <p:txBody>
+          <a:bodyPr wrap="square" anchor="ctr" lIns="0" rIns="0" tIns="0" bIns="0">
+            <a:spAutoFit/>
+          </a:bodyPr>
+          <a:lstStyle/>
+          <a:p>
+            <a:pPr algn="l">
+              <a:lnSpc>
+                <a:spcPct val="105000"/>
+              </a:lnSpc>
+              <a:spcBef>
+                <a:spcPts val="0"/>
+              </a:spcBef>
+              <a:spcAft>
+                <a:spcPts val="600"/>
+              </a:spcAft>
+            </a:pPr>
+            <a:r>
+              <a:rPr sz="1400" b="1" i="0">
+                <a:solidFill>
+                  <a:srgbClr val="1A1A2E"/>
+                </a:solidFill>
+                <a:latin typeface="Microsoft JhengHei"/>
+              </a:rPr>
+              <a:t>depth/時空評測可直接沿用(VSI/STI/VLM4D/R4D);</a:t>
+            </a:r>
+            <a:r>
+              <a:rPr sz="1400" b="0" i="0">
+                <a:solidFill>
+                  <a:srgbClr val="1A1A2E"/>
+                </a:solidFill>
+                <a:latin typeface="Microsoft JhengHei"/>
+              </a:rPr>
+              <a:t>沒有任何論文評「flow 一致性」→ 呼應我們的縫隙;R4D-Bench 是最近的對照。</a:t>
+            </a:r>
+          </a:p>
+        </p:txBody>
+      </p:sp>
+      <p:sp>
+        <p:nvSpPr>
+          <p:cNvPr id="14" name="TextBox 13"/>
+          <p:cNvSpPr txBox="1"/>
+          <p:nvPr/>
+        </p:nvSpPr>
+        <p:spPr>
+          <a:xfrm>
+            <a:off x="640080" y="6080760"/>
+            <a:ext cx="10972800" cy="320040"/>
+          </a:xfrm>
+          <a:prstGeom prst="rect">
+            <a:avLst/>
+          </a:prstGeom>
+          <a:noFill/>
+        </p:spPr>
+        <p:txBody>
+          <a:bodyPr wrap="square" anchor="t" lIns="0" rIns="0" tIns="0" bIns="0">
+            <a:spAutoFit/>
+          </a:bodyPr>
+          <a:lstStyle/>
+          <a:p>
+            <a:pPr algn="l">
+              <a:lnSpc>
+                <a:spcPct val="108000"/>
+              </a:lnSpc>
+              <a:spcBef>
+                <a:spcPts val="0"/>
+              </a:spcBef>
+              <a:spcAft>
+                <a:spcPts val="600"/>
+              </a:spcAft>
+            </a:pPr>
+            <a:r>
+              <a:rPr sz="1000" b="1" i="0">
+                <a:solidFill>
+                  <a:srgbClr val="5B6370"/>
+                </a:solidFill>
+                <a:latin typeface="Microsoft JhengHei"/>
+              </a:rPr>
+              <a:t>▸ 依據:</a:t>
+            </a:r>
+            <a:r>
+              <a:rPr sz="1000" b="0" i="1">
+                <a:solidFill>
+                  <a:srgbClr val="5B6370"/>
+                </a:solidFill>
+                <a:latin typeface="Segoe UI"/>
+              </a:rPr>
+              <a:t>各列出自 4D_evidence_reward_deep.pptx 導讀之論文 benchmark 段(VER · 4D-RGPT · Video-R1 · Video-STR · Flow4Agent 等);數字為各論文自報。</a:t>
+            </a:r>
+          </a:p>
+        </p:txBody>
+      </p:sp>
+      <p:sp>
+        <p:nvSpPr>
+          <p:cNvPr id="15" name="TextBox 14"/>
+          <p:cNvSpPr txBox="1"/>
+          <p:nvPr/>
+        </p:nvSpPr>
+        <p:spPr>
+          <a:xfrm>
+            <a:off x="10424160" y="6455664"/>
+            <a:ext cx="1554480" cy="274320"/>
+          </a:xfrm>
+          <a:prstGeom prst="rect">
+            <a:avLst/>
+          </a:prstGeom>
+          <a:noFill/>
+        </p:spPr>
+        <p:txBody>
+          <a:bodyPr wrap="square" anchor="t" lIns="0" rIns="0" tIns="0" bIns="0">
+            <a:spAutoFit/>
+          </a:bodyPr>
+          <a:lstStyle/>
+          <a:p>
+            <a:pPr algn="r">
+              <a:lnSpc>
+                <a:spcPct val="108000"/>
+              </a:lnSpc>
+              <a:spcBef>
+                <a:spcPts val="0"/>
+              </a:spcBef>
+              <a:spcAft>
+                <a:spcPts val="600"/>
+              </a:spcAft>
+            </a:pPr>
+            <a:r>
+              <a:rPr sz="900" b="0" i="0">
+                <a:solidFill>
+                  <a:srgbClr val="5B6370"/>
+                </a:solidFill>
+                <a:latin typeface="Segoe UI"/>
+              </a:rPr>
+              <a:t>待辦回答 · 8/8</a:t>
             </a:r>
           </a:p>
         </p:txBody>

--- a/slides/TDL_7頁回答.pptx
+++ b/slides/TDL_7頁回答.pptx
@@ -13,6 +13,7 @@
     <p:sldId id="261" r:id="rId13"/>
     <p:sldId id="262" r:id="rId14"/>
     <p:sldId id="263" r:id="rId15"/>
+    <p:sldId id="264" r:id="rId16"/>
   </p:sldIdLst>
   <p:sldSz cx="12191695" cy="6858000" type="screen4x3"/>
   <p:notesSz cx="6858000" cy="9144000"/>
@@ -509,7 +510,7 @@
           <a:lstStyle/>
           <a:p>
             <a:r>
-              <a:t>回答待辦1。重點在最後一條：Flow4Agent 沒把光流當 reward，留給我們升級空間。</a:t>
+              <a:t>Q1。圖為原論文架構。未驗證段是報告時要誠實講的。</a:t>
             </a:r>
           </a:p>
         </p:txBody>
@@ -579,7 +580,7 @@
           <a:lstStyle/>
           <a:p>
             <a:r>
-              <a:t>回答待辦2。已做撞題檢查：depth 擁擠、flow-consistency 推理 reward 空白。</a:t>
+              <a:t>Q2 新穎性。圖用 Smooth Operator 原圖示範 depth-reward 長什麼樣,對照出 flow 的空白。</a:t>
             </a:r>
           </a:p>
         </p:txBody>
@@ -649,7 +650,7 @@
           <a:lstStyle/>
           <a:p>
             <a:r>
-              <a:t>回答待辦3(最關鍵)。感知vs推理，4D偏感知；MoCA歸因法可直接接reward。</a:t>
+              <a:t>Q3 最關鍵。誠實呈現兩側證據並存;拆解實驗缺口可能是自己做實驗的機會。</a:t>
             </a:r>
           </a:p>
         </p:txBody>
@@ -719,7 +720,7 @@
           <a:lstStyle/>
           <a:p>
             <a:r>
-              <a:t>回答待辦4。GT 資料驗證 + 偽標規模化，解決標註瓶頸。</a:t>
+              <a:t>Q4。無圖(資料集清單型)。重點在未驗證段的偽標噪音問題。</a:t>
             </a:r>
           </a:p>
         </p:txBody>
@@ -789,7 +790,7 @@
           <a:lstStyle/>
           <a:p>
             <a:r>
-              <a:t>回答待辦5。scene-flow 與點追蹤是升級選項，直擊時間一致性弱點。</a:t>
+              <a:t>Q5。誠實標注:升級訊號的主張還沒有證據,工具成熟度要查。</a:t>
             </a:r>
           </a:p>
         </p:txBody>
@@ -859,7 +860,7 @@
           <a:lstStyle/>
           <a:p>
             <a:r>
-              <a:t>回答待辦6。RLVR 痛點=稀疏；連續+過程級 reward 是對策，正是我們方法的正當性。</a:t>
+              <a:t>Q6。警訊那條要講:RLVR 不誘發新能力的爭議直接威脅我們的故事。</a:t>
             </a:r>
           </a:p>
         </p:txBody>
@@ -929,7 +930,7 @@
           <a:lstStyle/>
           <a:p>
             <a:r>
-              <a:t>回答待辦7。賣點+benchmark對照。差異軸：靜vs動、真實vs合成、定量、規模。主評測VLM4D+STI。</a:t>
+              <a:t>Q7。刻意用支持/反對並列而非結論;最後一條 baseline 對照是 reviewer 最可能的一槍。</a:t>
             </a:r>
           </a:p>
         </p:txBody>
@@ -999,7 +1000,77 @@
           <a:lstStyle/>
           <a:p>
             <a:r>
-              <a:t>補充頁:只列 10 篇導讀論文實際用到的 benchmark。講解重點:(1) depth/時空評測已齊全,可沿用其設定;(2) Flow4Agent 用了 flow 卻只評一般影片 benchmark —— 全場沒有 flow 專屬評測,呼應我們的縫隙;(3) 4D-RGPT 的 R4D-Bench(動態+region)是我們最近的對照,它的 ablation(P4D&gt;4D-SFT&gt;4D-Concat)也是學姊指定要學的範本。</a:t>
+              <a:t>Q8=舊 P7 表+P8 表合併。R4D-Bench(4D-RGPT 自建)是最近的對照;它的 ablation 是學姊指定範本。</a:t>
+            </a:r>
+          </a:p>
+        </p:txBody>
+      </p:sp>
+      <p:sp>
+        <p:nvSpPr>
+          <p:cNvPr id="4" name="Slide Number Placeholder 3"/>
+          <p:cNvSpPr>
+            <a:spLocks noGrp="1"/>
+          </p:cNvSpPr>
+          <p:nvPr>
+            <p:ph type="sldNum" idx="5" sz="quarter"/>
+          </p:nvPr>
+        </p:nvSpPr>
+        <p:spPr/>
+      </p:sp>
+    </p:spTree>
+  </p:cSld>
+  <p:clrMapOvr>
+    <a:masterClrMapping/>
+  </p:clrMapOvr>
+</p:notes>
+</file>
+
+<file path=ppt/notesSlides/notesSlide9.xml><?xml version="1.0" encoding="utf-8"?>
+<p:notes xmlns:a="http://schemas.openxmlformats.org/drawingml/2006/main" xmlns:p="http://schemas.openxmlformats.org/presentationml/2006/main" xmlns:r="http://schemas.openxmlformats.org/officeDocument/2006/relationships">
+  <p:cSld>
+    <p:spTree>
+      <p:nvGrpSpPr>
+        <p:cNvPr id="1" name=""/>
+        <p:cNvGrpSpPr/>
+        <p:nvPr/>
+      </p:nvGrpSpPr>
+      <p:grpSpPr>
+        <a:xfrm>
+          <a:off x="0" y="0"/>
+          <a:ext cx="0" cy="0"/>
+          <a:chOff x="0" y="0"/>
+          <a:chExt cx="0" cy="0"/>
+        </a:xfrm>
+      </p:grpSpPr>
+      <p:sp>
+        <p:nvSpPr>
+          <p:cNvPr id="2" name="Slide Image Placeholder 1"/>
+          <p:cNvSpPr>
+            <a:spLocks noGrp="1"/>
+          </p:cNvSpPr>
+          <p:nvPr>
+            <p:ph type="sldImg" idx="2"/>
+          </p:nvPr>
+        </p:nvSpPr>
+        <p:spPr/>
+      </p:sp>
+      <p:sp>
+        <p:nvSpPr>
+          <p:cNvPr id="3" name="Notes Placeholder 2"/>
+          <p:cNvSpPr>
+            <a:spLocks noGrp="1"/>
+          </p:cNvSpPr>
+          <p:nvPr>
+            <p:ph type="body" idx="3" sz="quarter"/>
+          </p:nvPr>
+        </p:nvSpPr>
+        <p:spPr/>
+        <p:txBody>
+          <a:bodyPr/>
+          <a:lstStyle/>
+          <a:p>
+            <a:r>
+              <a:t>收尾頁。這 6 題對應 notes/理解整理_7題.md 的「只有你能回答」欄。</a:t>
             </a:r>
           </a:p>
         </p:txBody>
@@ -4051,20 +4122,74 @@
       </p:sp>
       <p:sp>
         <p:nvSpPr>
-          <p:cNvPr id="3" name="Oval 2"/>
+          <p:cNvPr id="3" name="TextBox 2"/>
+          <p:cNvSpPr txBox="1"/>
+          <p:nvPr/>
+        </p:nvSpPr>
+        <p:spPr>
+          <a:xfrm>
+            <a:off x="640080" y="384048"/>
+            <a:ext cx="10881360" cy="365760"/>
+          </a:xfrm>
+          <a:prstGeom prst="rect">
+            <a:avLst/>
+          </a:prstGeom>
+          <a:noFill/>
+        </p:spPr>
+        <p:txBody>
+          <a:bodyPr wrap="square" anchor="t" lIns="0" rIns="0" tIns="0" bIns="0">
+            <a:spAutoFit/>
+          </a:bodyPr>
+          <a:lstStyle/>
+          <a:p>
+            <a:pPr algn="l">
+              <a:lnSpc>
+                <a:spcPct val="110000"/>
+              </a:lnSpc>
+              <a:spcBef>
+                <a:spcPts val="0"/>
+              </a:spcBef>
+              <a:spcAft>
+                <a:spcPts val="500"/>
+              </a:spcAft>
+            </a:pPr>
+            <a:r>
+              <a:rPr sz="1500" b="1" i="0">
+                <a:solidFill>
+                  <a:srgbClr val="0F768E"/>
+                </a:solidFill>
+                <a:latin typeface="Segoe UI"/>
+              </a:rPr>
+              <a:t>Q1　</a:t>
+            </a:r>
+            <a:r>
+              <a:rPr sz="1250" b="0" i="0">
+                <a:solidFill>
+                  <a:srgbClr val="555B63"/>
+                </a:solidFill>
+                <a:latin typeface="Microsoft JhengHei"/>
+              </a:rPr>
+              <a:t>研究 Flow4Agent 如何使用 flow;training-free 做法有無可借用的點子。</a:t>
+            </a:r>
+          </a:p>
+        </p:txBody>
+      </p:sp>
+      <p:sp>
+        <p:nvSpPr>
+          <p:cNvPr id="4" name="Rectangle 3"/>
           <p:cNvSpPr/>
           <p:nvPr/>
         </p:nvSpPr>
         <p:spPr>
           <a:xfrm>
-            <a:off x="640080" y="457200"/>
-            <a:ext cx="566928" cy="566928"/>
-          </a:xfrm>
-          <a:prstGeom prst="ellipse">
+            <a:off x="640080" y="804672"/>
+            <a:ext cx="10881360" cy="14630"/>
+          </a:xfrm>
+          <a:prstGeom prst="rect">
             <a:avLst/>
           </a:prstGeom>
           <a:solidFill>
-            <a:srgbClr val="0F768E"/>
+            <a:srgbClr val="DDDDDD"/>
           </a:solidFill>
           <a:ln>
             <a:noFill/>
@@ -4095,14 +4220,14 @@
       </p:sp>
       <p:sp>
         <p:nvSpPr>
-          <p:cNvPr id="4" name="TextBox 3"/>
+          <p:cNvPr id="5" name="TextBox 4"/>
           <p:cNvSpPr txBox="1"/>
           <p:nvPr/>
         </p:nvSpPr>
         <p:spPr>
           <a:xfrm>
-            <a:off x="640080" y="457200"/>
-            <a:ext cx="566928" cy="566928"/>
+            <a:off x="640080" y="960120"/>
+            <a:ext cx="10972800" cy="777240"/>
           </a:xfrm>
           <a:prstGeom prst="rect">
             <a:avLst/>
@@ -4110,14 +4235,59 @@
           <a:noFill/>
         </p:spPr>
         <p:txBody>
-          <a:bodyPr wrap="square" anchor="ctr" lIns="0" rIns="0" tIns="0" bIns="0">
+          <a:bodyPr wrap="square" anchor="t" lIns="0" rIns="0" tIns="0" bIns="0">
             <a:spAutoFit/>
           </a:bodyPr>
           <a:lstStyle/>
           <a:p>
-            <a:pPr algn="ctr">
+            <a:pPr algn="l">
               <a:lnSpc>
-                <a:spcPct val="108000"/>
+                <a:spcPct val="106000"/>
+              </a:lnSpc>
+              <a:spcBef>
+                <a:spcPts val="0"/>
+              </a:spcBef>
+              <a:spcAft>
+                <a:spcPts val="500"/>
+              </a:spcAft>
+            </a:pPr>
+            <a:r>
+              <a:rPr sz="2100" b="1" i="0">
+                <a:solidFill>
+                  <a:srgbClr val="111111"/>
+                </a:solidFill>
+                <a:latin typeface="Microsoft JhengHei"/>
+              </a:rPr>
+              <a:t>Flow4Agent:光流只當 training-free 壓縮 prior,未當訓練訊號</a:t>
+            </a:r>
+          </a:p>
+        </p:txBody>
+      </p:sp>
+      <p:sp>
+        <p:nvSpPr>
+          <p:cNvPr id="6" name="TextBox 5"/>
+          <p:cNvSpPr txBox="1"/>
+          <p:nvPr/>
+        </p:nvSpPr>
+        <p:spPr>
+          <a:xfrm>
+            <a:off x="640080" y="1828800"/>
+            <a:ext cx="5486400" cy="3291840"/>
+          </a:xfrm>
+          <a:prstGeom prst="rect">
+            <a:avLst/>
+          </a:prstGeom>
+          <a:noFill/>
+        </p:spPr>
+        <p:txBody>
+          <a:bodyPr wrap="square" anchor="t" lIns="0" rIns="0" tIns="0" bIns="0">
+            <a:spAutoFit/>
+          </a:bodyPr>
+          <a:lstStyle/>
+          <a:p>
+            <a:pPr algn="l">
+              <a:lnSpc>
+                <a:spcPct val="115000"/>
               </a:lnSpc>
               <a:spcBef>
                 <a:spcPts val="0"/>
@@ -4127,42 +4297,28 @@
               </a:spcAft>
             </a:pPr>
             <a:r>
-              <a:rPr sz="2200" b="1" i="0">
-                <a:solidFill>
-                  <a:srgbClr val="FFFFFF"/>
+              <a:rPr sz="1400" b="0" i="0">
+                <a:solidFill>
+                  <a:srgbClr val="555B63"/>
                 </a:solidFill>
                 <a:latin typeface="Segoe UI"/>
               </a:rPr>
-              <a:t>1</a:t>
-            </a:r>
-          </a:p>
-        </p:txBody>
-      </p:sp>
-      <p:sp>
-        <p:nvSpPr>
-          <p:cNvPr id="5" name="TextBox 4"/>
-          <p:cNvSpPr txBox="1"/>
-          <p:nvPr/>
-        </p:nvSpPr>
-        <p:spPr>
-          <a:xfrm>
-            <a:off x="1371600" y="475488"/>
-            <a:ext cx="10241280" cy="548640"/>
-          </a:xfrm>
-          <a:prstGeom prst="rect">
-            <a:avLst/>
-          </a:prstGeom>
-          <a:noFill/>
-        </p:spPr>
-        <p:txBody>
-          <a:bodyPr wrap="square" anchor="t" lIns="0" rIns="0" tIns="0" bIns="0">
-            <a:spAutoFit/>
-          </a:bodyPr>
-          <a:lstStyle/>
+              <a:t>— </a:t>
+            </a:r>
+            <a:r>
+              <a:rPr sz="1400" b="0" i="0">
+                <a:solidFill>
+                  <a:srgbClr val="111111"/>
+                </a:solidFill>
+                <a:latin typeface="Microsoft JhengHei"/>
+              </a:rPr>
+              <a:t>TGO:粗光流分組相似幀 + 語意 prior 濾場景 → 幀階層。</a:t>
+            </a:r>
+          </a:p>
           <a:p>
             <a:pPr algn="l">
               <a:lnSpc>
-                <a:spcPct val="108000"/>
+                <a:spcPct val="115000"/>
               </a:lnSpc>
               <a:spcBef>
                 <a:spcPts val="0"/>
@@ -4172,42 +4328,28 @@
               </a:spcAft>
             </a:pPr>
             <a:r>
-              <a:rPr sz="1300" b="1" i="0">
-                <a:solidFill>
-                  <a:srgbClr val="0F768E"/>
+              <a:rPr sz="1400" b="0" i="0">
+                <a:solidFill>
+                  <a:srgbClr val="555B63"/>
+                </a:solidFill>
+                <a:latin typeface="Segoe UI"/>
+              </a:rPr>
+              <a:t>— </a:t>
+            </a:r>
+            <a:r>
+              <a:rPr sz="1400" b="0" i="0">
+                <a:solidFill>
+                  <a:srgbClr val="111111"/>
                 </a:solidFill>
                 <a:latin typeface="Microsoft JhengHei"/>
               </a:rPr>
-              <a:t>待辦事項 1</a:t>
-            </a:r>
-          </a:p>
-        </p:txBody>
-      </p:sp>
-      <p:sp>
-        <p:nvSpPr>
-          <p:cNvPr id="6" name="TextBox 5"/>
-          <p:cNvSpPr txBox="1"/>
-          <p:nvPr/>
-        </p:nvSpPr>
-        <p:spPr>
-          <a:xfrm>
-            <a:off x="1371600" y="822960"/>
-            <a:ext cx="10424160" cy="502920"/>
-          </a:xfrm>
-          <a:prstGeom prst="rect">
-            <a:avLst/>
-          </a:prstGeom>
-          <a:noFill/>
-        </p:spPr>
-        <p:txBody>
-          <a:bodyPr wrap="square" anchor="t" lIns="0" rIns="0" tIns="0" bIns="0">
-            <a:spAutoFit/>
-          </a:bodyPr>
-          <a:lstStyle/>
+              <a:t>MTP:細光流剪 frame 內冗餘 token。</a:t>
+            </a:r>
+          </a:p>
           <a:p>
             <a:pPr algn="l">
               <a:lnSpc>
-                <a:spcPct val="108000"/>
+                <a:spcPct val="115000"/>
               </a:lnSpc>
               <a:spcBef>
                 <a:spcPts val="0"/>
@@ -4217,42 +4359,28 @@
               </a:spcAft>
             </a:pPr>
             <a:r>
-              <a:rPr sz="1300" b="0" i="1">
-                <a:solidFill>
-                  <a:srgbClr val="5B6370"/>
+              <a:rPr sz="1400" b="0" i="0">
+                <a:solidFill>
+                  <a:srgbClr val="555B63"/>
+                </a:solidFill>
+                <a:latin typeface="Segoe UI"/>
+              </a:rPr>
+              <a:t>— </a:t>
+            </a:r>
+            <a:r>
+              <a:rPr sz="1400" b="0" i="0">
+                <a:solidFill>
+                  <a:srgbClr val="111111"/>
                 </a:solidFill>
                 <a:latin typeface="Microsoft JhengHei"/>
               </a:rPr>
-              <a:t>研究 Flow4Agent 如何使用 flow，並檢視 training-free 做法有無可借用的新點子。</a:t>
-            </a:r>
-          </a:p>
-        </p:txBody>
-      </p:sp>
-      <p:sp>
-        <p:nvSpPr>
-          <p:cNvPr id="7" name="TextBox 6"/>
-          <p:cNvSpPr txBox="1"/>
-          <p:nvPr/>
-        </p:nvSpPr>
-        <p:spPr>
-          <a:xfrm>
-            <a:off x="640080" y="1600200"/>
-            <a:ext cx="10972800" cy="914400"/>
-          </a:xfrm>
-          <a:prstGeom prst="rect">
-            <a:avLst/>
-          </a:prstGeom>
-          <a:noFill/>
-        </p:spPr>
-        <p:txBody>
-          <a:bodyPr wrap="square" anchor="t" lIns="0" rIns="0" tIns="0" bIns="0">
-            <a:spAutoFit/>
-          </a:bodyPr>
-          <a:lstStyle/>
+              <a:t>Video-MME 64.7 / MLVU 71.4 / LongVideoBench 60.4;消融:DES 升短片、ECQ/MTP 升長片。</a:t>
+            </a:r>
+          </a:p>
           <a:p>
             <a:pPr algn="l">
               <a:lnSpc>
-                <a:spcPct val="106000"/>
+                <a:spcPct val="115000"/>
               </a:lnSpc>
               <a:spcBef>
                 <a:spcPts val="0"/>
@@ -4262,44 +4390,50 @@
               </a:spcAft>
             </a:pPr>
             <a:r>
-              <a:rPr sz="2400" b="1" i="0">
-                <a:solidFill>
-                  <a:srgbClr val="1A1A2E"/>
+              <a:rPr sz="1400" b="0" i="0">
+                <a:solidFill>
+                  <a:srgbClr val="555B63"/>
+                </a:solidFill>
+                <a:latin typeface="Segoe UI"/>
+              </a:rPr>
+              <a:t>— </a:t>
+            </a:r>
+            <a:r>
+              <a:rPr sz="1400" b="1" i="0">
+                <a:solidFill>
+                  <a:srgbClr val="111111"/>
                 </a:solidFill>
                 <a:latin typeface="Microsoft JhengHei"/>
               </a:rPr>
-              <a:t>Flow4Agent：光流只當 </a:t>
-            </a:r>
-            <a:r>
-              <a:rPr sz="2400" b="1" i="0">
-                <a:solidFill>
-                  <a:srgbClr val="E86A33"/>
-                </a:solidFill>
-                <a:latin typeface="Microsoft JhengHei"/>
-              </a:rPr>
-              <a:t>training-free 壓縮 prior</a:t>
-            </a:r>
-            <a:r>
-              <a:rPr sz="2400" b="1" i="0">
-                <a:solidFill>
-                  <a:srgbClr val="1A1A2E"/>
-                </a:solidFill>
-                <a:latin typeface="Microsoft JhengHei"/>
-              </a:rPr>
-              <a:t>，</a:t>
-            </a:r>
-            <a:r>
-              <a:rPr sz="2400" b="1" i="0">
-                <a:solidFill>
-                  <a:srgbClr val="1A1A2E"/>
-                </a:solidFill>
-                <a:latin typeface="Microsoft JhengHei"/>
-              </a:rPr>
-              <a:t>我們可升級為 reward</a:t>
-            </a:r>
-          </a:p>
-        </p:txBody>
-      </p:sp>
+              <a:t>可借:光流能標定「哪裡有運動證據」→ 可從壓縮升級為 reward。</a:t>
+            </a:r>
+          </a:p>
+        </p:txBody>
+      </p:sp>
+      <p:pic>
+        <p:nvPicPr>
+          <p:cNvPr id="7" name="Picture 6" descr="Flow4Agent_x2.png"/>
+          <p:cNvPicPr>
+            <a:picLocks noChangeAspect="1"/>
+          </p:cNvPicPr>
+          <p:nvPr/>
+        </p:nvPicPr>
+        <p:blipFill>
+          <a:blip r:embed="rId2"/>
+          <a:stretch>
+            <a:fillRect/>
+          </a:stretch>
+        </p:blipFill>
+        <p:spPr>
+          <a:xfrm>
+            <a:off x="6400800" y="2124753"/>
+            <a:ext cx="5120640" cy="2882813"/>
+          </a:xfrm>
+          <a:prstGeom prst="rect">
+            <a:avLst/>
+          </a:prstGeom>
+        </p:spPr>
+      </p:pic>
       <p:sp>
         <p:nvSpPr>
           <p:cNvPr id="8" name="TextBox 7"/>
@@ -4308,8 +4442,8 @@
         </p:nvSpPr>
         <p:spPr>
           <a:xfrm>
-            <a:off x="685800" y="2651760"/>
-            <a:ext cx="10881360" cy="2377440"/>
+            <a:off x="6400800" y="5034998"/>
+            <a:ext cx="5120640" cy="274320"/>
           </a:xfrm>
           <a:prstGeom prst="rect">
             <a:avLst/>
@@ -4322,533 +4456,178 @@
           </a:bodyPr>
           <a:lstStyle/>
           <a:p>
-            <a:pPr algn="l">
+            <a:pPr algn="ctr">
               <a:lnSpc>
-                <a:spcPct val="112000"/>
+                <a:spcPct val="110000"/>
               </a:lnSpc>
               <a:spcBef>
                 <a:spcPts val="0"/>
               </a:spcBef>
               <a:spcAft>
-                <a:spcPts val="600"/>
+                <a:spcPts val="500"/>
               </a:spcAft>
             </a:pPr>
             <a:r>
-              <a:rPr sz="1600" b="1" i="0">
-                <a:solidFill>
-                  <a:srgbClr val="0F768E"/>
+              <a:rPr sz="950" b="0" i="1">
+                <a:solidFill>
+                  <a:srgbClr val="555B63"/>
                 </a:solidFill>
                 <a:latin typeface="Microsoft JhengHei"/>
               </a:rPr>
-              <a:t>▸ </a:t>
-            </a:r>
-            <a:r>
-              <a:rPr sz="1600" b="1" i="0">
-                <a:solidFill>
-                  <a:srgbClr val="1A1A2E"/>
-                </a:solidFill>
-                <a:latin typeface="Microsoft JhengHei"/>
-              </a:rPr>
-              <a:t>首個把光流用於 LLM 影片理解</a:t>
-            </a:r>
-            <a:r>
-              <a:rPr sz="1600" b="0" i="0">
-                <a:solidFill>
-                  <a:srgbClr val="1A1A2E"/>
-                </a:solidFill>
-                <a:latin typeface="Microsoft JhengHei"/>
-              </a:rPr>
-              <a:t>（ICCV 2025）。</a:t>
-            </a:r>
-          </a:p>
+              <a:t>Flow4Agent 架構圖(取自 arXiv 2510.05836 HTML 原圖)</a:t>
+            </a:r>
+          </a:p>
+        </p:txBody>
+      </p:sp>
+      <p:sp>
+        <p:nvSpPr>
+          <p:cNvPr id="9" name="TextBox 8"/>
+          <p:cNvSpPr txBox="1"/>
+          <p:nvPr/>
+        </p:nvSpPr>
+        <p:spPr>
+          <a:xfrm>
+            <a:off x="640080" y="5806440"/>
+            <a:ext cx="10881360" cy="594360"/>
+          </a:xfrm>
+          <a:prstGeom prst="rect">
+            <a:avLst/>
+          </a:prstGeom>
+          <a:noFill/>
+        </p:spPr>
+        <p:txBody>
+          <a:bodyPr wrap="square" anchor="t" lIns="0" rIns="0" tIns="0" bIns="0">
+            <a:spAutoFit/>
+          </a:bodyPr>
+          <a:lstStyle/>
           <a:p>
             <a:pPr algn="l">
               <a:lnSpc>
-                <a:spcPct val="112000"/>
+                <a:spcPct val="110000"/>
               </a:lnSpc>
               <a:spcBef>
                 <a:spcPts val="0"/>
               </a:spcBef>
               <a:spcAft>
-                <a:spcPts val="600"/>
+                <a:spcPts val="500"/>
               </a:spcAft>
             </a:pPr>
             <a:r>
-              <a:rPr sz="1600" b="1" i="0">
-                <a:solidFill>
-                  <a:srgbClr val="0F768E"/>
+              <a:rPr sz="1150" b="1" i="0">
+                <a:solidFill>
+                  <a:srgbClr val="B44A1E"/>
                 </a:solidFill>
                 <a:latin typeface="Microsoft JhengHei"/>
               </a:rPr>
-              <a:t>▸ </a:t>
-            </a:r>
-            <a:r>
-              <a:rPr sz="1600" b="1" i="0">
-                <a:solidFill>
-                  <a:srgbClr val="1A1A2E"/>
+              <a:t>未驗證：</a:t>
+            </a:r>
+            <a:r>
+              <a:rPr sz="1150" b="0" i="0">
+                <a:solidFill>
+                  <a:srgbClr val="111111"/>
                 </a:solidFill>
                 <a:latin typeface="Microsoft JhengHei"/>
               </a:rPr>
-              <a:t>TGO：</a:t>
-            </a:r>
-            <a:r>
-              <a:rPr sz="1600" b="0" i="0">
-                <a:solidFill>
-                  <a:srgbClr val="1A1A2E"/>
-                </a:solidFill>
-                <a:latin typeface="Microsoft JhengHei"/>
-              </a:rPr>
-              <a:t>用粗光流分組相似幀 + 語意 prior 濾場景 → 自適應 frame 階層。</a:t>
-            </a:r>
-          </a:p>
+              <a:t>TGO/MTP 的 flow 具體計算方式(用哪個 estimator、幾幀間)未讀 method 段;增益來自「運動資訊」或僅「去冗餘」待從 ablation 判斷。</a:t>
+            </a:r>
+          </a:p>
+        </p:txBody>
+      </p:sp>
+      <p:sp>
+        <p:nvSpPr>
+          <p:cNvPr id="10" name="TextBox 9"/>
+          <p:cNvSpPr txBox="1"/>
+          <p:nvPr/>
+        </p:nvSpPr>
+        <p:spPr>
+          <a:xfrm>
+            <a:off x="640080" y="6355080"/>
+            <a:ext cx="10058400" cy="320040"/>
+          </a:xfrm>
+          <a:prstGeom prst="rect">
+            <a:avLst/>
+          </a:prstGeom>
+          <a:noFill/>
+        </p:spPr>
+        <p:txBody>
+          <a:bodyPr wrap="square" anchor="t" lIns="0" rIns="0" tIns="0" bIns="0">
+            <a:spAutoFit/>
+          </a:bodyPr>
+          <a:lstStyle/>
           <a:p>
             <a:pPr algn="l">
               <a:lnSpc>
-                <a:spcPct val="112000"/>
+                <a:spcPct val="110000"/>
               </a:lnSpc>
               <a:spcBef>
                 <a:spcPts val="0"/>
               </a:spcBef>
               <a:spcAft>
-                <a:spcPts val="600"/>
+                <a:spcPts val="500"/>
               </a:spcAft>
             </a:pPr>
             <a:r>
-              <a:rPr sz="1600" b="1" i="0">
-                <a:solidFill>
-                  <a:srgbClr val="0F768E"/>
+              <a:rPr sz="950" b="1" i="0">
+                <a:solidFill>
+                  <a:srgbClr val="555B63"/>
                 </a:solidFill>
                 <a:latin typeface="Microsoft JhengHei"/>
               </a:rPr>
-              <a:t>▸ </a:t>
-            </a:r>
-            <a:r>
-              <a:rPr sz="1600" b="1" i="0">
-                <a:solidFill>
-                  <a:srgbClr val="1A1A2E"/>
-                </a:solidFill>
-                <a:latin typeface="Microsoft JhengHei"/>
-              </a:rPr>
-              <a:t>MTP：</a:t>
-            </a:r>
-            <a:r>
-              <a:rPr sz="1600" b="0" i="0">
-                <a:solidFill>
-                  <a:srgbClr val="1A1A2E"/>
-                </a:solidFill>
-                <a:latin typeface="Microsoft JhengHei"/>
-              </a:rPr>
-              <a:t>用細光流剪掉 frame 內高冗餘 token。</a:t>
-            </a:r>
-          </a:p>
-          <a:p>
-            <a:pPr algn="l">
+              <a:t>依據：</a:t>
+            </a:r>
+            <a:r>
+              <a:rPr sz="950" b="0" i="1">
+                <a:solidFill>
+                  <a:srgbClr val="555B63"/>
+                </a:solidFill>
+                <a:latin typeface="Segoe UI"/>
+              </a:rPr>
+              <a:t>Flow4Agent, arXiv 2510.05836 (ICCV 2025)。數字為論文自報。</a:t>
+            </a:r>
+          </a:p>
+        </p:txBody>
+      </p:sp>
+      <p:sp>
+        <p:nvSpPr>
+          <p:cNvPr id="11" name="TextBox 10"/>
+          <p:cNvSpPr txBox="1"/>
+          <p:nvPr/>
+        </p:nvSpPr>
+        <p:spPr>
+          <a:xfrm>
+            <a:off x="10881360" y="6510528"/>
+            <a:ext cx="1097280" cy="274320"/>
+          </a:xfrm>
+          <a:prstGeom prst="rect">
+            <a:avLst/>
+          </a:prstGeom>
+          <a:noFill/>
+        </p:spPr>
+        <p:txBody>
+          <a:bodyPr wrap="square" anchor="t" lIns="0" rIns="0" tIns="0" bIns="0">
+            <a:spAutoFit/>
+          </a:bodyPr>
+          <a:lstStyle/>
+          <a:p>
+            <a:pPr algn="r">
               <a:lnSpc>
-                <a:spcPct val="112000"/>
+                <a:spcPct val="110000"/>
               </a:lnSpc>
               <a:spcBef>
                 <a:spcPts val="0"/>
               </a:spcBef>
               <a:spcAft>
-                <a:spcPts val="600"/>
+                <a:spcPts val="500"/>
               </a:spcAft>
             </a:pPr>
             <a:r>
-              <a:rPr sz="1600" b="1" i="0">
-                <a:solidFill>
-                  <a:srgbClr val="0F768E"/>
-                </a:solidFill>
-                <a:latin typeface="Microsoft JhengHei"/>
-              </a:rPr>
-              <a:t>▸ </a:t>
-            </a:r>
-            <a:r>
-              <a:rPr sz="1600" b="0" i="0">
-                <a:solidFill>
-                  <a:srgbClr val="1A1A2E"/>
-                </a:solidFill>
-                <a:latin typeface="Microsoft JhengHei"/>
-              </a:rPr>
-              <a:t>成績：</a:t>
-            </a:r>
-            <a:r>
-              <a:rPr sz="1600" b="0" i="0">
-                <a:solidFill>
-                  <a:srgbClr val="1A1A2E"/>
+              <a:rPr sz="900" b="0" i="0">
+                <a:solidFill>
+                  <a:srgbClr val="555B63"/>
                 </a:solidFill>
                 <a:latin typeface="Segoe UI"/>
               </a:rPr>
-              <a:t>Video-MME 64.7 / MLVU 71.4 / LongVideoBench 60.4。</a:t>
-            </a:r>
-          </a:p>
-          <a:p>
-            <a:pPr algn="l">
-              <a:lnSpc>
-                <a:spcPct val="112000"/>
-              </a:lnSpc>
-              <a:spcBef>
-                <a:spcPts val="0"/>
-              </a:spcBef>
-              <a:spcAft>
-                <a:spcPts val="600"/>
-              </a:spcAft>
-            </a:pPr>
-            <a:r>
-              <a:rPr sz="1600" b="1" i="0">
-                <a:solidFill>
-                  <a:srgbClr val="0F768E"/>
-                </a:solidFill>
-                <a:latin typeface="Microsoft JhengHei"/>
-              </a:rPr>
-              <a:t>▸ </a:t>
-            </a:r>
-            <a:r>
-              <a:rPr sz="1600" b="1" i="0">
-                <a:solidFill>
-                  <a:srgbClr val="E86A33"/>
-                </a:solidFill>
-                <a:latin typeface="Microsoft JhengHei"/>
-              </a:rPr>
-              <a:t>可借用點子：</a:t>
-            </a:r>
-            <a:r>
-              <a:rPr sz="1600" b="0" i="0">
-                <a:solidFill>
-                  <a:srgbClr val="1A1A2E"/>
-                </a:solidFill>
-                <a:latin typeface="Microsoft JhengHei"/>
-              </a:rPr>
-              <a:t>光流能有效標定「哪裡有運動證據」→ 把 motion prior 從『壓縮』升級為『訓練訊號(reward)』。</a:t>
-            </a:r>
-          </a:p>
-        </p:txBody>
-      </p:sp>
-      <p:sp>
-        <p:nvSpPr>
-          <p:cNvPr id="9" name="Rounded Rectangle 8"/>
-          <p:cNvSpPr/>
-          <p:nvPr/>
-        </p:nvSpPr>
-        <p:spPr>
-          <a:xfrm>
-            <a:off x="640080" y="5166360"/>
-            <a:ext cx="10881360" cy="731520"/>
-          </a:xfrm>
-          <a:prstGeom prst="roundRect">
-            <a:avLst/>
-          </a:prstGeom>
-          <a:solidFill>
-            <a:srgbClr val="ECF5F0"/>
-          </a:solidFill>
-          <a:ln>
-            <a:noFill/>
-          </a:ln>
-          <a:effectLst/>
-        </p:spPr>
-        <p:style>
-          <a:lnRef idx="1">
-            <a:schemeClr val="accent1"/>
-          </a:lnRef>
-          <a:fillRef idx="3">
-            <a:schemeClr val="accent1"/>
-          </a:fillRef>
-          <a:effectRef idx="2">
-            <a:schemeClr val="accent1"/>
-          </a:effectRef>
-          <a:fontRef idx="minor">
-            <a:schemeClr val="lt1"/>
-          </a:fontRef>
-        </p:style>
-        <p:txBody>
-          <a:bodyPr rtlCol="0" anchor="ctr"/>
-          <a:lstStyle/>
-          <a:p>
-            <a:pPr algn="ctr"/>
-          </a:p>
-        </p:txBody>
-      </p:sp>
-      <p:sp>
-        <p:nvSpPr>
-          <p:cNvPr id="10" name="Rectangle 9"/>
-          <p:cNvSpPr/>
-          <p:nvPr/>
-        </p:nvSpPr>
-        <p:spPr>
-          <a:xfrm>
-            <a:off x="640080" y="5166360"/>
-            <a:ext cx="146304" cy="731520"/>
-          </a:xfrm>
-          <a:prstGeom prst="rect">
-            <a:avLst/>
-          </a:prstGeom>
-          <a:solidFill>
-            <a:srgbClr val="E86A33"/>
-          </a:solidFill>
-          <a:ln>
-            <a:noFill/>
-          </a:ln>
-          <a:effectLst/>
-        </p:spPr>
-        <p:style>
-          <a:lnRef idx="1">
-            <a:schemeClr val="accent1"/>
-          </a:lnRef>
-          <a:fillRef idx="3">
-            <a:schemeClr val="accent1"/>
-          </a:fillRef>
-          <a:effectRef idx="2">
-            <a:schemeClr val="accent1"/>
-          </a:effectRef>
-          <a:fontRef idx="minor">
-            <a:schemeClr val="lt1"/>
-          </a:fontRef>
-        </p:style>
-        <p:txBody>
-          <a:bodyPr rtlCol="0" anchor="ctr"/>
-          <a:lstStyle/>
-          <a:p>
-            <a:pPr algn="ctr"/>
-          </a:p>
-        </p:txBody>
-      </p:sp>
-      <p:sp>
-        <p:nvSpPr>
-          <p:cNvPr id="11" name="Rounded Rectangle 10"/>
-          <p:cNvSpPr/>
-          <p:nvPr/>
-        </p:nvSpPr>
-        <p:spPr>
-          <a:xfrm>
-            <a:off x="868680" y="5330952"/>
-            <a:ext cx="960120" cy="402336"/>
-          </a:xfrm>
-          <a:prstGeom prst="roundRect">
-            <a:avLst/>
-          </a:prstGeom>
-          <a:solidFill>
-            <a:srgbClr val="E86A33"/>
-          </a:solidFill>
-          <a:ln>
-            <a:noFill/>
-          </a:ln>
-          <a:effectLst/>
-        </p:spPr>
-        <p:style>
-          <a:lnRef idx="1">
-            <a:schemeClr val="accent1"/>
-          </a:lnRef>
-          <a:fillRef idx="3">
-            <a:schemeClr val="accent1"/>
-          </a:fillRef>
-          <a:effectRef idx="2">
-            <a:schemeClr val="accent1"/>
-          </a:effectRef>
-          <a:fontRef idx="minor">
-            <a:schemeClr val="lt1"/>
-          </a:fontRef>
-        </p:style>
-        <p:txBody>
-          <a:bodyPr rtlCol="0" anchor="ctr"/>
-          <a:lstStyle/>
-          <a:p>
-            <a:pPr algn="ctr"/>
-          </a:p>
-        </p:txBody>
-      </p:sp>
-      <p:sp>
-        <p:nvSpPr>
-          <p:cNvPr id="12" name="TextBox 11"/>
-          <p:cNvSpPr txBox="1"/>
-          <p:nvPr/>
-        </p:nvSpPr>
-        <p:spPr>
-          <a:xfrm>
-            <a:off x="868680" y="5330952"/>
-            <a:ext cx="960120" cy="402336"/>
-          </a:xfrm>
-          <a:prstGeom prst="rect">
-            <a:avLst/>
-          </a:prstGeom>
-          <a:noFill/>
-        </p:spPr>
-        <p:txBody>
-          <a:bodyPr wrap="square" anchor="ctr" lIns="0" rIns="0" tIns="0" bIns="0">
-            <a:spAutoFit/>
-          </a:bodyPr>
-          <a:lstStyle/>
-          <a:p>
-            <a:pPr algn="ctr">
-              <a:lnSpc>
-                <a:spcPct val="108000"/>
-              </a:lnSpc>
-              <a:spcBef>
-                <a:spcPts val="0"/>
-              </a:spcBef>
-              <a:spcAft>
-                <a:spcPts val="600"/>
-              </a:spcAft>
-            </a:pPr>
-            <a:r>
-              <a:rPr sz="1500" b="1" i="0">
-                <a:solidFill>
-                  <a:srgbClr val="FFFFFF"/>
-                </a:solidFill>
-                <a:latin typeface="Microsoft JhengHei"/>
-              </a:rPr>
-              <a:t>結論</a:t>
-            </a:r>
-          </a:p>
-        </p:txBody>
-      </p:sp>
-      <p:sp>
-        <p:nvSpPr>
-          <p:cNvPr id="13" name="TextBox 12"/>
-          <p:cNvSpPr txBox="1"/>
-          <p:nvPr/>
-        </p:nvSpPr>
-        <p:spPr>
-          <a:xfrm>
-            <a:off x="2011680" y="5166360"/>
-            <a:ext cx="9326880" cy="731520"/>
-          </a:xfrm>
-          <a:prstGeom prst="rect">
-            <a:avLst/>
-          </a:prstGeom>
-          <a:noFill/>
-        </p:spPr>
-        <p:txBody>
-          <a:bodyPr wrap="square" anchor="ctr" lIns="0" rIns="0" tIns="0" bIns="0">
-            <a:spAutoFit/>
-          </a:bodyPr>
-          <a:lstStyle/>
-          <a:p>
-            <a:pPr algn="l">
-              <a:lnSpc>
-                <a:spcPct val="105000"/>
-              </a:lnSpc>
-              <a:spcBef>
-                <a:spcPts val="0"/>
-              </a:spcBef>
-              <a:spcAft>
-                <a:spcPts val="600"/>
-              </a:spcAft>
-            </a:pPr>
-            <a:r>
-              <a:rPr sz="1450" b="1" i="0">
-                <a:solidFill>
-                  <a:srgbClr val="1A1A2E"/>
-                </a:solidFill>
-                <a:latin typeface="Microsoft JhengHei"/>
-              </a:rPr>
-              <a:t>它證明光流能定位運動證據，但只用於壓縮、</a:t>
-            </a:r>
-            <a:r>
-              <a:rPr sz="1450" b="0" i="0">
-                <a:solidFill>
-                  <a:srgbClr val="1A1A2E"/>
-                </a:solidFill>
-                <a:latin typeface="Microsoft JhengHei"/>
-              </a:rPr>
-              <a:t>沒當 reward —— 這就是我們的切入點。</a:t>
-            </a:r>
-          </a:p>
-        </p:txBody>
-      </p:sp>
-      <p:sp>
-        <p:nvSpPr>
-          <p:cNvPr id="14" name="TextBox 13"/>
-          <p:cNvSpPr txBox="1"/>
-          <p:nvPr/>
-        </p:nvSpPr>
-        <p:spPr>
-          <a:xfrm>
-            <a:off x="640080" y="6035040"/>
-            <a:ext cx="10972800" cy="320040"/>
-          </a:xfrm>
-          <a:prstGeom prst="rect">
-            <a:avLst/>
-          </a:prstGeom>
-          <a:noFill/>
-        </p:spPr>
-        <p:txBody>
-          <a:bodyPr wrap="square" anchor="t" lIns="0" rIns="0" tIns="0" bIns="0">
-            <a:spAutoFit/>
-          </a:bodyPr>
-          <a:lstStyle/>
-          <a:p>
-            <a:pPr algn="l">
-              <a:lnSpc>
-                <a:spcPct val="108000"/>
-              </a:lnSpc>
-              <a:spcBef>
-                <a:spcPts val="0"/>
-              </a:spcBef>
-              <a:spcAft>
-                <a:spcPts val="600"/>
-              </a:spcAft>
-            </a:pPr>
-            <a:r>
-              <a:rPr sz="1000" b="1" i="0">
-                <a:solidFill>
-                  <a:srgbClr val="5B6370"/>
-                </a:solidFill>
-                <a:latin typeface="Microsoft JhengHei"/>
-              </a:rPr>
-              <a:t>▸ 依據：</a:t>
-            </a:r>
-            <a:r>
-              <a:rPr sz="1000" b="0" i="1">
-                <a:solidFill>
-                  <a:srgbClr val="5B6370"/>
-                </a:solidFill>
-                <a:latin typeface="Segoe UI"/>
-              </a:rPr>
-              <a:t>Flow4Agent — Long-form Video Understanding via Motion Prior from Optical Flow. arXiv 2510.05836 (ICCV 2025).</a:t>
-            </a:r>
-          </a:p>
-        </p:txBody>
-      </p:sp>
-      <p:sp>
-        <p:nvSpPr>
-          <p:cNvPr id="15" name="TextBox 14"/>
-          <p:cNvSpPr txBox="1"/>
-          <p:nvPr/>
-        </p:nvSpPr>
-        <p:spPr>
-          <a:xfrm>
-            <a:off x="10424160" y="6455664"/>
-            <a:ext cx="1554480" cy="274320"/>
-          </a:xfrm>
-          <a:prstGeom prst="rect">
-            <a:avLst/>
-          </a:prstGeom>
-          <a:noFill/>
-        </p:spPr>
-        <p:txBody>
-          <a:bodyPr wrap="square" anchor="t" lIns="0" rIns="0" tIns="0" bIns="0">
-            <a:spAutoFit/>
-          </a:bodyPr>
-          <a:lstStyle/>
-          <a:p>
-            <a:pPr algn="r">
-              <a:lnSpc>
-                <a:spcPct val="108000"/>
-              </a:lnSpc>
-              <a:spcBef>
-                <a:spcPts val="0"/>
-              </a:spcBef>
-              <a:spcAft>
-                <a:spcPts val="600"/>
-              </a:spcAft>
-            </a:pPr>
-            <a:r>
-              <a:rPr sz="900" b="0" i="0">
-                <a:solidFill>
-                  <a:srgbClr val="5B6370"/>
-                </a:solidFill>
-                <a:latin typeface="Segoe UI"/>
-              </a:rPr>
-              <a:t>待辦回答 · 1/7</a:t>
+              <a:t>1/9 · 草稿</a:t>
             </a:r>
           </a:p>
         </p:txBody>
@@ -4917,20 +4696,74 @@
       </p:sp>
       <p:sp>
         <p:nvSpPr>
-          <p:cNvPr id="3" name="Oval 2"/>
+          <p:cNvPr id="3" name="TextBox 2"/>
+          <p:cNvSpPr txBox="1"/>
+          <p:nvPr/>
+        </p:nvSpPr>
+        <p:spPr>
+          <a:xfrm>
+            <a:off x="640080" y="384048"/>
+            <a:ext cx="10881360" cy="365760"/>
+          </a:xfrm>
+          <a:prstGeom prst="rect">
+            <a:avLst/>
+          </a:prstGeom>
+          <a:noFill/>
+        </p:spPr>
+        <p:txBody>
+          <a:bodyPr wrap="square" anchor="t" lIns="0" rIns="0" tIns="0" bIns="0">
+            <a:spAutoFit/>
+          </a:bodyPr>
+          <a:lstStyle/>
+          <a:p>
+            <a:pPr algn="l">
+              <a:lnSpc>
+                <a:spcPct val="110000"/>
+              </a:lnSpc>
+              <a:spcBef>
+                <a:spcPts val="0"/>
+              </a:spcBef>
+              <a:spcAft>
+                <a:spcPts val="500"/>
+              </a:spcAft>
+            </a:pPr>
+            <a:r>
+              <a:rPr sz="1500" b="1" i="0">
+                <a:solidFill>
+                  <a:srgbClr val="0F768E"/>
+                </a:solidFill>
+                <a:latin typeface="Segoe UI"/>
+              </a:rPr>
+              <a:t>Q2　</a:t>
+            </a:r>
+            <a:r>
+              <a:rPr sz="1250" b="0" i="0">
+                <a:solidFill>
+                  <a:srgbClr val="555B63"/>
+                </a:solidFill>
+                <a:latin typeface="Microsoft JhengHei"/>
+              </a:rPr>
+              <a:t>是否已有研究把 depth / flow 放進 GRPO reward(不限 4D)?</a:t>
+            </a:r>
+          </a:p>
+        </p:txBody>
+      </p:sp>
+      <p:sp>
+        <p:nvSpPr>
+          <p:cNvPr id="4" name="Rectangle 3"/>
           <p:cNvSpPr/>
           <p:nvPr/>
         </p:nvSpPr>
         <p:spPr>
           <a:xfrm>
-            <a:off x="640080" y="457200"/>
-            <a:ext cx="566928" cy="566928"/>
-          </a:xfrm>
-          <a:prstGeom prst="ellipse">
+            <a:off x="640080" y="804672"/>
+            <a:ext cx="10881360" cy="14630"/>
+          </a:xfrm>
+          <a:prstGeom prst="rect">
             <a:avLst/>
           </a:prstGeom>
           <a:solidFill>
-            <a:srgbClr val="0F768E"/>
+            <a:srgbClr val="DDDDDD"/>
           </a:solidFill>
           <a:ln>
             <a:noFill/>
@@ -4961,14 +4794,14 @@
       </p:sp>
       <p:sp>
         <p:nvSpPr>
-          <p:cNvPr id="4" name="TextBox 3"/>
+          <p:cNvPr id="5" name="TextBox 4"/>
           <p:cNvSpPr txBox="1"/>
           <p:nvPr/>
         </p:nvSpPr>
         <p:spPr>
           <a:xfrm>
-            <a:off x="640080" y="457200"/>
-            <a:ext cx="566928" cy="566928"/>
+            <a:off x="640080" y="960120"/>
+            <a:ext cx="10972800" cy="777240"/>
           </a:xfrm>
           <a:prstGeom prst="rect">
             <a:avLst/>
@@ -4976,14 +4809,59 @@
           <a:noFill/>
         </p:spPr>
         <p:txBody>
-          <a:bodyPr wrap="square" anchor="ctr" lIns="0" rIns="0" tIns="0" bIns="0">
+          <a:bodyPr wrap="square" anchor="t" lIns="0" rIns="0" tIns="0" bIns="0">
             <a:spAutoFit/>
           </a:bodyPr>
           <a:lstStyle/>
           <a:p>
-            <a:pPr algn="ctr">
+            <a:pPr algn="l">
               <a:lnSpc>
-                <a:spcPct val="108000"/>
+                <a:spcPct val="106000"/>
+              </a:lnSpc>
+              <a:spcBef>
+                <a:spcPts val="0"/>
+              </a:spcBef>
+              <a:spcAft>
+                <a:spcPts val="500"/>
+              </a:spcAft>
+            </a:pPr>
+            <a:r>
+              <a:rPr sz="2100" b="1" i="0">
+                <a:solidFill>
+                  <a:srgbClr val="111111"/>
+                </a:solidFill>
+                <a:latin typeface="Microsoft JhengHei"/>
+              </a:rPr>
+              <a:t>depth 當 reward 已多見;flow 一致性當推理 reward 搜尋範圍內未見</a:t>
+            </a:r>
+          </a:p>
+        </p:txBody>
+      </p:sp>
+      <p:sp>
+        <p:nvSpPr>
+          <p:cNvPr id="6" name="TextBox 5"/>
+          <p:cNvSpPr txBox="1"/>
+          <p:nvPr/>
+        </p:nvSpPr>
+        <p:spPr>
+          <a:xfrm>
+            <a:off x="640080" y="1828800"/>
+            <a:ext cx="10881360" cy="3291840"/>
+          </a:xfrm>
+          <a:prstGeom prst="rect">
+            <a:avLst/>
+          </a:prstGeom>
+          <a:noFill/>
+        </p:spPr>
+        <p:txBody>
+          <a:bodyPr wrap="square" anchor="t" lIns="0" rIns="0" tIns="0" bIns="0">
+            <a:spAutoFit/>
+          </a:bodyPr>
+          <a:lstStyle/>
+          <a:p>
+            <a:pPr algn="l">
+              <a:lnSpc>
+                <a:spcPct val="115000"/>
               </a:lnSpc>
               <a:spcBef>
                 <a:spcPts val="0"/>
@@ -4993,42 +4871,28 @@
               </a:spcAft>
             </a:pPr>
             <a:r>
-              <a:rPr sz="2200" b="1" i="0">
-                <a:solidFill>
-                  <a:srgbClr val="FFFFFF"/>
+              <a:rPr sz="1400" b="0" i="0">
+                <a:solidFill>
+                  <a:srgbClr val="555B63"/>
                 </a:solidFill>
                 <a:latin typeface="Segoe UI"/>
               </a:rPr>
-              <a:t>2</a:t>
-            </a:r>
-          </a:p>
-        </p:txBody>
-      </p:sp>
-      <p:sp>
-        <p:nvSpPr>
-          <p:cNvPr id="5" name="TextBox 4"/>
-          <p:cNvSpPr txBox="1"/>
-          <p:nvPr/>
-        </p:nvSpPr>
-        <p:spPr>
-          <a:xfrm>
-            <a:off x="1371600" y="475488"/>
-            <a:ext cx="10241280" cy="548640"/>
-          </a:xfrm>
-          <a:prstGeom prst="rect">
-            <a:avLst/>
-          </a:prstGeom>
-          <a:noFill/>
-        </p:spPr>
-        <p:txBody>
-          <a:bodyPr wrap="square" anchor="t" lIns="0" rIns="0" tIns="0" bIns="0">
-            <a:spAutoFit/>
-          </a:bodyPr>
-          <a:lstStyle/>
+              <a:t>— </a:t>
+            </a:r>
+            <a:r>
+              <a:rPr sz="1400" b="0" i="0">
+                <a:solidFill>
+                  <a:srgbClr val="111111"/>
+                </a:solidFill>
+                <a:latin typeface="Microsoft JhengHei"/>
+              </a:rPr>
+              <a:t>depth/3D 先例:Smooth Operator/AP-GRPO (2601.07695)、3D-R1 (2507.23478)、N3D-VLM (2512.16561)、DepthLM。</a:t>
+            </a:r>
+          </a:p>
           <a:p>
             <a:pPr algn="l">
               <a:lnSpc>
-                <a:spcPct val="108000"/>
+                <a:spcPct val="115000"/>
               </a:lnSpc>
               <a:spcBef>
                 <a:spcPts val="0"/>
@@ -5038,42 +4902,28 @@
               </a:spcAft>
             </a:pPr>
             <a:r>
-              <a:rPr sz="1300" b="1" i="0">
-                <a:solidFill>
-                  <a:srgbClr val="0F768E"/>
+              <a:rPr sz="1400" b="0" i="0">
+                <a:solidFill>
+                  <a:srgbClr val="555B63"/>
+                </a:solidFill>
+                <a:latin typeface="Segoe UI"/>
+              </a:rPr>
+              <a:t>— </a:t>
+            </a:r>
+            <a:r>
+              <a:rPr sz="1400" b="0" i="0">
+                <a:solidFill>
+                  <a:srgbClr val="111111"/>
                 </a:solidFill>
                 <a:latin typeface="Microsoft JhengHei"/>
               </a:rPr>
-              <a:t>待辦事項 2</a:t>
-            </a:r>
-          </a:p>
-        </p:txBody>
-      </p:sp>
-      <p:sp>
-        <p:nvSpPr>
-          <p:cNvPr id="6" name="TextBox 5"/>
-          <p:cNvSpPr txBox="1"/>
-          <p:nvPr/>
-        </p:nvSpPr>
-        <p:spPr>
-          <a:xfrm>
-            <a:off x="1371600" y="822960"/>
-            <a:ext cx="10424160" cy="502920"/>
-          </a:xfrm>
-          <a:prstGeom prst="rect">
-            <a:avLst/>
-          </a:prstGeom>
-          <a:noFill/>
-        </p:spPr>
-        <p:txBody>
-          <a:bodyPr wrap="square" anchor="t" lIns="0" rIns="0" tIns="0" bIns="0">
-            <a:spAutoFit/>
-          </a:bodyPr>
-          <a:lstStyle/>
+              <a:t>flow 現有用法 = 輸入/CoT/剪枝(Flow4Agent、Optical-Flow CoT 2507.13362),非 reward。</a:t>
+            </a:r>
+          </a:p>
           <a:p>
             <a:pPr algn="l">
               <a:lnSpc>
-                <a:spcPct val="108000"/>
+                <a:spcPct val="115000"/>
               </a:lnSpc>
               <a:spcBef>
                 <a:spcPts val="0"/>
@@ -5083,27 +4933,60 @@
               </a:spcAft>
             </a:pPr>
             <a:r>
-              <a:rPr sz="1300" b="0" i="1">
-                <a:solidFill>
-                  <a:srgbClr val="5B6370"/>
+              <a:rPr sz="1400" b="0" i="0">
+                <a:solidFill>
+                  <a:srgbClr val="555B63"/>
+                </a:solidFill>
+                <a:latin typeface="Segoe UI"/>
+              </a:rPr>
+              <a:t>— </a:t>
+            </a:r>
+            <a:r>
+              <a:rPr sz="1400" b="0" i="0">
+                <a:solidFill>
+                  <a:srgbClr val="111111"/>
                 </a:solidFill>
                 <a:latin typeface="Microsoft JhengHei"/>
               </a:rPr>
-              <a:t>調查是否已有研究把 depth / flow 放進 GRPO reward（不限 4D）。</a:t>
-            </a:r>
-          </a:p>
-        </p:txBody>
-      </p:sp>
-      <p:sp>
-        <p:nvSpPr>
-          <p:cNvPr id="7" name="TextBox 6"/>
+              <a:t>最近鄰:VGGRPO (2603.26599, 影片生成)、Video-R2 (2511.23478, 時間戳對齊)——皆非光流一致性。</a:t>
+            </a:r>
+          </a:p>
+        </p:txBody>
+      </p:sp>
+      <p:pic>
+        <p:nvPicPr>
+          <p:cNvPr id="7" name="Picture 6" descr="SmoothOp_overview.png"/>
+          <p:cNvPicPr>
+            <a:picLocks noChangeAspect="1"/>
+          </p:cNvPicPr>
+          <p:nvPr/>
+        </p:nvPicPr>
+        <p:blipFill>
+          <a:blip r:embed="rId2"/>
+          <a:stretch>
+            <a:fillRect/>
+          </a:stretch>
+        </p:blipFill>
+        <p:spPr>
+          <a:xfrm>
+            <a:off x="3166110" y="3383280"/>
+            <a:ext cx="5829300" cy="2286000"/>
+          </a:xfrm>
+          <a:prstGeom prst="rect">
+            <a:avLst/>
+          </a:prstGeom>
+        </p:spPr>
+      </p:pic>
+      <p:sp>
+        <p:nvSpPr>
+          <p:cNvPr id="8" name="TextBox 7"/>
           <p:cNvSpPr txBox="1"/>
           <p:nvPr/>
         </p:nvSpPr>
         <p:spPr>
           <a:xfrm>
-            <a:off x="640080" y="1600200"/>
-            <a:ext cx="10972800" cy="914400"/>
+            <a:off x="3166110" y="5696712"/>
+            <a:ext cx="5829300" cy="274320"/>
           </a:xfrm>
           <a:prstGeom prst="rect">
             <a:avLst/>
@@ -5116,48 +4999,39 @@
           </a:bodyPr>
           <a:lstStyle/>
           <a:p>
-            <a:pPr algn="l">
+            <a:pPr algn="ctr">
               <a:lnSpc>
-                <a:spcPct val="106000"/>
+                <a:spcPct val="110000"/>
               </a:lnSpc>
               <a:spcBef>
                 <a:spcPts val="0"/>
               </a:spcBef>
               <a:spcAft>
-                <a:spcPts val="600"/>
+                <a:spcPts val="500"/>
               </a:spcAft>
             </a:pPr>
             <a:r>
-              <a:rPr sz="2300" b="1" i="0">
-                <a:solidFill>
-                  <a:srgbClr val="1A1A2E"/>
+              <a:rPr sz="950" b="0" i="1">
+                <a:solidFill>
+                  <a:srgbClr val="555B63"/>
                 </a:solidFill>
                 <a:latin typeface="Microsoft JhengHei"/>
               </a:rPr>
-              <a:t>Depth-as-reward 已擁擠；</a:t>
-            </a:r>
-            <a:r>
-              <a:rPr sz="2300" b="1" i="0">
-                <a:solidFill>
-                  <a:srgbClr val="E86A33"/>
-                </a:solidFill>
-                <a:latin typeface="Microsoft JhengHei"/>
-              </a:rPr>
-              <a:t>flow / scene-flow 一致性 reward 幾乎空白</a:t>
-            </a:r>
-          </a:p>
-        </p:txBody>
-      </p:sp>
-      <p:sp>
-        <p:nvSpPr>
-          <p:cNvPr id="8" name="TextBox 7"/>
+              <a:t>depth 類 reward 的代表:AP-GRPO 流程與 SNRA 公式(取自 arXiv 2601.07695 原圖)</a:t>
+            </a:r>
+          </a:p>
+        </p:txBody>
+      </p:sp>
+      <p:sp>
+        <p:nvSpPr>
+          <p:cNvPr id="9" name="TextBox 8"/>
           <p:cNvSpPr txBox="1"/>
           <p:nvPr/>
         </p:nvSpPr>
         <p:spPr>
           <a:xfrm>
-            <a:off x="685800" y="2606040"/>
-            <a:ext cx="10881360" cy="2377440"/>
+            <a:off x="640080" y="5806440"/>
+            <a:ext cx="10881360" cy="594360"/>
           </a:xfrm>
           <a:prstGeom prst="rect">
             <a:avLst/>
@@ -5172,451 +5046,131 @@
           <a:p>
             <a:pPr algn="l">
               <a:lnSpc>
-                <a:spcPct val="112000"/>
+                <a:spcPct val="110000"/>
               </a:lnSpc>
               <a:spcBef>
                 <a:spcPts val="0"/>
               </a:spcBef>
               <a:spcAft>
-                <a:spcPts val="600"/>
+                <a:spcPts val="500"/>
               </a:spcAft>
             </a:pPr>
             <a:r>
-              <a:rPr sz="1600" b="1" i="0">
-                <a:solidFill>
-                  <a:srgbClr val="0F768E"/>
+              <a:rPr sz="1150" b="1" i="0">
+                <a:solidFill>
+                  <a:srgbClr val="B44A1E"/>
                 </a:solidFill>
                 <a:latin typeface="Microsoft JhengHei"/>
               </a:rPr>
-              <a:t>▸ </a:t>
-            </a:r>
-            <a:r>
-              <a:rPr sz="1600" b="1" i="0">
-                <a:solidFill>
-                  <a:srgbClr val="1A1A2E"/>
+              <a:t>未驗證：</a:t>
+            </a:r>
+            <a:r>
+              <a:rPr sz="1150" b="0" i="0">
+                <a:solidFill>
+                  <a:srgbClr val="111111"/>
                 </a:solidFill>
                 <a:latin typeface="Microsoft JhengHei"/>
               </a:rPr>
-              <a:t>Depth 已有先例：</a:t>
-            </a:r>
-            <a:r>
-              <a:rPr sz="1600" b="0" i="0">
-                <a:solidFill>
-                  <a:srgbClr val="1A1A2E"/>
-                </a:solidFill>
-                <a:latin typeface="Microsoft JhengHei"/>
-              </a:rPr>
-              <a:t>DepthLM、Smooth Operator/AP-GRPO (2601.07695)、3D-R1 (2507.23478)、MetaSpatial、N3D-VLM (2512.16561)、DepthRL。</a:t>
-            </a:r>
-          </a:p>
+              <a:t>「搜不到≠不存在」。已搜關鍵字:optical flow reward GRPO / motion consistency reward / temporal consistency verifiable reward。仍需自行掃 arXiv 近 3 個月與引用鏈;MetaSpatial 編號未查證。</a:t>
+            </a:r>
+          </a:p>
+        </p:txBody>
+      </p:sp>
+      <p:sp>
+        <p:nvSpPr>
+          <p:cNvPr id="10" name="TextBox 9"/>
+          <p:cNvSpPr txBox="1"/>
+          <p:nvPr/>
+        </p:nvSpPr>
+        <p:spPr>
+          <a:xfrm>
+            <a:off x="640080" y="6355080"/>
+            <a:ext cx="10058400" cy="320040"/>
+          </a:xfrm>
+          <a:prstGeom prst="rect">
+            <a:avLst/>
+          </a:prstGeom>
+          <a:noFill/>
+        </p:spPr>
+        <p:txBody>
+          <a:bodyPr wrap="square" anchor="t" lIns="0" rIns="0" tIns="0" bIns="0">
+            <a:spAutoFit/>
+          </a:bodyPr>
+          <a:lstStyle/>
           <a:p>
             <a:pPr algn="l">
               <a:lnSpc>
-                <a:spcPct val="112000"/>
+                <a:spcPct val="110000"/>
               </a:lnSpc>
               <a:spcBef>
                 <a:spcPts val="0"/>
               </a:spcBef>
               <a:spcAft>
-                <a:spcPts val="600"/>
+                <a:spcPts val="500"/>
               </a:spcAft>
             </a:pPr>
             <a:r>
-              <a:rPr sz="1600" b="1" i="0">
-                <a:solidFill>
-                  <a:srgbClr val="0F768E"/>
+              <a:rPr sz="950" b="1" i="0">
+                <a:solidFill>
+                  <a:srgbClr val="555B63"/>
                 </a:solidFill>
                 <a:latin typeface="Microsoft JhengHei"/>
               </a:rPr>
-              <a:t>▸ </a:t>
-            </a:r>
-            <a:r>
-              <a:rPr sz="1600" b="1" i="0">
-                <a:solidFill>
-                  <a:srgbClr val="E86A33"/>
-                </a:solidFill>
-                <a:latin typeface="Microsoft JhengHei"/>
-              </a:rPr>
-              <a:t>Flow 當 reward：幾乎沒有。</a:t>
-            </a:r>
-            <a:r>
-              <a:rPr sz="1600" b="0" i="0">
-                <a:solidFill>
-                  <a:srgbClr val="1A1A2E"/>
-                </a:solidFill>
-                <a:latin typeface="Microsoft JhengHei"/>
-              </a:rPr>
-              <a:t>現有 flow 多為 輸入 / CoT / token 剪枝（Flow4Agent、Optical Flow CoT 2507.13362）。</a:t>
-            </a:r>
-          </a:p>
-          <a:p>
-            <a:pPr algn="l">
+              <a:t>依據：</a:t>
+            </a:r>
+            <a:r>
+              <a:rPr sz="950" b="0" i="1">
+                <a:solidFill>
+                  <a:srgbClr val="555B63"/>
+                </a:solidFill>
+                <a:latin typeface="Segoe UI"/>
+              </a:rPr>
+              <a:t>如上各 arXiv 編號;搜尋時間 2026/07。</a:t>
+            </a:r>
+          </a:p>
+        </p:txBody>
+      </p:sp>
+      <p:sp>
+        <p:nvSpPr>
+          <p:cNvPr id="11" name="TextBox 10"/>
+          <p:cNvSpPr txBox="1"/>
+          <p:nvPr/>
+        </p:nvSpPr>
+        <p:spPr>
+          <a:xfrm>
+            <a:off x="10881360" y="6510528"/>
+            <a:ext cx="1097280" cy="274320"/>
+          </a:xfrm>
+          <a:prstGeom prst="rect">
+            <a:avLst/>
+          </a:prstGeom>
+          <a:noFill/>
+        </p:spPr>
+        <p:txBody>
+          <a:bodyPr wrap="square" anchor="t" lIns="0" rIns="0" tIns="0" bIns="0">
+            <a:spAutoFit/>
+          </a:bodyPr>
+          <a:lstStyle/>
+          <a:p>
+            <a:pPr algn="r">
               <a:lnSpc>
-                <a:spcPct val="112000"/>
+                <a:spcPct val="110000"/>
               </a:lnSpc>
               <a:spcBef>
                 <a:spcPts val="0"/>
               </a:spcBef>
               <a:spcAft>
-                <a:spcPts val="600"/>
+                <a:spcPts val="500"/>
               </a:spcAft>
             </a:pPr>
             <a:r>
-              <a:rPr sz="1600" b="1" i="0">
-                <a:solidFill>
-                  <a:srgbClr val="0F768E"/>
-                </a:solidFill>
-                <a:latin typeface="Microsoft JhengHei"/>
-              </a:rPr>
-              <a:t>▸ </a:t>
-            </a:r>
-            <a:r>
-              <a:rPr sz="1600" b="1" i="0">
-                <a:solidFill>
-                  <a:srgbClr val="1A1A2E"/>
-                </a:solidFill>
-                <a:latin typeface="Microsoft JhengHei"/>
-              </a:rPr>
-              <a:t>最近鄰但不撞題：</a:t>
-            </a:r>
-            <a:r>
-              <a:rPr sz="1600" b="0" i="0">
-                <a:solidFill>
-                  <a:srgbClr val="1A1A2E"/>
-                </a:solidFill>
-                <a:latin typeface="Microsoft JhengHei"/>
-              </a:rPr>
-              <a:t>VGGRPO (2603.26599) 屬影片生成；Video-R2 (2511.23478) 用時間戳對齊，非光流一致性。</a:t>
-            </a:r>
-          </a:p>
-        </p:txBody>
-      </p:sp>
-      <p:sp>
-        <p:nvSpPr>
-          <p:cNvPr id="9" name="Rounded Rectangle 8"/>
-          <p:cNvSpPr/>
-          <p:nvPr/>
-        </p:nvSpPr>
-        <p:spPr>
-          <a:xfrm>
-            <a:off x="640080" y="5166360"/>
-            <a:ext cx="10881360" cy="731520"/>
-          </a:xfrm>
-          <a:prstGeom prst="roundRect">
-            <a:avLst/>
-          </a:prstGeom>
-          <a:solidFill>
-            <a:srgbClr val="ECF5F0"/>
-          </a:solidFill>
-          <a:ln>
-            <a:noFill/>
-          </a:ln>
-          <a:effectLst/>
-        </p:spPr>
-        <p:style>
-          <a:lnRef idx="1">
-            <a:schemeClr val="accent1"/>
-          </a:lnRef>
-          <a:fillRef idx="3">
-            <a:schemeClr val="accent1"/>
-          </a:fillRef>
-          <a:effectRef idx="2">
-            <a:schemeClr val="accent1"/>
-          </a:effectRef>
-          <a:fontRef idx="minor">
-            <a:schemeClr val="lt1"/>
-          </a:fontRef>
-        </p:style>
-        <p:txBody>
-          <a:bodyPr rtlCol="0" anchor="ctr"/>
-          <a:lstStyle/>
-          <a:p>
-            <a:pPr algn="ctr"/>
-          </a:p>
-        </p:txBody>
-      </p:sp>
-      <p:sp>
-        <p:nvSpPr>
-          <p:cNvPr id="10" name="Rectangle 9"/>
-          <p:cNvSpPr/>
-          <p:nvPr/>
-        </p:nvSpPr>
-        <p:spPr>
-          <a:xfrm>
-            <a:off x="640080" y="5166360"/>
-            <a:ext cx="146304" cy="731520"/>
-          </a:xfrm>
-          <a:prstGeom prst="rect">
-            <a:avLst/>
-          </a:prstGeom>
-          <a:solidFill>
-            <a:srgbClr val="E86A33"/>
-          </a:solidFill>
-          <a:ln>
-            <a:noFill/>
-          </a:ln>
-          <a:effectLst/>
-        </p:spPr>
-        <p:style>
-          <a:lnRef idx="1">
-            <a:schemeClr val="accent1"/>
-          </a:lnRef>
-          <a:fillRef idx="3">
-            <a:schemeClr val="accent1"/>
-          </a:fillRef>
-          <a:effectRef idx="2">
-            <a:schemeClr val="accent1"/>
-          </a:effectRef>
-          <a:fontRef idx="minor">
-            <a:schemeClr val="lt1"/>
-          </a:fontRef>
-        </p:style>
-        <p:txBody>
-          <a:bodyPr rtlCol="0" anchor="ctr"/>
-          <a:lstStyle/>
-          <a:p>
-            <a:pPr algn="ctr"/>
-          </a:p>
-        </p:txBody>
-      </p:sp>
-      <p:sp>
-        <p:nvSpPr>
-          <p:cNvPr id="11" name="Rounded Rectangle 10"/>
-          <p:cNvSpPr/>
-          <p:nvPr/>
-        </p:nvSpPr>
-        <p:spPr>
-          <a:xfrm>
-            <a:off x="868680" y="5330952"/>
-            <a:ext cx="960120" cy="402336"/>
-          </a:xfrm>
-          <a:prstGeom prst="roundRect">
-            <a:avLst/>
-          </a:prstGeom>
-          <a:solidFill>
-            <a:srgbClr val="E86A33"/>
-          </a:solidFill>
-          <a:ln>
-            <a:noFill/>
-          </a:ln>
-          <a:effectLst/>
-        </p:spPr>
-        <p:style>
-          <a:lnRef idx="1">
-            <a:schemeClr val="accent1"/>
-          </a:lnRef>
-          <a:fillRef idx="3">
-            <a:schemeClr val="accent1"/>
-          </a:fillRef>
-          <a:effectRef idx="2">
-            <a:schemeClr val="accent1"/>
-          </a:effectRef>
-          <a:fontRef idx="minor">
-            <a:schemeClr val="lt1"/>
-          </a:fontRef>
-        </p:style>
-        <p:txBody>
-          <a:bodyPr rtlCol="0" anchor="ctr"/>
-          <a:lstStyle/>
-          <a:p>
-            <a:pPr algn="ctr"/>
-          </a:p>
-        </p:txBody>
-      </p:sp>
-      <p:sp>
-        <p:nvSpPr>
-          <p:cNvPr id="12" name="TextBox 11"/>
-          <p:cNvSpPr txBox="1"/>
-          <p:nvPr/>
-        </p:nvSpPr>
-        <p:spPr>
-          <a:xfrm>
-            <a:off x="868680" y="5330952"/>
-            <a:ext cx="960120" cy="402336"/>
-          </a:xfrm>
-          <a:prstGeom prst="rect">
-            <a:avLst/>
-          </a:prstGeom>
-          <a:noFill/>
-        </p:spPr>
-        <p:txBody>
-          <a:bodyPr wrap="square" anchor="ctr" lIns="0" rIns="0" tIns="0" bIns="0">
-            <a:spAutoFit/>
-          </a:bodyPr>
-          <a:lstStyle/>
-          <a:p>
-            <a:pPr algn="ctr">
-              <a:lnSpc>
-                <a:spcPct val="108000"/>
-              </a:lnSpc>
-              <a:spcBef>
-                <a:spcPts val="0"/>
-              </a:spcBef>
-              <a:spcAft>
-                <a:spcPts val="600"/>
-              </a:spcAft>
-            </a:pPr>
-            <a:r>
-              <a:rPr sz="1500" b="1" i="0">
-                <a:solidFill>
-                  <a:srgbClr val="FFFFFF"/>
-                </a:solidFill>
-                <a:latin typeface="Microsoft JhengHei"/>
-              </a:rPr>
-              <a:t>結論</a:t>
-            </a:r>
-          </a:p>
-        </p:txBody>
-      </p:sp>
-      <p:sp>
-        <p:nvSpPr>
-          <p:cNvPr id="13" name="TextBox 12"/>
-          <p:cNvSpPr txBox="1"/>
-          <p:nvPr/>
-        </p:nvSpPr>
-        <p:spPr>
-          <a:xfrm>
-            <a:off x="2011680" y="5166360"/>
-            <a:ext cx="9326880" cy="731520"/>
-          </a:xfrm>
-          <a:prstGeom prst="rect">
-            <a:avLst/>
-          </a:prstGeom>
-          <a:noFill/>
-        </p:spPr>
-        <p:txBody>
-          <a:bodyPr wrap="square" anchor="ctr" lIns="0" rIns="0" tIns="0" bIns="0">
-            <a:spAutoFit/>
-          </a:bodyPr>
-          <a:lstStyle/>
-          <a:p>
-            <a:pPr algn="l">
-              <a:lnSpc>
-                <a:spcPct val="105000"/>
-              </a:lnSpc>
-              <a:spcBef>
-                <a:spcPts val="0"/>
-              </a:spcBef>
-              <a:spcAft>
-                <a:spcPts val="600"/>
-              </a:spcAft>
-            </a:pPr>
-            <a:r>
-              <a:rPr sz="1450" b="1" i="0">
-                <a:solidFill>
-                  <a:srgbClr val="1A1A2E"/>
-                </a:solidFill>
-                <a:latin typeface="Microsoft JhengHei"/>
-              </a:rPr>
-              <a:t>把「光流／scene-flow 一致性」當 VLM 推理的可驗證 reward 沒人做 → </a:t>
-            </a:r>
-            <a:r>
-              <a:rPr sz="1450" b="0" i="0">
-                <a:solidFill>
-                  <a:srgbClr val="1A1A2E"/>
-                </a:solidFill>
-                <a:latin typeface="Microsoft JhengHei"/>
-              </a:rPr>
-              <a:t>新穎縫隙成立。</a:t>
-            </a:r>
-          </a:p>
-        </p:txBody>
-      </p:sp>
-      <p:sp>
-        <p:nvSpPr>
-          <p:cNvPr id="14" name="TextBox 13"/>
-          <p:cNvSpPr txBox="1"/>
-          <p:nvPr/>
-        </p:nvSpPr>
-        <p:spPr>
-          <a:xfrm>
-            <a:off x="640080" y="6035040"/>
-            <a:ext cx="10972800" cy="320040"/>
-          </a:xfrm>
-          <a:prstGeom prst="rect">
-            <a:avLst/>
-          </a:prstGeom>
-          <a:noFill/>
-        </p:spPr>
-        <p:txBody>
-          <a:bodyPr wrap="square" anchor="t" lIns="0" rIns="0" tIns="0" bIns="0">
-            <a:spAutoFit/>
-          </a:bodyPr>
-          <a:lstStyle/>
-          <a:p>
-            <a:pPr algn="l">
-              <a:lnSpc>
-                <a:spcPct val="108000"/>
-              </a:lnSpc>
-              <a:spcBef>
-                <a:spcPts val="0"/>
-              </a:spcBef>
-              <a:spcAft>
-                <a:spcPts val="600"/>
-              </a:spcAft>
-            </a:pPr>
-            <a:r>
-              <a:rPr sz="1000" b="1" i="0">
-                <a:solidFill>
-                  <a:srgbClr val="5B6370"/>
-                </a:solidFill>
-                <a:latin typeface="Microsoft JhengHei"/>
-              </a:rPr>
-              <a:t>▸ 依據：</a:t>
-            </a:r>
-            <a:r>
-              <a:rPr sz="1000" b="0" i="1">
-                <a:solidFill>
-                  <a:srgbClr val="5B6370"/>
+              <a:rPr sz="900" b="0" i="0">
+                <a:solidFill>
+                  <a:srgbClr val="555B63"/>
                 </a:solidFill>
                 <a:latin typeface="Segoe UI"/>
               </a:rPr>
-              <a:t>DepthLM · Smooth Operator 2601.07695 · 3D-R1 2507.23478 · N3D-VLM 2512.16561 · Flow4Agent 2510.05836 · VGGRPO 2603.26599 · Video-R2 2511.23478</a:t>
-            </a:r>
-          </a:p>
-        </p:txBody>
-      </p:sp>
-      <p:sp>
-        <p:nvSpPr>
-          <p:cNvPr id="15" name="TextBox 14"/>
-          <p:cNvSpPr txBox="1"/>
-          <p:nvPr/>
-        </p:nvSpPr>
-        <p:spPr>
-          <a:xfrm>
-            <a:off x="10424160" y="6455664"/>
-            <a:ext cx="1554480" cy="274320"/>
-          </a:xfrm>
-          <a:prstGeom prst="rect">
-            <a:avLst/>
-          </a:prstGeom>
-          <a:noFill/>
-        </p:spPr>
-        <p:txBody>
-          <a:bodyPr wrap="square" anchor="t" lIns="0" rIns="0" tIns="0" bIns="0">
-            <a:spAutoFit/>
-          </a:bodyPr>
-          <a:lstStyle/>
-          <a:p>
-            <a:pPr algn="r">
-              <a:lnSpc>
-                <a:spcPct val="108000"/>
-              </a:lnSpc>
-              <a:spcBef>
-                <a:spcPts val="0"/>
-              </a:spcBef>
-              <a:spcAft>
-                <a:spcPts val="600"/>
-              </a:spcAft>
-            </a:pPr>
-            <a:r>
-              <a:rPr sz="900" b="0" i="0">
-                <a:solidFill>
-                  <a:srgbClr val="5B6370"/>
-                </a:solidFill>
-                <a:latin typeface="Segoe UI"/>
-              </a:rPr>
-              <a:t>待辦回答 · 2/7</a:t>
+              <a:t>2/9 · 草稿</a:t>
             </a:r>
           </a:p>
         </p:txBody>
@@ -5685,20 +5239,74 @@
       </p:sp>
       <p:sp>
         <p:nvSpPr>
-          <p:cNvPr id="3" name="Oval 2"/>
+          <p:cNvPr id="3" name="TextBox 2"/>
+          <p:cNvSpPr txBox="1"/>
+          <p:nvPr/>
+        </p:nvSpPr>
+        <p:spPr>
+          <a:xfrm>
+            <a:off x="640080" y="384048"/>
+            <a:ext cx="10881360" cy="365760"/>
+          </a:xfrm>
+          <a:prstGeom prst="rect">
+            <a:avLst/>
+          </a:prstGeom>
+          <a:noFill/>
+        </p:spPr>
+        <p:txBody>
+          <a:bodyPr wrap="square" anchor="t" lIns="0" rIns="0" tIns="0" bIns="0">
+            <a:spAutoFit/>
+          </a:bodyPr>
+          <a:lstStyle/>
+          <a:p>
+            <a:pPr algn="l">
+              <a:lnSpc>
+                <a:spcPct val="110000"/>
+              </a:lnSpc>
+              <a:spcBef>
+                <a:spcPts val="0"/>
+              </a:spcBef>
+              <a:spcAft>
+                <a:spcPts val="500"/>
+              </a:spcAft>
+            </a:pPr>
+            <a:r>
+              <a:rPr sz="1500" b="1" i="0">
+                <a:solidFill>
+                  <a:srgbClr val="0F768E"/>
+                </a:solidFill>
+                <a:latin typeface="Segoe UI"/>
+              </a:rPr>
+              <a:t>Q3　</a:t>
+            </a:r>
+            <a:r>
+              <a:rPr sz="1250" b="0" i="0">
+                <a:solidFill>
+                  <a:srgbClr val="555B63"/>
+                </a:solidFill>
+                <a:latin typeface="Microsoft JhengHei"/>
+              </a:rPr>
+              <a:t>VLM 為何表現差?(4D 感知不足 vs. LLM 推理未發揮)→ reward 設計依據。</a:t>
+            </a:r>
+          </a:p>
+        </p:txBody>
+      </p:sp>
+      <p:sp>
+        <p:nvSpPr>
+          <p:cNvPr id="4" name="Rectangle 3"/>
           <p:cNvSpPr/>
           <p:nvPr/>
         </p:nvSpPr>
         <p:spPr>
           <a:xfrm>
-            <a:off x="640080" y="457200"/>
-            <a:ext cx="566928" cy="566928"/>
-          </a:xfrm>
-          <a:prstGeom prst="ellipse">
+            <a:off x="640080" y="804672"/>
+            <a:ext cx="10881360" cy="14630"/>
+          </a:xfrm>
+          <a:prstGeom prst="rect">
             <a:avLst/>
           </a:prstGeom>
           <a:solidFill>
-            <a:srgbClr val="0F768E"/>
+            <a:srgbClr val="DDDDDD"/>
           </a:solidFill>
           <a:ln>
             <a:noFill/>
@@ -5729,14 +5337,14 @@
       </p:sp>
       <p:sp>
         <p:nvSpPr>
-          <p:cNvPr id="4" name="TextBox 3"/>
+          <p:cNvPr id="5" name="TextBox 4"/>
           <p:cNvSpPr txBox="1"/>
           <p:nvPr/>
         </p:nvSpPr>
         <p:spPr>
           <a:xfrm>
-            <a:off x="640080" y="457200"/>
-            <a:ext cx="566928" cy="566928"/>
+            <a:off x="640080" y="960120"/>
+            <a:ext cx="10972800" cy="777240"/>
           </a:xfrm>
           <a:prstGeom prst="rect">
             <a:avLst/>
@@ -5744,14 +5352,59 @@
           <a:noFill/>
         </p:spPr>
         <p:txBody>
-          <a:bodyPr wrap="square" anchor="ctr" lIns="0" rIns="0" tIns="0" bIns="0">
+          <a:bodyPr wrap="square" anchor="t" lIns="0" rIns="0" tIns="0" bIns="0">
             <a:spAutoFit/>
           </a:bodyPr>
           <a:lstStyle/>
           <a:p>
-            <a:pPr algn="ctr">
+            <a:pPr algn="l">
               <a:lnSpc>
-                <a:spcPct val="108000"/>
+                <a:spcPct val="106000"/>
+              </a:lnSpc>
+              <a:spcBef>
+                <a:spcPts val="0"/>
+              </a:spcBef>
+              <a:spcAft>
+                <a:spcPts val="500"/>
+              </a:spcAft>
+            </a:pPr>
+            <a:r>
+              <a:rPr sz="2100" b="1" i="0">
+                <a:solidFill>
+                  <a:srgbClr val="111111"/>
+                </a:solidFill>
+                <a:latin typeface="Microsoft JhengHei"/>
+              </a:rPr>
+              <a:t>兩側證據並存,4D 任務上尚無人做過拆解實驗</a:t>
+            </a:r>
+          </a:p>
+        </p:txBody>
+      </p:sp>
+      <p:sp>
+        <p:nvSpPr>
+          <p:cNvPr id="6" name="TextBox 5"/>
+          <p:cNvSpPr txBox="1"/>
+          <p:nvPr/>
+        </p:nvSpPr>
+        <p:spPr>
+          <a:xfrm>
+            <a:off x="640080" y="1828800"/>
+            <a:ext cx="6035040" cy="3291840"/>
+          </a:xfrm>
+          <a:prstGeom prst="rect">
+            <a:avLst/>
+          </a:prstGeom>
+          <a:noFill/>
+        </p:spPr>
+        <p:txBody>
+          <a:bodyPr wrap="square" anchor="t" lIns="0" rIns="0" tIns="0" bIns="0">
+            <a:spAutoFit/>
+          </a:bodyPr>
+          <a:lstStyle/>
+          <a:p>
+            <a:pPr algn="l">
+              <a:lnSpc>
+                <a:spcPct val="115000"/>
               </a:lnSpc>
               <a:spcBef>
                 <a:spcPts val="0"/>
@@ -5761,42 +5414,28 @@
               </a:spcAft>
             </a:pPr>
             <a:r>
-              <a:rPr sz="2200" b="1" i="0">
-                <a:solidFill>
-                  <a:srgbClr val="FFFFFF"/>
+              <a:rPr sz="1400" b="0" i="0">
+                <a:solidFill>
+                  <a:srgbClr val="555B63"/>
                 </a:solidFill>
                 <a:latin typeface="Segoe UI"/>
               </a:rPr>
-              <a:t>3</a:t>
-            </a:r>
-          </a:p>
-        </p:txBody>
-      </p:sp>
-      <p:sp>
-        <p:nvSpPr>
-          <p:cNvPr id="5" name="TextBox 4"/>
-          <p:cNvSpPr txBox="1"/>
-          <p:nvPr/>
-        </p:nvSpPr>
-        <p:spPr>
-          <a:xfrm>
-            <a:off x="1371600" y="475488"/>
-            <a:ext cx="10241280" cy="548640"/>
-          </a:xfrm>
-          <a:prstGeom prst="rect">
-            <a:avLst/>
-          </a:prstGeom>
-          <a:noFill/>
-        </p:spPr>
-        <p:txBody>
-          <a:bodyPr wrap="square" anchor="t" lIns="0" rIns="0" tIns="0" bIns="0">
-            <a:spAutoFit/>
-          </a:bodyPr>
-          <a:lstStyle/>
+              <a:t>— </a:t>
+            </a:r>
+            <a:r>
+              <a:rPr sz="1400" b="0" i="0">
+                <a:solidFill>
+                  <a:srgbClr val="111111"/>
+                </a:solidFill>
+                <a:latin typeface="Microsoft JhengHei"/>
+              </a:rPr>
+              <a:t>支持「感知端」:VLM4D 人類 98.8 vs 最佳 62.0;弱在整合線索+時間一致性。</a:t>
+            </a:r>
+          </a:p>
           <a:p>
             <a:pPr algn="l">
               <a:lnSpc>
-                <a:spcPct val="108000"/>
+                <a:spcPct val="115000"/>
               </a:lnSpc>
               <a:spcBef>
                 <a:spcPts val="0"/>
@@ -5806,42 +5445,28 @@
               </a:spcAft>
             </a:pPr>
             <a:r>
-              <a:rPr sz="1300" b="1" i="0">
-                <a:solidFill>
-                  <a:srgbClr val="0F768E"/>
+              <a:rPr sz="1400" b="0" i="0">
+                <a:solidFill>
+                  <a:srgbClr val="555B63"/>
+                </a:solidFill>
+                <a:latin typeface="Segoe UI"/>
+              </a:rPr>
+              <a:t>— </a:t>
+            </a:r>
+            <a:r>
+              <a:rPr sz="1400" b="0" i="0">
+                <a:solidFill>
+                  <a:srgbClr val="111111"/>
                 </a:solidFill>
                 <a:latin typeface="Microsoft JhengHei"/>
               </a:rPr>
-              <a:t>待辦事項 3</a:t>
-            </a:r>
-          </a:p>
-        </p:txBody>
-      </p:sp>
-      <p:sp>
-        <p:nvSpPr>
-          <p:cNvPr id="6" name="TextBox 5"/>
-          <p:cNvSpPr txBox="1"/>
-          <p:nvPr/>
-        </p:nvSpPr>
-        <p:spPr>
-          <a:xfrm>
-            <a:off x="1371600" y="822960"/>
-            <a:ext cx="10424160" cy="502920"/>
-          </a:xfrm>
-          <a:prstGeom prst="rect">
-            <a:avLst/>
-          </a:prstGeom>
-          <a:noFill/>
-        </p:spPr>
-        <p:txBody>
-          <a:bodyPr wrap="square" anchor="t" lIns="0" rIns="0" tIns="0" bIns="0">
-            <a:spAutoFit/>
-          </a:bodyPr>
-          <a:lstStyle/>
+              <a:t>支持「推理端」:MindCube (2506.21458) 只調 LLM 51.43% vs baseline 37.81%,瓶頸幾乎全在 LLM(它的任務,非 4D)。</a:t>
+            </a:r>
+          </a:p>
           <a:p>
             <a:pPr algn="l">
               <a:lnSpc>
-                <a:spcPct val="108000"/>
+                <a:spcPct val="115000"/>
               </a:lnSpc>
               <a:spcBef>
                 <a:spcPts val="0"/>
@@ -5851,42 +5476,28 @@
               </a:spcAft>
             </a:pPr>
             <a:r>
-              <a:rPr sz="1300" b="0" i="1">
-                <a:solidFill>
-                  <a:srgbClr val="5B6370"/>
+              <a:rPr sz="1400" b="0" i="0">
+                <a:solidFill>
+                  <a:srgbClr val="555B63"/>
+                </a:solidFill>
+                <a:latin typeface="Segoe UI"/>
+              </a:rPr>
+              <a:t>— </a:t>
+            </a:r>
+            <a:r>
+              <a:rPr sz="1400" b="0" i="0">
+                <a:solidFill>
+                  <a:srgbClr val="111111"/>
                 </a:solidFill>
                 <a:latin typeface="Microsoft JhengHei"/>
               </a:rPr>
-              <a:t>找出「VLM 為何表現差」的根因（4D 感知不足 vs. LLM 推理未發揮）→ 作為 GRPO reward 設計依據。</a:t>
-            </a:r>
-          </a:p>
-        </p:txBody>
-      </p:sp>
-      <p:sp>
-        <p:nvSpPr>
-          <p:cNvPr id="7" name="TextBox 6"/>
-          <p:cNvSpPr txBox="1"/>
-          <p:nvPr/>
-        </p:nvSpPr>
-        <p:spPr>
-          <a:xfrm>
-            <a:off x="640080" y="1600200"/>
-            <a:ext cx="10972800" cy="914400"/>
-          </a:xfrm>
-          <a:prstGeom prst="rect">
-            <a:avLst/>
-          </a:prstGeom>
-          <a:noFill/>
-        </p:spPr>
-        <p:txBody>
-          <a:bodyPr wrap="square" anchor="t" lIns="0" rIns="0" tIns="0" bIns="0">
-            <a:spAutoFit/>
-          </a:bodyPr>
-          <a:lstStyle/>
+              <a:t>任務相依:CrossMath (2604.16256) 數學題卡推理深度(純文 97.3 vs 純圖 35.7)。</a:t>
+            </a:r>
+          </a:p>
           <a:p>
             <a:pPr algn="l">
               <a:lnSpc>
-                <a:spcPct val="106000"/>
+                <a:spcPct val="115000"/>
               </a:lnSpc>
               <a:spcBef>
                 <a:spcPts val="0"/>
@@ -5896,44 +5507,50 @@
               </a:spcAft>
             </a:pPr>
             <a:r>
-              <a:rPr sz="2300" b="1" i="0">
-                <a:solidFill>
-                  <a:srgbClr val="1A1A2E"/>
+              <a:rPr sz="1400" b="0" i="0">
+                <a:solidFill>
+                  <a:srgbClr val="555B63"/>
+                </a:solidFill>
+                <a:latin typeface="Segoe UI"/>
+              </a:rPr>
+              <a:t>— </a:t>
+            </a:r>
+            <a:r>
+              <a:rPr sz="1400" b="0" i="0">
+                <a:solidFill>
+                  <a:srgbClr val="111111"/>
                 </a:solidFill>
                 <a:latin typeface="Microsoft JhengHei"/>
               </a:rPr>
-              <a:t>根因依任務而異：4D 題卡在</a:t>
-            </a:r>
-            <a:r>
-              <a:rPr sz="2300" b="1" i="0">
-                <a:solidFill>
-                  <a:srgbClr val="0F768E"/>
-                </a:solidFill>
-                <a:latin typeface="Microsoft JhengHei"/>
-              </a:rPr>
-              <a:t>「感知不足」</a:t>
-            </a:r>
-            <a:r>
-              <a:rPr sz="2300" b="1" i="0">
-                <a:solidFill>
-                  <a:srgbClr val="1A1A2E"/>
-                </a:solidFill>
-                <a:latin typeface="Microsoft JhengHei"/>
-              </a:rPr>
-              <a:t>，數學題卡在</a:t>
-            </a:r>
-            <a:r>
-              <a:rPr sz="2300" b="1" i="0">
-                <a:solidFill>
-                  <a:srgbClr val="5B6370"/>
-                </a:solidFill>
-                <a:latin typeface="Microsoft JhengHei"/>
-              </a:rPr>
-              <a:t>「推理未發揮」</a:t>
-            </a:r>
-          </a:p>
-        </p:txBody>
-      </p:sp>
+              <a:t>歸因工具:MoCA 蒙眼推理器 → 判「壞在看/壞在想」,可直接接 reward(右圖)。</a:t>
+            </a:r>
+          </a:p>
+        </p:txBody>
+      </p:sp>
+      <p:pic>
+        <p:nvPicPr>
+          <p:cNvPr id="7" name="Picture 6" descr="MoCA_x1.png"/>
+          <p:cNvPicPr>
+            <a:picLocks noChangeAspect="1"/>
+          </p:cNvPicPr>
+          <p:nvPr/>
+        </p:nvPicPr>
+        <p:blipFill>
+          <a:blip r:embed="rId2"/>
+          <a:stretch>
+            <a:fillRect/>
+          </a:stretch>
+        </p:blipFill>
+        <p:spPr>
+          <a:xfrm>
+            <a:off x="6949440" y="1819160"/>
+            <a:ext cx="4572000" cy="3676879"/>
+          </a:xfrm>
+          <a:prstGeom prst="rect">
+            <a:avLst/>
+          </a:prstGeom>
+        </p:spPr>
+      </p:pic>
       <p:sp>
         <p:nvSpPr>
           <p:cNvPr id="8" name="TextBox 7"/>
@@ -5942,8 +5559,8 @@
         </p:nvSpPr>
         <p:spPr>
           <a:xfrm>
-            <a:off x="685800" y="2606040"/>
-            <a:ext cx="10881360" cy="2377440"/>
+            <a:off x="6949440" y="5523471"/>
+            <a:ext cx="4572000" cy="274320"/>
           </a:xfrm>
           <a:prstGeom prst="rect">
             <a:avLst/>
@@ -5956,269 +5573,147 @@
           </a:bodyPr>
           <a:lstStyle/>
           <a:p>
-            <a:pPr algn="l">
+            <a:pPr algn="ctr">
               <a:lnSpc>
-                <a:spcPct val="112000"/>
+                <a:spcPct val="110000"/>
               </a:lnSpc>
               <a:spcBef>
                 <a:spcPts val="0"/>
               </a:spcBef>
               <a:spcAft>
-                <a:spcPts val="600"/>
+                <a:spcPts val="500"/>
               </a:spcAft>
             </a:pPr>
             <a:r>
-              <a:rPr sz="1600" b="1" i="0">
-                <a:solidFill>
-                  <a:srgbClr val="0F768E"/>
+              <a:rPr sz="950" b="0" i="1">
+                <a:solidFill>
+                  <a:srgbClr val="555B63"/>
                 </a:solidFill>
                 <a:latin typeface="Microsoft JhengHei"/>
               </a:rPr>
-              <a:t>▸ </a:t>
-            </a:r>
-            <a:r>
-              <a:rPr sz="1600" b="1" i="0">
-                <a:solidFill>
-                  <a:srgbClr val="0F768E"/>
-                </a:solidFill>
-                <a:latin typeface="Microsoft JhengHei"/>
-              </a:rPr>
-              <a:t>4D/時空 → 感知端：</a:t>
-            </a:r>
-            <a:r>
-              <a:rPr sz="1600" b="0" i="0">
-                <a:solidFill>
-                  <a:srgbClr val="1A1A2E"/>
-                </a:solidFill>
-                <a:latin typeface="Microsoft JhengHei"/>
-              </a:rPr>
-              <a:t>VLM4D 人類 98.8% vs 最佳 62.0%（36 分差），弱在「整合視覺線索 + 維持時間一致性」。</a:t>
-            </a:r>
-          </a:p>
+              <a:t>MoCA/VL-Scaler:蒙眼推理器 + 感知/結果雙驗證(取自 arXiv 2605.14054 原圖)</a:t>
+            </a:r>
+          </a:p>
+        </p:txBody>
+      </p:sp>
+      <p:sp>
+        <p:nvSpPr>
+          <p:cNvPr id="9" name="TextBox 8"/>
+          <p:cNvSpPr txBox="1"/>
+          <p:nvPr/>
+        </p:nvSpPr>
+        <p:spPr>
+          <a:xfrm>
+            <a:off x="640080" y="5806440"/>
+            <a:ext cx="10881360" cy="594360"/>
+          </a:xfrm>
+          <a:prstGeom prst="rect">
+            <a:avLst/>
+          </a:prstGeom>
+          <a:noFill/>
+        </p:spPr>
+        <p:txBody>
+          <a:bodyPr wrap="square" anchor="t" lIns="0" rIns="0" tIns="0" bIns="0">
+            <a:spAutoFit/>
+          </a:bodyPr>
+          <a:lstStyle/>
           <a:p>
             <a:pPr algn="l">
               <a:lnSpc>
-                <a:spcPct val="112000"/>
+                <a:spcPct val="110000"/>
               </a:lnSpc>
               <a:spcBef>
                 <a:spcPts val="0"/>
               </a:spcBef>
               <a:spcAft>
-                <a:spcPts val="600"/>
+                <a:spcPts val="500"/>
               </a:spcAft>
             </a:pPr>
             <a:r>
-              <a:rPr sz="1600" b="1" i="0">
-                <a:solidFill>
-                  <a:srgbClr val="0F768E"/>
+              <a:rPr sz="1150" b="1" i="0">
+                <a:solidFill>
+                  <a:srgbClr val="B44A1E"/>
                 </a:solidFill>
                 <a:latin typeface="Microsoft JhengHei"/>
               </a:rPr>
-              <a:t>▸ </a:t>
-            </a:r>
-            <a:r>
-              <a:rPr sz="1600" b="1" i="0">
-                <a:solidFill>
-                  <a:srgbClr val="1A1A2E"/>
+              <a:t>未驗證：</a:t>
+            </a:r>
+            <a:r>
+              <a:rPr sz="1150" b="0" i="0">
+                <a:solidFill>
+                  <a:srgbClr val="111111"/>
                 </a:solidFill>
                 <a:latin typeface="Microsoft JhengHei"/>
               </a:rPr>
-              <a:t>數學/邏輯 → 推理端：</a:t>
-            </a:r>
-            <a:r>
-              <a:rPr sz="1600" b="0" i="0">
-                <a:solidFill>
-                  <a:srgbClr val="1A1A2E"/>
-                </a:solidFill>
-                <a:latin typeface="Microsoft JhengHei"/>
-              </a:rPr>
-              <a:t>CrossMath (2604.16256) 純文 97.3% vs 純圖 35.7%，卡在推理鏈深度。</a:t>
-            </a:r>
-          </a:p>
+              <a:t>「4D 瓶頸在感知端」只是由 VLM4D 失敗描述推測;VLM4D 沒做 encoder-vs-LLM 拆解,MindCube 沒測 4D 任務。此為方向地基,仍懸而未決。</a:t>
+            </a:r>
+          </a:p>
+        </p:txBody>
+      </p:sp>
+      <p:sp>
+        <p:nvSpPr>
+          <p:cNvPr id="10" name="TextBox 9"/>
+          <p:cNvSpPr txBox="1"/>
+          <p:nvPr/>
+        </p:nvSpPr>
+        <p:spPr>
+          <a:xfrm>
+            <a:off x="640080" y="6355080"/>
+            <a:ext cx="10058400" cy="320040"/>
+          </a:xfrm>
+          <a:prstGeom prst="rect">
+            <a:avLst/>
+          </a:prstGeom>
+          <a:noFill/>
+        </p:spPr>
+        <p:txBody>
+          <a:bodyPr wrap="square" anchor="t" lIns="0" rIns="0" tIns="0" bIns="0">
+            <a:spAutoFit/>
+          </a:bodyPr>
+          <a:lstStyle/>
           <a:p>
             <a:pPr algn="l">
               <a:lnSpc>
-                <a:spcPct val="112000"/>
+                <a:spcPct val="110000"/>
               </a:lnSpc>
               <a:spcBef>
                 <a:spcPts val="0"/>
               </a:spcBef>
               <a:spcAft>
-                <a:spcPts val="600"/>
+                <a:spcPts val="500"/>
               </a:spcAft>
             </a:pPr>
             <a:r>
-              <a:rPr sz="1600" b="1" i="0">
-                <a:solidFill>
-                  <a:srgbClr val="0F768E"/>
+              <a:rPr sz="950" b="1" i="0">
+                <a:solidFill>
+                  <a:srgbClr val="555B63"/>
                 </a:solidFill>
                 <a:latin typeface="Microsoft JhengHei"/>
               </a:rPr>
-              <a:t>▸ </a:t>
-            </a:r>
-            <a:r>
-              <a:rPr sz="1600" b="1" i="0">
-                <a:solidFill>
-                  <a:srgbClr val="1A1A2E"/>
-                </a:solidFill>
-                <a:latin typeface="Microsoft JhengHei"/>
-              </a:rPr>
-              <a:t>歸因方法(可用)：</a:t>
-            </a:r>
-            <a:r>
-              <a:rPr sz="1600" b="0" i="0">
-                <a:solidFill>
-                  <a:srgbClr val="1A1A2E"/>
-                </a:solidFill>
-                <a:latin typeface="Microsoft JhengHei"/>
-              </a:rPr>
-              <a:t>MoCA「蒙眼推理器」判『壞在看 vs 壞在想』→ 直接變成 reward 依據。</a:t>
-            </a:r>
-          </a:p>
-        </p:txBody>
-      </p:sp>
-      <p:sp>
-        <p:nvSpPr>
-          <p:cNvPr id="9" name="Rounded Rectangle 8"/>
-          <p:cNvSpPr/>
-          <p:nvPr/>
-        </p:nvSpPr>
-        <p:spPr>
-          <a:xfrm>
-            <a:off x="640080" y="5166360"/>
-            <a:ext cx="10881360" cy="731520"/>
-          </a:xfrm>
-          <a:prstGeom prst="roundRect">
-            <a:avLst/>
-          </a:prstGeom>
-          <a:solidFill>
-            <a:srgbClr val="EFF6F8"/>
-          </a:solidFill>
-          <a:ln>
-            <a:noFill/>
-          </a:ln>
-          <a:effectLst/>
-        </p:spPr>
-        <p:style>
-          <a:lnRef idx="1">
-            <a:schemeClr val="accent1"/>
-          </a:lnRef>
-          <a:fillRef idx="3">
-            <a:schemeClr val="accent1"/>
-          </a:fillRef>
-          <a:effectRef idx="2">
-            <a:schemeClr val="accent1"/>
-          </a:effectRef>
-          <a:fontRef idx="minor">
-            <a:schemeClr val="lt1"/>
-          </a:fontRef>
-        </p:style>
-        <p:txBody>
-          <a:bodyPr rtlCol="0" anchor="ctr"/>
-          <a:lstStyle/>
-          <a:p>
-            <a:pPr algn="ctr"/>
-          </a:p>
-        </p:txBody>
-      </p:sp>
-      <p:sp>
-        <p:nvSpPr>
-          <p:cNvPr id="10" name="Rectangle 9"/>
-          <p:cNvSpPr/>
-          <p:nvPr/>
-        </p:nvSpPr>
-        <p:spPr>
-          <a:xfrm>
-            <a:off x="640080" y="5166360"/>
-            <a:ext cx="146304" cy="731520"/>
-          </a:xfrm>
-          <a:prstGeom prst="rect">
-            <a:avLst/>
-          </a:prstGeom>
-          <a:solidFill>
-            <a:srgbClr val="0F768E"/>
-          </a:solidFill>
-          <a:ln>
-            <a:noFill/>
-          </a:ln>
-          <a:effectLst/>
-        </p:spPr>
-        <p:style>
-          <a:lnRef idx="1">
-            <a:schemeClr val="accent1"/>
-          </a:lnRef>
-          <a:fillRef idx="3">
-            <a:schemeClr val="accent1"/>
-          </a:fillRef>
-          <a:effectRef idx="2">
-            <a:schemeClr val="accent1"/>
-          </a:effectRef>
-          <a:fontRef idx="minor">
-            <a:schemeClr val="lt1"/>
-          </a:fontRef>
-        </p:style>
-        <p:txBody>
-          <a:bodyPr rtlCol="0" anchor="ctr"/>
-          <a:lstStyle/>
-          <a:p>
-            <a:pPr algn="ctr"/>
-          </a:p>
-        </p:txBody>
-      </p:sp>
-      <p:sp>
-        <p:nvSpPr>
-          <p:cNvPr id="11" name="Rounded Rectangle 10"/>
-          <p:cNvSpPr/>
-          <p:nvPr/>
-        </p:nvSpPr>
-        <p:spPr>
-          <a:xfrm>
-            <a:off x="868680" y="5330952"/>
-            <a:ext cx="960120" cy="402336"/>
-          </a:xfrm>
-          <a:prstGeom prst="roundRect">
-            <a:avLst/>
-          </a:prstGeom>
-          <a:solidFill>
-            <a:srgbClr val="0F768E"/>
-          </a:solidFill>
-          <a:ln>
-            <a:noFill/>
-          </a:ln>
-          <a:effectLst/>
-        </p:spPr>
-        <p:style>
-          <a:lnRef idx="1">
-            <a:schemeClr val="accent1"/>
-          </a:lnRef>
-          <a:fillRef idx="3">
-            <a:schemeClr val="accent1"/>
-          </a:fillRef>
-          <a:effectRef idx="2">
-            <a:schemeClr val="accent1"/>
-          </a:effectRef>
-          <a:fontRef idx="minor">
-            <a:schemeClr val="lt1"/>
-          </a:fontRef>
-        </p:style>
-        <p:txBody>
-          <a:bodyPr rtlCol="0" anchor="ctr"/>
-          <a:lstStyle/>
-          <a:p>
-            <a:pPr algn="ctr"/>
-          </a:p>
-        </p:txBody>
-      </p:sp>
-      <p:sp>
-        <p:nvSpPr>
-          <p:cNvPr id="12" name="TextBox 11"/>
+              <a:t>依據：</a:t>
+            </a:r>
+            <a:r>
+              <a:rPr sz="950" b="0" i="1">
+                <a:solidFill>
+                  <a:srgbClr val="555B63"/>
+                </a:solidFill>
+                <a:latin typeface="Segoe UI"/>
+              </a:rPr>
+              <a:t>VLM4D 2508.02095 · MindCube 2506.21458 · CrossMath 2604.16256 · MoCA 2605.14054</a:t>
+            </a:r>
+          </a:p>
+        </p:txBody>
+      </p:sp>
+      <p:sp>
+        <p:nvSpPr>
+          <p:cNvPr id="11" name="TextBox 10"/>
           <p:cNvSpPr txBox="1"/>
           <p:nvPr/>
         </p:nvSpPr>
         <p:spPr>
           <a:xfrm>
-            <a:off x="868680" y="5330952"/>
-            <a:ext cx="960120" cy="402336"/>
+            <a:off x="10881360" y="6510528"/>
+            <a:ext cx="1097280" cy="274320"/>
           </a:xfrm>
           <a:prstGeom prst="rect">
             <a:avLst/>
@@ -6226,183 +5721,30 @@
           <a:noFill/>
         </p:spPr>
         <p:txBody>
-          <a:bodyPr wrap="square" anchor="ctr" lIns="0" rIns="0" tIns="0" bIns="0">
+          <a:bodyPr wrap="square" anchor="t" lIns="0" rIns="0" tIns="0" bIns="0">
             <a:spAutoFit/>
           </a:bodyPr>
           <a:lstStyle/>
           <a:p>
-            <a:pPr algn="ctr">
+            <a:pPr algn="r">
               <a:lnSpc>
-                <a:spcPct val="108000"/>
+                <a:spcPct val="110000"/>
               </a:lnSpc>
               <a:spcBef>
                 <a:spcPts val="0"/>
               </a:spcBef>
               <a:spcAft>
-                <a:spcPts val="600"/>
+                <a:spcPts val="500"/>
               </a:spcAft>
             </a:pPr>
             <a:r>
-              <a:rPr sz="1500" b="1" i="0">
-                <a:solidFill>
-                  <a:srgbClr val="FFFFFF"/>
-                </a:solidFill>
-                <a:latin typeface="Microsoft JhengHei"/>
-              </a:rPr>
-              <a:t>結論</a:t>
-            </a:r>
-          </a:p>
-        </p:txBody>
-      </p:sp>
-      <p:sp>
-        <p:nvSpPr>
-          <p:cNvPr id="13" name="TextBox 12"/>
-          <p:cNvSpPr txBox="1"/>
-          <p:nvPr/>
-        </p:nvSpPr>
-        <p:spPr>
-          <a:xfrm>
-            <a:off x="2011680" y="5166360"/>
-            <a:ext cx="9326880" cy="731520"/>
-          </a:xfrm>
-          <a:prstGeom prst="rect">
-            <a:avLst/>
-          </a:prstGeom>
-          <a:noFill/>
-        </p:spPr>
-        <p:txBody>
-          <a:bodyPr wrap="square" anchor="ctr" lIns="0" rIns="0" tIns="0" bIns="0">
-            <a:spAutoFit/>
-          </a:bodyPr>
-          <a:lstStyle/>
-          <a:p>
-            <a:pPr algn="l">
-              <a:lnSpc>
-                <a:spcPct val="105000"/>
-              </a:lnSpc>
-              <a:spcBef>
-                <a:spcPts val="0"/>
-              </a:spcBef>
-              <a:spcAft>
-                <a:spcPts val="600"/>
-              </a:spcAft>
-            </a:pPr>
-            <a:r>
-              <a:rPr sz="1450" b="1" i="0">
-                <a:solidFill>
-                  <a:srgbClr val="1A1A2E"/>
-                </a:solidFill>
-                <a:latin typeface="Microsoft JhengHei"/>
-              </a:rPr>
-              <a:t>對 4D 任務，感知不足是主因 → </a:t>
-            </a:r>
-            <a:r>
-              <a:rPr sz="1450" b="0" i="0">
-                <a:solidFill>
-                  <a:srgbClr val="1A1A2E"/>
-                </a:solidFill>
-                <a:latin typeface="Microsoft JhengHei"/>
-              </a:rPr>
-              <a:t>正當化用 depth/flow 一致性當 GRPO reward 訊號。</a:t>
-            </a:r>
-          </a:p>
-        </p:txBody>
-      </p:sp>
-      <p:sp>
-        <p:nvSpPr>
-          <p:cNvPr id="14" name="TextBox 13"/>
-          <p:cNvSpPr txBox="1"/>
-          <p:nvPr/>
-        </p:nvSpPr>
-        <p:spPr>
-          <a:xfrm>
-            <a:off x="640080" y="6035040"/>
-            <a:ext cx="10972800" cy="320040"/>
-          </a:xfrm>
-          <a:prstGeom prst="rect">
-            <a:avLst/>
-          </a:prstGeom>
-          <a:noFill/>
-        </p:spPr>
-        <p:txBody>
-          <a:bodyPr wrap="square" anchor="t" lIns="0" rIns="0" tIns="0" bIns="0">
-            <a:spAutoFit/>
-          </a:bodyPr>
-          <a:lstStyle/>
-          <a:p>
-            <a:pPr algn="l">
-              <a:lnSpc>
-                <a:spcPct val="108000"/>
-              </a:lnSpc>
-              <a:spcBef>
-                <a:spcPts val="0"/>
-              </a:spcBef>
-              <a:spcAft>
-                <a:spcPts val="600"/>
-              </a:spcAft>
-            </a:pPr>
-            <a:r>
-              <a:rPr sz="1000" b="1" i="0">
-                <a:solidFill>
-                  <a:srgbClr val="5B6370"/>
-                </a:solidFill>
-                <a:latin typeface="Microsoft JhengHei"/>
-              </a:rPr>
-              <a:t>▸ 依據：</a:t>
-            </a:r>
-            <a:r>
-              <a:rPr sz="1000" b="0" i="1">
-                <a:solidFill>
-                  <a:srgbClr val="5B6370"/>
+              <a:rPr sz="900" b="0" i="0">
+                <a:solidFill>
+                  <a:srgbClr val="555B63"/>
                 </a:solidFill>
                 <a:latin typeface="Segoe UI"/>
               </a:rPr>
-              <a:t>VLM4D 2508.02095 · CrossMath 2604.16256 · MoCA (Bad Seeing or Bad Thinking) 2605.14054</a:t>
-            </a:r>
-          </a:p>
-        </p:txBody>
-      </p:sp>
-      <p:sp>
-        <p:nvSpPr>
-          <p:cNvPr id="15" name="TextBox 14"/>
-          <p:cNvSpPr txBox="1"/>
-          <p:nvPr/>
-        </p:nvSpPr>
-        <p:spPr>
-          <a:xfrm>
-            <a:off x="10424160" y="6455664"/>
-            <a:ext cx="1554480" cy="274320"/>
-          </a:xfrm>
-          <a:prstGeom prst="rect">
-            <a:avLst/>
-          </a:prstGeom>
-          <a:noFill/>
-        </p:spPr>
-        <p:txBody>
-          <a:bodyPr wrap="square" anchor="t" lIns="0" rIns="0" tIns="0" bIns="0">
-            <a:spAutoFit/>
-          </a:bodyPr>
-          <a:lstStyle/>
-          <a:p>
-            <a:pPr algn="r">
-              <a:lnSpc>
-                <a:spcPct val="108000"/>
-              </a:lnSpc>
-              <a:spcBef>
-                <a:spcPts val="0"/>
-              </a:spcBef>
-              <a:spcAft>
-                <a:spcPts val="600"/>
-              </a:spcAft>
-            </a:pPr>
-            <a:r>
-              <a:rPr sz="900" b="0" i="0">
-                <a:solidFill>
-                  <a:srgbClr val="5B6370"/>
-                </a:solidFill>
-                <a:latin typeface="Segoe UI"/>
-              </a:rPr>
-              <a:t>待辦回答 · 3/7</a:t>
+              <a:t>3/9 · 草稿</a:t>
             </a:r>
           </a:p>
         </p:txBody>
@@ -6471,20 +5813,74 @@
       </p:sp>
       <p:sp>
         <p:nvSpPr>
-          <p:cNvPr id="3" name="Oval 2"/>
+          <p:cNvPr id="3" name="TextBox 2"/>
+          <p:cNvSpPr txBox="1"/>
+          <p:nvPr/>
+        </p:nvSpPr>
+        <p:spPr>
+          <a:xfrm>
+            <a:off x="640080" y="384048"/>
+            <a:ext cx="10881360" cy="365760"/>
+          </a:xfrm>
+          <a:prstGeom prst="rect">
+            <a:avLst/>
+          </a:prstGeom>
+          <a:noFill/>
+        </p:spPr>
+        <p:txBody>
+          <a:bodyPr wrap="square" anchor="t" lIns="0" rIns="0" tIns="0" bIns="0">
+            <a:spAutoFit/>
+          </a:bodyPr>
+          <a:lstStyle/>
+          <a:p>
+            <a:pPr algn="l">
+              <a:lnSpc>
+                <a:spcPct val="110000"/>
+              </a:lnSpc>
+              <a:spcBef>
+                <a:spcPts val="0"/>
+              </a:spcBef>
+              <a:spcAft>
+                <a:spcPts val="500"/>
+              </a:spcAft>
+            </a:pPr>
+            <a:r>
+              <a:rPr sz="1500" b="1" i="0">
+                <a:solidFill>
+                  <a:srgbClr val="0F768E"/>
+                </a:solidFill>
+                <a:latin typeface="Segoe UI"/>
+              </a:rPr>
+              <a:t>Q4　</a:t>
+            </a:r>
+            <a:r>
+              <a:rPr sz="1250" b="0" i="0">
+                <a:solidFill>
+                  <a:srgbClr val="555B63"/>
+                </a:solidFill>
+                <a:latin typeface="Microsoft JhengHei"/>
+              </a:rPr>
+              <a:t>有沒有已帶 depth 資訊的資料集?</a:t>
+            </a:r>
+          </a:p>
+        </p:txBody>
+      </p:sp>
+      <p:sp>
+        <p:nvSpPr>
+          <p:cNvPr id="4" name="Rectangle 3"/>
           <p:cNvSpPr/>
           <p:nvPr/>
         </p:nvSpPr>
         <p:spPr>
           <a:xfrm>
-            <a:off x="640080" y="457200"/>
-            <a:ext cx="566928" cy="566928"/>
-          </a:xfrm>
-          <a:prstGeom prst="ellipse">
+            <a:off x="640080" y="804672"/>
+            <a:ext cx="10881360" cy="14630"/>
+          </a:xfrm>
+          <a:prstGeom prst="rect">
             <a:avLst/>
           </a:prstGeom>
           <a:solidFill>
-            <a:srgbClr val="0F768E"/>
+            <a:srgbClr val="DDDDDD"/>
           </a:solidFill>
           <a:ln>
             <a:noFill/>
@@ -6515,14 +5911,14 @@
       </p:sp>
       <p:sp>
         <p:nvSpPr>
-          <p:cNvPr id="4" name="TextBox 3"/>
+          <p:cNvPr id="5" name="TextBox 4"/>
           <p:cNvSpPr txBox="1"/>
           <p:nvPr/>
         </p:nvSpPr>
         <p:spPr>
           <a:xfrm>
-            <a:off x="640080" y="457200"/>
-            <a:ext cx="566928" cy="566928"/>
+            <a:off x="640080" y="960120"/>
+            <a:ext cx="10972800" cy="777240"/>
           </a:xfrm>
           <a:prstGeom prst="rect">
             <a:avLst/>
@@ -6530,14 +5926,59 @@
           <a:noFill/>
         </p:spPr>
         <p:txBody>
-          <a:bodyPr wrap="square" anchor="ctr" lIns="0" rIns="0" tIns="0" bIns="0">
+          <a:bodyPr wrap="square" anchor="t" lIns="0" rIns="0" tIns="0" bIns="0">
             <a:spAutoFit/>
           </a:bodyPr>
           <a:lstStyle/>
           <a:p>
-            <a:pPr algn="ctr">
+            <a:pPr algn="l">
               <a:lnSpc>
-                <a:spcPct val="108000"/>
+                <a:spcPct val="106000"/>
+              </a:lnSpc>
+              <a:spcBef>
+                <a:spcPts val="0"/>
+              </a:spcBef>
+              <a:spcAft>
+                <a:spcPts val="500"/>
+              </a:spcAft>
+            </a:pPr>
+            <a:r>
+              <a:rPr sz="2100" b="1" i="0">
+                <a:solidFill>
+                  <a:srgbClr val="111111"/>
+                </a:solidFill>
+                <a:latin typeface="Microsoft JhengHei"/>
+              </a:rPr>
+              <a:t>有:真實 RGB-D + 合成 flow/depth 皆現成;偽標可再擴大規模</a:t>
+            </a:r>
+          </a:p>
+        </p:txBody>
+      </p:sp>
+      <p:sp>
+        <p:nvSpPr>
+          <p:cNvPr id="6" name="TextBox 5"/>
+          <p:cNvSpPr txBox="1"/>
+          <p:nvPr/>
+        </p:nvSpPr>
+        <p:spPr>
+          <a:xfrm>
+            <a:off x="640080" y="1828800"/>
+            <a:ext cx="10881360" cy="3291840"/>
+          </a:xfrm>
+          <a:prstGeom prst="rect">
+            <a:avLst/>
+          </a:prstGeom>
+          <a:noFill/>
+        </p:spPr>
+        <p:txBody>
+          <a:bodyPr wrap="square" anchor="t" lIns="0" rIns="0" tIns="0" bIns="0">
+            <a:spAutoFit/>
+          </a:bodyPr>
+          <a:lstStyle/>
+          <a:p>
+            <a:pPr algn="l">
+              <a:lnSpc>
+                <a:spcPct val="115000"/>
               </a:lnSpc>
               <a:spcBef>
                 <a:spcPts val="0"/>
@@ -6547,42 +5988,28 @@
               </a:spcAft>
             </a:pPr>
             <a:r>
-              <a:rPr sz="2200" b="1" i="0">
-                <a:solidFill>
-                  <a:srgbClr val="FFFFFF"/>
+              <a:rPr sz="1400" b="0" i="0">
+                <a:solidFill>
+                  <a:srgbClr val="555B63"/>
                 </a:solidFill>
                 <a:latin typeface="Segoe UI"/>
               </a:rPr>
-              <a:t>4</a:t>
-            </a:r>
-          </a:p>
-        </p:txBody>
-      </p:sp>
-      <p:sp>
-        <p:nvSpPr>
-          <p:cNvPr id="5" name="TextBox 4"/>
-          <p:cNvSpPr txBox="1"/>
-          <p:nvPr/>
-        </p:nvSpPr>
-        <p:spPr>
-          <a:xfrm>
-            <a:off x="1371600" y="475488"/>
-            <a:ext cx="10241280" cy="548640"/>
-          </a:xfrm>
-          <a:prstGeom prst="rect">
-            <a:avLst/>
-          </a:prstGeom>
-          <a:noFill/>
-        </p:spPr>
-        <p:txBody>
-          <a:bodyPr wrap="square" anchor="t" lIns="0" rIns="0" tIns="0" bIns="0">
-            <a:spAutoFit/>
-          </a:bodyPr>
-          <a:lstStyle/>
+              <a:t>— </a:t>
+            </a:r>
+            <a:r>
+              <a:rPr sz="1400" b="0" i="0">
+                <a:solidFill>
+                  <a:srgbClr val="111111"/>
+                </a:solidFill>
+                <a:latin typeface="Microsoft JhengHei"/>
+              </a:rPr>
+              <a:t>真實:ARKitScenes(5,048 序列,雷射 GT 深度,2111.08897)、ScanNet/ScanNet++(VSI-Bench 之來源)。</a:t>
+            </a:r>
+          </a:p>
           <a:p>
             <a:pPr algn="l">
               <a:lnSpc>
-                <a:spcPct val="108000"/>
+                <a:spcPct val="115000"/>
               </a:lnSpc>
               <a:spcBef>
                 <a:spcPts val="0"/>
@@ -6592,42 +6019,28 @@
               </a:spcAft>
             </a:pPr>
             <a:r>
-              <a:rPr sz="1300" b="1" i="0">
-                <a:solidFill>
-                  <a:srgbClr val="0F768E"/>
+              <a:rPr sz="1400" b="0" i="0">
+                <a:solidFill>
+                  <a:srgbClr val="555B63"/>
+                </a:solidFill>
+                <a:latin typeface="Segoe UI"/>
+              </a:rPr>
+              <a:t>— </a:t>
+            </a:r>
+            <a:r>
+              <a:rPr sz="1400" b="0" i="0">
+                <a:solidFill>
+                  <a:srgbClr val="111111"/>
                 </a:solidFill>
                 <a:latin typeface="Microsoft JhengHei"/>
               </a:rPr>
-              <a:t>待辦事項 4</a:t>
-            </a:r>
-          </a:p>
-        </p:txBody>
-      </p:sp>
-      <p:sp>
-        <p:nvSpPr>
-          <p:cNvPr id="6" name="TextBox 5"/>
-          <p:cNvSpPr txBox="1"/>
-          <p:nvPr/>
-        </p:nvSpPr>
-        <p:spPr>
-          <a:xfrm>
-            <a:off x="1371600" y="822960"/>
-            <a:ext cx="10424160" cy="502920"/>
-          </a:xfrm>
-          <a:prstGeom prst="rect">
-            <a:avLst/>
-          </a:prstGeom>
-          <a:noFill/>
-        </p:spPr>
-        <p:txBody>
-          <a:bodyPr wrap="square" anchor="t" lIns="0" rIns="0" tIns="0" bIns="0">
-            <a:spAutoFit/>
-          </a:bodyPr>
-          <a:lstStyle/>
+              <a:t>合成含 flow:Spring、FlyingThings3D、Virtual KITTI 2(GT scene flow)、Dynamic Replica(光流+3D 點追蹤)。</a:t>
+            </a:r>
+          </a:p>
           <a:p>
             <a:pPr algn="l">
               <a:lnSpc>
-                <a:spcPct val="108000"/>
+                <a:spcPct val="115000"/>
               </a:lnSpc>
               <a:spcBef>
                 <a:spcPts val="0"/>
@@ -6637,42 +6050,28 @@
               </a:spcAft>
             </a:pPr>
             <a:r>
-              <a:rPr sz="1300" b="0" i="1">
-                <a:solidFill>
-                  <a:srgbClr val="5B6370"/>
+              <a:rPr sz="1400" b="0" i="0">
+                <a:solidFill>
+                  <a:srgbClr val="555B63"/>
+                </a:solidFill>
+                <a:latin typeface="Segoe UI"/>
+              </a:rPr>
+              <a:t>— </a:t>
+            </a:r>
+            <a:r>
+              <a:rPr sz="1400" b="0" i="0">
+                <a:solidFill>
+                  <a:srgbClr val="111111"/>
                 </a:solidFill>
                 <a:latin typeface="Microsoft JhengHei"/>
               </a:rPr>
-              <a:t>找有沒有已經帶 depth 資訊的資料集。</a:t>
-            </a:r>
-          </a:p>
-        </p:txBody>
-      </p:sp>
-      <p:sp>
-        <p:nvSpPr>
-          <p:cNvPr id="7" name="TextBox 6"/>
-          <p:cNvSpPr txBox="1"/>
-          <p:nvPr/>
-        </p:nvSpPr>
-        <p:spPr>
-          <a:xfrm>
-            <a:off x="640080" y="1600200"/>
-            <a:ext cx="10972800" cy="914400"/>
-          </a:xfrm>
-          <a:prstGeom prst="rect">
-            <a:avLst/>
-          </a:prstGeom>
-          <a:noFill/>
-        </p:spPr>
-        <p:txBody>
-          <a:bodyPr wrap="square" anchor="t" lIns="0" rIns="0" tIns="0" bIns="0">
-            <a:spAutoFit/>
-          </a:bodyPr>
-          <a:lstStyle/>
+              <a:t>偽標:Depth Anything V2(NeurIPS'24)+ RAFT/FlowSeek(2509.05297)→ 任意影片自動生 depth/flow。</a:t>
+            </a:r>
+          </a:p>
           <a:p>
             <a:pPr algn="l">
               <a:lnSpc>
-                <a:spcPct val="106000"/>
+                <a:spcPct val="115000"/>
               </a:lnSpc>
               <a:spcBef>
                 <a:spcPts val="0"/>
@@ -6682,36 +6081,36 @@
               </a:spcAft>
             </a:pPr>
             <a:r>
-              <a:rPr sz="2200" b="1" i="0">
-                <a:solidFill>
-                  <a:srgbClr val="1A1A2E"/>
+              <a:rPr sz="1400" b="0" i="0">
+                <a:solidFill>
+                  <a:srgbClr val="555B63"/>
+                </a:solidFill>
+                <a:latin typeface="Segoe UI"/>
+              </a:rPr>
+              <a:t>— </a:t>
+            </a:r>
+            <a:r>
+              <a:rPr sz="1400" b="1" i="0">
+                <a:solidFill>
+                  <a:srgbClr val="111111"/>
                 </a:solidFill>
                 <a:latin typeface="Microsoft JhengHei"/>
               </a:rPr>
-              <a:t>真實 RGB-D（ARKitScenes）+ 合成 flow/depth（Spring 等），且可</a:t>
-            </a:r>
-            <a:r>
-              <a:rPr sz="2200" b="1" i="0">
-                <a:solidFill>
-                  <a:srgbClr val="E86A33"/>
-                </a:solidFill>
-                <a:latin typeface="Microsoft JhengHei"/>
-              </a:rPr>
-              <a:t>偽標免 GT</a:t>
-            </a:r>
-          </a:p>
-        </p:txBody>
-      </p:sp>
-      <p:sp>
-        <p:nvSpPr>
-          <p:cNvPr id="8" name="TextBox 7"/>
+              <a:t>用法:GT 資料先驗證 reward 概念 → 偽標擴到大規模真實影片。</a:t>
+            </a:r>
+          </a:p>
+        </p:txBody>
+      </p:sp>
+      <p:sp>
+        <p:nvSpPr>
+          <p:cNvPr id="7" name="TextBox 6"/>
           <p:cNvSpPr txBox="1"/>
           <p:nvPr/>
         </p:nvSpPr>
         <p:spPr>
           <a:xfrm>
-            <a:off x="685800" y="2606040"/>
-            <a:ext cx="10881360" cy="2377440"/>
+            <a:off x="640080" y="5806440"/>
+            <a:ext cx="10881360" cy="594360"/>
           </a:xfrm>
           <a:prstGeom prst="rect">
             <a:avLst/>
@@ -6726,451 +6125,131 @@
           <a:p>
             <a:pPr algn="l">
               <a:lnSpc>
-                <a:spcPct val="112000"/>
+                <a:spcPct val="110000"/>
               </a:lnSpc>
               <a:spcBef>
                 <a:spcPts val="0"/>
               </a:spcBef>
               <a:spcAft>
-                <a:spcPts val="600"/>
+                <a:spcPts val="500"/>
               </a:spcAft>
             </a:pPr>
             <a:r>
-              <a:rPr sz="1600" b="1" i="0">
-                <a:solidFill>
-                  <a:srgbClr val="0F768E"/>
+              <a:rPr sz="1150" b="1" i="0">
+                <a:solidFill>
+                  <a:srgbClr val="B44A1E"/>
                 </a:solidFill>
                 <a:latin typeface="Microsoft JhengHei"/>
               </a:rPr>
-              <a:t>▸ </a:t>
-            </a:r>
-            <a:r>
-              <a:rPr sz="1600" b="1" i="0">
-                <a:solidFill>
-                  <a:srgbClr val="1A1A2E"/>
+              <a:t>未驗證：</a:t>
+            </a:r>
+            <a:r>
+              <a:rPr sz="1150" b="0" i="0">
+                <a:solidFill>
+                  <a:srgbClr val="111111"/>
                 </a:solidFill>
                 <a:latin typeface="Microsoft JhengHei"/>
               </a:rPr>
-              <a:t>真實 3D/深度：</a:t>
-            </a:r>
-            <a:r>
-              <a:rPr sz="1600" b="0" i="0">
-                <a:solidFill>
-                  <a:srgbClr val="1A1A2E"/>
-                </a:solidFill>
-                <a:latin typeface="Microsoft JhengHei"/>
-              </a:rPr>
-              <a:t>ARKitScenes（5,048 序列、雷射 GT 深度，2111.08897）、ScanNet++；VSI-Bench 建其上。</a:t>
-            </a:r>
-          </a:p>
+              <a:t>各資料集授權與規模是否夠 GRPO 訓練未查;偽標在動態/遮擋場景的誤差(= reward 噪音)未量化——偽標錯則 reward 錯,這是方法設計要正面回答的問題。</a:t>
+            </a:r>
+          </a:p>
+        </p:txBody>
+      </p:sp>
+      <p:sp>
+        <p:nvSpPr>
+          <p:cNvPr id="8" name="TextBox 7"/>
+          <p:cNvSpPr txBox="1"/>
+          <p:nvPr/>
+        </p:nvSpPr>
+        <p:spPr>
+          <a:xfrm>
+            <a:off x="640080" y="6355080"/>
+            <a:ext cx="10058400" cy="320040"/>
+          </a:xfrm>
+          <a:prstGeom prst="rect">
+            <a:avLst/>
+          </a:prstGeom>
+          <a:noFill/>
+        </p:spPr>
+        <p:txBody>
+          <a:bodyPr wrap="square" anchor="t" lIns="0" rIns="0" tIns="0" bIns="0">
+            <a:spAutoFit/>
+          </a:bodyPr>
+          <a:lstStyle/>
           <a:p>
             <a:pPr algn="l">
               <a:lnSpc>
-                <a:spcPct val="112000"/>
+                <a:spcPct val="110000"/>
               </a:lnSpc>
               <a:spcBef>
                 <a:spcPts val="0"/>
               </a:spcBef>
               <a:spcAft>
-                <a:spcPts val="600"/>
+                <a:spcPts val="500"/>
               </a:spcAft>
             </a:pPr>
             <a:r>
-              <a:rPr sz="1600" b="1" i="0">
-                <a:solidFill>
-                  <a:srgbClr val="0F768E"/>
+              <a:rPr sz="950" b="1" i="0">
+                <a:solidFill>
+                  <a:srgbClr val="555B63"/>
                 </a:solidFill>
                 <a:latin typeface="Microsoft JhengHei"/>
               </a:rPr>
-              <a:t>▸ </a:t>
-            </a:r>
-            <a:r>
-              <a:rPr sz="1600" b="1" i="0">
-                <a:solidFill>
-                  <a:srgbClr val="1A1A2E"/>
-                </a:solidFill>
-                <a:latin typeface="Microsoft JhengHei"/>
-              </a:rPr>
-              <a:t>同時有 flow+depth：</a:t>
-            </a:r>
-            <a:r>
-              <a:rPr sz="1600" b="0" i="0">
-                <a:solidFill>
-                  <a:srgbClr val="1A1A2E"/>
-                </a:solidFill>
-                <a:latin typeface="Microsoft JhengHei"/>
-              </a:rPr>
-              <a:t>Spring、FlyingThings3D、Virtual KITTI 2（GT scene flow）、Dynamic Replica（光流+3D 點追蹤）。</a:t>
-            </a:r>
-          </a:p>
-          <a:p>
-            <a:pPr algn="l">
+              <a:t>依據：</a:t>
+            </a:r>
+            <a:r>
+              <a:rPr sz="950" b="0" i="1">
+                <a:solidFill>
+                  <a:srgbClr val="555B63"/>
+                </a:solidFill>
+                <a:latin typeface="Segoe UI"/>
+              </a:rPr>
+              <a:t>ARKitScenes 2111.08897 · Spring · Virtual KITTI 2 · Dynamic Replica · Depth Anything V2 · FlowSeek 2509.05297</a:t>
+            </a:r>
+          </a:p>
+        </p:txBody>
+      </p:sp>
+      <p:sp>
+        <p:nvSpPr>
+          <p:cNvPr id="9" name="TextBox 8"/>
+          <p:cNvSpPr txBox="1"/>
+          <p:nvPr/>
+        </p:nvSpPr>
+        <p:spPr>
+          <a:xfrm>
+            <a:off x="10881360" y="6510528"/>
+            <a:ext cx="1097280" cy="274320"/>
+          </a:xfrm>
+          <a:prstGeom prst="rect">
+            <a:avLst/>
+          </a:prstGeom>
+          <a:noFill/>
+        </p:spPr>
+        <p:txBody>
+          <a:bodyPr wrap="square" anchor="t" lIns="0" rIns="0" tIns="0" bIns="0">
+            <a:spAutoFit/>
+          </a:bodyPr>
+          <a:lstStyle/>
+          <a:p>
+            <a:pPr algn="r">
               <a:lnSpc>
-                <a:spcPct val="112000"/>
+                <a:spcPct val="110000"/>
               </a:lnSpc>
               <a:spcBef>
                 <a:spcPts val="0"/>
               </a:spcBef>
               <a:spcAft>
-                <a:spcPts val="600"/>
+                <a:spcPts val="500"/>
               </a:spcAft>
             </a:pPr>
             <a:r>
-              <a:rPr sz="1600" b="1" i="0">
-                <a:solidFill>
-                  <a:srgbClr val="0F768E"/>
-                </a:solidFill>
-                <a:latin typeface="Microsoft JhengHei"/>
-              </a:rPr>
-              <a:t>▸ </a:t>
-            </a:r>
-            <a:r>
-              <a:rPr sz="1600" b="1" i="0">
-                <a:solidFill>
-                  <a:srgbClr val="E86A33"/>
-                </a:solidFill>
-                <a:latin typeface="Microsoft JhengHei"/>
-              </a:rPr>
-              <a:t>關鍵：偽標可規模化。</a:t>
-            </a:r>
-            <a:r>
-              <a:rPr sz="1600" b="0" i="0">
-                <a:solidFill>
-                  <a:srgbClr val="1A1A2E"/>
-                </a:solidFill>
-                <a:latin typeface="Microsoft JhengHei"/>
-              </a:rPr>
-              <a:t>Depth Anything V2 + RAFT/FlowSeek (2509.05297) → 任意真實影片自動生 depth/flow。</a:t>
-            </a:r>
-          </a:p>
-        </p:txBody>
-      </p:sp>
-      <p:sp>
-        <p:nvSpPr>
-          <p:cNvPr id="9" name="Rounded Rectangle 8"/>
-          <p:cNvSpPr/>
-          <p:nvPr/>
-        </p:nvSpPr>
-        <p:spPr>
-          <a:xfrm>
-            <a:off x="640080" y="5166360"/>
-            <a:ext cx="10881360" cy="731520"/>
-          </a:xfrm>
-          <a:prstGeom prst="roundRect">
-            <a:avLst/>
-          </a:prstGeom>
-          <a:solidFill>
-            <a:srgbClr val="ECF5F0"/>
-          </a:solidFill>
-          <a:ln>
-            <a:noFill/>
-          </a:ln>
-          <a:effectLst/>
-        </p:spPr>
-        <p:style>
-          <a:lnRef idx="1">
-            <a:schemeClr val="accent1"/>
-          </a:lnRef>
-          <a:fillRef idx="3">
-            <a:schemeClr val="accent1"/>
-          </a:fillRef>
-          <a:effectRef idx="2">
-            <a:schemeClr val="accent1"/>
-          </a:effectRef>
-          <a:fontRef idx="minor">
-            <a:schemeClr val="lt1"/>
-          </a:fontRef>
-        </p:style>
-        <p:txBody>
-          <a:bodyPr rtlCol="0" anchor="ctr"/>
-          <a:lstStyle/>
-          <a:p>
-            <a:pPr algn="ctr"/>
-          </a:p>
-        </p:txBody>
-      </p:sp>
-      <p:sp>
-        <p:nvSpPr>
-          <p:cNvPr id="10" name="Rectangle 9"/>
-          <p:cNvSpPr/>
-          <p:nvPr/>
-        </p:nvSpPr>
-        <p:spPr>
-          <a:xfrm>
-            <a:off x="640080" y="5166360"/>
-            <a:ext cx="146304" cy="731520"/>
-          </a:xfrm>
-          <a:prstGeom prst="rect">
-            <a:avLst/>
-          </a:prstGeom>
-          <a:solidFill>
-            <a:srgbClr val="E86A33"/>
-          </a:solidFill>
-          <a:ln>
-            <a:noFill/>
-          </a:ln>
-          <a:effectLst/>
-        </p:spPr>
-        <p:style>
-          <a:lnRef idx="1">
-            <a:schemeClr val="accent1"/>
-          </a:lnRef>
-          <a:fillRef idx="3">
-            <a:schemeClr val="accent1"/>
-          </a:fillRef>
-          <a:effectRef idx="2">
-            <a:schemeClr val="accent1"/>
-          </a:effectRef>
-          <a:fontRef idx="minor">
-            <a:schemeClr val="lt1"/>
-          </a:fontRef>
-        </p:style>
-        <p:txBody>
-          <a:bodyPr rtlCol="0" anchor="ctr"/>
-          <a:lstStyle/>
-          <a:p>
-            <a:pPr algn="ctr"/>
-          </a:p>
-        </p:txBody>
-      </p:sp>
-      <p:sp>
-        <p:nvSpPr>
-          <p:cNvPr id="11" name="Rounded Rectangle 10"/>
-          <p:cNvSpPr/>
-          <p:nvPr/>
-        </p:nvSpPr>
-        <p:spPr>
-          <a:xfrm>
-            <a:off x="868680" y="5330952"/>
-            <a:ext cx="960120" cy="402336"/>
-          </a:xfrm>
-          <a:prstGeom prst="roundRect">
-            <a:avLst/>
-          </a:prstGeom>
-          <a:solidFill>
-            <a:srgbClr val="E86A33"/>
-          </a:solidFill>
-          <a:ln>
-            <a:noFill/>
-          </a:ln>
-          <a:effectLst/>
-        </p:spPr>
-        <p:style>
-          <a:lnRef idx="1">
-            <a:schemeClr val="accent1"/>
-          </a:lnRef>
-          <a:fillRef idx="3">
-            <a:schemeClr val="accent1"/>
-          </a:fillRef>
-          <a:effectRef idx="2">
-            <a:schemeClr val="accent1"/>
-          </a:effectRef>
-          <a:fontRef idx="minor">
-            <a:schemeClr val="lt1"/>
-          </a:fontRef>
-        </p:style>
-        <p:txBody>
-          <a:bodyPr rtlCol="0" anchor="ctr"/>
-          <a:lstStyle/>
-          <a:p>
-            <a:pPr algn="ctr"/>
-          </a:p>
-        </p:txBody>
-      </p:sp>
-      <p:sp>
-        <p:nvSpPr>
-          <p:cNvPr id="12" name="TextBox 11"/>
-          <p:cNvSpPr txBox="1"/>
-          <p:nvPr/>
-        </p:nvSpPr>
-        <p:spPr>
-          <a:xfrm>
-            <a:off x="868680" y="5330952"/>
-            <a:ext cx="960120" cy="402336"/>
-          </a:xfrm>
-          <a:prstGeom prst="rect">
-            <a:avLst/>
-          </a:prstGeom>
-          <a:noFill/>
-        </p:spPr>
-        <p:txBody>
-          <a:bodyPr wrap="square" anchor="ctr" lIns="0" rIns="0" tIns="0" bIns="0">
-            <a:spAutoFit/>
-          </a:bodyPr>
-          <a:lstStyle/>
-          <a:p>
-            <a:pPr algn="ctr">
-              <a:lnSpc>
-                <a:spcPct val="108000"/>
-              </a:lnSpc>
-              <a:spcBef>
-                <a:spcPts val="0"/>
-              </a:spcBef>
-              <a:spcAft>
-                <a:spcPts val="600"/>
-              </a:spcAft>
-            </a:pPr>
-            <a:r>
-              <a:rPr sz="1500" b="1" i="0">
-                <a:solidFill>
-                  <a:srgbClr val="FFFFFF"/>
-                </a:solidFill>
-                <a:latin typeface="Microsoft JhengHei"/>
-              </a:rPr>
-              <a:t>結論</a:t>
-            </a:r>
-          </a:p>
-        </p:txBody>
-      </p:sp>
-      <p:sp>
-        <p:nvSpPr>
-          <p:cNvPr id="13" name="TextBox 12"/>
-          <p:cNvSpPr txBox="1"/>
-          <p:nvPr/>
-        </p:nvSpPr>
-        <p:spPr>
-          <a:xfrm>
-            <a:off x="2011680" y="5166360"/>
-            <a:ext cx="9326880" cy="731520"/>
-          </a:xfrm>
-          <a:prstGeom prst="rect">
-            <a:avLst/>
-          </a:prstGeom>
-          <a:noFill/>
-        </p:spPr>
-        <p:txBody>
-          <a:bodyPr wrap="square" anchor="ctr" lIns="0" rIns="0" tIns="0" bIns="0">
-            <a:spAutoFit/>
-          </a:bodyPr>
-          <a:lstStyle/>
-          <a:p>
-            <a:pPr algn="l">
-              <a:lnSpc>
-                <a:spcPct val="105000"/>
-              </a:lnSpc>
-              <a:spcBef>
-                <a:spcPts val="0"/>
-              </a:spcBef>
-              <a:spcAft>
-                <a:spcPts val="600"/>
-              </a:spcAft>
-            </a:pPr>
-            <a:r>
-              <a:rPr sz="1450" b="1" i="0">
-                <a:solidFill>
-                  <a:srgbClr val="1A1A2E"/>
-                </a:solidFill>
-                <a:latin typeface="Microsoft JhengHei"/>
-              </a:rPr>
-              <a:t>有現成 GT 資料先驗證概念，</a:t>
-            </a:r>
-            <a:r>
-              <a:rPr sz="1450" b="0" i="0">
-                <a:solidFill>
-                  <a:srgbClr val="1A1A2E"/>
-                </a:solidFill>
-                <a:latin typeface="Microsoft JhengHei"/>
-              </a:rPr>
-              <a:t>再靠基礎模型偽標把 reward 擴到大規模真實影片。</a:t>
-            </a:r>
-          </a:p>
-        </p:txBody>
-      </p:sp>
-      <p:sp>
-        <p:nvSpPr>
-          <p:cNvPr id="14" name="TextBox 13"/>
-          <p:cNvSpPr txBox="1"/>
-          <p:nvPr/>
-        </p:nvSpPr>
-        <p:spPr>
-          <a:xfrm>
-            <a:off x="640080" y="6035040"/>
-            <a:ext cx="10972800" cy="320040"/>
-          </a:xfrm>
-          <a:prstGeom prst="rect">
-            <a:avLst/>
-          </a:prstGeom>
-          <a:noFill/>
-        </p:spPr>
-        <p:txBody>
-          <a:bodyPr wrap="square" anchor="t" lIns="0" rIns="0" tIns="0" bIns="0">
-            <a:spAutoFit/>
-          </a:bodyPr>
-          <a:lstStyle/>
-          <a:p>
-            <a:pPr algn="l">
-              <a:lnSpc>
-                <a:spcPct val="108000"/>
-              </a:lnSpc>
-              <a:spcBef>
-                <a:spcPts val="0"/>
-              </a:spcBef>
-              <a:spcAft>
-                <a:spcPts val="600"/>
-              </a:spcAft>
-            </a:pPr>
-            <a:r>
-              <a:rPr sz="1000" b="1" i="0">
-                <a:solidFill>
-                  <a:srgbClr val="5B6370"/>
-                </a:solidFill>
-                <a:latin typeface="Microsoft JhengHei"/>
-              </a:rPr>
-              <a:t>▸ 依據：</a:t>
-            </a:r>
-            <a:r>
-              <a:rPr sz="1000" b="0" i="1">
-                <a:solidFill>
-                  <a:srgbClr val="5B6370"/>
+              <a:rPr sz="900" b="0" i="0">
+                <a:solidFill>
+                  <a:srgbClr val="555B63"/>
                 </a:solidFill>
                 <a:latin typeface="Segoe UI"/>
               </a:rPr>
-              <a:t>ARKitScenes 2111.08897 · Spring · Virtual KITTI 2 · Dynamic Replica · Depth Anything V2 (NeurIPS'24) · FlowSeek 2509.05297</a:t>
-            </a:r>
-          </a:p>
-        </p:txBody>
-      </p:sp>
-      <p:sp>
-        <p:nvSpPr>
-          <p:cNvPr id="15" name="TextBox 14"/>
-          <p:cNvSpPr txBox="1"/>
-          <p:nvPr/>
-        </p:nvSpPr>
-        <p:spPr>
-          <a:xfrm>
-            <a:off x="10424160" y="6455664"/>
-            <a:ext cx="1554480" cy="274320"/>
-          </a:xfrm>
-          <a:prstGeom prst="rect">
-            <a:avLst/>
-          </a:prstGeom>
-          <a:noFill/>
-        </p:spPr>
-        <p:txBody>
-          <a:bodyPr wrap="square" anchor="t" lIns="0" rIns="0" tIns="0" bIns="0">
-            <a:spAutoFit/>
-          </a:bodyPr>
-          <a:lstStyle/>
-          <a:p>
-            <a:pPr algn="r">
-              <a:lnSpc>
-                <a:spcPct val="108000"/>
-              </a:lnSpc>
-              <a:spcBef>
-                <a:spcPts val="0"/>
-              </a:spcBef>
-              <a:spcAft>
-                <a:spcPts val="600"/>
-              </a:spcAft>
-            </a:pPr>
-            <a:r>
-              <a:rPr sz="900" b="0" i="0">
-                <a:solidFill>
-                  <a:srgbClr val="5B6370"/>
-                </a:solidFill>
-                <a:latin typeface="Segoe UI"/>
-              </a:rPr>
-              <a:t>待辦回答 · 4/7</a:t>
+              <a:t>4/9 · 草稿</a:t>
             </a:r>
           </a:p>
         </p:txBody>
@@ -7239,20 +6318,74 @@
       </p:sp>
       <p:sp>
         <p:nvSpPr>
-          <p:cNvPr id="3" name="Oval 2"/>
+          <p:cNvPr id="3" name="TextBox 2"/>
+          <p:cNvSpPr txBox="1"/>
+          <p:nvPr/>
+        </p:nvSpPr>
+        <p:spPr>
+          <a:xfrm>
+            <a:off x="640080" y="384048"/>
+            <a:ext cx="10881360" cy="365760"/>
+          </a:xfrm>
+          <a:prstGeom prst="rect">
+            <a:avLst/>
+          </a:prstGeom>
+          <a:noFill/>
+        </p:spPr>
+        <p:txBody>
+          <a:bodyPr wrap="square" anchor="t" lIns="0" rIns="0" tIns="0" bIns="0">
+            <a:spAutoFit/>
+          </a:bodyPr>
+          <a:lstStyle/>
+          <a:p>
+            <a:pPr algn="l">
+              <a:lnSpc>
+                <a:spcPct val="110000"/>
+              </a:lnSpc>
+              <a:spcBef>
+                <a:spcPts val="0"/>
+              </a:spcBef>
+              <a:spcAft>
+                <a:spcPts val="500"/>
+              </a:spcAft>
+            </a:pPr>
+            <a:r>
+              <a:rPr sz="1500" b="1" i="0">
+                <a:solidFill>
+                  <a:srgbClr val="0F768E"/>
+                </a:solidFill>
+                <a:latin typeface="Segoe UI"/>
+              </a:rPr>
+              <a:t>Q5　</a:t>
+            </a:r>
+            <a:r>
+              <a:rPr sz="1250" b="0" i="0">
+                <a:solidFill>
+                  <a:srgbClr val="555B63"/>
+                </a:solidFill>
+                <a:latin typeface="Microsoft JhengHei"/>
+              </a:rPr>
+              <a:t>depth / flow 以外還有哪些證據模態?</a:t>
+            </a:r>
+          </a:p>
+        </p:txBody>
+      </p:sp>
+      <p:sp>
+        <p:nvSpPr>
+          <p:cNvPr id="4" name="Rectangle 3"/>
           <p:cNvSpPr/>
           <p:nvPr/>
         </p:nvSpPr>
         <p:spPr>
           <a:xfrm>
-            <a:off x="640080" y="457200"/>
-            <a:ext cx="566928" cy="566928"/>
-          </a:xfrm>
-          <a:prstGeom prst="ellipse">
+            <a:off x="640080" y="804672"/>
+            <a:ext cx="10881360" cy="14630"/>
+          </a:xfrm>
+          <a:prstGeom prst="rect">
             <a:avLst/>
           </a:prstGeom>
           <a:solidFill>
-            <a:srgbClr val="0F768E"/>
+            <a:srgbClr val="DDDDDD"/>
           </a:solidFill>
           <a:ln>
             <a:noFill/>
@@ -7283,14 +6416,14 @@
       </p:sp>
       <p:sp>
         <p:nvSpPr>
-          <p:cNvPr id="4" name="TextBox 3"/>
+          <p:cNvPr id="5" name="TextBox 4"/>
           <p:cNvSpPr txBox="1"/>
           <p:nvPr/>
         </p:nvSpPr>
         <p:spPr>
           <a:xfrm>
-            <a:off x="640080" y="457200"/>
-            <a:ext cx="566928" cy="566928"/>
+            <a:off x="640080" y="960120"/>
+            <a:ext cx="10972800" cy="777240"/>
           </a:xfrm>
           <a:prstGeom prst="rect">
             <a:avLst/>
@@ -7298,14 +6431,59 @@
           <a:noFill/>
         </p:spPr>
         <p:txBody>
-          <a:bodyPr wrap="square" anchor="ctr" lIns="0" rIns="0" tIns="0" bIns="0">
+          <a:bodyPr wrap="square" anchor="t" lIns="0" rIns="0" tIns="0" bIns="0">
             <a:spAutoFit/>
           </a:bodyPr>
           <a:lstStyle/>
           <a:p>
-            <a:pPr algn="ctr">
+            <a:pPr algn="l">
               <a:lnSpc>
-                <a:spcPct val="108000"/>
+                <a:spcPct val="106000"/>
+              </a:lnSpc>
+              <a:spcBef>
+                <a:spcPts val="0"/>
+              </a:spcBef>
+              <a:spcAft>
+                <a:spcPts val="500"/>
+              </a:spcAft>
+            </a:pPr>
+            <a:r>
+              <a:rPr sz="2100" b="1" i="0">
+                <a:solidFill>
+                  <a:srgbClr val="111111"/>
+                </a:solidFill>
+                <a:latin typeface="Microsoft JhengHei"/>
+              </a:rPr>
+              <a:t>候選裡最貼 4D:scene flow 與 3D 點追蹤;但「更好」目前只是推論</a:t>
+            </a:r>
+          </a:p>
+        </p:txBody>
+      </p:sp>
+      <p:sp>
+        <p:nvSpPr>
+          <p:cNvPr id="6" name="TextBox 5"/>
+          <p:cNvSpPr txBox="1"/>
+          <p:nvPr/>
+        </p:nvSpPr>
+        <p:spPr>
+          <a:xfrm>
+            <a:off x="640080" y="1828800"/>
+            <a:ext cx="10881360" cy="3291840"/>
+          </a:xfrm>
+          <a:prstGeom prst="rect">
+            <a:avLst/>
+          </a:prstGeom>
+          <a:noFill/>
+        </p:spPr>
+        <p:txBody>
+          <a:bodyPr wrap="square" anchor="t" lIns="0" rIns="0" tIns="0" bIns="0">
+            <a:spAutoFit/>
+          </a:bodyPr>
+          <a:lstStyle/>
+          <a:p>
+            <a:pPr algn="l">
+              <a:lnSpc>
+                <a:spcPct val="115000"/>
               </a:lnSpc>
               <a:spcBef>
                 <a:spcPts val="0"/>
@@ -7315,42 +6493,28 @@
               </a:spcAft>
             </a:pPr>
             <a:r>
-              <a:rPr sz="2200" b="1" i="0">
-                <a:solidFill>
-                  <a:srgbClr val="FFFFFF"/>
+              <a:rPr sz="1400" b="0" i="0">
+                <a:solidFill>
+                  <a:srgbClr val="555B63"/>
                 </a:solidFill>
                 <a:latin typeface="Segoe UI"/>
               </a:rPr>
-              <a:t>5</a:t>
-            </a:r>
-          </a:p>
-        </p:txBody>
-      </p:sp>
-      <p:sp>
-        <p:nvSpPr>
-          <p:cNvPr id="5" name="TextBox 4"/>
-          <p:cNvSpPr txBox="1"/>
-          <p:nvPr/>
-        </p:nvSpPr>
-        <p:spPr>
-          <a:xfrm>
-            <a:off x="1371600" y="475488"/>
-            <a:ext cx="10241280" cy="548640"/>
-          </a:xfrm>
-          <a:prstGeom prst="rect">
-            <a:avLst/>
-          </a:prstGeom>
-          <a:noFill/>
-        </p:spPr>
-        <p:txBody>
-          <a:bodyPr wrap="square" anchor="t" lIns="0" rIns="0" tIns="0" bIns="0">
-            <a:spAutoFit/>
-          </a:bodyPr>
-          <a:lstStyle/>
+              <a:t>— </a:t>
+            </a:r>
+            <a:r>
+              <a:rPr sz="1400" b="0" i="0">
+                <a:solidFill>
+                  <a:srgbClr val="111111"/>
+                </a:solidFill>
+                <a:latin typeface="Microsoft JhengHei"/>
+              </a:rPr>
+              <a:t>scene flow(3D 運動場):把 depth+flow 合為單一訊號。GT:Virtual KITTI 2 / FlyingThings3D。</a:t>
+            </a:r>
+          </a:p>
           <a:p>
             <a:pPr algn="l">
               <a:lnSpc>
-                <a:spcPct val="108000"/>
+                <a:spcPct val="115000"/>
               </a:lnSpc>
               <a:spcBef>
                 <a:spcPts val="0"/>
@@ -7360,42 +6524,28 @@
               </a:spcAft>
             </a:pPr>
             <a:r>
-              <a:rPr sz="1300" b="1" i="0">
-                <a:solidFill>
-                  <a:srgbClr val="0F768E"/>
+              <a:rPr sz="1400" b="0" i="0">
+                <a:solidFill>
+                  <a:srgbClr val="555B63"/>
+                </a:solidFill>
+                <a:latin typeface="Segoe UI"/>
+              </a:rPr>
+              <a:t>— </a:t>
+            </a:r>
+            <a:r>
+              <a:rPr sz="1400" b="0" i="0">
+                <a:solidFill>
+                  <a:srgbClr val="111111"/>
                 </a:solidFill>
                 <a:latin typeface="Microsoft JhengHei"/>
               </a:rPr>
-              <a:t>待辦事項 5</a:t>
-            </a:r>
-          </a:p>
-        </p:txBody>
-      </p:sp>
-      <p:sp>
-        <p:nvSpPr>
-          <p:cNvPr id="6" name="TextBox 5"/>
-          <p:cNvSpPr txBox="1"/>
-          <p:nvPr/>
-        </p:nvSpPr>
-        <p:spPr>
-          <a:xfrm>
-            <a:off x="1371600" y="822960"/>
-            <a:ext cx="10424160" cy="502920"/>
-          </a:xfrm>
-          <a:prstGeom prst="rect">
-            <a:avLst/>
-          </a:prstGeom>
-          <a:noFill/>
-        </p:spPr>
-        <p:txBody>
-          <a:bodyPr wrap="square" anchor="t" lIns="0" rIns="0" tIns="0" bIns="0">
-            <a:spAutoFit/>
-          </a:bodyPr>
-          <a:lstStyle/>
+              <a:t>3D 點追蹤:直接量時間一致性(VLM4D 指出的弱點)。GT:PointOdyssey / Dynamic Replica。</a:t>
+            </a:r>
+          </a:p>
           <a:p>
             <a:pPr algn="l">
               <a:lnSpc>
-                <a:spcPct val="108000"/>
+                <a:spcPct val="115000"/>
               </a:lnSpc>
               <a:spcBef>
                 <a:spcPts val="0"/>
@@ -7405,13 +6555,22 @@
               </a:spcAft>
             </a:pPr>
             <a:r>
-              <a:rPr sz="1300" b="0" i="1">
-                <a:solidFill>
-                  <a:srgbClr val="5B6370"/>
+              <a:rPr sz="1400" b="0" i="0">
+                <a:solidFill>
+                  <a:srgbClr val="555B63"/>
+                </a:solidFill>
+                <a:latin typeface="Segoe UI"/>
+              </a:rPr>
+              <a:t>— </a:t>
+            </a:r>
+            <a:r>
+              <a:rPr sz="1400" b="0" i="0">
+                <a:solidFill>
+                  <a:srgbClr val="111111"/>
                 </a:solidFill>
                 <a:latin typeface="Microsoft JhengHei"/>
               </a:rPr>
-              <a:t>探索 depth / flow 以外的其他證據模態。</a:t>
+              <a:t>其他:相機位姿、表面法線、分割遮罩、點雲、BEV、多視角一致性。</a:t>
             </a:r>
           </a:p>
         </p:txBody>
@@ -7424,8 +6583,8 @@
         </p:nvSpPr>
         <p:spPr>
           <a:xfrm>
-            <a:off x="640080" y="1600200"/>
-            <a:ext cx="10972800" cy="914400"/>
+            <a:off x="640080" y="5806440"/>
+            <a:ext cx="10881360" cy="594360"/>
           </a:xfrm>
           <a:prstGeom prst="rect">
             <a:avLst/>
@@ -7440,59 +6599,32 @@
           <a:p>
             <a:pPr algn="l">
               <a:lnSpc>
-                <a:spcPct val="106000"/>
+                <a:spcPct val="110000"/>
               </a:lnSpc>
               <a:spcBef>
                 <a:spcPts val="0"/>
               </a:spcBef>
               <a:spcAft>
-                <a:spcPts val="600"/>
+                <a:spcPts val="500"/>
               </a:spcAft>
             </a:pPr>
             <a:r>
-              <a:rPr sz="2200" b="1" i="0">
-                <a:solidFill>
-                  <a:srgbClr val="1A1A2E"/>
+              <a:rPr sz="1150" b="1" i="0">
+                <a:solidFill>
+                  <a:srgbClr val="B44A1E"/>
                 </a:solidFill>
                 <a:latin typeface="Microsoft JhengHei"/>
               </a:rPr>
-              <a:t>最貼 4D 的是 </a:t>
-            </a:r>
-            <a:r>
-              <a:rPr sz="2200" b="1" i="0">
-                <a:solidFill>
-                  <a:srgbClr val="0F768E"/>
+              <a:t>未驗證：</a:t>
+            </a:r>
+            <a:r>
+              <a:rPr sz="1150" b="0" i="0">
+                <a:solidFill>
+                  <a:srgbClr val="111111"/>
                 </a:solidFill>
                 <a:latin typeface="Microsoft JhengHei"/>
               </a:rPr>
-              <a:t>scene-flow</a:t>
-            </a:r>
-            <a:r>
-              <a:rPr sz="2200" b="1" i="0">
-                <a:solidFill>
-                  <a:srgbClr val="1A1A2E"/>
-                </a:solidFill>
-                <a:latin typeface="Microsoft JhengHei"/>
-              </a:rPr>
-              <a:t> 與 </a:t>
-            </a:r>
-            <a:r>
-              <a:rPr sz="2200" b="1" i="0">
-                <a:solidFill>
-                  <a:srgbClr val="0F768E"/>
-                </a:solidFill>
-                <a:latin typeface="Microsoft JhengHei"/>
-              </a:rPr>
-              <a:t>3D 點追蹤</a:t>
-            </a:r>
-            <a:r>
-              <a:rPr sz="2200" b="1" i="0">
-                <a:solidFill>
-                  <a:srgbClr val="1A1A2E"/>
-                </a:solidFill>
-                <a:latin typeface="Microsoft JhengHei"/>
-              </a:rPr>
-              <a:t>——統一運動、直擊時間一致性</a:t>
+              <a:t>scene-flow / 點追蹤的「任意影片偽標」工具成熟度未查(是否有 Depth-Anything 等級的基礎模型);「比 2D flow 更好」無實驗依據。第一版訊號選擇(成熟的 2D flow vs 更貼 4D 的 scene flow)是 scope 決策。</a:t>
             </a:r>
           </a:p>
         </p:txBody>
@@ -7505,8 +6637,8 @@
         </p:nvSpPr>
         <p:spPr>
           <a:xfrm>
-            <a:off x="685800" y="2606040"/>
-            <a:ext cx="10881360" cy="2377440"/>
+            <a:off x="640080" y="6355080"/>
+            <a:ext cx="10058400" cy="320040"/>
           </a:xfrm>
           <a:prstGeom prst="rect">
             <a:avLst/>
@@ -7521,451 +6653,77 @@
           <a:p>
             <a:pPr algn="l">
               <a:lnSpc>
-                <a:spcPct val="112000"/>
+                <a:spcPct val="110000"/>
               </a:lnSpc>
               <a:spcBef>
                 <a:spcPts val="0"/>
               </a:spcBef>
               <a:spcAft>
-                <a:spcPts val="600"/>
+                <a:spcPts val="500"/>
               </a:spcAft>
             </a:pPr>
             <a:r>
-              <a:rPr sz="1600" b="1" i="0">
-                <a:solidFill>
-                  <a:srgbClr val="0F768E"/>
+              <a:rPr sz="950" b="1" i="0">
+                <a:solidFill>
+                  <a:srgbClr val="555B63"/>
                 </a:solidFill>
                 <a:latin typeface="Microsoft JhengHei"/>
               </a:rPr>
-              <a:t>▸ </a:t>
-            </a:r>
-            <a:r>
-              <a:rPr sz="1600" b="1" i="0">
-                <a:solidFill>
-                  <a:srgbClr val="0F768E"/>
-                </a:solidFill>
-                <a:latin typeface="Microsoft JhengHei"/>
-              </a:rPr>
-              <a:t>Scene flow（3D 運動場）：</a:t>
-            </a:r>
-            <a:r>
-              <a:rPr sz="1600" b="0" i="0">
-                <a:solidFill>
-                  <a:srgbClr val="1A1A2E"/>
-                </a:solidFill>
-                <a:latin typeface="Microsoft JhengHei"/>
-              </a:rPr>
-              <a:t>把 depth+flow 統一於單一訊號，才是真正的「4D 證據」。</a:t>
-            </a:r>
-          </a:p>
-          <a:p>
-            <a:pPr algn="l">
+              <a:t>依據：</a:t>
+            </a:r>
+            <a:r>
+              <a:rPr sz="950" b="0" i="1">
+                <a:solidFill>
+                  <a:srgbClr val="555B63"/>
+                </a:solidFill>
+                <a:latin typeface="Segoe UI"/>
+              </a:rPr>
+              <a:t>資料集見 notes/C_資料集與證據模態.md;N3D-VLM 2512.16561 · SpaceMind 2511.23075</a:t>
+            </a:r>
+          </a:p>
+        </p:txBody>
+      </p:sp>
+      <p:sp>
+        <p:nvSpPr>
+          <p:cNvPr id="9" name="TextBox 8"/>
+          <p:cNvSpPr txBox="1"/>
+          <p:nvPr/>
+        </p:nvSpPr>
+        <p:spPr>
+          <a:xfrm>
+            <a:off x="10881360" y="6510528"/>
+            <a:ext cx="1097280" cy="274320"/>
+          </a:xfrm>
+          <a:prstGeom prst="rect">
+            <a:avLst/>
+          </a:prstGeom>
+          <a:noFill/>
+        </p:spPr>
+        <p:txBody>
+          <a:bodyPr wrap="square" anchor="t" lIns="0" rIns="0" tIns="0" bIns="0">
+            <a:spAutoFit/>
+          </a:bodyPr>
+          <a:lstStyle/>
+          <a:p>
+            <a:pPr algn="r">
               <a:lnSpc>
-                <a:spcPct val="112000"/>
+                <a:spcPct val="110000"/>
               </a:lnSpc>
               <a:spcBef>
                 <a:spcPts val="0"/>
               </a:spcBef>
               <a:spcAft>
-                <a:spcPts val="600"/>
+                <a:spcPts val="500"/>
               </a:spcAft>
             </a:pPr>
             <a:r>
-              <a:rPr sz="1600" b="1" i="0">
-                <a:solidFill>
-                  <a:srgbClr val="0F768E"/>
-                </a:solidFill>
-                <a:latin typeface="Microsoft JhengHei"/>
-              </a:rPr>
-              <a:t>▸ </a:t>
-            </a:r>
-            <a:r>
-              <a:rPr sz="1600" b="1" i="0">
-                <a:solidFill>
-                  <a:srgbClr val="0F768E"/>
-                </a:solidFill>
-                <a:latin typeface="Microsoft JhengHei"/>
-              </a:rPr>
-              <a:t>3D 點追蹤 / 跨幀對應：</a:t>
-            </a:r>
-            <a:r>
-              <a:rPr sz="1600" b="0" i="0">
-                <a:solidFill>
-                  <a:srgbClr val="1A1A2E"/>
-                </a:solidFill>
-                <a:latin typeface="Microsoft JhengHei"/>
-              </a:rPr>
-              <a:t>直接量測時間一致性（正是 VLM4D 診斷的弱點）。</a:t>
-            </a:r>
-          </a:p>
-          <a:p>
-            <a:pPr algn="l">
-              <a:lnSpc>
-                <a:spcPct val="112000"/>
-              </a:lnSpc>
-              <a:spcBef>
-                <a:spcPts val="0"/>
-              </a:spcBef>
-              <a:spcAft>
-                <a:spcPts val="600"/>
-              </a:spcAft>
-            </a:pPr>
-            <a:r>
-              <a:rPr sz="1600" b="1" i="0">
-                <a:solidFill>
-                  <a:srgbClr val="0F768E"/>
-                </a:solidFill>
-                <a:latin typeface="Microsoft JhengHei"/>
-              </a:rPr>
-              <a:t>▸ </a:t>
-            </a:r>
-            <a:r>
-              <a:rPr sz="1600" b="1" i="0">
-                <a:solidFill>
-                  <a:srgbClr val="1A1A2E"/>
-                </a:solidFill>
-                <a:latin typeface="Microsoft JhengHei"/>
-              </a:rPr>
-              <a:t>其他候選：</a:t>
-            </a:r>
-            <a:r>
-              <a:rPr sz="1600" b="0" i="0">
-                <a:solidFill>
-                  <a:srgbClr val="1A1A2E"/>
-                </a:solidFill>
-                <a:latin typeface="Microsoft JhengHei"/>
-              </a:rPr>
-              <a:t>相機位姿、表面法線、分割遮罩、點雲/體素、BEV(GPT4Scene)、多視角一致性。</a:t>
-            </a:r>
-          </a:p>
-        </p:txBody>
-      </p:sp>
-      <p:sp>
-        <p:nvSpPr>
-          <p:cNvPr id="9" name="Rounded Rectangle 8"/>
-          <p:cNvSpPr/>
-          <p:nvPr/>
-        </p:nvSpPr>
-        <p:spPr>
-          <a:xfrm>
-            <a:off x="640080" y="5166360"/>
-            <a:ext cx="10881360" cy="731520"/>
-          </a:xfrm>
-          <a:prstGeom prst="roundRect">
-            <a:avLst/>
-          </a:prstGeom>
-          <a:solidFill>
-            <a:srgbClr val="EFF6F8"/>
-          </a:solidFill>
-          <a:ln>
-            <a:noFill/>
-          </a:ln>
-          <a:effectLst/>
-        </p:spPr>
-        <p:style>
-          <a:lnRef idx="1">
-            <a:schemeClr val="accent1"/>
-          </a:lnRef>
-          <a:fillRef idx="3">
-            <a:schemeClr val="accent1"/>
-          </a:fillRef>
-          <a:effectRef idx="2">
-            <a:schemeClr val="accent1"/>
-          </a:effectRef>
-          <a:fontRef idx="minor">
-            <a:schemeClr val="lt1"/>
-          </a:fontRef>
-        </p:style>
-        <p:txBody>
-          <a:bodyPr rtlCol="0" anchor="ctr"/>
-          <a:lstStyle/>
-          <a:p>
-            <a:pPr algn="ctr"/>
-          </a:p>
-        </p:txBody>
-      </p:sp>
-      <p:sp>
-        <p:nvSpPr>
-          <p:cNvPr id="10" name="Rectangle 9"/>
-          <p:cNvSpPr/>
-          <p:nvPr/>
-        </p:nvSpPr>
-        <p:spPr>
-          <a:xfrm>
-            <a:off x="640080" y="5166360"/>
-            <a:ext cx="146304" cy="731520"/>
-          </a:xfrm>
-          <a:prstGeom prst="rect">
-            <a:avLst/>
-          </a:prstGeom>
-          <a:solidFill>
-            <a:srgbClr val="0F768E"/>
-          </a:solidFill>
-          <a:ln>
-            <a:noFill/>
-          </a:ln>
-          <a:effectLst/>
-        </p:spPr>
-        <p:style>
-          <a:lnRef idx="1">
-            <a:schemeClr val="accent1"/>
-          </a:lnRef>
-          <a:fillRef idx="3">
-            <a:schemeClr val="accent1"/>
-          </a:fillRef>
-          <a:effectRef idx="2">
-            <a:schemeClr val="accent1"/>
-          </a:effectRef>
-          <a:fontRef idx="minor">
-            <a:schemeClr val="lt1"/>
-          </a:fontRef>
-        </p:style>
-        <p:txBody>
-          <a:bodyPr rtlCol="0" anchor="ctr"/>
-          <a:lstStyle/>
-          <a:p>
-            <a:pPr algn="ctr"/>
-          </a:p>
-        </p:txBody>
-      </p:sp>
-      <p:sp>
-        <p:nvSpPr>
-          <p:cNvPr id="11" name="Rounded Rectangle 10"/>
-          <p:cNvSpPr/>
-          <p:nvPr/>
-        </p:nvSpPr>
-        <p:spPr>
-          <a:xfrm>
-            <a:off x="868680" y="5330952"/>
-            <a:ext cx="960120" cy="402336"/>
-          </a:xfrm>
-          <a:prstGeom prst="roundRect">
-            <a:avLst/>
-          </a:prstGeom>
-          <a:solidFill>
-            <a:srgbClr val="0F768E"/>
-          </a:solidFill>
-          <a:ln>
-            <a:noFill/>
-          </a:ln>
-          <a:effectLst/>
-        </p:spPr>
-        <p:style>
-          <a:lnRef idx="1">
-            <a:schemeClr val="accent1"/>
-          </a:lnRef>
-          <a:fillRef idx="3">
-            <a:schemeClr val="accent1"/>
-          </a:fillRef>
-          <a:effectRef idx="2">
-            <a:schemeClr val="accent1"/>
-          </a:effectRef>
-          <a:fontRef idx="minor">
-            <a:schemeClr val="lt1"/>
-          </a:fontRef>
-        </p:style>
-        <p:txBody>
-          <a:bodyPr rtlCol="0" anchor="ctr"/>
-          <a:lstStyle/>
-          <a:p>
-            <a:pPr algn="ctr"/>
-          </a:p>
-        </p:txBody>
-      </p:sp>
-      <p:sp>
-        <p:nvSpPr>
-          <p:cNvPr id="12" name="TextBox 11"/>
-          <p:cNvSpPr txBox="1"/>
-          <p:nvPr/>
-        </p:nvSpPr>
-        <p:spPr>
-          <a:xfrm>
-            <a:off x="868680" y="5330952"/>
-            <a:ext cx="960120" cy="402336"/>
-          </a:xfrm>
-          <a:prstGeom prst="rect">
-            <a:avLst/>
-          </a:prstGeom>
-          <a:noFill/>
-        </p:spPr>
-        <p:txBody>
-          <a:bodyPr wrap="square" anchor="ctr" lIns="0" rIns="0" tIns="0" bIns="0">
-            <a:spAutoFit/>
-          </a:bodyPr>
-          <a:lstStyle/>
-          <a:p>
-            <a:pPr algn="ctr">
-              <a:lnSpc>
-                <a:spcPct val="108000"/>
-              </a:lnSpc>
-              <a:spcBef>
-                <a:spcPts val="0"/>
-              </a:spcBef>
-              <a:spcAft>
-                <a:spcPts val="600"/>
-              </a:spcAft>
-            </a:pPr>
-            <a:r>
-              <a:rPr sz="1500" b="1" i="0">
-                <a:solidFill>
-                  <a:srgbClr val="FFFFFF"/>
-                </a:solidFill>
-                <a:latin typeface="Microsoft JhengHei"/>
-              </a:rPr>
-              <a:t>結論</a:t>
-            </a:r>
-          </a:p>
-        </p:txBody>
-      </p:sp>
-      <p:sp>
-        <p:nvSpPr>
-          <p:cNvPr id="13" name="TextBox 12"/>
-          <p:cNvSpPr txBox="1"/>
-          <p:nvPr/>
-        </p:nvSpPr>
-        <p:spPr>
-          <a:xfrm>
-            <a:off x="2011680" y="5166360"/>
-            <a:ext cx="9326880" cy="731520"/>
-          </a:xfrm>
-          <a:prstGeom prst="rect">
-            <a:avLst/>
-          </a:prstGeom>
-          <a:noFill/>
-        </p:spPr>
-        <p:txBody>
-          <a:bodyPr wrap="square" anchor="ctr" lIns="0" rIns="0" tIns="0" bIns="0">
-            <a:spAutoFit/>
-          </a:bodyPr>
-          <a:lstStyle/>
-          <a:p>
-            <a:pPr algn="l">
-              <a:lnSpc>
-                <a:spcPct val="105000"/>
-              </a:lnSpc>
-              <a:spcBef>
-                <a:spcPts val="0"/>
-              </a:spcBef>
-              <a:spcAft>
-                <a:spcPts val="600"/>
-              </a:spcAft>
-            </a:pPr>
-            <a:r>
-              <a:rPr sz="1450" b="1" i="0">
-                <a:solidFill>
-                  <a:srgbClr val="1A1A2E"/>
-                </a:solidFill>
-                <a:latin typeface="Microsoft JhengHei"/>
-              </a:rPr>
-              <a:t>可把 reward 訊號從「2D 光流」升級為「scene-flow / 點追蹤一致性」，</a:t>
-            </a:r>
-            <a:r>
-              <a:rPr sz="1450" b="0" i="0">
-                <a:solidFill>
-                  <a:srgbClr val="1A1A2E"/>
-                </a:solidFill>
-                <a:latin typeface="Microsoft JhengHei"/>
-              </a:rPr>
-              <a:t>新穎度與 4D 契合度更高。</a:t>
-            </a:r>
-          </a:p>
-        </p:txBody>
-      </p:sp>
-      <p:sp>
-        <p:nvSpPr>
-          <p:cNvPr id="14" name="TextBox 13"/>
-          <p:cNvSpPr txBox="1"/>
-          <p:nvPr/>
-        </p:nvSpPr>
-        <p:spPr>
-          <a:xfrm>
-            <a:off x="640080" y="6035040"/>
-            <a:ext cx="10972800" cy="320040"/>
-          </a:xfrm>
-          <a:prstGeom prst="rect">
-            <a:avLst/>
-          </a:prstGeom>
-          <a:noFill/>
-        </p:spPr>
-        <p:txBody>
-          <a:bodyPr wrap="square" anchor="t" lIns="0" rIns="0" tIns="0" bIns="0">
-            <a:spAutoFit/>
-          </a:bodyPr>
-          <a:lstStyle/>
-          <a:p>
-            <a:pPr algn="l">
-              <a:lnSpc>
-                <a:spcPct val="108000"/>
-              </a:lnSpc>
-              <a:spcBef>
-                <a:spcPts val="0"/>
-              </a:spcBef>
-              <a:spcAft>
-                <a:spcPts val="600"/>
-              </a:spcAft>
-            </a:pPr>
-            <a:r>
-              <a:rPr sz="1000" b="1" i="0">
-                <a:solidFill>
-                  <a:srgbClr val="5B6370"/>
-                </a:solidFill>
-                <a:latin typeface="Microsoft JhengHei"/>
-              </a:rPr>
-              <a:t>▸ 依據：</a:t>
-            </a:r>
-            <a:r>
-              <a:rPr sz="1000" b="0" i="1">
-                <a:solidFill>
-                  <a:srgbClr val="5B6370"/>
+              <a:rPr sz="900" b="0" i="0">
+                <a:solidFill>
+                  <a:srgbClr val="555B63"/>
                 </a:solidFill>
                 <a:latin typeface="Segoe UI"/>
               </a:rPr>
-              <a:t>scene flow: Virtual KITTI 2 / FlyingThings3D · 點追蹤: PointOdyssey / Dynamic Replica · N3D-VLM 2512.16561 · SpaceMind 2511.23075</a:t>
-            </a:r>
-          </a:p>
-        </p:txBody>
-      </p:sp>
-      <p:sp>
-        <p:nvSpPr>
-          <p:cNvPr id="15" name="TextBox 14"/>
-          <p:cNvSpPr txBox="1"/>
-          <p:nvPr/>
-        </p:nvSpPr>
-        <p:spPr>
-          <a:xfrm>
-            <a:off x="10424160" y="6455664"/>
-            <a:ext cx="1554480" cy="274320"/>
-          </a:xfrm>
-          <a:prstGeom prst="rect">
-            <a:avLst/>
-          </a:prstGeom>
-          <a:noFill/>
-        </p:spPr>
-        <p:txBody>
-          <a:bodyPr wrap="square" anchor="t" lIns="0" rIns="0" tIns="0" bIns="0">
-            <a:spAutoFit/>
-          </a:bodyPr>
-          <a:lstStyle/>
-          <a:p>
-            <a:pPr algn="r">
-              <a:lnSpc>
-                <a:spcPct val="108000"/>
-              </a:lnSpc>
-              <a:spcBef>
-                <a:spcPts val="0"/>
-              </a:spcBef>
-              <a:spcAft>
-                <a:spcPts val="600"/>
-              </a:spcAft>
-            </a:pPr>
-            <a:r>
-              <a:rPr sz="900" b="0" i="0">
-                <a:solidFill>
-                  <a:srgbClr val="5B6370"/>
-                </a:solidFill>
-                <a:latin typeface="Segoe UI"/>
-              </a:rPr>
-              <a:t>待辦回答 · 5/7</a:t>
+              <a:t>5/9 · 草稿</a:t>
             </a:r>
           </a:p>
         </p:txBody>
@@ -8034,20 +6792,74 @@
       </p:sp>
       <p:sp>
         <p:nvSpPr>
-          <p:cNvPr id="3" name="Oval 2"/>
+          <p:cNvPr id="3" name="TextBox 2"/>
+          <p:cNvSpPr txBox="1"/>
+          <p:nvPr/>
+        </p:nvSpPr>
+        <p:spPr>
+          <a:xfrm>
+            <a:off x="640080" y="384048"/>
+            <a:ext cx="10881360" cy="365760"/>
+          </a:xfrm>
+          <a:prstGeom prst="rect">
+            <a:avLst/>
+          </a:prstGeom>
+          <a:noFill/>
+        </p:spPr>
+        <p:txBody>
+          <a:bodyPr wrap="square" anchor="t" lIns="0" rIns="0" tIns="0" bIns="0">
+            <a:spAutoFit/>
+          </a:bodyPr>
+          <a:lstStyle/>
+          <a:p>
+            <a:pPr algn="l">
+              <a:lnSpc>
+                <a:spcPct val="110000"/>
+              </a:lnSpc>
+              <a:spcBef>
+                <a:spcPts val="0"/>
+              </a:spcBef>
+              <a:spcAft>
+                <a:spcPts val="500"/>
+              </a:spcAft>
+            </a:pPr>
+            <a:r>
+              <a:rPr sz="1500" b="1" i="0">
+                <a:solidFill>
+                  <a:srgbClr val="0F768E"/>
+                </a:solidFill>
+                <a:latin typeface="Segoe UI"/>
+              </a:rPr>
+              <a:t>Q6　</a:t>
+            </a:r>
+            <a:r>
+              <a:rPr sz="1250" b="0" i="0">
+                <a:solidFill>
+                  <a:srgbClr val="555B63"/>
+                </a:solidFill>
+                <a:latin typeface="Microsoft JhengHei"/>
+              </a:rPr>
+              <a:t>「reward function 設計提升能力」的相關論文(可含視覺以外)?</a:t>
+            </a:r>
+          </a:p>
+        </p:txBody>
+      </p:sp>
+      <p:sp>
+        <p:nvSpPr>
+          <p:cNvPr id="4" name="Rectangle 3"/>
           <p:cNvSpPr/>
           <p:nvPr/>
         </p:nvSpPr>
         <p:spPr>
           <a:xfrm>
-            <a:off x="640080" y="457200"/>
-            <a:ext cx="566928" cy="566928"/>
-          </a:xfrm>
-          <a:prstGeom prst="ellipse">
+            <a:off x="640080" y="804672"/>
+            <a:ext cx="10881360" cy="14630"/>
+          </a:xfrm>
+          <a:prstGeom prst="rect">
             <a:avLst/>
           </a:prstGeom>
           <a:solidFill>
-            <a:srgbClr val="0F768E"/>
+            <a:srgbClr val="DDDDDD"/>
           </a:solidFill>
           <a:ln>
             <a:noFill/>
@@ -8078,14 +6890,14 @@
       </p:sp>
       <p:sp>
         <p:nvSpPr>
-          <p:cNvPr id="4" name="TextBox 3"/>
+          <p:cNvPr id="5" name="TextBox 4"/>
           <p:cNvSpPr txBox="1"/>
           <p:nvPr/>
         </p:nvSpPr>
         <p:spPr>
           <a:xfrm>
-            <a:off x="640080" y="457200"/>
-            <a:ext cx="566928" cy="566928"/>
+            <a:off x="640080" y="960120"/>
+            <a:ext cx="10972800" cy="777240"/>
           </a:xfrm>
           <a:prstGeom prst="rect">
             <a:avLst/>
@@ -8093,14 +6905,59 @@
           <a:noFill/>
         </p:spPr>
         <p:txBody>
-          <a:bodyPr wrap="square" anchor="ctr" lIns="0" rIns="0" tIns="0" bIns="0">
+          <a:bodyPr wrap="square" anchor="t" lIns="0" rIns="0" tIns="0" bIns="0">
             <a:spAutoFit/>
           </a:bodyPr>
           <a:lstStyle/>
           <a:p>
-            <a:pPr algn="ctr">
+            <a:pPr algn="l">
               <a:lnSpc>
-                <a:spcPct val="108000"/>
+                <a:spcPct val="106000"/>
+              </a:lnSpc>
+              <a:spcBef>
+                <a:spcPts val="0"/>
+              </a:spcBef>
+              <a:spcAft>
+                <a:spcPts val="500"/>
+              </a:spcAft>
+            </a:pPr>
+            <a:r>
+              <a:rPr sz="2100" b="1" i="0">
+                <a:solidFill>
+                  <a:srgbClr val="111111"/>
+                </a:solidFill>
+                <a:latin typeface="Microsoft JhengHei"/>
+              </a:rPr>
+              <a:t>RLVR 是主流範式;共同痛點 outcome-only 太稀疏 → 連續化/過程化是對策</a:t>
+            </a:r>
+          </a:p>
+        </p:txBody>
+      </p:sp>
+      <p:sp>
+        <p:nvSpPr>
+          <p:cNvPr id="6" name="TextBox 5"/>
+          <p:cNvSpPr txBox="1"/>
+          <p:nvPr/>
+        </p:nvSpPr>
+        <p:spPr>
+          <a:xfrm>
+            <a:off x="640080" y="1828800"/>
+            <a:ext cx="10881360" cy="3291840"/>
+          </a:xfrm>
+          <a:prstGeom prst="rect">
+            <a:avLst/>
+          </a:prstGeom>
+          <a:noFill/>
+        </p:spPr>
+        <p:txBody>
+          <a:bodyPr wrap="square" anchor="t" lIns="0" rIns="0" tIns="0" bIns="0">
+            <a:spAutoFit/>
+          </a:bodyPr>
+          <a:lstStyle/>
+          <a:p>
+            <a:pPr algn="l">
+              <a:lnSpc>
+                <a:spcPct val="115000"/>
               </a:lnSpc>
               <a:spcBef>
                 <a:spcPts val="0"/>
@@ -8110,42 +6967,28 @@
               </a:spcAft>
             </a:pPr>
             <a:r>
-              <a:rPr sz="2200" b="1" i="0">
-                <a:solidFill>
-                  <a:srgbClr val="FFFFFF"/>
+              <a:rPr sz="1400" b="0" i="0">
+                <a:solidFill>
+                  <a:srgbClr val="555B63"/>
                 </a:solidFill>
                 <a:latin typeface="Segoe UI"/>
               </a:rPr>
-              <a:t>6</a:t>
-            </a:r>
-          </a:p>
-        </p:txBody>
-      </p:sp>
-      <p:sp>
-        <p:nvSpPr>
-          <p:cNvPr id="5" name="TextBox 4"/>
-          <p:cNvSpPr txBox="1"/>
-          <p:nvPr/>
-        </p:nvSpPr>
-        <p:spPr>
-          <a:xfrm>
-            <a:off x="1371600" y="475488"/>
-            <a:ext cx="10241280" cy="548640"/>
-          </a:xfrm>
-          <a:prstGeom prst="rect">
-            <a:avLst/>
-          </a:prstGeom>
-          <a:noFill/>
-        </p:spPr>
-        <p:txBody>
-          <a:bodyPr wrap="square" anchor="t" lIns="0" rIns="0" tIns="0" bIns="0">
-            <a:spAutoFit/>
-          </a:bodyPr>
-          <a:lstStyle/>
+              <a:t>— </a:t>
+            </a:r>
+            <a:r>
+              <a:rPr sz="1400" b="0" i="0">
+                <a:solidFill>
+                  <a:srgbClr val="111111"/>
+                </a:solidFill>
+                <a:latin typeface="Microsoft JhengHei"/>
+              </a:rPr>
+              <a:t>RLVR:可程式驗證準則當 rule-based reward,低標註、緩解 hacking(survey 2508.08189)。</a:t>
+            </a:r>
+          </a:p>
           <a:p>
             <a:pPr algn="l">
               <a:lnSpc>
-                <a:spcPct val="108000"/>
+                <a:spcPct val="115000"/>
               </a:lnSpc>
               <a:spcBef>
                 <a:spcPts val="0"/>
@@ -8155,42 +6998,28 @@
               </a:spcAft>
             </a:pPr>
             <a:r>
-              <a:rPr sz="1300" b="1" i="0">
-                <a:solidFill>
-                  <a:srgbClr val="0F768E"/>
+              <a:rPr sz="1400" b="0" i="0">
+                <a:solidFill>
+                  <a:srgbClr val="555B63"/>
+                </a:solidFill>
+                <a:latin typeface="Segoe UI"/>
+              </a:rPr>
+              <a:t>— </a:t>
+            </a:r>
+            <a:r>
+              <a:rPr sz="1400" b="0" i="0">
+                <a:solidFill>
+                  <a:srgbClr val="111111"/>
                 </a:solidFill>
                 <a:latin typeface="Microsoft JhengHei"/>
               </a:rPr>
-              <a:t>待辦事項 6</a:t>
-            </a:r>
-          </a:p>
-        </p:txBody>
-      </p:sp>
-      <p:sp>
-        <p:nvSpPr>
-          <p:cNvPr id="6" name="TextBox 5"/>
-          <p:cNvSpPr txBox="1"/>
-          <p:nvPr/>
-        </p:nvSpPr>
-        <p:spPr>
-          <a:xfrm>
-            <a:off x="1371600" y="822960"/>
-            <a:ext cx="10424160" cy="502920"/>
-          </a:xfrm>
-          <a:prstGeom prst="rect">
-            <a:avLst/>
-          </a:prstGeom>
-          <a:noFill/>
-        </p:spPr>
-        <p:txBody>
-          <a:bodyPr wrap="square" anchor="t" lIns="0" rIns="0" tIns="0" bIns="0">
-            <a:spAutoFit/>
-          </a:bodyPr>
-          <a:lstStyle/>
+              <a:t>對策:過程 reward(Perception-PRM 2604.24583)、連續稠密化(SNRA,下圖)。</a:t>
+            </a:r>
+          </a:p>
           <a:p>
             <a:pPr algn="l">
               <a:lnSpc>
-                <a:spcPct val="108000"/>
+                <a:spcPct val="115000"/>
               </a:lnSpc>
               <a:spcBef>
                 <a:spcPts val="0"/>
@@ -8200,27 +7029,60 @@
               </a:spcAft>
             </a:pPr>
             <a:r>
-              <a:rPr sz="1300" b="0" i="1">
-                <a:solidFill>
-                  <a:srgbClr val="5B6370"/>
+              <a:rPr sz="1400" b="0" i="0">
+                <a:solidFill>
+                  <a:srgbClr val="555B63"/>
+                </a:solidFill>
+                <a:latin typeface="Segoe UI"/>
+              </a:rPr>
+              <a:t>— </a:t>
+            </a:r>
+            <a:r>
+              <a:rPr sz="1400" b="1" i="0">
+                <a:solidFill>
+                  <a:srgbClr val="111111"/>
                 </a:solidFill>
                 <a:latin typeface="Microsoft JhengHei"/>
               </a:rPr>
-              <a:t>找「reward function 設計提升能力」的相關論文，可含視覺以外領域。</a:t>
-            </a:r>
-          </a:p>
-        </p:txBody>
-      </p:sp>
-      <p:sp>
-        <p:nvSpPr>
-          <p:cNvPr id="7" name="TextBox 6"/>
+              <a:t>警訊:有研究認為 RLVR 只放大既有行為、不誘發新推理(OpenReview 4OsgYD7em5)——對我們也是威脅。</a:t>
+            </a:r>
+          </a:p>
+        </p:txBody>
+      </p:sp>
+      <p:pic>
+        <p:nvPicPr>
+          <p:cNvPr id="7" name="Picture 6" descr="SmoothOp_sigmoid.png"/>
+          <p:cNvPicPr>
+            <a:picLocks noChangeAspect="1"/>
+          </p:cNvPicPr>
+          <p:nvPr/>
+        </p:nvPicPr>
+        <p:blipFill>
+          <a:blip r:embed="rId2"/>
+          <a:stretch>
+            <a:fillRect/>
+          </a:stretch>
+        </p:blipFill>
+        <p:spPr>
+          <a:xfrm>
+            <a:off x="2265330" y="3794760"/>
+            <a:ext cx="7630859" cy="1737360"/>
+          </a:xfrm>
+          <a:prstGeom prst="rect">
+            <a:avLst/>
+          </a:prstGeom>
+        </p:spPr>
+      </p:pic>
+      <p:sp>
+        <p:nvSpPr>
+          <p:cNvPr id="8" name="TextBox 7"/>
           <p:cNvSpPr txBox="1"/>
           <p:nvPr/>
         </p:nvSpPr>
         <p:spPr>
           <a:xfrm>
-            <a:off x="640080" y="1600200"/>
-            <a:ext cx="10972800" cy="914400"/>
+            <a:off x="2265330" y="5559552"/>
+            <a:ext cx="7630859" cy="274320"/>
           </a:xfrm>
           <a:prstGeom prst="rect">
             <a:avLst/>
@@ -8233,48 +7095,39 @@
           </a:bodyPr>
           <a:lstStyle/>
           <a:p>
-            <a:pPr algn="l">
+            <a:pPr algn="ctr">
               <a:lnSpc>
-                <a:spcPct val="106000"/>
+                <a:spcPct val="110000"/>
               </a:lnSpc>
               <a:spcBef>
                 <a:spcPts val="0"/>
               </a:spcBef>
               <a:spcAft>
-                <a:spcPts val="600"/>
+                <a:spcPts val="500"/>
               </a:spcAft>
             </a:pPr>
             <a:r>
-              <a:rPr sz="2200" b="1" i="0">
-                <a:solidFill>
-                  <a:srgbClr val="1A1A2E"/>
+              <a:rPr sz="950" b="0" i="1">
+                <a:solidFill>
+                  <a:srgbClr val="555B63"/>
                 </a:solidFill>
                 <a:latin typeface="Microsoft JhengHei"/>
               </a:rPr>
-              <a:t>RLVR 用可驗證 reward 提升推理；痛點是 </a:t>
-            </a:r>
-            <a:r>
-              <a:rPr sz="2200" b="1" i="0">
-                <a:solidFill>
-                  <a:srgbClr val="E86A33"/>
-                </a:solidFill>
-                <a:latin typeface="Microsoft JhengHei"/>
-              </a:rPr>
-              <a:t>outcome-only 太稀疏</a:t>
-            </a:r>
-          </a:p>
-        </p:txBody>
-      </p:sp>
-      <p:sp>
-        <p:nvSpPr>
-          <p:cNvPr id="8" name="TextBox 7"/>
+              <a:t>SNRA:把 near-miss 誤差經動態 Sigmoid 轉成連續 reward(取自 arXiv 2601.07695 原圖)</a:t>
+            </a:r>
+          </a:p>
+        </p:txBody>
+      </p:sp>
+      <p:sp>
+        <p:nvSpPr>
+          <p:cNvPr id="9" name="TextBox 8"/>
           <p:cNvSpPr txBox="1"/>
           <p:nvPr/>
         </p:nvSpPr>
         <p:spPr>
           <a:xfrm>
-            <a:off x="685800" y="2606040"/>
-            <a:ext cx="10881360" cy="2377440"/>
+            <a:off x="640080" y="5806440"/>
+            <a:ext cx="10881360" cy="594360"/>
           </a:xfrm>
           <a:prstGeom prst="rect">
             <a:avLst/>
@@ -8289,442 +7142,131 @@
           <a:p>
             <a:pPr algn="l">
               <a:lnSpc>
-                <a:spcPct val="112000"/>
+                <a:spcPct val="110000"/>
               </a:lnSpc>
               <a:spcBef>
                 <a:spcPts val="0"/>
               </a:spcBef>
               <a:spcAft>
-                <a:spcPts val="600"/>
+                <a:spcPts val="500"/>
               </a:spcAft>
             </a:pPr>
             <a:r>
-              <a:rPr sz="1600" b="1" i="0">
-                <a:solidFill>
-                  <a:srgbClr val="0F768E"/>
+              <a:rPr sz="1150" b="1" i="0">
+                <a:solidFill>
+                  <a:srgbClr val="B44A1E"/>
                 </a:solidFill>
                 <a:latin typeface="Microsoft JhengHei"/>
               </a:rPr>
-              <a:t>▸ </a:t>
-            </a:r>
-            <a:r>
-              <a:rPr sz="1600" b="1" i="0">
-                <a:solidFill>
-                  <a:srgbClr val="1A1A2E"/>
+              <a:t>未驗證：</a:t>
+            </a:r>
+            <a:r>
+              <a:rPr sz="1150" b="0" i="0">
+                <a:solidFill>
+                  <a:srgbClr val="111111"/>
                 </a:solidFill>
                 <a:latin typeface="Microsoft JhengHei"/>
               </a:rPr>
-              <a:t>RLVR 範式：</a:t>
-            </a:r>
-            <a:r>
-              <a:rPr sz="1600" b="0" i="0">
-                <a:solidFill>
-                  <a:srgbClr val="1A1A2E"/>
-                </a:solidFill>
-                <a:latin typeface="Microsoft JhengHei"/>
-              </a:rPr>
-              <a:t>用可程式化/自動驗證準則當 rule-based reward，低標註成本、緩解 reward hacking（Survey 2508.08189）。</a:t>
-            </a:r>
-          </a:p>
+              <a:t>跨領域(code RL 測試通過率、math 部分分、robotics shaped reward)尚未系統掃描;flow-consistency reward 的可 hack 性(模型學會講模糊安全的描述騙分)未分析。</a:t>
+            </a:r>
+          </a:p>
+        </p:txBody>
+      </p:sp>
+      <p:sp>
+        <p:nvSpPr>
+          <p:cNvPr id="10" name="TextBox 9"/>
+          <p:cNvSpPr txBox="1"/>
+          <p:nvPr/>
+        </p:nvSpPr>
+        <p:spPr>
+          <a:xfrm>
+            <a:off x="640080" y="6355080"/>
+            <a:ext cx="10058400" cy="320040"/>
+          </a:xfrm>
+          <a:prstGeom prst="rect">
+            <a:avLst/>
+          </a:prstGeom>
+          <a:noFill/>
+        </p:spPr>
+        <p:txBody>
+          <a:bodyPr wrap="square" anchor="t" lIns="0" rIns="0" tIns="0" bIns="0">
+            <a:spAutoFit/>
+          </a:bodyPr>
+          <a:lstStyle/>
           <a:p>
             <a:pPr algn="l">
               <a:lnSpc>
-                <a:spcPct val="112000"/>
+                <a:spcPct val="110000"/>
               </a:lnSpc>
               <a:spcBef>
                 <a:spcPts val="0"/>
               </a:spcBef>
               <a:spcAft>
-                <a:spcPts val="600"/>
+                <a:spcPts val="500"/>
               </a:spcAft>
             </a:pPr>
             <a:r>
-              <a:rPr sz="1600" b="1" i="0">
-                <a:solidFill>
-                  <a:srgbClr val="0F768E"/>
+              <a:rPr sz="950" b="1" i="0">
+                <a:solidFill>
+                  <a:srgbClr val="555B63"/>
                 </a:solidFill>
                 <a:latin typeface="Microsoft JhengHei"/>
               </a:rPr>
-              <a:t>▸ </a:t>
-            </a:r>
-            <a:r>
-              <a:rPr sz="1600" b="1" i="0">
-                <a:solidFill>
-                  <a:srgbClr val="E86A33"/>
-                </a:solidFill>
-                <a:latin typeface="Microsoft JhengHei"/>
-              </a:rPr>
-              <a:t>痛點：</a:t>
-            </a:r>
-            <a:r>
-              <a:rPr sz="1600" b="0" i="0">
-                <a:solidFill>
-                  <a:srgbClr val="1A1A2E"/>
-                </a:solidFill>
-                <a:latin typeface="Microsoft JhengHei"/>
-              </a:rPr>
-              <a:t>多為 outcome-only → 訊號稀疏、難約束中間步驟；RL 不誘發全新推理模式（OpenReview 4OsgYD7em5）。</a:t>
-            </a:r>
-          </a:p>
-          <a:p>
-            <a:pPr algn="l">
+              <a:t>依據：</a:t>
+            </a:r>
+            <a:r>
+              <a:rPr sz="950" b="0" i="1">
+                <a:solidFill>
+                  <a:srgbClr val="555B63"/>
+                </a:solidFill>
+                <a:latin typeface="Segoe UI"/>
+              </a:rPr>
+              <a:t>RLVR survey 2508.08189 · Perception-PRM 2604.24583 · Smooth Operator 2601.07695</a:t>
+            </a:r>
+          </a:p>
+        </p:txBody>
+      </p:sp>
+      <p:sp>
+        <p:nvSpPr>
+          <p:cNvPr id="11" name="TextBox 10"/>
+          <p:cNvSpPr txBox="1"/>
+          <p:nvPr/>
+        </p:nvSpPr>
+        <p:spPr>
+          <a:xfrm>
+            <a:off x="10881360" y="6510528"/>
+            <a:ext cx="1097280" cy="274320"/>
+          </a:xfrm>
+          <a:prstGeom prst="rect">
+            <a:avLst/>
+          </a:prstGeom>
+          <a:noFill/>
+        </p:spPr>
+        <p:txBody>
+          <a:bodyPr wrap="square" anchor="t" lIns="0" rIns="0" tIns="0" bIns="0">
+            <a:spAutoFit/>
+          </a:bodyPr>
+          <a:lstStyle/>
+          <a:p>
+            <a:pPr algn="r">
               <a:lnSpc>
-                <a:spcPct val="112000"/>
+                <a:spcPct val="110000"/>
               </a:lnSpc>
               <a:spcBef>
                 <a:spcPts val="0"/>
               </a:spcBef>
               <a:spcAft>
-                <a:spcPts val="600"/>
+                <a:spcPts val="500"/>
               </a:spcAft>
             </a:pPr>
             <a:r>
-              <a:rPr sz="1600" b="1" i="0">
-                <a:solidFill>
-                  <a:srgbClr val="0F768E"/>
-                </a:solidFill>
-                <a:latin typeface="Microsoft JhengHei"/>
-              </a:rPr>
-              <a:t>▸ </a:t>
-            </a:r>
-            <a:r>
-              <a:rPr sz="1600" b="1" i="0">
-                <a:solidFill>
-                  <a:srgbClr val="1A1A2E"/>
-                </a:solidFill>
-                <a:latin typeface="Microsoft JhengHei"/>
-              </a:rPr>
-              <a:t>對策(可借)：</a:t>
-            </a:r>
-            <a:r>
-              <a:rPr sz="1600" b="0" i="0">
-                <a:solidFill>
-                  <a:srgbClr val="1A1A2E"/>
-                </a:solidFill>
-                <a:latin typeface="Microsoft JhengHei"/>
-              </a:rPr>
-              <a:t>過程 reward（Perception-PRM 2604.24583）、連續稠密化（Smooth Operator SNRA 2601.07695）。</a:t>
-            </a:r>
-          </a:p>
-        </p:txBody>
-      </p:sp>
-      <p:sp>
-        <p:nvSpPr>
-          <p:cNvPr id="9" name="Rounded Rectangle 8"/>
-          <p:cNvSpPr/>
-          <p:nvPr/>
-        </p:nvSpPr>
-        <p:spPr>
-          <a:xfrm>
-            <a:off x="640080" y="5166360"/>
-            <a:ext cx="10881360" cy="731520"/>
-          </a:xfrm>
-          <a:prstGeom prst="roundRect">
-            <a:avLst/>
-          </a:prstGeom>
-          <a:solidFill>
-            <a:srgbClr val="EFF6F8"/>
-          </a:solidFill>
-          <a:ln>
-            <a:noFill/>
-          </a:ln>
-          <a:effectLst/>
-        </p:spPr>
-        <p:style>
-          <a:lnRef idx="1">
-            <a:schemeClr val="accent1"/>
-          </a:lnRef>
-          <a:fillRef idx="3">
-            <a:schemeClr val="accent1"/>
-          </a:fillRef>
-          <a:effectRef idx="2">
-            <a:schemeClr val="accent1"/>
-          </a:effectRef>
-          <a:fontRef idx="minor">
-            <a:schemeClr val="lt1"/>
-          </a:fontRef>
-        </p:style>
-        <p:txBody>
-          <a:bodyPr rtlCol="0" anchor="ctr"/>
-          <a:lstStyle/>
-          <a:p>
-            <a:pPr algn="ctr"/>
-          </a:p>
-        </p:txBody>
-      </p:sp>
-      <p:sp>
-        <p:nvSpPr>
-          <p:cNvPr id="10" name="Rectangle 9"/>
-          <p:cNvSpPr/>
-          <p:nvPr/>
-        </p:nvSpPr>
-        <p:spPr>
-          <a:xfrm>
-            <a:off x="640080" y="5166360"/>
-            <a:ext cx="146304" cy="731520"/>
-          </a:xfrm>
-          <a:prstGeom prst="rect">
-            <a:avLst/>
-          </a:prstGeom>
-          <a:solidFill>
-            <a:srgbClr val="0F768E"/>
-          </a:solidFill>
-          <a:ln>
-            <a:noFill/>
-          </a:ln>
-          <a:effectLst/>
-        </p:spPr>
-        <p:style>
-          <a:lnRef idx="1">
-            <a:schemeClr val="accent1"/>
-          </a:lnRef>
-          <a:fillRef idx="3">
-            <a:schemeClr val="accent1"/>
-          </a:fillRef>
-          <a:effectRef idx="2">
-            <a:schemeClr val="accent1"/>
-          </a:effectRef>
-          <a:fontRef idx="minor">
-            <a:schemeClr val="lt1"/>
-          </a:fontRef>
-        </p:style>
-        <p:txBody>
-          <a:bodyPr rtlCol="0" anchor="ctr"/>
-          <a:lstStyle/>
-          <a:p>
-            <a:pPr algn="ctr"/>
-          </a:p>
-        </p:txBody>
-      </p:sp>
-      <p:sp>
-        <p:nvSpPr>
-          <p:cNvPr id="11" name="Rounded Rectangle 10"/>
-          <p:cNvSpPr/>
-          <p:nvPr/>
-        </p:nvSpPr>
-        <p:spPr>
-          <a:xfrm>
-            <a:off x="868680" y="5330952"/>
-            <a:ext cx="960120" cy="402336"/>
-          </a:xfrm>
-          <a:prstGeom prst="roundRect">
-            <a:avLst/>
-          </a:prstGeom>
-          <a:solidFill>
-            <a:srgbClr val="0F768E"/>
-          </a:solidFill>
-          <a:ln>
-            <a:noFill/>
-          </a:ln>
-          <a:effectLst/>
-        </p:spPr>
-        <p:style>
-          <a:lnRef idx="1">
-            <a:schemeClr val="accent1"/>
-          </a:lnRef>
-          <a:fillRef idx="3">
-            <a:schemeClr val="accent1"/>
-          </a:fillRef>
-          <a:effectRef idx="2">
-            <a:schemeClr val="accent1"/>
-          </a:effectRef>
-          <a:fontRef idx="minor">
-            <a:schemeClr val="lt1"/>
-          </a:fontRef>
-        </p:style>
-        <p:txBody>
-          <a:bodyPr rtlCol="0" anchor="ctr"/>
-          <a:lstStyle/>
-          <a:p>
-            <a:pPr algn="ctr"/>
-          </a:p>
-        </p:txBody>
-      </p:sp>
-      <p:sp>
-        <p:nvSpPr>
-          <p:cNvPr id="12" name="TextBox 11"/>
-          <p:cNvSpPr txBox="1"/>
-          <p:nvPr/>
-        </p:nvSpPr>
-        <p:spPr>
-          <a:xfrm>
-            <a:off x="868680" y="5330952"/>
-            <a:ext cx="960120" cy="402336"/>
-          </a:xfrm>
-          <a:prstGeom prst="rect">
-            <a:avLst/>
-          </a:prstGeom>
-          <a:noFill/>
-        </p:spPr>
-        <p:txBody>
-          <a:bodyPr wrap="square" anchor="ctr" lIns="0" rIns="0" tIns="0" bIns="0">
-            <a:spAutoFit/>
-          </a:bodyPr>
-          <a:lstStyle/>
-          <a:p>
-            <a:pPr algn="ctr">
-              <a:lnSpc>
-                <a:spcPct val="108000"/>
-              </a:lnSpc>
-              <a:spcBef>
-                <a:spcPts val="0"/>
-              </a:spcBef>
-              <a:spcAft>
-                <a:spcPts val="600"/>
-              </a:spcAft>
-            </a:pPr>
-            <a:r>
-              <a:rPr sz="1500" b="1" i="0">
-                <a:solidFill>
-                  <a:srgbClr val="FFFFFF"/>
-                </a:solidFill>
-                <a:latin typeface="Microsoft JhengHei"/>
-              </a:rPr>
-              <a:t>結論</a:t>
-            </a:r>
-          </a:p>
-        </p:txBody>
-      </p:sp>
-      <p:sp>
-        <p:nvSpPr>
-          <p:cNvPr id="13" name="TextBox 12"/>
-          <p:cNvSpPr txBox="1"/>
-          <p:nvPr/>
-        </p:nvSpPr>
-        <p:spPr>
-          <a:xfrm>
-            <a:off x="2011680" y="5166360"/>
-            <a:ext cx="9326880" cy="731520"/>
-          </a:xfrm>
-          <a:prstGeom prst="rect">
-            <a:avLst/>
-          </a:prstGeom>
-          <a:noFill/>
-        </p:spPr>
-        <p:txBody>
-          <a:bodyPr wrap="square" anchor="ctr" lIns="0" rIns="0" tIns="0" bIns="0">
-            <a:spAutoFit/>
-          </a:bodyPr>
-          <a:lstStyle/>
-          <a:p>
-            <a:pPr algn="l">
-              <a:lnSpc>
-                <a:spcPct val="105000"/>
-              </a:lnSpc>
-              <a:spcBef>
-                <a:spcPts val="0"/>
-              </a:spcBef>
-              <a:spcAft>
-                <a:spcPts val="600"/>
-              </a:spcAft>
-            </a:pPr>
-            <a:r>
-              <a:rPr sz="1450" b="1" i="0">
-                <a:solidFill>
-                  <a:srgbClr val="1A1A2E"/>
-                </a:solidFill>
-                <a:latin typeface="Microsoft JhengHei"/>
-              </a:rPr>
-              <a:t>RLVR 的痛點，正好被我們的「連續 4D 證據 reward + 過程級信用分配」對症解決。</a:t>
-            </a:r>
-          </a:p>
-        </p:txBody>
-      </p:sp>
-      <p:sp>
-        <p:nvSpPr>
-          <p:cNvPr id="14" name="TextBox 13"/>
-          <p:cNvSpPr txBox="1"/>
-          <p:nvPr/>
-        </p:nvSpPr>
-        <p:spPr>
-          <a:xfrm>
-            <a:off x="640080" y="6035040"/>
-            <a:ext cx="10972800" cy="320040"/>
-          </a:xfrm>
-          <a:prstGeom prst="rect">
-            <a:avLst/>
-          </a:prstGeom>
-          <a:noFill/>
-        </p:spPr>
-        <p:txBody>
-          <a:bodyPr wrap="square" anchor="t" lIns="0" rIns="0" tIns="0" bIns="0">
-            <a:spAutoFit/>
-          </a:bodyPr>
-          <a:lstStyle/>
-          <a:p>
-            <a:pPr algn="l">
-              <a:lnSpc>
-                <a:spcPct val="108000"/>
-              </a:lnSpc>
-              <a:spcBef>
-                <a:spcPts val="0"/>
-              </a:spcBef>
-              <a:spcAft>
-                <a:spcPts val="600"/>
-              </a:spcAft>
-            </a:pPr>
-            <a:r>
-              <a:rPr sz="1000" b="1" i="0">
-                <a:solidFill>
-                  <a:srgbClr val="5B6370"/>
-                </a:solidFill>
-                <a:latin typeface="Microsoft JhengHei"/>
-              </a:rPr>
-              <a:t>▸ 依據：</a:t>
-            </a:r>
-            <a:r>
-              <a:rPr sz="1000" b="0" i="1">
-                <a:solidFill>
-                  <a:srgbClr val="5B6370"/>
+              <a:rPr sz="900" b="0" i="0">
+                <a:solidFill>
+                  <a:srgbClr val="555B63"/>
                 </a:solidFill>
                 <a:latin typeface="Segoe UI"/>
               </a:rPr>
-              <a:t>RLVR Survey 2508.08189 · RL 侷限 OpenReview 4OsgYD7em5 · Perception-PRM 2604.24583 · Smooth Operator 2601.07695</a:t>
-            </a:r>
-          </a:p>
-        </p:txBody>
-      </p:sp>
-      <p:sp>
-        <p:nvSpPr>
-          <p:cNvPr id="15" name="TextBox 14"/>
-          <p:cNvSpPr txBox="1"/>
-          <p:nvPr/>
-        </p:nvSpPr>
-        <p:spPr>
-          <a:xfrm>
-            <a:off x="10424160" y="6455664"/>
-            <a:ext cx="1554480" cy="274320"/>
-          </a:xfrm>
-          <a:prstGeom prst="rect">
-            <a:avLst/>
-          </a:prstGeom>
-          <a:noFill/>
-        </p:spPr>
-        <p:txBody>
-          <a:bodyPr wrap="square" anchor="t" lIns="0" rIns="0" tIns="0" bIns="0">
-            <a:spAutoFit/>
-          </a:bodyPr>
-          <a:lstStyle/>
-          <a:p>
-            <a:pPr algn="r">
-              <a:lnSpc>
-                <a:spcPct val="108000"/>
-              </a:lnSpc>
-              <a:spcBef>
-                <a:spcPts val="0"/>
-              </a:spcBef>
-              <a:spcAft>
-                <a:spcPts val="600"/>
-              </a:spcAft>
-            </a:pPr>
-            <a:r>
-              <a:rPr sz="900" b="0" i="0">
-                <a:solidFill>
-                  <a:srgbClr val="5B6370"/>
-                </a:solidFill>
-                <a:latin typeface="Segoe UI"/>
-              </a:rPr>
-              <a:t>待辦回答 · 6/7</a:t>
+              <a:t>6/9 · 草稿</a:t>
             </a:r>
           </a:p>
         </p:txBody>
@@ -8793,20 +7335,74 @@
       </p:sp>
       <p:sp>
         <p:nvSpPr>
-          <p:cNvPr id="3" name="Oval 2"/>
+          <p:cNvPr id="3" name="TextBox 2"/>
+          <p:cNvSpPr txBox="1"/>
+          <p:nvPr/>
+        </p:nvSpPr>
+        <p:spPr>
+          <a:xfrm>
+            <a:off x="640080" y="384048"/>
+            <a:ext cx="10881360" cy="365760"/>
+          </a:xfrm>
+          <a:prstGeom prst="rect">
+            <a:avLst/>
+          </a:prstGeom>
+          <a:noFill/>
+        </p:spPr>
+        <p:txBody>
+          <a:bodyPr wrap="square" anchor="t" lIns="0" rIns="0" tIns="0" bIns="0">
+            <a:spAutoFit/>
+          </a:bodyPr>
+          <a:lstStyle/>
+          <a:p>
+            <a:pPr algn="l">
+              <a:lnSpc>
+                <a:spcPct val="110000"/>
+              </a:lnSpc>
+              <a:spcBef>
+                <a:spcPts val="0"/>
+              </a:spcBef>
+              <a:spcAft>
+                <a:spcPts val="500"/>
+              </a:spcAft>
+            </a:pPr>
+            <a:r>
+              <a:rPr sz="1500" b="1" i="0">
+                <a:solidFill>
+                  <a:srgbClr val="0F768E"/>
+                </a:solidFill>
+                <a:latin typeface="Segoe UI"/>
+              </a:rPr>
+              <a:t>Q7　</a:t>
+            </a:r>
+            <a:r>
+              <a:rPr sz="1250" b="0" i="0">
+                <a:solidFill>
+                  <a:srgbClr val="555B63"/>
+                </a:solidFill>
+                <a:latin typeface="Microsoft JhengHei"/>
+              </a:rPr>
+              <a:t>確立方向的最大賣點。</a:t>
+            </a:r>
+          </a:p>
+        </p:txBody>
+      </p:sp>
+      <p:sp>
+        <p:nvSpPr>
+          <p:cNvPr id="4" name="Rectangle 3"/>
           <p:cNvSpPr/>
           <p:nvPr/>
         </p:nvSpPr>
         <p:spPr>
           <a:xfrm>
-            <a:off x="640080" y="457200"/>
-            <a:ext cx="566928" cy="566928"/>
-          </a:xfrm>
-          <a:prstGeom prst="ellipse">
+            <a:off x="640080" y="804672"/>
+            <a:ext cx="10881360" cy="14630"/>
+          </a:xfrm>
+          <a:prstGeom prst="rect">
             <a:avLst/>
           </a:prstGeom>
           <a:solidFill>
-            <a:srgbClr val="0F768E"/>
+            <a:srgbClr val="DDDDDD"/>
           </a:solidFill>
           <a:ln>
             <a:noFill/>
@@ -8837,14 +7433,14 @@
       </p:sp>
       <p:sp>
         <p:nvSpPr>
-          <p:cNvPr id="4" name="TextBox 3"/>
+          <p:cNvPr id="5" name="TextBox 4"/>
           <p:cNvSpPr txBox="1"/>
           <p:nvPr/>
         </p:nvSpPr>
         <p:spPr>
           <a:xfrm>
-            <a:off x="640080" y="457200"/>
-            <a:ext cx="566928" cy="566928"/>
+            <a:off x="640080" y="960120"/>
+            <a:ext cx="10972800" cy="777240"/>
           </a:xfrm>
           <a:prstGeom prst="rect">
             <a:avLst/>
@@ -8852,14 +7448,59 @@
           <a:noFill/>
         </p:spPr>
         <p:txBody>
-          <a:bodyPr wrap="square" anchor="ctr" lIns="0" rIns="0" tIns="0" bIns="0">
+          <a:bodyPr wrap="square" anchor="t" lIns="0" rIns="0" tIns="0" bIns="0">
             <a:spAutoFit/>
           </a:bodyPr>
           <a:lstStyle/>
           <a:p>
-            <a:pPr algn="ctr">
+            <a:pPr algn="l">
               <a:lnSpc>
-                <a:spcPct val="108000"/>
+                <a:spcPct val="106000"/>
+              </a:lnSpc>
+              <a:spcBef>
+                <a:spcPts val="0"/>
+              </a:spcBef>
+              <a:spcAft>
+                <a:spcPts val="500"/>
+              </a:spcAft>
+            </a:pPr>
+            <a:r>
+              <a:rPr sz="2100" b="1" i="0">
+                <a:solidFill>
+                  <a:srgbClr val="111111"/>
+                </a:solidFill>
+                <a:latin typeface="Microsoft JhengHei"/>
+              </a:rPr>
+              <a:t>候選賣點:flow/scene-flow 一致性當可驗證 reward(此句需你自己重寫)</a:t>
+            </a:r>
+          </a:p>
+        </p:txBody>
+      </p:sp>
+      <p:sp>
+        <p:nvSpPr>
+          <p:cNvPr id="6" name="TextBox 5"/>
+          <p:cNvSpPr txBox="1"/>
+          <p:nvPr/>
+        </p:nvSpPr>
+        <p:spPr>
+          <a:xfrm>
+            <a:off x="640080" y="1828800"/>
+            <a:ext cx="6583680" cy="3291840"/>
+          </a:xfrm>
+          <a:prstGeom prst="rect">
+            <a:avLst/>
+          </a:prstGeom>
+          <a:noFill/>
+        </p:spPr>
+        <p:txBody>
+          <a:bodyPr wrap="square" anchor="t" lIns="0" rIns="0" tIns="0" bIns="0">
+            <a:spAutoFit/>
+          </a:bodyPr>
+          <a:lstStyle/>
+          <a:p>
+            <a:pPr algn="l">
+              <a:lnSpc>
+                <a:spcPct val="115000"/>
               </a:lnSpc>
               <a:spcBef>
                 <a:spcPts val="0"/>
@@ -8869,42 +7510,28 @@
               </a:spcAft>
             </a:pPr>
             <a:r>
-              <a:rPr sz="2200" b="1" i="0">
-                <a:solidFill>
-                  <a:srgbClr val="FFFFFF"/>
+              <a:rPr sz="1400" b="0" i="0">
+                <a:solidFill>
+                  <a:srgbClr val="555B63"/>
                 </a:solidFill>
                 <a:latin typeface="Segoe UI"/>
               </a:rPr>
-              <a:t>7</a:t>
-            </a:r>
-          </a:p>
-        </p:txBody>
-      </p:sp>
-      <p:sp>
-        <p:nvSpPr>
-          <p:cNvPr id="5" name="TextBox 4"/>
-          <p:cNvSpPr txBox="1"/>
-          <p:nvPr/>
-        </p:nvSpPr>
-        <p:spPr>
-          <a:xfrm>
-            <a:off x="1371600" y="475488"/>
-            <a:ext cx="10241280" cy="548640"/>
-          </a:xfrm>
-          <a:prstGeom prst="rect">
-            <a:avLst/>
-          </a:prstGeom>
-          <a:noFill/>
-        </p:spPr>
-        <p:txBody>
-          <a:bodyPr wrap="square" anchor="t" lIns="0" rIns="0" tIns="0" bIns="0">
-            <a:spAutoFit/>
-          </a:bodyPr>
-          <a:lstStyle/>
+              <a:t>— </a:t>
+            </a:r>
+            <a:r>
+              <a:rPr sz="1400" b="0" i="0">
+                <a:solidFill>
+                  <a:srgbClr val="111111"/>
+                </a:solidFill>
+                <a:latin typeface="Microsoft JhengHei"/>
+              </a:rPr>
+              <a:t>支持:depth-as-reward 擁擠、flow 空白(Q2);4D 評測無 flow 一致性項(Q8);偽標可規模化(Q4)。</a:t>
+            </a:r>
+          </a:p>
           <a:p>
             <a:pPr algn="l">
               <a:lnSpc>
-                <a:spcPct val="108000"/>
+                <a:spcPct val="115000"/>
               </a:lnSpc>
               <a:spcBef>
                 <a:spcPts val="0"/>
@@ -8914,42 +7541,28 @@
               </a:spcAft>
             </a:pPr>
             <a:r>
-              <a:rPr sz="1300" b="1" i="0">
-                <a:solidFill>
-                  <a:srgbClr val="0F768E"/>
+              <a:rPr sz="1400" b="0" i="0">
+                <a:solidFill>
+                  <a:srgbClr val="555B63"/>
+                </a:solidFill>
+                <a:latin typeface="Segoe UI"/>
+              </a:rPr>
+              <a:t>— </a:t>
+            </a:r>
+            <a:r>
+              <a:rPr sz="1400" b="0" i="0">
+                <a:solidFill>
+                  <a:srgbClr val="111111"/>
                 </a:solidFill>
                 <a:latin typeface="Microsoft JhengHei"/>
               </a:rPr>
-              <a:t>待辦事項 7</a:t>
-            </a:r>
-          </a:p>
-        </p:txBody>
-      </p:sp>
-      <p:sp>
-        <p:nvSpPr>
-          <p:cNvPr id="6" name="TextBox 5"/>
-          <p:cNvSpPr txBox="1"/>
-          <p:nvPr/>
-        </p:nvSpPr>
-        <p:spPr>
-          <a:xfrm>
-            <a:off x="1371600" y="822960"/>
-            <a:ext cx="10424160" cy="502920"/>
-          </a:xfrm>
-          <a:prstGeom prst="rect">
-            <a:avLst/>
-          </a:prstGeom>
-          <a:noFill/>
-        </p:spPr>
-        <p:txBody>
-          <a:bodyPr wrap="square" anchor="t" lIns="0" rIns="0" tIns="0" bIns="0">
-            <a:spAutoFit/>
-          </a:bodyPr>
-          <a:lstStyle/>
+              <a:t>反對/風險:根因未定(Q3);偽標=蒸餾天花板(Q4);RLVR 不誘發新能力的爭議(Q6);一致性 verifier 難做——自然語言主張 vs 稠密光流場的比對是真正難點。</a:t>
+            </a:r>
+          </a:p>
           <a:p>
             <a:pPr algn="l">
               <a:lnSpc>
-                <a:spcPct val="108000"/>
+                <a:spcPct val="115000"/>
               </a:lnSpc>
               <a:spcBef>
                 <a:spcPts val="0"/>
@@ -8959,27 +7572,60 @@
               </a:spcAft>
             </a:pPr>
             <a:r>
-              <a:rPr sz="1300" b="0" i="1">
-                <a:solidFill>
-                  <a:srgbClr val="5B6370"/>
+              <a:rPr sz="1400" b="0" i="0">
+                <a:solidFill>
+                  <a:srgbClr val="555B63"/>
+                </a:solidFill>
+                <a:latin typeface="Segoe UI"/>
+              </a:rPr>
+              <a:t>— </a:t>
+            </a:r>
+            <a:r>
+              <a:rPr sz="1400" b="1" i="0">
+                <a:solidFill>
+                  <a:srgbClr val="111111"/>
                 </a:solidFill>
                 <a:latin typeface="Microsoft JhengHei"/>
               </a:rPr>
-              <a:t>確立方向的最大賣點；並記錄 4D 常見 benchmark（STI、VLM4D 等）及彼此差異。</a:t>
-            </a:r>
-          </a:p>
-        </p:txBody>
-      </p:sp>
-      <p:sp>
-        <p:nvSpPr>
-          <p:cNvPr id="7" name="TextBox 6"/>
+              <a:t>必要對照:RL-with-flow-reward vs SFT-with-flow-as-input——若後者追平,reward 故事不成立。</a:t>
+            </a:r>
+          </a:p>
+        </p:txBody>
+      </p:sp>
+      <p:pic>
+        <p:nvPicPr>
+          <p:cNvPr id="7" name="Picture 6" descr="VLM4D_radar.png"/>
+          <p:cNvPicPr>
+            <a:picLocks noChangeAspect="1"/>
+          </p:cNvPicPr>
+          <p:nvPr/>
+        </p:nvPicPr>
+        <p:blipFill>
+          <a:blip r:embed="rId2"/>
+          <a:stretch>
+            <a:fillRect/>
+          </a:stretch>
+        </p:blipFill>
+        <p:spPr>
+          <a:xfrm>
+            <a:off x="7498079" y="1821626"/>
+            <a:ext cx="4023360" cy="3580507"/>
+          </a:xfrm>
+          <a:prstGeom prst="rect">
+            <a:avLst/>
+          </a:prstGeom>
+        </p:spPr>
+      </p:pic>
+      <p:sp>
+        <p:nvSpPr>
+          <p:cNvPr id="8" name="TextBox 7"/>
           <p:cNvSpPr txBox="1"/>
           <p:nvPr/>
         </p:nvSpPr>
         <p:spPr>
           <a:xfrm>
-            <a:off x="640080" y="1600200"/>
-            <a:ext cx="10972800" cy="914400"/>
+            <a:off x="7498079" y="5429565"/>
+            <a:ext cx="4023360" cy="274320"/>
           </a:xfrm>
           <a:prstGeom prst="rect">
             <a:avLst/>
@@ -8992,48 +7638,39 @@
           </a:bodyPr>
           <a:lstStyle/>
           <a:p>
-            <a:pPr algn="l">
+            <a:pPr algn="ctr">
               <a:lnSpc>
-                <a:spcPct val="106000"/>
+                <a:spcPct val="110000"/>
               </a:lnSpc>
               <a:spcBef>
                 <a:spcPts val="0"/>
               </a:spcBef>
               <a:spcAft>
-                <a:spcPts val="600"/>
+                <a:spcPts val="500"/>
               </a:spcAft>
             </a:pPr>
             <a:r>
-              <a:rPr sz="2100" b="1" i="0">
-                <a:solidFill>
-                  <a:srgbClr val="1A1A2E"/>
+              <a:rPr sz="950" b="0" i="1">
+                <a:solidFill>
+                  <a:srgbClr val="555B63"/>
                 </a:solidFill>
                 <a:latin typeface="Microsoft JhengHei"/>
               </a:rPr>
-              <a:t>賣點：4D 證據一致性當可驗證 reward；</a:t>
-            </a:r>
-            <a:r>
-              <a:rPr sz="2100" b="1" i="0">
-                <a:solidFill>
-                  <a:srgbClr val="0F768E"/>
-                </a:solidFill>
-                <a:latin typeface="Microsoft JhengHei"/>
-              </a:rPr>
-              <a:t>主評測 VLM4D + STI-Bench</a:t>
-            </a:r>
-          </a:p>
-        </p:txBody>
-      </p:sp>
-      <p:sp>
-        <p:nvSpPr>
-          <p:cNvPr id="8" name="TextBox 7"/>
+              <a:t>主評測 VLM4D 的任務組成(取自 arXiv 2508.02095 原圖)</a:t>
+            </a:r>
+          </a:p>
+        </p:txBody>
+      </p:sp>
+      <p:sp>
+        <p:nvSpPr>
+          <p:cNvPr id="9" name="TextBox 8"/>
           <p:cNvSpPr txBox="1"/>
           <p:nvPr/>
         </p:nvSpPr>
         <p:spPr>
           <a:xfrm>
-            <a:off x="640080" y="1600200"/>
-            <a:ext cx="10881360" cy="548640"/>
+            <a:off x="640080" y="5806440"/>
+            <a:ext cx="10881360" cy="594360"/>
           </a:xfrm>
           <a:prstGeom prst="rect">
             <a:avLst/>
@@ -9048,613 +7685,46 @@
           <a:p>
             <a:pPr algn="l">
               <a:lnSpc>
-                <a:spcPct val="105000"/>
+                <a:spcPct val="110000"/>
               </a:lnSpc>
               <a:spcBef>
                 <a:spcPts val="0"/>
               </a:spcBef>
               <a:spcAft>
-                <a:spcPts val="600"/>
+                <a:spcPts val="500"/>
               </a:spcAft>
             </a:pPr>
             <a:r>
-              <a:rPr sz="1400" b="1" i="0">
-                <a:solidFill>
-                  <a:srgbClr val="2E7D5B"/>
+              <a:rPr sz="1150" b="1" i="0">
+                <a:solidFill>
+                  <a:srgbClr val="B44A1E"/>
                 </a:solidFill>
                 <a:latin typeface="Microsoft JhengHei"/>
               </a:rPr>
-              <a:t>一句話賣點：</a:t>
-            </a:r>
-            <a:r>
-              <a:rPr sz="1400" b="0" i="0">
-                <a:solidFill>
-                  <a:srgbClr val="1A1A2E"/>
+              <a:t>未驗證：</a:t>
+            </a:r>
+            <a:r>
+              <a:rPr sz="1150" b="0" i="0">
+                <a:solidFill>
+                  <a:srgbClr val="111111"/>
                 </a:solidFill>
                 <a:latin typeface="Microsoft JhengHei"/>
               </a:rPr>
-              <a:t>把運動證據(光流/scene-flow)一致性做成連續可驗證 GRPO reward，首個把它從壓縮 prior 升級為訓練訊號。</a:t>
-            </a:r>
-          </a:p>
-        </p:txBody>
-      </p:sp>
-      <p:graphicFrame>
-        <p:nvGraphicFramePr>
-          <p:cNvPr id="9" name="Table 8"/>
-          <p:cNvGraphicFramePr>
-            <a:graphicFrameLocks noGrp="1"/>
-          </p:cNvGraphicFramePr>
-          <p:nvPr/>
-        </p:nvGraphicFramePr>
-        <p:xfrm>
-          <a:off x="640080" y="2194560"/>
-          <a:ext cx="10881360" cy="2286000"/>
-        </p:xfrm>
-        <a:graphic>
-          <a:graphicData uri="http://schemas.openxmlformats.org/drawingml/2006/table">
-            <a:tbl>
-              <a:tblPr firstRow="1" bandRow="1">
-                <a:tableStyleId>{5C22544A-7EE6-4342-B048-85BDC9FD1C3A}</a:tableStyleId>
-              </a:tblPr>
-              <a:tblGrid>
-                <a:gridCol w="3383280"/>
-                <a:gridCol w="2194560"/>
-                <a:gridCol w="5303520"/>
-              </a:tblGrid>
-              <a:tr h="381000">
-                <a:tc>
-                  <a:txBody>
-                    <a:bodyPr wrap="square"/>
-                    <a:lstStyle/>
-                    <a:p>
-                      <a:r>
-                        <a:rPr sz="1250" b="1">
-                          <a:solidFill>
-                            <a:srgbClr val="FFFFFF"/>
-                          </a:solidFill>
-                          <a:latin typeface="Microsoft JhengHei"/>
-                        </a:rPr>
-                        <a:t>Benchmark</a:t>
-                      </a:r>
-                    </a:p>
-                  </a:txBody>
-                  <a:tcPr marL="76200" marR="63500" marT="25400" marB="25400" anchor="ctr">
-                    <a:solidFill>
-                      <a:srgbClr val="1A1A2E"/>
-                    </a:solidFill>
-                  </a:tcPr>
-                </a:tc>
-                <a:tc>
-                  <a:txBody>
-                    <a:bodyPr wrap="square"/>
-                    <a:lstStyle/>
-                    <a:p>
-                      <a:r>
-                        <a:rPr sz="1250" b="1">
-                          <a:solidFill>
-                            <a:srgbClr val="FFFFFF"/>
-                          </a:solidFill>
-                          <a:latin typeface="Microsoft JhengHei"/>
-                        </a:rPr>
-                        <a:t>規模</a:t>
-                      </a:r>
-                    </a:p>
-                  </a:txBody>
-                  <a:tcPr marL="76200" marR="63500" marT="25400" marB="25400" anchor="ctr">
-                    <a:solidFill>
-                      <a:srgbClr val="1A1A2E"/>
-                    </a:solidFill>
-                  </a:tcPr>
-                </a:tc>
-                <a:tc>
-                  <a:txBody>
-                    <a:bodyPr wrap="square"/>
-                    <a:lstStyle/>
-                    <a:p>
-                      <a:r>
-                        <a:rPr sz="1250" b="1">
-                          <a:solidFill>
-                            <a:srgbClr val="FFFFFF"/>
-                          </a:solidFill>
-                          <a:latin typeface="Microsoft JhengHei"/>
-                        </a:rPr>
-                        <a:t>焦點 / 差異</a:t>
-                      </a:r>
-                    </a:p>
-                  </a:txBody>
-                  <a:tcPr marL="76200" marR="63500" marT="25400" marB="25400" anchor="ctr">
-                    <a:solidFill>
-                      <a:srgbClr val="1A1A2E"/>
-                    </a:solidFill>
-                  </a:tcPr>
-                </a:tc>
-              </a:tr>
-              <a:tr h="381000">
-                <a:tc>
-                  <a:txBody>
-                    <a:bodyPr wrap="square"/>
-                    <a:lstStyle/>
-                    <a:p>
-                      <a:r>
-                        <a:rPr sz="1100" b="1">
-                          <a:solidFill>
-                            <a:srgbClr val="0F768E"/>
-                          </a:solidFill>
-                          <a:latin typeface="Microsoft JhengHei"/>
-                        </a:rPr>
-                        <a:t>VLM4D (2508.02095)</a:t>
-                      </a:r>
-                    </a:p>
-                  </a:txBody>
-                  <a:tcPr marL="76200" marR="63500" marT="25400" marB="25400" anchor="ctr">
-                    <a:solidFill>
-                      <a:srgbClr val="FFFFFF"/>
-                    </a:solidFill>
-                  </a:tcPr>
-                </a:tc>
-                <a:tc>
-                  <a:txBody>
-                    <a:bodyPr wrap="square"/>
-                    <a:lstStyle/>
-                    <a:p>
-                      <a:r>
-                        <a:rPr sz="1100">
-                          <a:solidFill>
-                            <a:srgbClr val="1A1A2E"/>
-                          </a:solidFill>
-                          <a:latin typeface="Microsoft JhengHei"/>
-                        </a:rPr>
-                        <a:t>curated QA</a:t>
-                      </a:r>
-                    </a:p>
-                  </a:txBody>
-                  <a:tcPr marL="76200" marR="63500" marT="25400" marB="25400" anchor="ctr">
-                    <a:solidFill>
-                      <a:srgbClr val="FFFFFF"/>
-                    </a:solidFill>
-                  </a:tcPr>
-                </a:tc>
-                <a:tc>
-                  <a:txBody>
-                    <a:bodyPr wrap="square"/>
-                    <a:lstStyle/>
-                    <a:p>
-                      <a:r>
-                        <a:rPr sz="1100">
-                          <a:solidFill>
-                            <a:srgbClr val="1A1A2E"/>
-                          </a:solidFill>
-                          <a:latin typeface="Microsoft JhengHei"/>
-                        </a:rPr>
-                        <a:t>平移/旋轉/視角/運動連續性；動態 · 對齊賣點</a:t>
-                      </a:r>
-                    </a:p>
-                  </a:txBody>
-                  <a:tcPr marL="76200" marR="63500" marT="25400" marB="25400" anchor="ctr">
-                    <a:solidFill>
-                      <a:srgbClr val="FFFFFF"/>
-                    </a:solidFill>
-                  </a:tcPr>
-                </a:tc>
-              </a:tr>
-              <a:tr h="381000">
-                <a:tc>
-                  <a:txBody>
-                    <a:bodyPr wrap="square"/>
-                    <a:lstStyle/>
-                    <a:p>
-                      <a:r>
-                        <a:rPr sz="1100" b="1">
-                          <a:solidFill>
-                            <a:srgbClr val="0F768E"/>
-                          </a:solidFill>
-                          <a:latin typeface="Microsoft JhengHei"/>
-                        </a:rPr>
-                        <a:t>STI-Bench</a:t>
-                      </a:r>
-                    </a:p>
-                  </a:txBody>
-                  <a:tcPr marL="76200" marR="63500" marT="25400" marB="25400" anchor="ctr">
-                    <a:solidFill>
-                      <a:srgbClr val="F2F5F7"/>
-                    </a:solidFill>
-                  </a:tcPr>
-                </a:tc>
-                <a:tc>
-                  <a:txBody>
-                    <a:bodyPr wrap="square"/>
-                    <a:lstStyle/>
-                    <a:p>
-                      <a:r>
-                        <a:rPr sz="1100">
-                          <a:solidFill>
-                            <a:srgbClr val="1A1A2E"/>
-                          </a:solidFill>
-                          <a:latin typeface="Microsoft JhengHei"/>
-                        </a:rPr>
-                        <a:t>300+片 / 2k+ QA</a:t>
-                      </a:r>
-                    </a:p>
-                  </a:txBody>
-                  <a:tcPr marL="76200" marR="63500" marT="25400" marB="25400" anchor="ctr">
-                    <a:solidFill>
-                      <a:srgbClr val="F2F5F7"/>
-                    </a:solidFill>
-                  </a:tcPr>
-                </a:tc>
-                <a:tc>
-                  <a:txBody>
-                    <a:bodyPr wrap="square"/>
-                    <a:lstStyle/>
-                    <a:p>
-                      <a:r>
-                        <a:rPr sz="1100">
-                          <a:solidFill>
-                            <a:srgbClr val="1A1A2E"/>
-                          </a:solidFill>
-                          <a:latin typeface="Microsoft JhengHei"/>
-                        </a:rPr>
-                        <a:t>靜+動，強調精確量測(速度/距離) · 適合連續 reward</a:t>
-                      </a:r>
-                    </a:p>
-                  </a:txBody>
-                  <a:tcPr marL="76200" marR="63500" marT="25400" marB="25400" anchor="ctr">
-                    <a:solidFill>
-                      <a:srgbClr val="F2F5F7"/>
-                    </a:solidFill>
-                  </a:tcPr>
-                </a:tc>
-              </a:tr>
-              <a:tr h="381000">
-                <a:tc>
-                  <a:txBody>
-                    <a:bodyPr wrap="square"/>
-                    <a:lstStyle/>
-                    <a:p>
-                      <a:r>
-                        <a:rPr sz="1100" b="1">
-                          <a:solidFill>
-                            <a:srgbClr val="0F768E"/>
-                          </a:solidFill>
-                          <a:latin typeface="Microsoft JhengHei"/>
-                        </a:rPr>
-                        <a:t>Spatial4D-Bench (2601.00092)</a:t>
-                      </a:r>
-                    </a:p>
-                  </a:txBody>
-                  <a:tcPr marL="76200" marR="63500" marT="25400" marB="25400" anchor="ctr">
-                    <a:solidFill>
-                      <a:srgbClr val="FFFFFF"/>
-                    </a:solidFill>
-                  </a:tcPr>
-                </a:tc>
-                <a:tc>
-                  <a:txBody>
-                    <a:bodyPr wrap="square"/>
-                    <a:lstStyle/>
-                    <a:p>
-                      <a:r>
-                        <a:rPr sz="1100">
-                          <a:solidFill>
-                            <a:srgbClr val="1A1A2E"/>
-                          </a:solidFill>
-                          <a:latin typeface="Microsoft JhengHei"/>
-                        </a:rPr>
-                        <a:t>~40k QA / 18 任務</a:t>
-                      </a:r>
-                    </a:p>
-                  </a:txBody>
-                  <a:tcPr marL="76200" marR="63500" marT="25400" marB="25400" anchor="ctr">
-                    <a:solidFill>
-                      <a:srgbClr val="FFFFFF"/>
-                    </a:solidFill>
-                  </a:tcPr>
-                </a:tc>
-                <a:tc>
-                  <a:txBody>
-                    <a:bodyPr wrap="square"/>
-                    <a:lstStyle/>
-                    <a:p>
-                      <a:r>
-                        <a:rPr sz="1100">
-                          <a:solidFill>
-                            <a:srgbClr val="1A1A2E"/>
-                          </a:solidFill>
-                          <a:latin typeface="Microsoft JhengHei"/>
-                        </a:rPr>
-                        <a:t>最全面 4D 空間智能；規模最大</a:t>
-                      </a:r>
-                    </a:p>
-                  </a:txBody>
-                  <a:tcPr marL="76200" marR="63500" marT="25400" marB="25400" anchor="ctr">
-                    <a:solidFill>
-                      <a:srgbClr val="FFFFFF"/>
-                    </a:solidFill>
-                  </a:tcPr>
-                </a:tc>
-              </a:tr>
-              <a:tr h="381000">
-                <a:tc>
-                  <a:txBody>
-                    <a:bodyPr wrap="square"/>
-                    <a:lstStyle/>
-                    <a:p>
-                      <a:r>
-                        <a:rPr sz="1100" b="1">
-                          <a:solidFill>
-                            <a:srgbClr val="0F768E"/>
-                          </a:solidFill>
-                          <a:latin typeface="Microsoft JhengHei"/>
-                        </a:rPr>
-                        <a:t>VSI-Bench</a:t>
-                      </a:r>
-                    </a:p>
-                  </a:txBody>
-                  <a:tcPr marL="76200" marR="63500" marT="25400" marB="25400" anchor="ctr">
-                    <a:solidFill>
-                      <a:srgbClr val="F2F5F7"/>
-                    </a:solidFill>
-                  </a:tcPr>
-                </a:tc>
-                <a:tc>
-                  <a:txBody>
-                    <a:bodyPr wrap="square"/>
-                    <a:lstStyle/>
-                    <a:p>
-                      <a:r>
-                        <a:rPr sz="1100">
-                          <a:solidFill>
-                            <a:srgbClr val="1A1A2E"/>
-                          </a:solidFill>
-                          <a:latin typeface="Microsoft JhengHei"/>
-                        </a:rPr>
-                        <a:t>5k QA / 8 任務</a:t>
-                      </a:r>
-                    </a:p>
-                  </a:txBody>
-                  <a:tcPr marL="76200" marR="63500" marT="25400" marB="25400" anchor="ctr">
-                    <a:solidFill>
-                      <a:srgbClr val="F2F5F7"/>
-                    </a:solidFill>
-                  </a:tcPr>
-                </a:tc>
-                <a:tc>
-                  <a:txBody>
-                    <a:bodyPr wrap="square"/>
-                    <a:lstStyle/>
-                    <a:p>
-                      <a:r>
-                        <a:rPr sz="1100">
-                          <a:solidFill>
-                            <a:srgbClr val="1A1A2E"/>
-                          </a:solidFill>
-                          <a:latin typeface="Microsoft JhengHei"/>
-                        </a:rPr>
-                        <a:t>ScanNet 系，自帶深度 · 偏靜態 3D</a:t>
-                      </a:r>
-                    </a:p>
-                  </a:txBody>
-                  <a:tcPr marL="76200" marR="63500" marT="25400" marB="25400" anchor="ctr">
-                    <a:solidFill>
-                      <a:srgbClr val="F2F5F7"/>
-                    </a:solidFill>
-                  </a:tcPr>
-                </a:tc>
-              </a:tr>
-              <a:tr h="381000">
-                <a:tc>
-                  <a:txBody>
-                    <a:bodyPr wrap="square"/>
-                    <a:lstStyle/>
-                    <a:p>
-                      <a:r>
-                        <a:rPr sz="1100" b="1">
-                          <a:solidFill>
-                            <a:srgbClr val="0F768E"/>
-                          </a:solidFill>
-                          <a:latin typeface="Microsoft JhengHei"/>
-                        </a:rPr>
-                        <a:t>DSI-Bench (2510.18873)</a:t>
-                      </a:r>
-                    </a:p>
-                  </a:txBody>
-                  <a:tcPr marL="76200" marR="63500" marT="25400" marB="25400" anchor="ctr">
-                    <a:solidFill>
-                      <a:srgbClr val="FFFFFF"/>
-                    </a:solidFill>
-                  </a:tcPr>
-                </a:tc>
-                <a:tc>
-                  <a:txBody>
-                    <a:bodyPr wrap="square"/>
-                    <a:lstStyle/>
-                    <a:p>
-                      <a:r>
-                        <a:rPr sz="1100">
-                          <a:solidFill>
-                            <a:srgbClr val="1A1A2E"/>
-                          </a:solidFill>
-                          <a:latin typeface="Microsoft JhengHei"/>
-                        </a:rPr>
-                        <a:t>—</a:t>
-                      </a:r>
-                    </a:p>
-                  </a:txBody>
-                  <a:tcPr marL="76200" marR="63500" marT="25400" marB="25400" anchor="ctr">
-                    <a:solidFill>
-                      <a:srgbClr val="FFFFFF"/>
-                    </a:solidFill>
-                  </a:tcPr>
-                </a:tc>
-                <a:tc>
-                  <a:txBody>
-                    <a:bodyPr wrap="square"/>
-                    <a:lstStyle/>
-                    <a:p>
-                      <a:r>
-                        <a:rPr sz="1100">
-                          <a:solidFill>
-                            <a:srgbClr val="1A1A2E"/>
-                          </a:solidFill>
-                          <a:latin typeface="Microsoft JhengHei"/>
-                        </a:rPr>
-                        <a:t>純動態空間智能 · 最貼 flow</a:t>
-                      </a:r>
-                    </a:p>
-                  </a:txBody>
-                  <a:tcPr marL="76200" marR="63500" marT="25400" marB="25400" anchor="ctr">
-                    <a:solidFill>
-                      <a:srgbClr val="FFFFFF"/>
-                    </a:solidFill>
-                  </a:tcPr>
-                </a:tc>
-              </a:tr>
-            </a:tbl>
-          </a:graphicData>
-        </a:graphic>
-      </p:graphicFrame>
-      <p:sp>
-        <p:nvSpPr>
-          <p:cNvPr id="10" name="Rounded Rectangle 9"/>
-          <p:cNvSpPr/>
-          <p:nvPr/>
-        </p:nvSpPr>
-        <p:spPr>
-          <a:xfrm>
-            <a:off x="640080" y="5166360"/>
-            <a:ext cx="10881360" cy="731520"/>
-          </a:xfrm>
-          <a:prstGeom prst="roundRect">
-            <a:avLst/>
-          </a:prstGeom>
-          <a:solidFill>
-            <a:srgbClr val="ECF5F0"/>
-          </a:solidFill>
-          <a:ln>
-            <a:noFill/>
-          </a:ln>
-          <a:effectLst/>
-        </p:spPr>
-        <p:style>
-          <a:lnRef idx="1">
-            <a:schemeClr val="accent1"/>
-          </a:lnRef>
-          <a:fillRef idx="3">
-            <a:schemeClr val="accent1"/>
-          </a:fillRef>
-          <a:effectRef idx="2">
-            <a:schemeClr val="accent1"/>
-          </a:effectRef>
-          <a:fontRef idx="minor">
-            <a:schemeClr val="lt1"/>
-          </a:fontRef>
-        </p:style>
-        <p:txBody>
-          <a:bodyPr rtlCol="0" anchor="ctr"/>
-          <a:lstStyle/>
-          <a:p>
-            <a:pPr algn="ctr"/>
-          </a:p>
-        </p:txBody>
-      </p:sp>
-      <p:sp>
-        <p:nvSpPr>
-          <p:cNvPr id="11" name="Rectangle 10"/>
-          <p:cNvSpPr/>
-          <p:nvPr/>
-        </p:nvSpPr>
-        <p:spPr>
-          <a:xfrm>
-            <a:off x="640080" y="5166360"/>
-            <a:ext cx="146304" cy="731520"/>
-          </a:xfrm>
-          <a:prstGeom prst="rect">
-            <a:avLst/>
-          </a:prstGeom>
-          <a:solidFill>
-            <a:srgbClr val="2E7D5B"/>
-          </a:solidFill>
-          <a:ln>
-            <a:noFill/>
-          </a:ln>
-          <a:effectLst/>
-        </p:spPr>
-        <p:style>
-          <a:lnRef idx="1">
-            <a:schemeClr val="accent1"/>
-          </a:lnRef>
-          <a:fillRef idx="3">
-            <a:schemeClr val="accent1"/>
-          </a:fillRef>
-          <a:effectRef idx="2">
-            <a:schemeClr val="accent1"/>
-          </a:effectRef>
-          <a:fontRef idx="minor">
-            <a:schemeClr val="lt1"/>
-          </a:fontRef>
-        </p:style>
-        <p:txBody>
-          <a:bodyPr rtlCol="0" anchor="ctr"/>
-          <a:lstStyle/>
-          <a:p>
-            <a:pPr algn="ctr"/>
-          </a:p>
-        </p:txBody>
-      </p:sp>
-      <p:sp>
-        <p:nvSpPr>
-          <p:cNvPr id="12" name="Rounded Rectangle 11"/>
-          <p:cNvSpPr/>
-          <p:nvPr/>
-        </p:nvSpPr>
-        <p:spPr>
-          <a:xfrm>
-            <a:off x="868680" y="5330952"/>
-            <a:ext cx="960120" cy="402336"/>
-          </a:xfrm>
-          <a:prstGeom prst="roundRect">
-            <a:avLst/>
-          </a:prstGeom>
-          <a:solidFill>
-            <a:srgbClr val="2E7D5B"/>
-          </a:solidFill>
-          <a:ln>
-            <a:noFill/>
-          </a:ln>
-          <a:effectLst/>
-        </p:spPr>
-        <p:style>
-          <a:lnRef idx="1">
-            <a:schemeClr val="accent1"/>
-          </a:lnRef>
-          <a:fillRef idx="3">
-            <a:schemeClr val="accent1"/>
-          </a:fillRef>
-          <a:effectRef idx="2">
-            <a:schemeClr val="accent1"/>
-          </a:effectRef>
-          <a:fontRef idx="minor">
-            <a:schemeClr val="lt1"/>
-          </a:fontRef>
-        </p:style>
-        <p:txBody>
-          <a:bodyPr rtlCol="0" anchor="ctr"/>
-          <a:lstStyle/>
-          <a:p>
-            <a:pPr algn="ctr"/>
-          </a:p>
-        </p:txBody>
-      </p:sp>
-      <p:sp>
-        <p:nvSpPr>
-          <p:cNvPr id="13" name="TextBox 12"/>
+              <a:t>以上為支持/反對兩欄並列,不下結論——賣點最終版由你重寫(skill 憲法)。</a:t>
+            </a:r>
+          </a:p>
+        </p:txBody>
+      </p:sp>
+      <p:sp>
+        <p:nvSpPr>
+          <p:cNvPr id="10" name="TextBox 9"/>
           <p:cNvSpPr txBox="1"/>
           <p:nvPr/>
         </p:nvSpPr>
         <p:spPr>
           <a:xfrm>
-            <a:off x="868680" y="5330952"/>
-            <a:ext cx="960120" cy="402336"/>
+            <a:off x="640080" y="6355080"/>
+            <a:ext cx="10058400" cy="320040"/>
           </a:xfrm>
           <a:prstGeom prst="rect">
             <a:avLst/>
@@ -9662,44 +7732,53 @@
           <a:noFill/>
         </p:spPr>
         <p:txBody>
-          <a:bodyPr wrap="square" anchor="ctr" lIns="0" rIns="0" tIns="0" bIns="0">
+          <a:bodyPr wrap="square" anchor="t" lIns="0" rIns="0" tIns="0" bIns="0">
             <a:spAutoFit/>
           </a:bodyPr>
           <a:lstStyle/>
           <a:p>
-            <a:pPr algn="ctr">
+            <a:pPr algn="l">
               <a:lnSpc>
-                <a:spcPct val="108000"/>
+                <a:spcPct val="110000"/>
               </a:lnSpc>
               <a:spcBef>
                 <a:spcPts val="0"/>
               </a:spcBef>
               <a:spcAft>
-                <a:spcPts val="600"/>
+                <a:spcPts val="500"/>
               </a:spcAft>
             </a:pPr>
             <a:r>
-              <a:rPr sz="1500" b="1" i="0">
-                <a:solidFill>
-                  <a:srgbClr val="FFFFFF"/>
+              <a:rPr sz="950" b="1" i="0">
+                <a:solidFill>
+                  <a:srgbClr val="555B63"/>
                 </a:solidFill>
                 <a:latin typeface="Microsoft JhengHei"/>
               </a:rPr>
-              <a:t>結論</a:t>
-            </a:r>
-          </a:p>
-        </p:txBody>
-      </p:sp>
-      <p:sp>
-        <p:nvSpPr>
-          <p:cNvPr id="14" name="TextBox 13"/>
+              <a:t>依據：</a:t>
+            </a:r>
+            <a:r>
+              <a:rPr sz="950" b="0" i="1">
+                <a:solidFill>
+                  <a:srgbClr val="555B63"/>
+                </a:solidFill>
+                <a:latin typeface="Segoe UI"/>
+              </a:rPr>
+              <a:t>彙整自 Q2/Q3/Q4/Q6/Q8 各頁之來源。</a:t>
+            </a:r>
+          </a:p>
+        </p:txBody>
+      </p:sp>
+      <p:sp>
+        <p:nvSpPr>
+          <p:cNvPr id="11" name="TextBox 10"/>
           <p:cNvSpPr txBox="1"/>
           <p:nvPr/>
         </p:nvSpPr>
         <p:spPr>
           <a:xfrm>
-            <a:off x="2011680" y="5166360"/>
-            <a:ext cx="9326880" cy="731520"/>
+            <a:off x="10881360" y="6510528"/>
+            <a:ext cx="1097280" cy="274320"/>
           </a:xfrm>
           <a:prstGeom prst="rect">
             <a:avLst/>
@@ -9707,138 +7786,30 @@
           <a:noFill/>
         </p:spPr>
         <p:txBody>
-          <a:bodyPr wrap="square" anchor="ctr" lIns="0" rIns="0" tIns="0" bIns="0">
+          <a:bodyPr wrap="square" anchor="t" lIns="0" rIns="0" tIns="0" bIns="0">
             <a:spAutoFit/>
           </a:bodyPr>
           <a:lstStyle/>
           <a:p>
-            <a:pPr algn="l">
+            <a:pPr algn="r">
               <a:lnSpc>
-                <a:spcPct val="105000"/>
+                <a:spcPct val="110000"/>
               </a:lnSpc>
               <a:spcBef>
                 <a:spcPts val="0"/>
               </a:spcBef>
               <a:spcAft>
-                <a:spcPts val="600"/>
+                <a:spcPts val="500"/>
               </a:spcAft>
             </a:pPr>
             <a:r>
-              <a:rPr sz="1450" b="1" i="0">
-                <a:solidFill>
-                  <a:srgbClr val="1A1A2E"/>
-                </a:solidFill>
-                <a:latin typeface="Microsoft JhengHei"/>
-              </a:rPr>
-              <a:t>depth-as-reward 擁擠 → 主打 flow 一致性；</a:t>
-            </a:r>
-            <a:r>
-              <a:rPr sz="1450" b="0" i="0">
-                <a:solidFill>
-                  <a:srgbClr val="1A1A2E"/>
-                </a:solidFill>
-                <a:latin typeface="Microsoft JhengHei"/>
-              </a:rPr>
-              <a:t>主評測 VLM4D(動態)+STI-Bench(可量化)。</a:t>
-            </a:r>
-          </a:p>
-        </p:txBody>
-      </p:sp>
-      <p:sp>
-        <p:nvSpPr>
-          <p:cNvPr id="15" name="TextBox 14"/>
-          <p:cNvSpPr txBox="1"/>
-          <p:nvPr/>
-        </p:nvSpPr>
-        <p:spPr>
-          <a:xfrm>
-            <a:off x="640080" y="6035040"/>
-            <a:ext cx="10972800" cy="320040"/>
-          </a:xfrm>
-          <a:prstGeom prst="rect">
-            <a:avLst/>
-          </a:prstGeom>
-          <a:noFill/>
-        </p:spPr>
-        <p:txBody>
-          <a:bodyPr wrap="square" anchor="t" lIns="0" rIns="0" tIns="0" bIns="0">
-            <a:spAutoFit/>
-          </a:bodyPr>
-          <a:lstStyle/>
-          <a:p>
-            <a:pPr algn="l">
-              <a:lnSpc>
-                <a:spcPct val="108000"/>
-              </a:lnSpc>
-              <a:spcBef>
-                <a:spcPts val="0"/>
-              </a:spcBef>
-              <a:spcAft>
-                <a:spcPts val="600"/>
-              </a:spcAft>
-            </a:pPr>
-            <a:r>
-              <a:rPr sz="1000" b="1" i="0">
-                <a:solidFill>
-                  <a:srgbClr val="5B6370"/>
-                </a:solidFill>
-                <a:latin typeface="Microsoft JhengHei"/>
-              </a:rPr>
-              <a:t>▸ 依據：</a:t>
-            </a:r>
-            <a:r>
-              <a:rPr sz="1000" b="0" i="1">
-                <a:solidFill>
-                  <a:srgbClr val="5B6370"/>
+              <a:rPr sz="900" b="0" i="0">
+                <a:solidFill>
+                  <a:srgbClr val="555B63"/>
                 </a:solidFill>
                 <a:latin typeface="Segoe UI"/>
               </a:rPr>
-              <a:t>VLM4D 2508.02095 · STI-Bench · Spatial4D-Bench 2601.00092 · VSI-Bench · DSI-Bench 2510.18873</a:t>
-            </a:r>
-          </a:p>
-        </p:txBody>
-      </p:sp>
-      <p:sp>
-        <p:nvSpPr>
-          <p:cNvPr id="16" name="TextBox 15"/>
-          <p:cNvSpPr txBox="1"/>
-          <p:nvPr/>
-        </p:nvSpPr>
-        <p:spPr>
-          <a:xfrm>
-            <a:off x="10424160" y="6455664"/>
-            <a:ext cx="1554480" cy="274320"/>
-          </a:xfrm>
-          <a:prstGeom prst="rect">
-            <a:avLst/>
-          </a:prstGeom>
-          <a:noFill/>
-        </p:spPr>
-        <p:txBody>
-          <a:bodyPr wrap="square" anchor="t" lIns="0" rIns="0" tIns="0" bIns="0">
-            <a:spAutoFit/>
-          </a:bodyPr>
-          <a:lstStyle/>
-          <a:p>
-            <a:pPr algn="r">
-              <a:lnSpc>
-                <a:spcPct val="108000"/>
-              </a:lnSpc>
-              <a:spcBef>
-                <a:spcPts val="0"/>
-              </a:spcBef>
-              <a:spcAft>
-                <a:spcPts val="600"/>
-              </a:spcAft>
-            </a:pPr>
-            <a:r>
-              <a:rPr sz="900" b="0" i="0">
-                <a:solidFill>
-                  <a:srgbClr val="5B6370"/>
-                </a:solidFill>
-                <a:latin typeface="Segoe UI"/>
-              </a:rPr>
-              <a:t>待辦回答 · 7/7</a:t>
+              <a:t>7/9 · 草稿</a:t>
             </a:r>
           </a:p>
         </p:txBody>
@@ -9907,20 +7878,74 @@
       </p:sp>
       <p:sp>
         <p:nvSpPr>
-          <p:cNvPr id="3" name="Oval 2"/>
+          <p:cNvPr id="3" name="TextBox 2"/>
+          <p:cNvSpPr txBox="1"/>
+          <p:nvPr/>
+        </p:nvSpPr>
+        <p:spPr>
+          <a:xfrm>
+            <a:off x="640080" y="384048"/>
+            <a:ext cx="10881360" cy="365760"/>
+          </a:xfrm>
+          <a:prstGeom prst="rect">
+            <a:avLst/>
+          </a:prstGeom>
+          <a:noFill/>
+        </p:spPr>
+        <p:txBody>
+          <a:bodyPr wrap="square" anchor="t" lIns="0" rIns="0" tIns="0" bIns="0">
+            <a:spAutoFit/>
+          </a:bodyPr>
+          <a:lstStyle/>
+          <a:p>
+            <a:pPr algn="l">
+              <a:lnSpc>
+                <a:spcPct val="110000"/>
+              </a:lnSpc>
+              <a:spcBef>
+                <a:spcPts val="0"/>
+              </a:spcBef>
+              <a:spcAft>
+                <a:spcPts val="500"/>
+              </a:spcAft>
+            </a:pPr>
+            <a:r>
+              <a:rPr sz="1500" b="1" i="0">
+                <a:solidFill>
+                  <a:srgbClr val="0F768E"/>
+                </a:solidFill>
+                <a:latin typeface="Segoe UI"/>
+              </a:rPr>
+              <a:t>Q8　</a:t>
+            </a:r>
+            <a:r>
+              <a:rPr sz="1250" b="0" i="0">
+                <a:solidFill>
+                  <a:srgbClr val="555B63"/>
+                </a:solidFill>
+                <a:latin typeface="Microsoft JhengHei"/>
+              </a:rPr>
+              <a:t>4D 常見 benchmark 及彼此差異(STI、VLM4D 等;含導讀論文實際使用)。</a:t>
+            </a:r>
+          </a:p>
+        </p:txBody>
+      </p:sp>
+      <p:sp>
+        <p:nvSpPr>
+          <p:cNvPr id="4" name="Rectangle 3"/>
           <p:cNvSpPr/>
           <p:nvPr/>
         </p:nvSpPr>
         <p:spPr>
           <a:xfrm>
-            <a:off x="640080" y="457200"/>
-            <a:ext cx="566928" cy="566928"/>
-          </a:xfrm>
-          <a:prstGeom prst="ellipse">
+            <a:off x="640080" y="804672"/>
+            <a:ext cx="10881360" cy="14630"/>
+          </a:xfrm>
+          <a:prstGeom prst="rect">
             <a:avLst/>
           </a:prstGeom>
           <a:solidFill>
-            <a:srgbClr val="0F768E"/>
+            <a:srgbClr val="DDDDDD"/>
           </a:solidFill>
           <a:ln>
             <a:noFill/>
@@ -9951,148 +7976,13 @@
       </p:sp>
       <p:sp>
         <p:nvSpPr>
-          <p:cNvPr id="4" name="TextBox 3"/>
-          <p:cNvSpPr txBox="1"/>
-          <p:nvPr/>
-        </p:nvSpPr>
-        <p:spPr>
-          <a:xfrm>
-            <a:off x="640080" y="457200"/>
-            <a:ext cx="566928" cy="566928"/>
-          </a:xfrm>
-          <a:prstGeom prst="rect">
-            <a:avLst/>
-          </a:prstGeom>
-          <a:noFill/>
-        </p:spPr>
-        <p:txBody>
-          <a:bodyPr wrap="square" anchor="ctr" lIns="0" rIns="0" tIns="0" bIns="0">
-            <a:spAutoFit/>
-          </a:bodyPr>
-          <a:lstStyle/>
-          <a:p>
-            <a:pPr algn="ctr">
-              <a:lnSpc>
-                <a:spcPct val="108000"/>
-              </a:lnSpc>
-              <a:spcBef>
-                <a:spcPts val="0"/>
-              </a:spcBef>
-              <a:spcAft>
-                <a:spcPts val="600"/>
-              </a:spcAft>
-            </a:pPr>
-            <a:r>
-              <a:rPr sz="2200" b="1" i="0">
-                <a:solidFill>
-                  <a:srgbClr val="FFFFFF"/>
-                </a:solidFill>
-                <a:latin typeface="Segoe UI"/>
-              </a:rPr>
-              <a:t>8</a:t>
-            </a:r>
-          </a:p>
-        </p:txBody>
-      </p:sp>
-      <p:sp>
-        <p:nvSpPr>
           <p:cNvPr id="5" name="TextBox 4"/>
           <p:cNvSpPr txBox="1"/>
           <p:nvPr/>
         </p:nvSpPr>
         <p:spPr>
           <a:xfrm>
-            <a:off x="1371600" y="475488"/>
-            <a:ext cx="10241280" cy="548640"/>
-          </a:xfrm>
-          <a:prstGeom prst="rect">
-            <a:avLst/>
-          </a:prstGeom>
-          <a:noFill/>
-        </p:spPr>
-        <p:txBody>
-          <a:bodyPr wrap="square" anchor="t" lIns="0" rIns="0" tIns="0" bIns="0">
-            <a:spAutoFit/>
-          </a:bodyPr>
-          <a:lstStyle/>
-          <a:p>
-            <a:pPr algn="l">
-              <a:lnSpc>
-                <a:spcPct val="108000"/>
-              </a:lnSpc>
-              <a:spcBef>
-                <a:spcPts val="0"/>
-              </a:spcBef>
-              <a:spcAft>
-                <a:spcPts val="600"/>
-              </a:spcAft>
-            </a:pPr>
-            <a:r>
-              <a:rPr sz="1300" b="1" i="0">
-                <a:solidFill>
-                  <a:srgbClr val="0F768E"/>
-                </a:solidFill>
-                <a:latin typeface="Microsoft JhengHei"/>
-              </a:rPr>
-              <a:t>補充 · Flow / Depth 相關 Benchmark(限報告論文實際使用者)</a:t>
-            </a:r>
-          </a:p>
-        </p:txBody>
-      </p:sp>
-      <p:sp>
-        <p:nvSpPr>
-          <p:cNvPr id="6" name="TextBox 5"/>
-          <p:cNvSpPr txBox="1"/>
-          <p:nvPr/>
-        </p:nvSpPr>
-        <p:spPr>
-          <a:xfrm>
-            <a:off x="1371600" y="822960"/>
-            <a:ext cx="10424160" cy="502920"/>
-          </a:xfrm>
-          <a:prstGeom prst="rect">
-            <a:avLst/>
-          </a:prstGeom>
-          <a:noFill/>
-        </p:spPr>
-        <p:txBody>
-          <a:bodyPr wrap="square" anchor="t" lIns="0" rIns="0" tIns="0" bIns="0">
-            <a:spAutoFit/>
-          </a:bodyPr>
-          <a:lstStyle/>
-          <a:p>
-            <a:pPr algn="l">
-              <a:lnSpc>
-                <a:spcPct val="108000"/>
-              </a:lnSpc>
-              <a:spcBef>
-                <a:spcPts val="0"/>
-              </a:spcBef>
-              <a:spcAft>
-                <a:spcPts val="600"/>
-              </a:spcAft>
-            </a:pPr>
-            <a:r>
-              <a:rPr sz="1300" b="0" i="1">
-                <a:solidFill>
-                  <a:srgbClr val="5B6370"/>
-                </a:solidFill>
-                <a:latin typeface="Microsoft JhengHei"/>
-              </a:rPr>
-              <a:t>整理 10 篇導讀論文(4D_evidence_reward_deep)實際評測用到的 depth / flow / 時空 benchmark。</a:t>
-            </a:r>
-          </a:p>
-        </p:txBody>
-      </p:sp>
-      <p:sp>
-        <p:nvSpPr>
-          <p:cNvPr id="7" name="TextBox 6"/>
-          <p:cNvSpPr txBox="1"/>
-          <p:nvPr/>
-        </p:nvSpPr>
-        <p:spPr>
-          <a:xfrm>
-            <a:off x="640080" y="1463040"/>
+            <a:off x="640080" y="960120"/>
             <a:ext cx="10972800" cy="777240"/>
           </a:xfrm>
           <a:prstGeom prst="rect">
@@ -10114,41 +8004,32 @@
                 <a:spcPts val="0"/>
               </a:spcBef>
               <a:spcAft>
-                <a:spcPts val="600"/>
+                <a:spcPts val="500"/>
               </a:spcAft>
             </a:pPr>
             <a:r>
-              <a:rPr sz="2200" b="1" i="0">
-                <a:solidFill>
-                  <a:srgbClr val="1A1A2E"/>
+              <a:rPr sz="2000" b="1" i="0">
+                <a:solidFill>
+                  <a:srgbClr val="111111"/>
                 </a:solidFill>
                 <a:latin typeface="Microsoft JhengHei"/>
               </a:rPr>
-              <a:t>深度/時空類 benchmark 在論文中已齊全；</a:t>
-            </a:r>
-            <a:r>
-              <a:rPr sz="2200" b="1" i="0">
-                <a:solidFill>
-                  <a:srgbClr val="E86A33"/>
-                </a:solidFill>
-                <a:latin typeface="Microsoft JhengHei"/>
-              </a:rPr>
-              <a:t>「flow 一致性」的評測不存在</a:t>
+              <a:t>深度/時空評測齊全可沿用;全場沒有「flow 一致性」評測</a:t>
             </a:r>
           </a:p>
         </p:txBody>
       </p:sp>
       <p:graphicFrame>
         <p:nvGraphicFramePr>
-          <p:cNvPr id="8" name="Table 7"/>
+          <p:cNvPr id="6" name="Table 5"/>
           <p:cNvGraphicFramePr>
             <a:graphicFrameLocks noGrp="1"/>
           </p:cNvGraphicFramePr>
           <p:nvPr/>
         </p:nvGraphicFramePr>
         <p:xfrm>
-          <a:off x="640080" y="2331720"/>
-          <a:ext cx="10881360" cy="2697480"/>
+          <a:off x="640080" y="1874519"/>
+          <a:ext cx="10881360" cy="3291840"/>
         </p:xfrm>
         <a:graphic>
           <a:graphicData uri="http://schemas.openxmlformats.org/drawingml/2006/table">
@@ -10157,11 +8038,11 @@
                 <a:tableStyleId>{5C22544A-7EE6-4342-B048-85BDC9FD1C3A}</a:tableStyleId>
               </a:tblPr>
               <a:tblGrid>
+                <a:gridCol w="2743200"/>
                 <a:gridCol w="2651760"/>
-                <a:gridCol w="2651760"/>
-                <a:gridCol w="5577840"/>
+                <a:gridCol w="5486400"/>
               </a:tblGrid>
-              <a:tr h="299720">
+              <a:tr h="411480">
                 <a:tc>
                   <a:txBody>
                     <a:bodyPr wrap="square"/>
@@ -10178,9 +8059,9 @@
                       </a:r>
                     </a:p>
                   </a:txBody>
-                  <a:tcPr marL="63500" marR="50800" marT="12700" marB="12700" anchor="ctr">
+                  <a:tcPr marL="63500" marR="50800" marT="25400" marB="25400" anchor="ctr">
                     <a:solidFill>
-                      <a:srgbClr val="1A1A2E"/>
+                      <a:srgbClr val="111111"/>
                     </a:solidFill>
                   </a:tcPr>
                 </a:tc>
@@ -10196,13 +8077,13 @@
                           </a:solidFill>
                           <a:latin typeface="Microsoft JhengHei"/>
                         </a:rPr>
-                        <a:t>哪篇論文在用</a:t>
+                        <a:t>誰在用(導讀論文)</a:t>
                       </a:r>
                     </a:p>
                   </a:txBody>
-                  <a:tcPr marL="63500" marR="50800" marT="12700" marB="12700" anchor="ctr">
+                  <a:tcPr marL="63500" marR="50800" marT="25400" marB="25400" anchor="ctr">
                     <a:solidFill>
-                      <a:srgbClr val="1A1A2E"/>
+                      <a:srgbClr val="111111"/>
                     </a:solidFill>
                   </a:tcPr>
                 </a:tc>
@@ -10218,18 +8099,18 @@
                           </a:solidFill>
                           <a:latin typeface="Microsoft JhengHei"/>
                         </a:rPr>
-                        <a:t>測什麼 / depth·flow 關聯</a:t>
+                        <a:t>測什麼 / 差異</a:t>
                       </a:r>
                     </a:p>
                   </a:txBody>
-                  <a:tcPr marL="63500" marR="50800" marT="12700" marB="12700" anchor="ctr">
+                  <a:tcPr marL="63500" marR="50800" marT="25400" marB="25400" anchor="ctr">
                     <a:solidFill>
-                      <a:srgbClr val="1A1A2E"/>
+                      <a:srgbClr val="111111"/>
                     </a:solidFill>
                   </a:tcPr>
                 </a:tc>
               </a:tr>
-              <a:tr h="299720">
+              <a:tr h="411480">
                 <a:tc>
                   <a:txBody>
                     <a:bodyPr wrap="square"/>
@@ -10246,7 +8127,7 @@
                       </a:r>
                     </a:p>
                   </a:txBody>
-                  <a:tcPr marL="63500" marR="50800" marT="12700" marB="12700" anchor="ctr">
+                  <a:tcPr marL="63500" marR="50800" marT="25400" marB="25400" anchor="ctr">
                     <a:solidFill>
                       <a:srgbClr val="FFFFFF"/>
                     </a:solidFill>
@@ -10260,7 +8141,7 @@
                       <a:r>
                         <a:rPr sz="1050">
                           <a:solidFill>
-                            <a:srgbClr val="1A1A2E"/>
+                            <a:srgbClr val="111111"/>
                           </a:solidFill>
                           <a:latin typeface="Microsoft JhengHei"/>
                         </a:rPr>
@@ -10268,7 +8149,7 @@
                       </a:r>
                     </a:p>
                   </a:txBody>
-                  <a:tcPr marL="63500" marR="50800" marT="12700" marB="12700" anchor="ctr">
+                  <a:tcPr marL="63500" marR="50800" marT="25400" marB="25400" anchor="ctr">
                     <a:solidFill>
                       <a:srgbClr val="FFFFFF"/>
                     </a:solidFill>
@@ -10282,22 +8163,22 @@
                       <a:r>
                         <a:rPr sz="1050">
                           <a:solidFill>
-                            <a:srgbClr val="1A1A2E"/>
+                            <a:srgbClr val="111111"/>
                           </a:solidFill>
                           <a:latin typeface="Microsoft JhengHei"/>
                         </a:rPr>
-                        <a:t>3D 空間認知;建於 ScanNet/ScanNet++/ARKitScenes(場景自帶深度)。Video-STR 33.0→46.5</a:t>
+                        <a:t>3D 空間認知;ScanNet 系,場景自帶深度。Video-STR 33.0→46.5</a:t>
                       </a:r>
                     </a:p>
                   </a:txBody>
-                  <a:tcPr marL="63500" marR="50800" marT="12700" marB="12700" anchor="ctr">
+                  <a:tcPr marL="63500" marR="50800" marT="25400" marB="25400" anchor="ctr">
                     <a:solidFill>
                       <a:srgbClr val="FFFFFF"/>
                     </a:solidFill>
                   </a:tcPr>
                 </a:tc>
               </a:tr>
-              <a:tr h="299720">
+              <a:tr h="411480">
                 <a:tc>
                   <a:txBody>
                     <a:bodyPr wrap="square"/>
@@ -10314,9 +8195,9 @@
                       </a:r>
                     </a:p>
                   </a:txBody>
-                  <a:tcPr marL="63500" marR="50800" marT="12700" marB="12700" anchor="ctr">
+                  <a:tcPr marL="63500" marR="50800" marT="25400" marB="25400" anchor="ctr">
                     <a:solidFill>
-                      <a:srgbClr val="F2F5F7"/>
+                      <a:srgbClr val="F4F5F6"/>
                     </a:solidFill>
                   </a:tcPr>
                 </a:tc>
@@ -10328,7 +8209,7 @@
                       <a:r>
                         <a:rPr sz="1050">
                           <a:solidFill>
-                            <a:srgbClr val="1A1A2E"/>
+                            <a:srgbClr val="111111"/>
                           </a:solidFill>
                           <a:latin typeface="Microsoft JhengHei"/>
                         </a:rPr>
@@ -10336,9 +8217,9 @@
                       </a:r>
                     </a:p>
                   </a:txBody>
-                  <a:tcPr marL="63500" marR="50800" marT="12700" marB="12700" anchor="ctr">
+                  <a:tcPr marL="63500" marR="50800" marT="25400" marB="25400" anchor="ctr">
                     <a:solidFill>
-                      <a:srgbClr val="F2F5F7"/>
+                      <a:srgbClr val="F4F5F6"/>
                     </a:solidFill>
                   </a:tcPr>
                 </a:tc>
@@ -10350,22 +8231,22 @@
                       <a:r>
                         <a:rPr sz="1050">
                           <a:solidFill>
-                            <a:srgbClr val="1A1A2E"/>
+                            <a:srgbClr val="111111"/>
                           </a:solidFill>
                           <a:latin typeface="Microsoft JhengHei"/>
                         </a:rPr>
-                        <a:t>精確量測(距離/速度/方向),深度+運動的定量評測。Video-STR 34.7→39.3</a:t>
+                        <a:t>精確量測(距離/速度);定量。Video-STR 34.7→39.3</a:t>
                       </a:r>
                     </a:p>
                   </a:txBody>
-                  <a:tcPr marL="63500" marR="50800" marT="12700" marB="12700" anchor="ctr">
+                  <a:tcPr marL="63500" marR="50800" marT="25400" marB="25400" anchor="ctr">
                     <a:solidFill>
-                      <a:srgbClr val="F2F5F7"/>
+                      <a:srgbClr val="F4F5F6"/>
                     </a:solidFill>
                   </a:tcPr>
                 </a:tc>
               </a:tr>
-              <a:tr h="299720">
+              <a:tr h="411480">
                 <a:tc>
                   <a:txBody>
                     <a:bodyPr wrap="square"/>
@@ -10382,7 +8263,7 @@
                       </a:r>
                     </a:p>
                   </a:txBody>
-                  <a:tcPr marL="63500" marR="50800" marT="12700" marB="12700" anchor="ctr">
+                  <a:tcPr marL="63500" marR="50800" marT="25400" marB="25400" anchor="ctr">
                     <a:solidFill>
                       <a:srgbClr val="FFFFFF"/>
                     </a:solidFill>
@@ -10396,7 +8277,7 @@
                       <a:r>
                         <a:rPr sz="1050">
                           <a:solidFill>
-                            <a:srgbClr val="1A1A2E"/>
+                            <a:srgbClr val="111111"/>
                           </a:solidFill>
                           <a:latin typeface="Microsoft JhengHei"/>
                         </a:rPr>
@@ -10404,7 +8285,7 @@
                       </a:r>
                     </a:p>
                   </a:txBody>
-                  <a:tcPr marL="63500" marR="50800" marT="12700" marB="12700" anchor="ctr">
+                  <a:tcPr marL="63500" marR="50800" marT="25400" marB="25400" anchor="ctr">
                     <a:solidFill>
                       <a:srgbClr val="FFFFFF"/>
                     </a:solidFill>
@@ -10418,22 +8299,22 @@
                       <a:r>
                         <a:rPr sz="1050">
                           <a:solidFill>
-                            <a:srgbClr val="1A1A2E"/>
+                            <a:srgbClr val="111111"/>
                           </a:solidFill>
                           <a:latin typeface="Microsoft JhengHei"/>
                         </a:rPr>
-                        <a:t>動態時空:平移/旋轉/視角/運動連續性(4D-RGPT +6.2)</a:t>
+                        <a:t>動態:平移/旋轉/視角/運動連續性(+6.2);人類-SOTA 差 36 分</a:t>
                       </a:r>
                     </a:p>
                   </a:txBody>
-                  <a:tcPr marL="63500" marR="50800" marT="12700" marB="12700" anchor="ctr">
+                  <a:tcPr marL="63500" marR="50800" marT="25400" marB="25400" anchor="ctr">
                     <a:solidFill>
                       <a:srgbClr val="FFFFFF"/>
                     </a:solidFill>
                   </a:tcPr>
                 </a:tc>
               </a:tr>
-              <a:tr h="299720">
+              <a:tr h="411480">
                 <a:tc>
                   <a:txBody>
                     <a:bodyPr wrap="square"/>
@@ -10450,9 +8331,9 @@
                       </a:r>
                     </a:p>
                   </a:txBody>
-                  <a:tcPr marL="63500" marR="50800" marT="12700" marB="12700" anchor="ctr">
+                  <a:tcPr marL="63500" marR="50800" marT="25400" marB="25400" anchor="ctr">
                     <a:solidFill>
-                      <a:srgbClr val="F2F5F7"/>
+                      <a:srgbClr val="F4F5F6"/>
                     </a:solidFill>
                   </a:tcPr>
                 </a:tc>
@@ -10464,7 +8345,7 @@
                       <a:r>
                         <a:rPr sz="1050">
                           <a:solidFill>
-                            <a:srgbClr val="1A1A2E"/>
+                            <a:srgbClr val="111111"/>
                           </a:solidFill>
                           <a:latin typeface="Microsoft JhengHei"/>
                         </a:rPr>
@@ -10472,9 +8353,9 @@
                       </a:r>
                     </a:p>
                   </a:txBody>
-                  <a:tcPr marL="63500" marR="50800" marT="12700" marB="12700" anchor="ctr">
+                  <a:tcPr marL="63500" marR="50800" marT="25400" marB="25400" anchor="ctr">
                     <a:solidFill>
-                      <a:srgbClr val="F2F5F7"/>
+                      <a:srgbClr val="F4F5F6"/>
                     </a:solidFill>
                   </a:tcPr>
                 </a:tc>
@@ -10486,22 +8367,22 @@
                       <a:r>
                         <a:rPr sz="1050">
                           <a:solidFill>
-                            <a:srgbClr val="1A1A2E"/>
+                            <a:srgbClr val="111111"/>
                           </a:solidFill>
                           <a:latin typeface="Microsoft JhengHei"/>
                         </a:rPr>
-                        <a:t>時空數值題(相對準確率;4D-RGPT +13.9)</a:t>
+                        <a:t>時空數值題,相對準確率(+13.9)</a:t>
                       </a:r>
                     </a:p>
                   </a:txBody>
-                  <a:tcPr marL="63500" marR="50800" marT="12700" marB="12700" anchor="ctr">
+                  <a:tcPr marL="63500" marR="50800" marT="25400" marB="25400" anchor="ctr">
                     <a:solidFill>
-                      <a:srgbClr val="F2F5F7"/>
+                      <a:srgbClr val="F4F5F6"/>
                     </a:solidFill>
                   </a:tcPr>
                 </a:tc>
               </a:tr>
-              <a:tr h="299720">
+              <a:tr h="411480">
                 <a:tc>
                   <a:txBody>
                     <a:bodyPr wrap="square"/>
@@ -10510,17 +8391,17 @@
                       <a:r>
                         <a:rPr sz="1050" b="1">
                           <a:solidFill>
-                            <a:srgbClr val="2E7D5B"/>
+                            <a:srgbClr val="0F768E"/>
                           </a:solidFill>
                           <a:latin typeface="Microsoft JhengHei"/>
                         </a:rPr>
-                        <a:t>R4D-Bench ★</a:t>
+                        <a:t>R4D-Bench</a:t>
                       </a:r>
                     </a:p>
                   </a:txBody>
-                  <a:tcPr marL="63500" marR="50800" marT="12700" marB="12700" anchor="ctr">
+                  <a:tcPr marL="63500" marR="50800" marT="25400" marB="25400" anchor="ctr">
                     <a:solidFill>
-                      <a:srgbClr val="EFF6F8"/>
+                      <a:srgbClr val="FFFFFF"/>
                     </a:solidFill>
                   </a:tcPr>
                 </a:tc>
@@ -10532,7 +8413,7 @@
                       <a:r>
                         <a:rPr sz="1050">
                           <a:solidFill>
-                            <a:srgbClr val="1A1A2E"/>
+                            <a:srgbClr val="111111"/>
                           </a:solidFill>
                           <a:latin typeface="Microsoft JhengHei"/>
                         </a:rPr>
@@ -10540,9 +8421,9 @@
                       </a:r>
                     </a:p>
                   </a:txBody>
-                  <a:tcPr marL="63500" marR="50800" marT="12700" marB="12700" anchor="ctr">
+                  <a:tcPr marL="63500" marR="50800" marT="25400" marB="25400" anchor="ctr">
                     <a:solidFill>
-                      <a:srgbClr val="EFF6F8"/>
+                      <a:srgbClr val="FFFFFF"/>
                     </a:solidFill>
                   </a:tcPr>
                 </a:tc>
@@ -10554,22 +8435,22 @@
                       <a:r>
                         <a:rPr sz="1050">
                           <a:solidFill>
-                            <a:srgbClr val="1A1A2E"/>
+                            <a:srgbClr val="111111"/>
                           </a:solidFill>
                           <a:latin typeface="Microsoft JhengHei"/>
                         </a:rPr>
-                        <a:t>首個「動態場景+region 提示」4D VQA(~1.5k QA、9 類);源自 STI+VLM4D;Avg 42.2</a:t>
+                        <a:t>首個動態+region 4D VQA(~1.5k,9 類);源自 STI+VLM4D;Avg 42.2</a:t>
                       </a:r>
                     </a:p>
                   </a:txBody>
-                  <a:tcPr marL="63500" marR="50800" marT="12700" marB="12700" anchor="ctr">
+                  <a:tcPr marL="63500" marR="50800" marT="25400" marB="25400" anchor="ctr">
                     <a:solidFill>
-                      <a:srgbClr val="EFF6F8"/>
+                      <a:srgbClr val="FFFFFF"/>
                     </a:solidFill>
                   </a:tcPr>
                 </a:tc>
               </a:tr>
-              <a:tr h="299720">
+              <a:tr h="411480">
                 <a:tc>
                   <a:txBody>
                     <a:bodyPr wrap="square"/>
@@ -10586,9 +8467,9 @@
                       </a:r>
                     </a:p>
                   </a:txBody>
-                  <a:tcPr marL="63500" marR="50800" marT="12700" marB="12700" anchor="ctr">
+                  <a:tcPr marL="63500" marR="50800" marT="25400" marB="25400" anchor="ctr">
                     <a:solidFill>
-                      <a:srgbClr val="F2F5F7"/>
+                      <a:srgbClr val="F4F5F6"/>
                     </a:solidFill>
                   </a:tcPr>
                 </a:tc>
@@ -10600,7 +8481,7 @@
                       <a:r>
                         <a:rPr sz="1050">
                           <a:solidFill>
-                            <a:srgbClr val="1A1A2E"/>
+                            <a:srgbClr val="111111"/>
                           </a:solidFill>
                           <a:latin typeface="Microsoft JhengHei"/>
                         </a:rPr>
@@ -10608,9 +8489,9 @@
                       </a:r>
                     </a:p>
                   </a:txBody>
-                  <a:tcPr marL="63500" marR="50800" marT="12700" marB="12700" anchor="ctr">
+                  <a:tcPr marL="63500" marR="50800" marT="25400" marB="25400" anchor="ctr">
                     <a:solidFill>
-                      <a:srgbClr val="F2F5F7"/>
+                      <a:srgbClr val="F4F5F6"/>
                     </a:solidFill>
                   </a:tcPr>
                 </a:tc>
@@ -10622,22 +8503,22 @@
                       <a:r>
                         <a:rPr sz="1050">
                           <a:solidFill>
-                            <a:srgbClr val="1A1A2E"/>
+                            <a:srgbClr val="111111"/>
                           </a:solidFill>
                           <a:latin typeface="Microsoft JhengHei"/>
                         </a:rPr>
-                        <a:t>TAO+ScanNet+KITTI 逐幀標註→8 類 QA;深度來源=ScanNet/KITTI</a:t>
+                        <a:t>TAO+ScanNet+KITTI 逐幀標註;深度來源</a:t>
                       </a:r>
                     </a:p>
                   </a:txBody>
-                  <a:tcPr marL="63500" marR="50800" marT="12700" marB="12700" anchor="ctr">
+                  <a:tcPr marL="63500" marR="50800" marT="25400" marB="25400" anchor="ctr">
                     <a:solidFill>
-                      <a:srgbClr val="F2F5F7"/>
+                      <a:srgbClr val="F4F5F6"/>
                     </a:solidFill>
                   </a:tcPr>
                 </a:tc>
               </a:tr>
-              <a:tr h="299720">
+              <a:tr h="411480">
                 <a:tc>
                   <a:txBody>
                     <a:bodyPr wrap="square"/>
@@ -10650,11 +8531,11 @@
                           </a:solidFill>
                           <a:latin typeface="Microsoft JhengHei"/>
                         </a:rPr>
-                        <a:t>OmniSpatial · MMSI · SAT · SPAR</a:t>
+                        <a:t>Spatial4D / DSI / OmniSpatial 等</a:t>
                       </a:r>
                     </a:p>
                   </a:txBody>
-                  <a:tcPr marL="63500" marR="50800" marT="12700" marB="12700" anchor="ctr">
+                  <a:tcPr marL="63500" marR="50800" marT="25400" marB="25400" anchor="ctr">
                     <a:solidFill>
                       <a:srgbClr val="FFFFFF"/>
                     </a:solidFill>
@@ -10668,15 +8549,15 @@
                       <a:r>
                         <a:rPr sz="1050">
                           <a:solidFill>
-                            <a:srgbClr val="1A1A2E"/>
+                            <a:srgbClr val="111111"/>
                           </a:solidFill>
                           <a:latin typeface="Microsoft JhengHei"/>
                         </a:rPr>
-                        <a:t>4D-RGPT · Video-STR</a:t>
+                        <a:t>(未在導讀論文)</a:t>
                       </a:r>
                     </a:p>
                   </a:txBody>
-                  <a:tcPr marL="63500" marR="50800" marT="12700" marB="12700" anchor="ctr">
+                  <a:tcPr marL="63500" marR="50800" marT="25400" marB="25400" anchor="ctr">
                     <a:solidFill>
                       <a:srgbClr val="FFFFFF"/>
                     </a:solidFill>
@@ -10690,85 +8571,17 @@
                       <a:r>
                         <a:rPr sz="1050">
                           <a:solidFill>
-                            <a:srgbClr val="1A1A2E"/>
+                            <a:srgbClr val="111111"/>
                           </a:solidFill>
                           <a:latin typeface="Microsoft JhengHei"/>
                         </a:rPr>
-                        <a:t>空間推理系列(靜態為主,無 flow 成分)</a:t>
+                        <a:t>廣覆蓋 4D(~40k QA)/純動態/空間系列——差異軸:靜vs動、真實vs合成、定量、規模</a:t>
                       </a:r>
                     </a:p>
                   </a:txBody>
-                  <a:tcPr marL="63500" marR="50800" marT="12700" marB="12700" anchor="ctr">
+                  <a:tcPr marL="63500" marR="50800" marT="25400" marB="25400" anchor="ctr">
                     <a:solidFill>
                       <a:srgbClr val="FFFFFF"/>
-                    </a:solidFill>
-                  </a:tcPr>
-                </a:tc>
-              </a:tr>
-              <a:tr h="299720">
-                <a:tc>
-                  <a:txBody>
-                    <a:bodyPr wrap="square"/>
-                    <a:lstStyle/>
-                    <a:p>
-                      <a:r>
-                        <a:rPr sz="1050" b="1">
-                          <a:solidFill>
-                            <a:srgbClr val="0F768E"/>
-                          </a:solidFill>
-                          <a:latin typeface="Microsoft JhengHei"/>
-                        </a:rPr>
-                        <a:t>Video-MME · MLVU · LVB 等</a:t>
-                      </a:r>
-                    </a:p>
-                  </a:txBody>
-                  <a:tcPr marL="63500" marR="50800" marT="12700" marB="12700" anchor="ctr">
-                    <a:solidFill>
-                      <a:srgbClr val="F2F5F7"/>
-                    </a:solidFill>
-                  </a:tcPr>
-                </a:tc>
-                <a:tc>
-                  <a:txBody>
-                    <a:bodyPr wrap="square"/>
-                    <a:lstStyle/>
-                    <a:p>
-                      <a:r>
-                        <a:rPr sz="1050">
-                          <a:solidFill>
-                            <a:srgbClr val="1A1A2E"/>
-                          </a:solidFill>
-                          <a:latin typeface="Microsoft JhengHei"/>
-                        </a:rPr>
-                        <a:t>Flow4Agent · VER · Video-R1</a:t>
-                      </a:r>
-                    </a:p>
-                  </a:txBody>
-                  <a:tcPr marL="63500" marR="50800" marT="12700" marB="12700" anchor="ctr">
-                    <a:solidFill>
-                      <a:srgbClr val="F2F5F7"/>
-                    </a:solidFill>
-                  </a:tcPr>
-                </a:tc>
-                <a:tc>
-                  <a:txBody>
-                    <a:bodyPr wrap="square"/>
-                    <a:lstStyle/>
-                    <a:p>
-                      <a:r>
-                        <a:rPr sz="1050">
-                          <a:solidFill>
-                            <a:srgbClr val="1A1A2E"/>
-                          </a:solidFill>
-                          <a:latin typeface="Microsoft JhengHei"/>
-                        </a:rPr>
-                        <a:t>一般影片理解;Flow4Agent 只評這些 —— 用了 flow 卻無 flow 專屬評測</a:t>
-                      </a:r>
-                    </a:p>
-                  </a:txBody>
-                  <a:tcPr marL="63500" marR="50800" marT="12700" marB="12700" anchor="ctr">
-                    <a:solidFill>
-                      <a:srgbClr val="F2F5F7"/>
                     </a:solidFill>
                   </a:tcPr>
                 </a:tc>
@@ -10779,20 +8592,191 @@
       </p:graphicFrame>
       <p:sp>
         <p:nvSpPr>
-          <p:cNvPr id="9" name="Rounded Rectangle 8"/>
+          <p:cNvPr id="7" name="TextBox 6"/>
+          <p:cNvSpPr txBox="1"/>
+          <p:nvPr/>
+        </p:nvSpPr>
+        <p:spPr>
+          <a:xfrm>
+            <a:off x="640080" y="5806440"/>
+            <a:ext cx="10881360" cy="594360"/>
+          </a:xfrm>
+          <a:prstGeom prst="rect">
+            <a:avLst/>
+          </a:prstGeom>
+          <a:noFill/>
+        </p:spPr>
+        <p:txBody>
+          <a:bodyPr wrap="square" anchor="t" lIns="0" rIns="0" tIns="0" bIns="0">
+            <a:spAutoFit/>
+          </a:bodyPr>
+          <a:lstStyle/>
+          <a:p>
+            <a:pPr algn="l">
+              <a:lnSpc>
+                <a:spcPct val="110000"/>
+              </a:lnSpc>
+              <a:spcBef>
+                <a:spcPts val="0"/>
+              </a:spcBef>
+              <a:spcAft>
+                <a:spcPts val="500"/>
+              </a:spcAft>
+            </a:pPr>
+            <a:r>
+              <a:rPr sz="1150" b="1" i="0">
+                <a:solidFill>
+                  <a:srgbClr val="B44A1E"/>
+                </a:solidFill>
+                <a:latin typeface="Microsoft JhengHei"/>
+              </a:rPr>
+              <a:t>未驗證：</a:t>
+            </a:r>
+            <a:r>
+              <a:rPr sz="1150" b="0" i="0">
+                <a:solidFill>
+                  <a:srgbClr val="111111"/>
+                </a:solidFill>
+                <a:latin typeface="Microsoft JhengHei"/>
+              </a:rPr>
+              <a:t>STI-Bench 任務細節、DSI-Bench 規模、3DSRBench 皆只有摘要層級;各 benchmark 人類-SOTA 差距只有 VLM4D 的 36 分確認過。表中增益數字為各論文自報,引用前需對原文。</a:t>
+            </a:r>
+          </a:p>
+        </p:txBody>
+      </p:sp>
+      <p:sp>
+        <p:nvSpPr>
+          <p:cNvPr id="8" name="TextBox 7"/>
+          <p:cNvSpPr txBox="1"/>
+          <p:nvPr/>
+        </p:nvSpPr>
+        <p:spPr>
+          <a:xfrm>
+            <a:off x="640080" y="6355080"/>
+            <a:ext cx="10058400" cy="320040"/>
+          </a:xfrm>
+          <a:prstGeom prst="rect">
+            <a:avLst/>
+          </a:prstGeom>
+          <a:noFill/>
+        </p:spPr>
+        <p:txBody>
+          <a:bodyPr wrap="square" anchor="t" lIns="0" rIns="0" tIns="0" bIns="0">
+            <a:spAutoFit/>
+          </a:bodyPr>
+          <a:lstStyle/>
+          <a:p>
+            <a:pPr algn="l">
+              <a:lnSpc>
+                <a:spcPct val="110000"/>
+              </a:lnSpc>
+              <a:spcBef>
+                <a:spcPts val="0"/>
+              </a:spcBef>
+              <a:spcAft>
+                <a:spcPts val="500"/>
+              </a:spcAft>
+            </a:pPr>
+            <a:r>
+              <a:rPr sz="950" b="1" i="0">
+                <a:solidFill>
+                  <a:srgbClr val="555B63"/>
+                </a:solidFill>
+                <a:latin typeface="Microsoft JhengHei"/>
+              </a:rPr>
+              <a:t>依據：</a:t>
+            </a:r>
+            <a:r>
+              <a:rPr sz="950" b="0" i="1">
+                <a:solidFill>
+                  <a:srgbClr val="555B63"/>
+                </a:solidFill>
+                <a:latin typeface="Segoe UI"/>
+              </a:rPr>
+              <a:t>導讀論文 benchmark 段(4D_evidence_reward_deep.pptx)· VLM4D 2508.02095 · Spatial4D 2601.00092 · DSI 2510.18873</a:t>
+            </a:r>
+          </a:p>
+        </p:txBody>
+      </p:sp>
+      <p:sp>
+        <p:nvSpPr>
+          <p:cNvPr id="9" name="TextBox 8"/>
+          <p:cNvSpPr txBox="1"/>
+          <p:nvPr/>
+        </p:nvSpPr>
+        <p:spPr>
+          <a:xfrm>
+            <a:off x="10881360" y="6510528"/>
+            <a:ext cx="1097280" cy="274320"/>
+          </a:xfrm>
+          <a:prstGeom prst="rect">
+            <a:avLst/>
+          </a:prstGeom>
+          <a:noFill/>
+        </p:spPr>
+        <p:txBody>
+          <a:bodyPr wrap="square" anchor="t" lIns="0" rIns="0" tIns="0" bIns="0">
+            <a:spAutoFit/>
+          </a:bodyPr>
+          <a:lstStyle/>
+          <a:p>
+            <a:pPr algn="r">
+              <a:lnSpc>
+                <a:spcPct val="110000"/>
+              </a:lnSpc>
+              <a:spcBef>
+                <a:spcPts val="0"/>
+              </a:spcBef>
+              <a:spcAft>
+                <a:spcPts val="500"/>
+              </a:spcAft>
+            </a:pPr>
+            <a:r>
+              <a:rPr sz="900" b="0" i="0">
+                <a:solidFill>
+                  <a:srgbClr val="555B63"/>
+                </a:solidFill>
+                <a:latin typeface="Segoe UI"/>
+              </a:rPr>
+              <a:t>8/9 · 草稿</a:t>
+            </a:r>
+          </a:p>
+        </p:txBody>
+      </p:sp>
+    </p:spTree>
+  </p:cSld>
+  <p:clrMapOvr>
+    <a:masterClrMapping/>
+  </p:clrMapOvr>
+</p:sld>
+</file>
+
+<file path=ppt/slides/slide9.xml><?xml version="1.0" encoding="utf-8"?>
+<p:sld xmlns:a="http://schemas.openxmlformats.org/drawingml/2006/main" xmlns:p="http://schemas.openxmlformats.org/presentationml/2006/main" xmlns:r="http://schemas.openxmlformats.org/officeDocument/2006/relationships">
+  <p:cSld>
+    <p:spTree>
+      <p:nvGrpSpPr>
+        <p:cNvPr id="1" name=""/>
+        <p:cNvGrpSpPr/>
+        <p:nvPr/>
+      </p:nvGrpSpPr>
+      <p:grpSpPr/>
+      <p:sp>
+        <p:nvSpPr>
+          <p:cNvPr id="2" name="Rectangle 1"/>
           <p:cNvSpPr/>
           <p:nvPr/>
         </p:nvSpPr>
         <p:spPr>
           <a:xfrm>
-            <a:off x="640080" y="5257800"/>
-            <a:ext cx="10881360" cy="731520"/>
-          </a:xfrm>
-          <a:prstGeom prst="roundRect">
+            <a:off x="0" y="0"/>
+            <a:ext cx="12191695" cy="6858000"/>
+          </a:xfrm>
+          <a:prstGeom prst="rect">
             <a:avLst/>
           </a:prstGeom>
           <a:solidFill>
-            <a:srgbClr val="EFF6F8"/>
+            <a:srgbClr val="FFFFFF"/>
           </a:solidFill>
           <a:ln>
             <a:noFill/>
@@ -10823,20 +8807,74 @@
       </p:sp>
       <p:sp>
         <p:nvSpPr>
-          <p:cNvPr id="10" name="Rectangle 9"/>
+          <p:cNvPr id="3" name="TextBox 2"/>
+          <p:cNvSpPr txBox="1"/>
+          <p:nvPr/>
+        </p:nvSpPr>
+        <p:spPr>
+          <a:xfrm>
+            <a:off x="640080" y="384048"/>
+            <a:ext cx="10881360" cy="365760"/>
+          </a:xfrm>
+          <a:prstGeom prst="rect">
+            <a:avLst/>
+          </a:prstGeom>
+          <a:noFill/>
+        </p:spPr>
+        <p:txBody>
+          <a:bodyPr wrap="square" anchor="t" lIns="0" rIns="0" tIns="0" bIns="0">
+            <a:spAutoFit/>
+          </a:bodyPr>
+          <a:lstStyle/>
+          <a:p>
+            <a:pPr algn="l">
+              <a:lnSpc>
+                <a:spcPct val="110000"/>
+              </a:lnSpc>
+              <a:spcBef>
+                <a:spcPts val="0"/>
+              </a:spcBef>
+              <a:spcAft>
+                <a:spcPts val="500"/>
+              </a:spcAft>
+            </a:pPr>
+            <a:r>
+              <a:rPr sz="1500" b="1" i="0">
+                <a:solidFill>
+                  <a:srgbClr val="0F768E"/>
+                </a:solidFill>
+                <a:latin typeface="Segoe UI"/>
+              </a:rPr>
+              <a:t>Q9　</a:t>
+            </a:r>
+            <a:r>
+              <a:rPr sz="1250" b="0" i="0">
+                <a:solidFill>
+                  <a:srgbClr val="555B63"/>
+                </a:solidFill>
+                <a:latin typeface="Microsoft JhengHei"/>
+              </a:rPr>
+              <a:t>skill 憲法第 4 條:這些問題 Claude 回答不了,由你回答。</a:t>
+            </a:r>
+          </a:p>
+        </p:txBody>
+      </p:sp>
+      <p:sp>
+        <p:nvSpPr>
+          <p:cNvPr id="4" name="Rectangle 3"/>
           <p:cNvSpPr/>
           <p:nvPr/>
         </p:nvSpPr>
         <p:spPr>
           <a:xfrm>
-            <a:off x="640080" y="5257800"/>
-            <a:ext cx="146304" cy="731520"/>
+            <a:off x="640080" y="804672"/>
+            <a:ext cx="10881360" cy="14630"/>
           </a:xfrm>
           <a:prstGeom prst="rect">
             <a:avLst/>
           </a:prstGeom>
           <a:solidFill>
-            <a:srgbClr val="E86A33"/>
+            <a:srgbClr val="DDDDDD"/>
           </a:solidFill>
           <a:ln>
             <a:noFill/>
@@ -10867,58 +8905,14 @@
       </p:sp>
       <p:sp>
         <p:nvSpPr>
-          <p:cNvPr id="11" name="Rounded Rectangle 10"/>
-          <p:cNvSpPr/>
-          <p:nvPr/>
-        </p:nvSpPr>
-        <p:spPr>
-          <a:xfrm>
-            <a:off x="868680" y="5422392"/>
-            <a:ext cx="960120" cy="402336"/>
-          </a:xfrm>
-          <a:prstGeom prst="roundRect">
-            <a:avLst/>
-          </a:prstGeom>
-          <a:solidFill>
-            <a:srgbClr val="E86A33"/>
-          </a:solidFill>
-          <a:ln>
-            <a:noFill/>
-          </a:ln>
-          <a:effectLst/>
-        </p:spPr>
-        <p:style>
-          <a:lnRef idx="1">
-            <a:schemeClr val="accent1"/>
-          </a:lnRef>
-          <a:fillRef idx="3">
-            <a:schemeClr val="accent1"/>
-          </a:fillRef>
-          <a:effectRef idx="2">
-            <a:schemeClr val="accent1"/>
-          </a:effectRef>
-          <a:fontRef idx="minor">
-            <a:schemeClr val="lt1"/>
-          </a:fontRef>
-        </p:style>
-        <p:txBody>
-          <a:bodyPr rtlCol="0" anchor="ctr"/>
-          <a:lstStyle/>
-          <a:p>
-            <a:pPr algn="ctr"/>
-          </a:p>
-        </p:txBody>
-      </p:sp>
-      <p:sp>
-        <p:nvSpPr>
-          <p:cNvPr id="12" name="TextBox 11"/>
+          <p:cNvPr id="5" name="TextBox 4"/>
           <p:cNvSpPr txBox="1"/>
           <p:nvPr/>
         </p:nvSpPr>
         <p:spPr>
           <a:xfrm>
-            <a:off x="868680" y="5422392"/>
-            <a:ext cx="960120" cy="402336"/>
+            <a:off x="640080" y="960120"/>
+            <a:ext cx="10972800" cy="777240"/>
           </a:xfrm>
           <a:prstGeom prst="rect">
             <a:avLst/>
@@ -10926,44 +8920,44 @@
           <a:noFill/>
         </p:spPr>
         <p:txBody>
-          <a:bodyPr wrap="square" anchor="ctr" lIns="0" rIns="0" tIns="0" bIns="0">
+          <a:bodyPr wrap="square" anchor="t" lIns="0" rIns="0" tIns="0" bIns="0">
             <a:spAutoFit/>
           </a:bodyPr>
           <a:lstStyle/>
           <a:p>
-            <a:pPr algn="ctr">
+            <a:pPr algn="l">
               <a:lnSpc>
-                <a:spcPct val="108000"/>
+                <a:spcPct val="106000"/>
               </a:lnSpc>
               <a:spcBef>
                 <a:spcPts val="0"/>
               </a:spcBef>
               <a:spcAft>
-                <a:spcPts val="600"/>
+                <a:spcPts val="500"/>
               </a:spcAft>
             </a:pPr>
             <a:r>
-              <a:rPr sz="1500" b="1" i="0">
-                <a:solidFill>
-                  <a:srgbClr val="FFFFFF"/>
+              <a:rPr sz="2100" b="1" i="0">
+                <a:solidFill>
+                  <a:srgbClr val="111111"/>
                 </a:solidFill>
                 <a:latin typeface="Microsoft JhengHei"/>
               </a:rPr>
-              <a:t>結論</a:t>
-            </a:r>
-          </a:p>
-        </p:txBody>
-      </p:sp>
-      <p:sp>
-        <p:nvSpPr>
-          <p:cNvPr id="13" name="TextBox 12"/>
+              <a:t>這些只有你能回答</a:t>
+            </a:r>
+          </a:p>
+        </p:txBody>
+      </p:sp>
+      <p:sp>
+        <p:nvSpPr>
+          <p:cNvPr id="6" name="TextBox 5"/>
           <p:cNvSpPr txBox="1"/>
           <p:nvPr/>
         </p:nvSpPr>
         <p:spPr>
           <a:xfrm>
-            <a:off x="2011680" y="5257800"/>
-            <a:ext cx="9326880" cy="731520"/>
+            <a:off x="640080" y="1783080"/>
+            <a:ext cx="10881360" cy="3291840"/>
           </a:xfrm>
           <a:prstGeom prst="rect">
             <a:avLst/>
@@ -10971,138 +8965,284 @@
           <a:noFill/>
         </p:spPr>
         <p:txBody>
-          <a:bodyPr wrap="square" anchor="ctr" lIns="0" rIns="0" tIns="0" bIns="0">
+          <a:bodyPr wrap="square" anchor="t" lIns="0" rIns="0" tIns="0" bIns="0">
             <a:spAutoFit/>
           </a:bodyPr>
           <a:lstStyle/>
           <a:p>
             <a:pPr algn="l">
               <a:lnSpc>
-                <a:spcPct val="105000"/>
+                <a:spcPct val="115000"/>
               </a:lnSpc>
               <a:spcBef>
                 <a:spcPts val="0"/>
               </a:spcBef>
               <a:spcAft>
-                <a:spcPts val="600"/>
+                <a:spcPts val="1000"/>
               </a:spcAft>
             </a:pPr>
             <a:r>
-              <a:rPr sz="1400" b="1" i="0">
-                <a:solidFill>
-                  <a:srgbClr val="1A1A2E"/>
+              <a:rPr sz="1500" b="0" i="0">
+                <a:solidFill>
+                  <a:srgbClr val="555B63"/>
+                </a:solidFill>
+                <a:latin typeface="Segoe UI"/>
+              </a:rPr>
+              <a:t>— </a:t>
+            </a:r>
+            <a:r>
+              <a:rPr sz="1500" b="1" i="0">
+                <a:solidFill>
+                  <a:srgbClr val="111111"/>
                 </a:solidFill>
                 <a:latin typeface="Microsoft JhengHei"/>
               </a:rPr>
-              <a:t>depth/時空評測可直接沿用(VSI/STI/VLM4D/R4D);</a:t>
-            </a:r>
-            <a:r>
-              <a:rPr sz="1400" b="0" i="0">
-                <a:solidFill>
-                  <a:srgbClr val="1A1A2E"/>
-                </a:solidFill>
-                <a:latin typeface="Microsoft JhengHei"/>
-              </a:rPr>
-              <a:t>沒有任何論文評「flow 一致性」→ 呼應我們的縫隙;R4D-Bench 是最近的對照。</a:t>
-            </a:r>
-          </a:p>
-        </p:txBody>
-      </p:sp>
-      <p:sp>
-        <p:nvSpPr>
-          <p:cNvPr id="14" name="TextBox 13"/>
-          <p:cNvSpPr txBox="1"/>
-          <p:nvPr/>
-        </p:nvSpPr>
-        <p:spPr>
-          <a:xfrm>
-            <a:off x="640080" y="6080760"/>
-            <a:ext cx="10972800" cy="320040"/>
-          </a:xfrm>
-          <a:prstGeom prst="rect">
-            <a:avLst/>
-          </a:prstGeom>
-          <a:noFill/>
-        </p:spPr>
-        <p:txBody>
-          <a:bodyPr wrap="square" anchor="t" lIns="0" rIns="0" tIns="0" bIns="0">
-            <a:spAutoFit/>
-          </a:bodyPr>
-          <a:lstStyle/>
+              <a:t>1. 根因你賭哪邊:4D 差是「看得到沒用上」還是「根本沒看到」?你的證據?(meeting 必問)</a:t>
+            </a:r>
+          </a:p>
           <a:p>
             <a:pPr algn="l">
               <a:lnSpc>
-                <a:spcPct val="108000"/>
+                <a:spcPct val="115000"/>
               </a:lnSpc>
               <a:spcBef>
                 <a:spcPts val="0"/>
               </a:spcBef>
               <a:spcAft>
-                <a:spcPts val="600"/>
+                <a:spcPts val="1000"/>
               </a:spcAft>
             </a:pPr>
             <a:r>
-              <a:rPr sz="1000" b="1" i="0">
-                <a:solidFill>
-                  <a:srgbClr val="5B6370"/>
+              <a:rPr sz="1500" b="0" i="0">
+                <a:solidFill>
+                  <a:srgbClr val="555B63"/>
+                </a:solidFill>
+                <a:latin typeface="Segoe UI"/>
+              </a:rPr>
+              <a:t>— </a:t>
+            </a:r>
+            <a:r>
+              <a:rPr sz="1500" b="0" i="0">
+                <a:solidFill>
+                  <a:srgbClr val="111111"/>
                 </a:solidFill>
                 <a:latin typeface="Microsoft JhengHei"/>
               </a:rPr>
-              <a:t>▸ 依據:</a:t>
-            </a:r>
-            <a:r>
-              <a:rPr sz="1000" b="0" i="1">
-                <a:solidFill>
-                  <a:srgbClr val="5B6370"/>
-                </a:solidFill>
-                <a:latin typeface="Segoe UI"/>
-              </a:rPr>
-              <a:t>各列出自 4D_evidence_reward_deep.pptx 導讀之論文 benchmark 段(VER · 4D-RGPT · Video-R1 · Video-STR · Flow4Agent 等);數字為各論文自報。</a:t>
-            </a:r>
-          </a:p>
-        </p:txBody>
-      </p:sp>
-      <p:sp>
-        <p:nvSpPr>
-          <p:cNvPr id="15" name="TextBox 14"/>
-          <p:cNvSpPr txBox="1"/>
-          <p:nvPr/>
-        </p:nvSpPr>
-        <p:spPr>
-          <a:xfrm>
-            <a:off x="10424160" y="6455664"/>
-            <a:ext cx="1554480" cy="274320"/>
-          </a:xfrm>
-          <a:prstGeom prst="rect">
-            <a:avLst/>
-          </a:prstGeom>
-          <a:noFill/>
-        </p:spPr>
-        <p:txBody>
-          <a:bodyPr wrap="square" anchor="t" lIns="0" rIns="0" tIns="0" bIns="0">
-            <a:spAutoFit/>
-          </a:bodyPr>
-          <a:lstStyle/>
-          <a:p>
-            <a:pPr algn="r">
+              <a:t>2. 偽標錯誤=reward 錯誤(蒸餾天花板):過濾低信心區域?混 GT?你的設計決策。</a:t>
+            </a:r>
+          </a:p>
+          <a:p>
+            <a:pPr algn="l">
               <a:lnSpc>
-                <a:spcPct val="108000"/>
+                <a:spcPct val="115000"/>
               </a:lnSpc>
               <a:spcBef>
                 <a:spcPts val="0"/>
               </a:spcBef>
               <a:spcAft>
-                <a:spcPts val="600"/>
+                <a:spcPts val="1000"/>
               </a:spcAft>
             </a:pPr>
             <a:r>
+              <a:rPr sz="1500" b="0" i="0">
+                <a:solidFill>
+                  <a:srgbClr val="555B63"/>
+                </a:solidFill>
+                <a:latin typeface="Segoe UI"/>
+              </a:rPr>
+              <a:t>— </a:t>
+            </a:r>
+            <a:r>
+              <a:rPr sz="1500" b="0" i="0">
+                <a:solidFill>
+                  <a:srgbClr val="111111"/>
+                </a:solidFill>
+                <a:latin typeface="Microsoft JhengHei"/>
+              </a:rPr>
+              <a:t>3. flow-consistency reward 怎麼被 hack?想一個具體情境,再想怎麼防。</a:t>
+            </a:r>
+          </a:p>
+          <a:p>
+            <a:pPr algn="l">
+              <a:lnSpc>
+                <a:spcPct val="115000"/>
+              </a:lnSpc>
+              <a:spcBef>
+                <a:spcPts val="0"/>
+              </a:spcBef>
+              <a:spcAft>
+                <a:spcPts val="1000"/>
+              </a:spcAft>
+            </a:pPr>
+            <a:r>
+              <a:rPr sz="1500" b="0" i="0">
+                <a:solidFill>
+                  <a:srgbClr val="555B63"/>
+                </a:solidFill>
+                <a:latin typeface="Segoe UI"/>
+              </a:rPr>
+              <a:t>— </a:t>
+            </a:r>
+            <a:r>
+              <a:rPr sz="1500" b="0" i="0">
+                <a:solidFill>
+                  <a:srgbClr val="111111"/>
+                </a:solidFill>
+                <a:latin typeface="Microsoft JhengHei"/>
+              </a:rPr>
+              <a:t>4. 第一版訊號:2D flow(成熟)還是 scene flow(貼 4D)?跟你的時程綁定。</a:t>
+            </a:r>
+          </a:p>
+          <a:p>
+            <a:pPr algn="l">
+              <a:lnSpc>
+                <a:spcPct val="115000"/>
+              </a:lnSpc>
+              <a:spcBef>
+                <a:spcPts val="0"/>
+              </a:spcBef>
+              <a:spcAft>
+                <a:spcPts val="1000"/>
+              </a:spcAft>
+            </a:pPr>
+            <a:r>
+              <a:rPr sz="1500" b="0" i="0">
+                <a:solidFill>
+                  <a:srgbClr val="555B63"/>
+                </a:solidFill>
+                <a:latin typeface="Segoe UI"/>
+              </a:rPr>
+              <a:t>— </a:t>
+            </a:r>
+            <a:r>
+              <a:rPr sz="1500" b="0" i="0">
+                <a:solidFill>
+                  <a:srgbClr val="111111"/>
+                </a:solidFill>
+                <a:latin typeface="Microsoft JhengHei"/>
+              </a:rPr>
+              <a:t>5. 讀完 4D-RGPT(在你的 papers/ 裡)後:它跟我們的差異,一句話講出來。</a:t>
+            </a:r>
+          </a:p>
+          <a:p>
+            <a:pPr algn="l">
+              <a:lnSpc>
+                <a:spcPct val="115000"/>
+              </a:lnSpc>
+              <a:spcBef>
+                <a:spcPts val="0"/>
+              </a:spcBef>
+              <a:spcAft>
+                <a:spcPts val="1000"/>
+              </a:spcAft>
+            </a:pPr>
+            <a:r>
+              <a:rPr sz="1500" b="0" i="0">
+                <a:solidFill>
+                  <a:srgbClr val="555B63"/>
+                </a:solidFill>
+                <a:latin typeface="Segoe UI"/>
+              </a:rPr>
+              <a:t>— </a:t>
+            </a:r>
+            <a:r>
+              <a:rPr sz="1500" b="1" i="0">
+                <a:solidFill>
+                  <a:srgbClr val="111111"/>
+                </a:solidFill>
+                <a:latin typeface="Microsoft JhengHei"/>
+              </a:rPr>
+              <a:t>6. 一句話賣點,自己重寫(P7 的只是靶子)。</a:t>
+            </a:r>
+          </a:p>
+        </p:txBody>
+      </p:sp>
+      <p:sp>
+        <p:nvSpPr>
+          <p:cNvPr id="7" name="TextBox 6"/>
+          <p:cNvSpPr txBox="1"/>
+          <p:nvPr/>
+        </p:nvSpPr>
+        <p:spPr>
+          <a:xfrm>
+            <a:off x="640080" y="5806440"/>
+            <a:ext cx="10881360" cy="548640"/>
+          </a:xfrm>
+          <a:prstGeom prst="rect">
+            <a:avLst/>
+          </a:prstGeom>
+          <a:noFill/>
+        </p:spPr>
+        <p:txBody>
+          <a:bodyPr wrap="square" anchor="t" lIns="0" rIns="0" tIns="0" bIns="0">
+            <a:spAutoFit/>
+          </a:bodyPr>
+          <a:lstStyle/>
+          <a:p>
+            <a:pPr algn="l">
+              <a:lnSpc>
+                <a:spcPct val="110000"/>
+              </a:lnSpc>
+              <a:spcBef>
+                <a:spcPts val="0"/>
+              </a:spcBef>
+              <a:spcAft>
+                <a:spcPts val="500"/>
+              </a:spcAft>
+            </a:pPr>
+            <a:r>
+              <a:rPr sz="1200" b="1" i="0">
+                <a:solidFill>
+                  <a:srgbClr val="B44A1E"/>
+                </a:solidFill>
+                <a:latin typeface="Microsoft JhengHei"/>
+              </a:rPr>
+              <a:t>聲明:本簡報為分析草稿。任何要放進正式簡報/報告的文字,須由報告者自己重寫——重寫即消化。</a:t>
+            </a:r>
+          </a:p>
+        </p:txBody>
+      </p:sp>
+      <p:sp>
+        <p:nvSpPr>
+          <p:cNvPr id="8" name="TextBox 7"/>
+          <p:cNvSpPr txBox="1"/>
+          <p:nvPr/>
+        </p:nvSpPr>
+        <p:spPr>
+          <a:xfrm>
+            <a:off x="10881360" y="6510528"/>
+            <a:ext cx="1097280" cy="274320"/>
+          </a:xfrm>
+          <a:prstGeom prst="rect">
+            <a:avLst/>
+          </a:prstGeom>
+          <a:noFill/>
+        </p:spPr>
+        <p:txBody>
+          <a:bodyPr wrap="square" anchor="t" lIns="0" rIns="0" tIns="0" bIns="0">
+            <a:spAutoFit/>
+          </a:bodyPr>
+          <a:lstStyle/>
+          <a:p>
+            <a:pPr algn="r">
+              <a:lnSpc>
+                <a:spcPct val="110000"/>
+              </a:lnSpc>
+              <a:spcBef>
+                <a:spcPts val="0"/>
+              </a:spcBef>
+              <a:spcAft>
+                <a:spcPts val="500"/>
+              </a:spcAft>
+            </a:pPr>
+            <a:r>
               <a:rPr sz="900" b="0" i="0">
                 <a:solidFill>
-                  <a:srgbClr val="5B6370"/>
+                  <a:srgbClr val="555B63"/>
                 </a:solidFill>
                 <a:latin typeface="Segoe UI"/>
               </a:rPr>
-              <a:t>待辦回答 · 8/8</a:t>
+              <a:t>9/9 · 草稿</a:t>
             </a:r>
           </a:p>
         </p:txBody>

--- a/slides/TDL_7頁回答.pptx
+++ b/slides/TDL_7頁回答.pptx
@@ -14,6 +14,7 @@
     <p:sldId id="262" r:id="rId14"/>
     <p:sldId id="263" r:id="rId15"/>
     <p:sldId id="264" r:id="rId16"/>
+    <p:sldId id="265" r:id="rId17"/>
   </p:sldIdLst>
   <p:sldSz cx="12191695" cy="6858000" type="screen4x3"/>
   <p:notesSz cx="6858000" cy="9144000"/>
@@ -535,6 +536,76 @@
 </p:notes>
 </file>
 
+<file path=ppt/notesSlides/notesSlide10.xml><?xml version="1.0" encoding="utf-8"?>
+<p:notes xmlns:a="http://schemas.openxmlformats.org/drawingml/2006/main" xmlns:p="http://schemas.openxmlformats.org/presentationml/2006/main" xmlns:r="http://schemas.openxmlformats.org/officeDocument/2006/relationships">
+  <p:cSld>
+    <p:spTree>
+      <p:nvGrpSpPr>
+        <p:cNvPr id="1" name=""/>
+        <p:cNvGrpSpPr/>
+        <p:nvPr/>
+      </p:nvGrpSpPr>
+      <p:grpSpPr>
+        <a:xfrm>
+          <a:off x="0" y="0"/>
+          <a:ext cx="0" cy="0"/>
+          <a:chOff x="0" y="0"/>
+          <a:chExt cx="0" cy="0"/>
+        </a:xfrm>
+      </p:grpSpPr>
+      <p:sp>
+        <p:nvSpPr>
+          <p:cNvPr id="2" name="Slide Image Placeholder 1"/>
+          <p:cNvSpPr>
+            <a:spLocks noGrp="1"/>
+          </p:cNvSpPr>
+          <p:nvPr>
+            <p:ph type="sldImg" idx="2"/>
+          </p:nvPr>
+        </p:nvSpPr>
+        <p:spPr/>
+      </p:sp>
+      <p:sp>
+        <p:nvSpPr>
+          <p:cNvPr id="3" name="Notes Placeholder 2"/>
+          <p:cNvSpPr>
+            <a:spLocks noGrp="1"/>
+          </p:cNvSpPr>
+          <p:nvPr>
+            <p:ph type="body" idx="3" sz="quarter"/>
+          </p:nvPr>
+        </p:nvSpPr>
+        <p:spPr/>
+        <p:txBody>
+          <a:bodyPr/>
+          <a:lstStyle/>
+          <a:p>
+            <a:r>
+              <a:t>收尾頁。這 6 題對應 notes/理解整理_7題.md 的「只有你能回答」欄。</a:t>
+            </a:r>
+          </a:p>
+        </p:txBody>
+      </p:sp>
+      <p:sp>
+        <p:nvSpPr>
+          <p:cNvPr id="4" name="Slide Number Placeholder 3"/>
+          <p:cNvSpPr>
+            <a:spLocks noGrp="1"/>
+          </p:cNvSpPr>
+          <p:nvPr>
+            <p:ph type="sldNum" idx="5" sz="quarter"/>
+          </p:nvPr>
+        </p:nvSpPr>
+        <p:spPr/>
+      </p:sp>
+    </p:spTree>
+  </p:cSld>
+  <p:clrMapOvr>
+    <a:masterClrMapping/>
+  </p:clrMapOvr>
+</p:notes>
+</file>
+
 <file path=ppt/notesSlides/notesSlide2.xml><?xml version="1.0" encoding="utf-8"?>
 <p:notes xmlns:a="http://schemas.openxmlformats.org/drawingml/2006/main" xmlns:p="http://schemas.openxmlformats.org/presentationml/2006/main" xmlns:r="http://schemas.openxmlformats.org/officeDocument/2006/relationships">
   <p:cSld>
@@ -1070,7 +1141,7 @@
           <a:lstStyle/>
           <a:p>
             <a:r>
-              <a:t>收尾頁。這 6 題對應 notes/理解整理_7題.md 的「只有你能回答」欄。</a:t>
+              <a:t>Q8 補充頁。重點:(1) MCQ vs 數值題兩種格式,數值題用相對準確率;(2) STI 的定量選項設計逼出度量能力;(3) 圖是 VLM4D 原 teaser,直接演示失敗案例。示意題需換原題。</a:t>
             </a:r>
           </a:p>
         </p:txBody>
@@ -4627,7 +4698,511 @@
                 </a:solidFill>
                 <a:latin typeface="Segoe UI"/>
               </a:rPr>
-              <a:t>1/9 · 草稿</a:t>
+              <a:t>1/10 · 草稿</a:t>
+            </a:r>
+          </a:p>
+        </p:txBody>
+      </p:sp>
+    </p:spTree>
+  </p:cSld>
+  <p:clrMapOvr>
+    <a:masterClrMapping/>
+  </p:clrMapOvr>
+</p:sld>
+</file>
+
+<file path=ppt/slides/slide10.xml><?xml version="1.0" encoding="utf-8"?>
+<p:sld xmlns:a="http://schemas.openxmlformats.org/drawingml/2006/main" xmlns:p="http://schemas.openxmlformats.org/presentationml/2006/main" xmlns:r="http://schemas.openxmlformats.org/officeDocument/2006/relationships">
+  <p:cSld>
+    <p:spTree>
+      <p:nvGrpSpPr>
+        <p:cNvPr id="1" name=""/>
+        <p:cNvGrpSpPr/>
+        <p:nvPr/>
+      </p:nvGrpSpPr>
+      <p:grpSpPr/>
+      <p:sp>
+        <p:nvSpPr>
+          <p:cNvPr id="2" name="Rectangle 1"/>
+          <p:cNvSpPr/>
+          <p:nvPr/>
+        </p:nvSpPr>
+        <p:spPr>
+          <a:xfrm>
+            <a:off x="0" y="0"/>
+            <a:ext cx="12191695" cy="6858000"/>
+          </a:xfrm>
+          <a:prstGeom prst="rect">
+            <a:avLst/>
+          </a:prstGeom>
+          <a:solidFill>
+            <a:srgbClr val="FFFFFF"/>
+          </a:solidFill>
+          <a:ln>
+            <a:noFill/>
+          </a:ln>
+          <a:effectLst/>
+        </p:spPr>
+        <p:style>
+          <a:lnRef idx="1">
+            <a:schemeClr val="accent1"/>
+          </a:lnRef>
+          <a:fillRef idx="3">
+            <a:schemeClr val="accent1"/>
+          </a:fillRef>
+          <a:effectRef idx="2">
+            <a:schemeClr val="accent1"/>
+          </a:effectRef>
+          <a:fontRef idx="minor">
+            <a:schemeClr val="lt1"/>
+          </a:fontRef>
+        </p:style>
+        <p:txBody>
+          <a:bodyPr rtlCol="0" anchor="ctr"/>
+          <a:lstStyle/>
+          <a:p>
+            <a:pPr algn="ctr"/>
+          </a:p>
+        </p:txBody>
+      </p:sp>
+      <p:sp>
+        <p:nvSpPr>
+          <p:cNvPr id="3" name="TextBox 2"/>
+          <p:cNvSpPr txBox="1"/>
+          <p:nvPr/>
+        </p:nvSpPr>
+        <p:spPr>
+          <a:xfrm>
+            <a:off x="640080" y="384048"/>
+            <a:ext cx="10881360" cy="365760"/>
+          </a:xfrm>
+          <a:prstGeom prst="rect">
+            <a:avLst/>
+          </a:prstGeom>
+          <a:noFill/>
+        </p:spPr>
+        <p:txBody>
+          <a:bodyPr wrap="square" anchor="t" lIns="0" rIns="0" tIns="0" bIns="0">
+            <a:spAutoFit/>
+          </a:bodyPr>
+          <a:lstStyle/>
+          <a:p>
+            <a:pPr algn="l">
+              <a:lnSpc>
+                <a:spcPct val="110000"/>
+              </a:lnSpc>
+              <a:spcBef>
+                <a:spcPts val="0"/>
+              </a:spcBef>
+              <a:spcAft>
+                <a:spcPts val="500"/>
+              </a:spcAft>
+            </a:pPr>
+            <a:r>
+              <a:rPr sz="1500" b="1" i="0">
+                <a:solidFill>
+                  <a:srgbClr val="0F768E"/>
+                </a:solidFill>
+                <a:latin typeface="Segoe UI"/>
+              </a:rPr>
+              <a:t>Q9　</a:t>
+            </a:r>
+            <a:r>
+              <a:rPr sz="1250" b="0" i="0">
+                <a:solidFill>
+                  <a:srgbClr val="555B63"/>
+                </a:solidFill>
+                <a:latin typeface="Microsoft JhengHei"/>
+              </a:rPr>
+              <a:t>skill 憲法第 4 條:這些問題 Claude 回答不了,由你回答。</a:t>
+            </a:r>
+          </a:p>
+        </p:txBody>
+      </p:sp>
+      <p:sp>
+        <p:nvSpPr>
+          <p:cNvPr id="4" name="Rectangle 3"/>
+          <p:cNvSpPr/>
+          <p:nvPr/>
+        </p:nvSpPr>
+        <p:spPr>
+          <a:xfrm>
+            <a:off x="640080" y="804672"/>
+            <a:ext cx="10881360" cy="14630"/>
+          </a:xfrm>
+          <a:prstGeom prst="rect">
+            <a:avLst/>
+          </a:prstGeom>
+          <a:solidFill>
+            <a:srgbClr val="DDDDDD"/>
+          </a:solidFill>
+          <a:ln>
+            <a:noFill/>
+          </a:ln>
+          <a:effectLst/>
+        </p:spPr>
+        <p:style>
+          <a:lnRef idx="1">
+            <a:schemeClr val="accent1"/>
+          </a:lnRef>
+          <a:fillRef idx="3">
+            <a:schemeClr val="accent1"/>
+          </a:fillRef>
+          <a:effectRef idx="2">
+            <a:schemeClr val="accent1"/>
+          </a:effectRef>
+          <a:fontRef idx="minor">
+            <a:schemeClr val="lt1"/>
+          </a:fontRef>
+        </p:style>
+        <p:txBody>
+          <a:bodyPr rtlCol="0" anchor="ctr"/>
+          <a:lstStyle/>
+          <a:p>
+            <a:pPr algn="ctr"/>
+          </a:p>
+        </p:txBody>
+      </p:sp>
+      <p:sp>
+        <p:nvSpPr>
+          <p:cNvPr id="5" name="TextBox 4"/>
+          <p:cNvSpPr txBox="1"/>
+          <p:nvPr/>
+        </p:nvSpPr>
+        <p:spPr>
+          <a:xfrm>
+            <a:off x="640080" y="960120"/>
+            <a:ext cx="10972800" cy="777240"/>
+          </a:xfrm>
+          <a:prstGeom prst="rect">
+            <a:avLst/>
+          </a:prstGeom>
+          <a:noFill/>
+        </p:spPr>
+        <p:txBody>
+          <a:bodyPr wrap="square" anchor="t" lIns="0" rIns="0" tIns="0" bIns="0">
+            <a:spAutoFit/>
+          </a:bodyPr>
+          <a:lstStyle/>
+          <a:p>
+            <a:pPr algn="l">
+              <a:lnSpc>
+                <a:spcPct val="106000"/>
+              </a:lnSpc>
+              <a:spcBef>
+                <a:spcPts val="0"/>
+              </a:spcBef>
+              <a:spcAft>
+                <a:spcPts val="500"/>
+              </a:spcAft>
+            </a:pPr>
+            <a:r>
+              <a:rPr sz="2100" b="1" i="0">
+                <a:solidFill>
+                  <a:srgbClr val="111111"/>
+                </a:solidFill>
+                <a:latin typeface="Microsoft JhengHei"/>
+              </a:rPr>
+              <a:t>這些只有你能回答</a:t>
+            </a:r>
+          </a:p>
+        </p:txBody>
+      </p:sp>
+      <p:sp>
+        <p:nvSpPr>
+          <p:cNvPr id="6" name="TextBox 5"/>
+          <p:cNvSpPr txBox="1"/>
+          <p:nvPr/>
+        </p:nvSpPr>
+        <p:spPr>
+          <a:xfrm>
+            <a:off x="640080" y="1783080"/>
+            <a:ext cx="10881360" cy="3291840"/>
+          </a:xfrm>
+          <a:prstGeom prst="rect">
+            <a:avLst/>
+          </a:prstGeom>
+          <a:noFill/>
+        </p:spPr>
+        <p:txBody>
+          <a:bodyPr wrap="square" anchor="t" lIns="0" rIns="0" tIns="0" bIns="0">
+            <a:spAutoFit/>
+          </a:bodyPr>
+          <a:lstStyle/>
+          <a:p>
+            <a:pPr algn="l">
+              <a:lnSpc>
+                <a:spcPct val="115000"/>
+              </a:lnSpc>
+              <a:spcBef>
+                <a:spcPts val="0"/>
+              </a:spcBef>
+              <a:spcAft>
+                <a:spcPts val="1000"/>
+              </a:spcAft>
+            </a:pPr>
+            <a:r>
+              <a:rPr sz="1500" b="0" i="0">
+                <a:solidFill>
+                  <a:srgbClr val="555B63"/>
+                </a:solidFill>
+                <a:latin typeface="Segoe UI"/>
+              </a:rPr>
+              <a:t>— </a:t>
+            </a:r>
+            <a:r>
+              <a:rPr sz="1500" b="1" i="0">
+                <a:solidFill>
+                  <a:srgbClr val="111111"/>
+                </a:solidFill>
+                <a:latin typeface="Microsoft JhengHei"/>
+              </a:rPr>
+              <a:t>1. 根因你賭哪邊:4D 差是「看得到沒用上」還是「根本沒看到」?你的證據?(meeting 必問)</a:t>
+            </a:r>
+          </a:p>
+          <a:p>
+            <a:pPr algn="l">
+              <a:lnSpc>
+                <a:spcPct val="115000"/>
+              </a:lnSpc>
+              <a:spcBef>
+                <a:spcPts val="0"/>
+              </a:spcBef>
+              <a:spcAft>
+                <a:spcPts val="1000"/>
+              </a:spcAft>
+            </a:pPr>
+            <a:r>
+              <a:rPr sz="1500" b="0" i="0">
+                <a:solidFill>
+                  <a:srgbClr val="555B63"/>
+                </a:solidFill>
+                <a:latin typeface="Segoe UI"/>
+              </a:rPr>
+              <a:t>— </a:t>
+            </a:r>
+            <a:r>
+              <a:rPr sz="1500" b="0" i="0">
+                <a:solidFill>
+                  <a:srgbClr val="111111"/>
+                </a:solidFill>
+                <a:latin typeface="Microsoft JhengHei"/>
+              </a:rPr>
+              <a:t>2. 偽標錯誤=reward 錯誤(蒸餾天花板):過濾低信心區域?混 GT?你的設計決策。</a:t>
+            </a:r>
+          </a:p>
+          <a:p>
+            <a:pPr algn="l">
+              <a:lnSpc>
+                <a:spcPct val="115000"/>
+              </a:lnSpc>
+              <a:spcBef>
+                <a:spcPts val="0"/>
+              </a:spcBef>
+              <a:spcAft>
+                <a:spcPts val="1000"/>
+              </a:spcAft>
+            </a:pPr>
+            <a:r>
+              <a:rPr sz="1500" b="0" i="0">
+                <a:solidFill>
+                  <a:srgbClr val="555B63"/>
+                </a:solidFill>
+                <a:latin typeface="Segoe UI"/>
+              </a:rPr>
+              <a:t>— </a:t>
+            </a:r>
+            <a:r>
+              <a:rPr sz="1500" b="0" i="0">
+                <a:solidFill>
+                  <a:srgbClr val="111111"/>
+                </a:solidFill>
+                <a:latin typeface="Microsoft JhengHei"/>
+              </a:rPr>
+              <a:t>3. flow-consistency reward 怎麼被 hack?想一個具體情境,再想怎麼防。</a:t>
+            </a:r>
+          </a:p>
+          <a:p>
+            <a:pPr algn="l">
+              <a:lnSpc>
+                <a:spcPct val="115000"/>
+              </a:lnSpc>
+              <a:spcBef>
+                <a:spcPts val="0"/>
+              </a:spcBef>
+              <a:spcAft>
+                <a:spcPts val="1000"/>
+              </a:spcAft>
+            </a:pPr>
+            <a:r>
+              <a:rPr sz="1500" b="0" i="0">
+                <a:solidFill>
+                  <a:srgbClr val="555B63"/>
+                </a:solidFill>
+                <a:latin typeface="Segoe UI"/>
+              </a:rPr>
+              <a:t>— </a:t>
+            </a:r>
+            <a:r>
+              <a:rPr sz="1500" b="0" i="0">
+                <a:solidFill>
+                  <a:srgbClr val="111111"/>
+                </a:solidFill>
+                <a:latin typeface="Microsoft JhengHei"/>
+              </a:rPr>
+              <a:t>4. 第一版訊號:2D flow(成熟)還是 scene flow(貼 4D)?跟你的時程綁定。</a:t>
+            </a:r>
+          </a:p>
+          <a:p>
+            <a:pPr algn="l">
+              <a:lnSpc>
+                <a:spcPct val="115000"/>
+              </a:lnSpc>
+              <a:spcBef>
+                <a:spcPts val="0"/>
+              </a:spcBef>
+              <a:spcAft>
+                <a:spcPts val="1000"/>
+              </a:spcAft>
+            </a:pPr>
+            <a:r>
+              <a:rPr sz="1500" b="0" i="0">
+                <a:solidFill>
+                  <a:srgbClr val="555B63"/>
+                </a:solidFill>
+                <a:latin typeface="Segoe UI"/>
+              </a:rPr>
+              <a:t>— </a:t>
+            </a:r>
+            <a:r>
+              <a:rPr sz="1500" b="0" i="0">
+                <a:solidFill>
+                  <a:srgbClr val="111111"/>
+                </a:solidFill>
+                <a:latin typeface="Microsoft JhengHei"/>
+              </a:rPr>
+              <a:t>5. 讀完 4D-RGPT(在你的 papers/ 裡)後:它跟我們的差異,一句話講出來。</a:t>
+            </a:r>
+          </a:p>
+          <a:p>
+            <a:pPr algn="l">
+              <a:lnSpc>
+                <a:spcPct val="115000"/>
+              </a:lnSpc>
+              <a:spcBef>
+                <a:spcPts val="0"/>
+              </a:spcBef>
+              <a:spcAft>
+                <a:spcPts val="1000"/>
+              </a:spcAft>
+            </a:pPr>
+            <a:r>
+              <a:rPr sz="1500" b="0" i="0">
+                <a:solidFill>
+                  <a:srgbClr val="555B63"/>
+                </a:solidFill>
+                <a:latin typeface="Segoe UI"/>
+              </a:rPr>
+              <a:t>— </a:t>
+            </a:r>
+            <a:r>
+              <a:rPr sz="1500" b="1" i="0">
+                <a:solidFill>
+                  <a:srgbClr val="111111"/>
+                </a:solidFill>
+                <a:latin typeface="Microsoft JhengHei"/>
+              </a:rPr>
+              <a:t>6. 一句話賣點,自己重寫(P7 的只是靶子)。</a:t>
+            </a:r>
+          </a:p>
+        </p:txBody>
+      </p:sp>
+      <p:sp>
+        <p:nvSpPr>
+          <p:cNvPr id="7" name="TextBox 6"/>
+          <p:cNvSpPr txBox="1"/>
+          <p:nvPr/>
+        </p:nvSpPr>
+        <p:spPr>
+          <a:xfrm>
+            <a:off x="640080" y="5806440"/>
+            <a:ext cx="10881360" cy="548640"/>
+          </a:xfrm>
+          <a:prstGeom prst="rect">
+            <a:avLst/>
+          </a:prstGeom>
+          <a:noFill/>
+        </p:spPr>
+        <p:txBody>
+          <a:bodyPr wrap="square" anchor="t" lIns="0" rIns="0" tIns="0" bIns="0">
+            <a:spAutoFit/>
+          </a:bodyPr>
+          <a:lstStyle/>
+          <a:p>
+            <a:pPr algn="l">
+              <a:lnSpc>
+                <a:spcPct val="110000"/>
+              </a:lnSpc>
+              <a:spcBef>
+                <a:spcPts val="0"/>
+              </a:spcBef>
+              <a:spcAft>
+                <a:spcPts val="500"/>
+              </a:spcAft>
+            </a:pPr>
+            <a:r>
+              <a:rPr sz="1200" b="1" i="0">
+                <a:solidFill>
+                  <a:srgbClr val="B44A1E"/>
+                </a:solidFill>
+                <a:latin typeface="Microsoft JhengHei"/>
+              </a:rPr>
+              <a:t>聲明:本簡報為分析草稿。任何要放進正式簡報/報告的文字,須由報告者自己重寫——重寫即消化。</a:t>
+            </a:r>
+          </a:p>
+        </p:txBody>
+      </p:sp>
+      <p:sp>
+        <p:nvSpPr>
+          <p:cNvPr id="8" name="TextBox 7"/>
+          <p:cNvSpPr txBox="1"/>
+          <p:nvPr/>
+        </p:nvSpPr>
+        <p:spPr>
+          <a:xfrm>
+            <a:off x="10881360" y="6510528"/>
+            <a:ext cx="1097280" cy="274320"/>
+          </a:xfrm>
+          <a:prstGeom prst="rect">
+            <a:avLst/>
+          </a:prstGeom>
+          <a:noFill/>
+        </p:spPr>
+        <p:txBody>
+          <a:bodyPr wrap="square" anchor="t" lIns="0" rIns="0" tIns="0" bIns="0">
+            <a:spAutoFit/>
+          </a:bodyPr>
+          <a:lstStyle/>
+          <a:p>
+            <a:pPr algn="r">
+              <a:lnSpc>
+                <a:spcPct val="110000"/>
+              </a:lnSpc>
+              <a:spcBef>
+                <a:spcPts val="0"/>
+              </a:spcBef>
+              <a:spcAft>
+                <a:spcPts val="500"/>
+              </a:spcAft>
+            </a:pPr>
+            <a:r>
+              <a:rPr sz="900" b="0" i="0">
+                <a:solidFill>
+                  <a:srgbClr val="555B63"/>
+                </a:solidFill>
+                <a:latin typeface="Segoe UI"/>
+              </a:rPr>
+              <a:t>10/10 · 草稿</a:t>
             </a:r>
           </a:p>
         </p:txBody>
@@ -5170,7 +5745,7 @@
                 </a:solidFill>
                 <a:latin typeface="Segoe UI"/>
               </a:rPr>
-              <a:t>2/9 · 草稿</a:t>
+              <a:t>2/10 · 草稿</a:t>
             </a:r>
           </a:p>
         </p:txBody>
@@ -5744,7 +6319,7 @@
                 </a:solidFill>
                 <a:latin typeface="Segoe UI"/>
               </a:rPr>
-              <a:t>3/9 · 草稿</a:t>
+              <a:t>3/10 · 草稿</a:t>
             </a:r>
           </a:p>
         </p:txBody>
@@ -6249,7 +6824,7 @@
                 </a:solidFill>
                 <a:latin typeface="Segoe UI"/>
               </a:rPr>
-              <a:t>4/9 · 草稿</a:t>
+              <a:t>4/10 · 草稿</a:t>
             </a:r>
           </a:p>
         </p:txBody>
@@ -6723,7 +7298,7 @@
                 </a:solidFill>
                 <a:latin typeface="Segoe UI"/>
               </a:rPr>
-              <a:t>5/9 · 草稿</a:t>
+              <a:t>5/10 · 草稿</a:t>
             </a:r>
           </a:p>
         </p:txBody>
@@ -7266,7 +7841,7 @@
                 </a:solidFill>
                 <a:latin typeface="Segoe UI"/>
               </a:rPr>
-              <a:t>6/9 · 草稿</a:t>
+              <a:t>6/10 · 草稿</a:t>
             </a:r>
           </a:p>
         </p:txBody>
@@ -7809,7 +8384,7 @@
                 </a:solidFill>
                 <a:latin typeface="Segoe UI"/>
               </a:rPr>
-              <a:t>7/9 · 草稿</a:t>
+              <a:t>7/10 · 草稿</a:t>
             </a:r>
           </a:p>
         </p:txBody>
@@ -8738,7 +9313,7 @@
                 </a:solidFill>
                 <a:latin typeface="Segoe UI"/>
               </a:rPr>
-              <a:t>8/9 · 草稿</a:t>
+              <a:t>8/10 · 草稿</a:t>
             </a:r>
           </a:p>
         </p:txBody>
@@ -8845,7 +9420,7 @@
                 </a:solidFill>
                 <a:latin typeface="Segoe UI"/>
               </a:rPr>
-              <a:t>Q9　</a:t>
+              <a:t>Q8b　</a:t>
             </a:r>
             <a:r>
               <a:rPr sz="1250" b="0" i="0">
@@ -8854,7 +9429,7 @@
                 </a:solidFill>
                 <a:latin typeface="Microsoft JhengHei"/>
               </a:rPr>
-              <a:t>skill 憲法第 4 條:這些問題 Claude 回答不了,由你回答。</a:t>
+              <a:t>補充:這些 benchmark 的題目長什麼樣?(題型 + 範例)</a:t>
             </a:r>
           </a:p>
         </p:txBody>
@@ -8937,13 +9512,13 @@
               </a:spcAft>
             </a:pPr>
             <a:r>
-              <a:rPr sz="2100" b="1" i="0">
+              <a:rPr sz="2000" b="1" i="0">
                 <a:solidFill>
                   <a:srgbClr val="111111"/>
                 </a:solidFill>
                 <a:latin typeface="Microsoft JhengHei"/>
               </a:rPr>
-              <a:t>這些只有你能回答</a:t>
+              <a:t>兩種答案格式:選擇題(MCA)與數值題(NA,相對準確率計分)</a:t>
             </a:r>
           </a:p>
         </p:txBody>
@@ -8957,7 +9532,7 @@
         <p:spPr>
           <a:xfrm>
             <a:off x="640080" y="1783080"/>
-            <a:ext cx="10881360" cy="3291840"/>
+            <a:ext cx="6126480" cy="3291840"/>
           </a:xfrm>
           <a:prstGeom prst="rect">
             <a:avLst/>
@@ -8978,11 +9553,11 @@
                 <a:spcPts val="0"/>
               </a:spcBef>
               <a:spcAft>
-                <a:spcPts val="1000"/>
+                <a:spcPts val="800"/>
               </a:spcAft>
             </a:pPr>
             <a:r>
-              <a:rPr sz="1500" b="0" i="0">
+              <a:rPr sz="1250" b="0" i="0">
                 <a:solidFill>
                   <a:srgbClr val="555B63"/>
                 </a:solidFill>
@@ -8991,13 +9566,22 @@
               <a:t>— </a:t>
             </a:r>
             <a:r>
-              <a:rPr sz="1500" b="1" i="0">
+              <a:rPr sz="1250" b="1" i="0">
                 <a:solidFill>
                   <a:srgbClr val="111111"/>
                 </a:solidFill>
                 <a:latin typeface="Microsoft JhengHei"/>
               </a:rPr>
-              <a:t>1. 根因你賭哪邊:4D 差是「看得到沒用上」還是「根本沒看到」?你的證據?(meeting 必問)</a:t>
+              <a:t>VLM4D — 選擇題:</a:t>
+            </a:r>
+            <a:r>
+              <a:rPr sz="1250" b="0" i="0">
+                <a:solidFill>
+                  <a:srgbClr val="111111"/>
+                </a:solidFill>
+                <a:latin typeface="Microsoft JhengHei"/>
+              </a:rPr>
+              <a:t>「From the camera's perspective, which direction is the car moving?  (A) left  (B) right  (C) toward  (D) away」→ 正解 (B);右圖為論文 teaser:人類秒答 right,模型答 left。</a:t>
             </a:r>
           </a:p>
           <a:p>
@@ -9009,11 +9593,11 @@
                 <a:spcPts val="0"/>
               </a:spcBef>
               <a:spcAft>
-                <a:spcPts val="1000"/>
+                <a:spcPts val="800"/>
               </a:spcAft>
             </a:pPr>
             <a:r>
-              <a:rPr sz="1500" b="0" i="0">
+              <a:rPr sz="1250" b="0" i="0">
                 <a:solidFill>
                   <a:srgbClr val="555B63"/>
                 </a:solidFill>
@@ -9022,13 +9606,22 @@
               <a:t>— </a:t>
             </a:r>
             <a:r>
-              <a:rPr sz="1500" b="0" i="0">
+              <a:rPr sz="1250" b="1" i="0">
                 <a:solidFill>
                   <a:srgbClr val="111111"/>
                 </a:solidFill>
                 <a:latin typeface="Microsoft JhengHei"/>
               </a:rPr>
-              <a:t>2. 偽標錯誤=reward 錯誤(蒸餾天花板):過濾低信心區域?混 GT?你的設計決策。</a:t>
+              <a:t>VSI-Bench — 兩型:</a:t>
+            </a:r>
+            <a:r>
+              <a:rPr sz="1250" b="0" i="0">
+                <a:solidFill>
+                  <a:srgbClr val="111111"/>
+                </a:solidFill>
+                <a:latin typeface="Microsoft JhengHei"/>
+              </a:rPr>
+              <a:t>MCA 選擇題(相對方向/路線規劃/出現順序)+ NA 數值題(「How many chairs?」「兩物距離幾公尺?」)— 數值題以相對準確率(MRA)計分,不是全對全錯。</a:t>
             </a:r>
           </a:p>
           <a:p>
@@ -9040,11 +9633,11 @@
                 <a:spcPts val="0"/>
               </a:spcBef>
               <a:spcAft>
-                <a:spcPts val="1000"/>
+                <a:spcPts val="800"/>
               </a:spcAft>
             </a:pPr>
             <a:r>
-              <a:rPr sz="1500" b="0" i="0">
+              <a:rPr sz="1250" b="0" i="0">
                 <a:solidFill>
                   <a:srgbClr val="555B63"/>
                 </a:solidFill>
@@ -9053,13 +9646,22 @@
               <a:t>— </a:t>
             </a:r>
             <a:r>
-              <a:rPr sz="1500" b="0" i="0">
+              <a:rPr sz="1250" b="1" i="0">
                 <a:solidFill>
                   <a:srgbClr val="111111"/>
                 </a:solidFill>
                 <a:latin typeface="Microsoft JhengHei"/>
               </a:rPr>
-              <a:t>3. flow-consistency reward 怎麼被 hack?想一個具體情境,再想怎麼防。</a:t>
+              <a:t>STI-Bench — 定量選擇題:</a:t>
+            </a:r>
+            <a:r>
+              <a:rPr sz="1250" b="0" i="0">
+                <a:solidFill>
+                  <a:srgbClr val="111111"/>
+                </a:solidFill>
+                <a:latin typeface="Microsoft JhengHei"/>
+              </a:rPr>
+              <a:t>「物體位移多少公尺 / 速度多少 m/s / 尺寸多大」,選項為數值區間 → 逼模型做度量級估計,不能靠語意矇。</a:t>
             </a:r>
           </a:p>
           <a:p>
@@ -9071,11 +9673,11 @@
                 <a:spcPts val="0"/>
               </a:spcBef>
               <a:spcAft>
-                <a:spcPts val="1000"/>
+                <a:spcPts val="800"/>
               </a:spcAft>
             </a:pPr>
             <a:r>
-              <a:rPr sz="1500" b="0" i="0">
+              <a:rPr sz="1250" b="0" i="0">
                 <a:solidFill>
                   <a:srgbClr val="555B63"/>
                 </a:solidFill>
@@ -9084,89 +9686,105 @@
               <a:t>— </a:t>
             </a:r>
             <a:r>
-              <a:rPr sz="1500" b="0" i="0">
+              <a:rPr sz="1250" b="1" i="0">
                 <a:solidFill>
                   <a:srgbClr val="111111"/>
                 </a:solidFill>
                 <a:latin typeface="Microsoft JhengHei"/>
               </a:rPr>
-              <a:t>4. 第一版訊號:2D flow(成熟)還是 scene flow(貼 4D)?跟你的時程綁定。</a:t>
-            </a:r>
-          </a:p>
-          <a:p>
-            <a:pPr algn="l">
+              <a:t>R4D/VSTI — 混合:</a:t>
+            </a:r>
+            <a:r>
+              <a:rPr sz="1250" b="0" i="0">
+                <a:solidFill>
+                  <a:srgbClr val="111111"/>
+                </a:solidFill>
+                <a:latin typeface="Microsoft JhengHei"/>
+              </a:rPr>
+              <a:t>多選 + 數值題(相對準確率);R4D 另加 region 提示(框住問的物體)。</a:t>
+            </a:r>
+          </a:p>
+        </p:txBody>
+      </p:sp>
+      <p:pic>
+        <p:nvPicPr>
+          <p:cNvPr id="7" name="Picture 6" descr="VLM4D_x1.png"/>
+          <p:cNvPicPr>
+            <a:picLocks noChangeAspect="1"/>
+          </p:cNvPicPr>
+          <p:nvPr/>
+        </p:nvPicPr>
+        <p:blipFill>
+          <a:blip r:embed="rId2"/>
+          <a:stretch>
+            <a:fillRect/>
+          </a:stretch>
+        </p:blipFill>
+        <p:spPr>
+          <a:xfrm>
+            <a:off x="7040880" y="2455668"/>
+            <a:ext cx="4480560" cy="2495303"/>
+          </a:xfrm>
+          <a:prstGeom prst="rect">
+            <a:avLst/>
+          </a:prstGeom>
+        </p:spPr>
+      </p:pic>
+      <p:sp>
+        <p:nvSpPr>
+          <p:cNvPr id="8" name="TextBox 7"/>
+          <p:cNvSpPr txBox="1"/>
+          <p:nvPr/>
+        </p:nvSpPr>
+        <p:spPr>
+          <a:xfrm>
+            <a:off x="7040880" y="4978403"/>
+            <a:ext cx="4480560" cy="274320"/>
+          </a:xfrm>
+          <a:prstGeom prst="rect">
+            <a:avLst/>
+          </a:prstGeom>
+          <a:noFill/>
+        </p:spPr>
+        <p:txBody>
+          <a:bodyPr wrap="square" anchor="t" lIns="0" rIns="0" tIns="0" bIns="0">
+            <a:spAutoFit/>
+          </a:bodyPr>
+          <a:lstStyle/>
+          <a:p>
+            <a:pPr algn="ctr">
               <a:lnSpc>
-                <a:spcPct val="115000"/>
+                <a:spcPct val="110000"/>
               </a:lnSpc>
               <a:spcBef>
                 <a:spcPts val="0"/>
               </a:spcBef>
               <a:spcAft>
-                <a:spcPts val="1000"/>
+                <a:spcPts val="500"/>
               </a:spcAft>
             </a:pPr>
             <a:r>
-              <a:rPr sz="1500" b="0" i="0">
+              <a:rPr sz="950" b="0" i="1">
                 <a:solidFill>
                   <a:srgbClr val="555B63"/>
                 </a:solidFill>
-                <a:latin typeface="Segoe UI"/>
-              </a:rPr>
-              <a:t>— </a:t>
-            </a:r>
-            <a:r>
-              <a:rPr sz="1500" b="0" i="0">
-                <a:solidFill>
-                  <a:srgbClr val="111111"/>
-                </a:solidFill>
                 <a:latin typeface="Microsoft JhengHei"/>
               </a:rPr>
-              <a:t>5. 讀完 4D-RGPT(在你的 papers/ 裡)後:它跟我們的差異,一句話講出來。</a:t>
-            </a:r>
-          </a:p>
-          <a:p>
-            <a:pPr algn="l">
-              <a:lnSpc>
-                <a:spcPct val="115000"/>
-              </a:lnSpc>
-              <a:spcBef>
-                <a:spcPts val="0"/>
-              </a:spcBef>
-              <a:spcAft>
-                <a:spcPts val="1000"/>
-              </a:spcAft>
-            </a:pPr>
-            <a:r>
-              <a:rPr sz="1500" b="0" i="0">
-                <a:solidFill>
-                  <a:srgbClr val="555B63"/>
-                </a:solidFill>
-                <a:latin typeface="Segoe UI"/>
-              </a:rPr>
-              <a:t>— </a:t>
-            </a:r>
-            <a:r>
-              <a:rPr sz="1500" b="1" i="0">
-                <a:solidFill>
-                  <a:srgbClr val="111111"/>
-                </a:solidFill>
-                <a:latin typeface="Microsoft JhengHei"/>
-              </a:rPr>
-              <a:t>6. 一句話賣點,自己重寫(P7 的只是靶子)。</a:t>
-            </a:r>
-          </a:p>
-        </p:txBody>
-      </p:sp>
-      <p:sp>
-        <p:nvSpPr>
-          <p:cNvPr id="7" name="TextBox 6"/>
+              <a:t>VLM4D teaser:車往右移,模型答「left」(取自 arXiv 2508.02095 原圖)</a:t>
+            </a:r>
+          </a:p>
+        </p:txBody>
+      </p:sp>
+      <p:sp>
+        <p:nvSpPr>
+          <p:cNvPr id="9" name="TextBox 8"/>
           <p:cNvSpPr txBox="1"/>
           <p:nvPr/>
         </p:nvSpPr>
         <p:spPr>
           <a:xfrm>
             <a:off x="640080" y="5806440"/>
-            <a:ext cx="10881360" cy="548640"/>
+            <a:ext cx="10881360" cy="594360"/>
           </a:xfrm>
           <a:prstGeom prst="rect">
             <a:avLst/>
@@ -9191,20 +9809,83 @@
               </a:spcAft>
             </a:pPr>
             <a:r>
-              <a:rPr sz="1200" b="1" i="0">
+              <a:rPr sz="1150" b="1" i="0">
                 <a:solidFill>
                   <a:srgbClr val="B44A1E"/>
                 </a:solidFill>
                 <a:latin typeface="Microsoft JhengHei"/>
               </a:rPr>
-              <a:t>聲明:本簡報為分析草稿。任何要放進正式簡報/報告的文字,須由報告者自己重寫——重寫即消化。</a:t>
-            </a:r>
-          </a:p>
-        </p:txBody>
-      </p:sp>
-      <p:sp>
-        <p:nvSpPr>
-          <p:cNvPr id="8" name="TextBox 7"/>
+              <a:t>未驗證：</a:t>
+            </a:r>
+            <a:r>
+              <a:rPr sz="1150" b="0" i="0">
+                <a:solidFill>
+                  <a:srgbClr val="111111"/>
+                </a:solidFill>
+                <a:latin typeface="Microsoft JhengHei"/>
+              </a:rPr>
+              <a:t>除 VLM4D 圖為原文外,其餘題目文字為依各論文題型描述改寫的示意,非原題;報告前建議各抓 1 題原題替換(VSI/STI 官網或論文附錄)。</a:t>
+            </a:r>
+          </a:p>
+        </p:txBody>
+      </p:sp>
+      <p:sp>
+        <p:nvSpPr>
+          <p:cNvPr id="10" name="TextBox 9"/>
+          <p:cNvSpPr txBox="1"/>
+          <p:nvPr/>
+        </p:nvSpPr>
+        <p:spPr>
+          <a:xfrm>
+            <a:off x="640080" y="6355080"/>
+            <a:ext cx="10058400" cy="320040"/>
+          </a:xfrm>
+          <a:prstGeom prst="rect">
+            <a:avLst/>
+          </a:prstGeom>
+          <a:noFill/>
+        </p:spPr>
+        <p:txBody>
+          <a:bodyPr wrap="square" anchor="t" lIns="0" rIns="0" tIns="0" bIns="0">
+            <a:spAutoFit/>
+          </a:bodyPr>
+          <a:lstStyle/>
+          <a:p>
+            <a:pPr algn="l">
+              <a:lnSpc>
+                <a:spcPct val="110000"/>
+              </a:lnSpc>
+              <a:spcBef>
+                <a:spcPts val="0"/>
+              </a:spcBef>
+              <a:spcAft>
+                <a:spcPts val="500"/>
+              </a:spcAft>
+            </a:pPr>
+            <a:r>
+              <a:rPr sz="950" b="1" i="0">
+                <a:solidFill>
+                  <a:srgbClr val="555B63"/>
+                </a:solidFill>
+                <a:latin typeface="Microsoft JhengHei"/>
+              </a:rPr>
+              <a:t>依據：</a:t>
+            </a:r>
+            <a:r>
+              <a:rPr sz="950" b="0" i="1">
+                <a:solidFill>
+                  <a:srgbClr val="555B63"/>
+                </a:solidFill>
+                <a:latin typeface="Segoe UI"/>
+              </a:rPr>
+              <a:t>VLM4D 2508.02095(MCQ)· VSI-Bench(MCA+NA/MRA)· STI-Bench(定量 MCQ)· 4D-RGPT(R4D 多選+數值)</a:t>
+            </a:r>
+          </a:p>
+        </p:txBody>
+      </p:sp>
+      <p:sp>
+        <p:nvSpPr>
+          <p:cNvPr id="11" name="TextBox 10"/>
           <p:cNvSpPr txBox="1"/>
           <p:nvPr/>
         </p:nvSpPr>
@@ -9242,7 +9923,7 @@
                 </a:solidFill>
                 <a:latin typeface="Segoe UI"/>
               </a:rPr>
-              <a:t>9/9 · 草稿</a:t>
+              <a:t>9/10 · 草稿</a:t>
             </a:r>
           </a:p>
         </p:txBody>
